--- a/presentation/BofA_x_Cognition_Devin_Demo.pptx
+++ b/presentation/BofA_x_Cognition_Devin_Demo.pptx
@@ -1010,34 +1010,46 @@
           <a:lstStyle/>
           <a:p>
             <a:r>
-              <a:t>This is the most important non-demo slide. Spend real time here and let THEM correct you — being corrected is a win, it means engagement and better intel.</a:t>
+              <a:t>This is the most important non-demo slide. Keep it general — the specific Angular 14→18 story is the demo's job; here you're naming the pattern they live with every day.</a:t>
             </a:r>
           </a:p>
           <a:p/>
           <a:p>
             <a:r>
-              <a:t>Talk track: "Here's my understanding of what you're up against — please red-pen this. You have a hard, policy-driven deadline on an app you cannot afford to destabilize, and the thing that makes it slow isn't typing code, it's the coordination tax across a dozen consuming teams."</a:t>
+              <a:t>Talk track: "Here's the pattern I suspect you know well. Frameworks and platforms age out — Angular, Java versions, Spring, on-prem stacks — and your own security policy says unsupported software can't run in production. So upgrades arrive with hard compliance deadlines, they land on your most experienced engineers, and every one of them displaces greenfield work. The backlog doesn't shrink; it compounds. The cruel part: the better your engineers are, the more of them you burn on maintenance nobody will ever see."</a:t>
             </a:r>
           </a:p>
           <a:p/>
           <a:p>
             <a:r>
+              <a:t>Bridge to the demo (one line, don't dwell): "Today's concrete example is your Angular 14→18 migration — hard EOL deadline, millions of customers, a shared library with 12+ downstream teams. We'll dig into that live in the demo."</a:t>
+            </a:r>
+          </a:p>
+          <a:p/>
+          <a:p>
+            <a:r>
+              <a:t>Spend real time here and let THEM correct you — being corrected is a win, it means engagement and better intel.</a:t>
+            </a:r>
+          </a:p>
+          <a:p/>
+          <a:p>
+            <a:r>
               <a:t>[ASK, by persona]</a:t>
             </a:r>
           </a:p>
           <a:p>
             <a:r>
-              <a:t>- VP Eng: "What's the current internal estimate for the upgrade, and what's it displacing on the roadmap?"</a:t>
-            </a:r>
-          </a:p>
-          <a:p>
-            <a:r>
-              <a:t>- Security: "What does your policy actually require when a framework goes EOL — remediation plan? exception filing? What's your audit exposure today?"</a:t>
-            </a:r>
-          </a:p>
-          <a:p>
-            <a:r>
-              <a:t>- Architect: "How do downstream teams consume the library today — pinned versions? monorepo? That changes the rollout strategy."</a:t>
+              <a:t>- VP Eng: "How much of your team's capacity goes to maintenance and upgrades versus new build? What's the number you wish it was?"</a:t>
+            </a:r>
+          </a:p>
+          <a:p>
+            <a:r>
+              <a:t>- Security: "What does your policy actually require when something goes EOL — remediation plan? exception filing? What's your audit exposure today?"</a:t>
+            </a:r>
+          </a:p>
+          <a:p>
+            <a:r>
+              <a:t>- Architect: "Where's the next EOL clock ticking in your estate — and how does that upgrade propagate through shared dependencies?"</a:t>
             </a:r>
           </a:p>
           <a:p/>
@@ -7766,7 +7778,7 @@
                 </a:solidFill>
                 <a:latin typeface="Roboto"/>
               </a:rPr>
-              <a:t>Angular 14 EOL — you talk, I listen</a:t>
+              <a:t>Legacy debt, compliance clocks — you talk, I listen</a:t>
             </a:r>
           </a:p>
         </p:txBody>
@@ -8282,7 +8294,7 @@
                 </a:solidFill>
                 <a:latin typeface="Roboto"/>
               </a:rPr>
-              <a:t>The real 14→18 migration, live</a:t>
+              <a:t>A real framework migration, live</a:t>
             </a:r>
           </a:p>
         </p:txBody>
@@ -9072,7 +9084,7 @@
                 </a:solidFill>
                 <a:latin typeface="Roboto"/>
               </a:rPr>
-              <a:t>The problem: a compliance clock on a system that can't break</a:t>
+              <a:t>The problem: legacy debt is eating your roadmap</a:t>
             </a:r>
           </a:p>
         </p:txBody>
@@ -9156,7 +9168,7 @@
                 </a:solidFill>
                 <a:latin typeface="Roboto"/>
               </a:rPr>
-              <a:t>Angular 14 is past end-of-life </a:t>
+              <a:t>Frameworks age out </a:t>
             </a:r>
             <a:r>
               <a:rPr sz="1700" b="0" i="0">
@@ -9165,7 +9177,7 @@
                 </a:solidFill>
                 <a:latin typeface="Roboto"/>
               </a:rPr>
-              <a:t>— an EOL framework in production violates your own security policy.</a:t>
+              <a:t>— and running unsupported software in production violates your own security policy.</a:t>
             </a:r>
           </a:p>
         </p:txBody>
@@ -9297,7 +9309,7 @@
                 </a:solidFill>
                 <a:latin typeface="Roboto"/>
               </a:rPr>
-              <a:t>The blast radius</a:t>
+              <a:t>The debt</a:t>
             </a:r>
           </a:p>
         </p:txBody>
@@ -9339,7 +9351,7 @@
                 </a:solidFill>
                 <a:latin typeface="Roboto"/>
               </a:rPr>
-              <a:t>Millions of retail customers</a:t>
+              <a:t>Outdated frameworks across the estate</a:t>
             </a:r>
           </a:p>
           <a:p>
@@ -9358,7 +9370,7 @@
                 </a:solidFill>
                 <a:latin typeface="Roboto"/>
               </a:rPr>
-              <a:t>12+ downstream teams</a:t>
+              <a:t>Every deferred upgrade compounds</a:t>
             </a:r>
           </a:p>
         </p:txBody>
@@ -9490,7 +9502,7 @@
                 </a:solidFill>
                 <a:latin typeface="Roboto"/>
               </a:rPr>
-              <a:t>The complexity</a:t>
+              <a:t>The clock</a:t>
             </a:r>
           </a:p>
         </p:txBody>
@@ -9532,7 +9544,7 @@
                 </a:solidFill>
                 <a:latin typeface="Roboto"/>
               </a:rPr>
-              <a:t>SSO / MFA · analytics SDK</a:t>
+              <a:t>Compliance-driven EOL deadlines</a:t>
             </a:r>
           </a:p>
           <a:p>
@@ -9551,7 +9563,7 @@
                 </a:solidFill>
                 <a:latin typeface="Roboto"/>
               </a:rPr>
-              <a:t>Financial data providers</a:t>
+              <a:t>Audit exposure while you wait</a:t>
             </a:r>
           </a:p>
         </p:txBody>
@@ -9683,7 +9695,7 @@
                 </a:solidFill>
                 <a:latin typeface="Roboto"/>
               </a:rPr>
-              <a:t>The math</a:t>
+              <a:t>The cost</a:t>
             </a:r>
           </a:p>
         </p:txBody>
@@ -9725,7 +9737,7 @@
                 </a:solidFill>
                 <a:latin typeface="Roboto"/>
               </a:rPr>
-              <a:t>4 major versions of churn</a:t>
+              <a:t>Backlog grows, greenfield stalls</a:t>
             </a:r>
           </a:p>
           <a:p>
@@ -9744,7 +9756,7 @@
                 </a:solidFill>
                 <a:latin typeface="Roboto"/>
               </a:rPr>
-              <a:t>Months of senior-engineer time</a:t>
+              <a:t>Best engineers stuck on upkeep</a:t>
             </a:r>
           </a:p>
         </p:txBody>
@@ -9832,7 +9844,7 @@
                 </a:solidFill>
                 <a:latin typeface="Roboto"/>
               </a:rPr>
-              <a:t>The real constraint isn't code — it's coordinating 12 teams' calendars.</a:t>
+              <a:t>Every quarter spent on maintenance is a quarter not spent building.</a:t>
             </a:r>
           </a:p>
         </p:txBody>

--- a/presentation/BofA_x_Cognition_Devin_Demo.pptx
+++ b/presentation/BofA_x_Cognition_Devin_Demo.pptx
@@ -17,6 +17,7 @@
     <p:sldId id="265" r:id="rId17"/>
     <p:sldId id="266" r:id="rId18"/>
     <p:sldId id="267" r:id="rId19"/>
+    <p:sldId id="268" r:id="rId20"/>
   </p:sldIdLst>
   <p:sldSz cx="12191695" cy="6858000" type="screen4x3"/>
   <p:notesSz cx="6858000" cy="9144000"/>
@@ -617,7 +618,58 @@
           <a:lstStyle/>
           <a:p>
             <a:r>
-              <a:t>These slides are for your prep only — hide them (right-click → Hide slide) or delete before presenting. Keep them in your back pocket; if the meeting goes deep on an objection, you'll have rehearsed the answer.</a:t>
+              <a:t>End with a specific, low-risk ask and assign owners in the room — that's what turns a nice meeting into a pipeline.</a:t>
+            </a:r>
+          </a:p>
+          <a:p/>
+          <a:p>
+            <a:r>
+              <a:t>Talk track: "Here's what I'd propose. First, we sit down together and pick three use cases — the natural starting points are work like what you just watched: framework upgrades, migrations, test-coverage debt — but you know your backlog; whatever you'd never staff greenfield engineers on is a candidate. Then a security and data review so your team is comfortable. Then we run a pilot on ONE of the three — a real repo, four weeks, measured against criteria you define. If it earns its keep, we scale to the other two. If it doesn't, you've spent almost nothing finding out."</a:t>
+            </a:r>
+          </a:p>
+          <a:p/>
+          <a:p>
+            <a:r>
+              <a:t>Why 3 use cases but 1 pilot: picking three gets them mentally invested in a roadmap (not a one-off experiment), while piloting one keeps the ask small enough to say yes to today.</a:t>
+            </a:r>
+          </a:p>
+          <a:p/>
+          <a:p>
+            <a:r>
+              <a:t>Assign ownership live: use-case shortlist → VP Eng (it's their backlog); security review → Security Engineer; pilot repo + success criteria → Chief Architect. People who own a step show up to the next meeting.</a:t>
+            </a:r>
+          </a:p>
+          <a:p/>
+          <a:p>
+            <a:r>
+              <a:t>[ASK] the closing question and get a name and a date before you leave the room. "Who should I follow up with, and does end of this week work for the security call?"</a:t>
+            </a:r>
+          </a:p>
+          <a:p/>
+          <a:p>
+            <a:r>
+              <a:t>DERAIL-PREP:</a:t>
+            </a:r>
+          </a:p>
+          <a:p>
+            <a:r>
+              <a:t>- "We need to run this through procurement/vendor risk first": "Understood — that's exactly why step 1 is the security review; it feeds your vendor-risk process. Can we start that in parallel?"</a:t>
+            </a:r>
+          </a:p>
+          <a:p>
+            <a:r>
+              <a:t>- "Send us materials and we'll get back to you": counter gently with a smaller yes: "Happy to — can I also pencil the security call so materials land with momentum? Easy to cancel."</a:t>
+            </a:r>
+          </a:p>
+          <a:p>
+            <a:r>
+              <a:t>- If the room is split (one enthusiast, one skeptic): scope the pilot around the skeptic's concern explicitly — "Let's make [skeptic]'s question the primary success criterion."</a:t>
+            </a:r>
+          </a:p>
+          <a:p/>
+          <a:p>
+            <a:r>
+              <a:t>Post-meeting: send notes + promised materials within 24–48h, restate the owners and dates they agreed to.</a:t>
             </a:r>
           </a:p>
         </p:txBody>
@@ -687,37 +739,7 @@
           <a:lstStyle/>
           <a:p>
             <a:r>
-              <a:t>General derailment playbook (for opinionated execs):</a:t>
-            </a:r>
-          </a:p>
-          <a:p>
-            <a:r>
-              <a:t>1. Never argue — agree with the valid kernel, then redirect to evidence ("fair concern; here's what we can measure").</a:t>
-            </a:r>
-          </a:p>
-          <a:p>
-            <a:r>
-              <a:t>2. Park with a return time: "Great question — that's next-steps territory; give me 8 minutes and I'll answer it properly." Then ACTUALLY return to it, by name.</a:t>
-            </a:r>
-          </a:p>
-          <a:p>
-            <a:r>
-              <a:t>3. If two execs start debating each other, don't referee — extract the requirement: "Sounds like the pilot needs to prove X to satisfy both of you. Noted."</a:t>
-            </a:r>
-          </a:p>
-          <a:p>
-            <a:r>
-              <a:t>4. If someone tries to turn it into a vendor bake-off ("how do you compare to X?"): "Happy to do a feature comparison async — in the room, the fastest way to compare is a pilot on the same repo."</a:t>
-            </a:r>
-          </a:p>
-          <a:p>
-            <a:r>
-              <a:t>5. Protect the demo time. If discovery is running long, cut slides 8–9 short, never the demo — the demo is what they'll remember.</a:t>
-            </a:r>
-          </a:p>
-          <a:p>
-            <a:r>
-              <a:t>6. If the meeting is fully derailed by one topic (e.g., security), embrace it: "Let's make this the security deep-dive, and I'll get you the demo recording + a follow-up demo slot." A derailed meeting where one stakeholder gets deeply satisfied still advances the deal.</a:t>
+              <a:t>These slides are for your prep only — hide them (right-click → Hide slide) or delete before presenting. Keep them in your back pocket; if the meeting goes deep on an objection, you'll have rehearsed the answer.</a:t>
             </a:r>
           </a:p>
         </p:txBody>
@@ -787,6 +809,106 @@
           <a:lstStyle/>
           <a:p>
             <a:r>
+              <a:t>General derailment playbook (for opinionated execs):</a:t>
+            </a:r>
+          </a:p>
+          <a:p>
+            <a:r>
+              <a:t>1. Never argue — agree with the valid kernel, then redirect to evidence ("fair concern; here's what we can measure").</a:t>
+            </a:r>
+          </a:p>
+          <a:p>
+            <a:r>
+              <a:t>2. Park with a return time: "Great question — that's next-steps territory; give me 8 minutes and I'll answer it properly." Then ACTUALLY return to it, by name.</a:t>
+            </a:r>
+          </a:p>
+          <a:p>
+            <a:r>
+              <a:t>3. If two execs start debating each other, don't referee — extract the requirement: "Sounds like the pilot needs to prove X to satisfy both of you. Noted."</a:t>
+            </a:r>
+          </a:p>
+          <a:p>
+            <a:r>
+              <a:t>4. If someone tries to turn it into a vendor bake-off ("how do you compare to X?"): "Happy to do a feature comparison async — in the room, the fastest way to compare is a pilot on the same repo."</a:t>
+            </a:r>
+          </a:p>
+          <a:p>
+            <a:r>
+              <a:t>5. Protect the demo time. If discovery is running long, cut slides 8–9 short, never the demo — the demo is what they'll remember.</a:t>
+            </a:r>
+          </a:p>
+          <a:p>
+            <a:r>
+              <a:t>6. If the meeting is fully derailed by one topic (e.g., security), embrace it: "Let's make this the security deep-dive, and I'll get you the demo recording + a follow-up demo slot." A derailed meeting where one stakeholder gets deeply satisfied still advances the deal.</a:t>
+            </a:r>
+          </a:p>
+        </p:txBody>
+      </p:sp>
+      <p:sp>
+        <p:nvSpPr>
+          <p:cNvPr id="4" name="Slide Number Placeholder 3"/>
+          <p:cNvSpPr>
+            <a:spLocks noGrp="1"/>
+          </p:cNvSpPr>
+          <p:nvPr>
+            <p:ph type="sldNum" idx="5" sz="quarter"/>
+          </p:nvPr>
+        </p:nvSpPr>
+        <p:spPr/>
+      </p:sp>
+    </p:spTree>
+  </p:cSld>
+  <p:clrMapOvr>
+    <a:masterClrMapping/>
+  </p:clrMapOvr>
+</p:notes>
+</file>
+
+<file path=ppt/notesSlides/notesSlide13.xml><?xml version="1.0" encoding="utf-8"?>
+<p:notes xmlns:a="http://schemas.openxmlformats.org/drawingml/2006/main" xmlns:p="http://schemas.openxmlformats.org/presentationml/2006/main" xmlns:r="http://schemas.openxmlformats.org/officeDocument/2006/relationships">
+  <p:cSld>
+    <p:spTree>
+      <p:nvGrpSpPr>
+        <p:cNvPr id="1" name=""/>
+        <p:cNvGrpSpPr/>
+        <p:nvPr/>
+      </p:nvGrpSpPr>
+      <p:grpSpPr>
+        <a:xfrm>
+          <a:off x="0" y="0"/>
+          <a:ext cx="0" cy="0"/>
+          <a:chOff x="0" y="0"/>
+          <a:chExt cx="0" cy="0"/>
+        </a:xfrm>
+      </p:grpSpPr>
+      <p:sp>
+        <p:nvSpPr>
+          <p:cNvPr id="2" name="Slide Image Placeholder 1"/>
+          <p:cNvSpPr>
+            <a:spLocks noGrp="1"/>
+          </p:cNvSpPr>
+          <p:nvPr>
+            <p:ph type="sldImg" idx="2"/>
+          </p:nvPr>
+        </p:nvSpPr>
+        <p:spPr/>
+      </p:sp>
+      <p:sp>
+        <p:nvSpPr>
+          <p:cNvPr id="3" name="Notes Placeholder 2"/>
+          <p:cNvSpPr>
+            <a:spLocks noGrp="1"/>
+          </p:cNvSpPr>
+          <p:nvPr>
+            <p:ph type="body" idx="3" sz="quarter"/>
+          </p:nvPr>
+        </p:nvSpPr>
+        <p:spPr/>
+        <p:txBody>
+          <a:bodyPr/>
+          <a:lstStyle/>
+          <a:p>
+            <a:r>
               <a:t>This slide is your homework list — everything the deck references that needs verification or that I (Devin) couldn't confirm as current fact. Delete before presenting.</a:t>
             </a:r>
           </a:p>
@@ -1147,41 +1269,41 @@
           <a:lstStyle/>
           <a:p>
             <a:r>
-              <a:t>Keep this SHORT — five minutes max. Execs don't want an architecture lecture; they want to know what it is, where it fits, and what stays under their control.</a:t>
+              <a:t>This slide answers "why are we the ones hearing this pitch?" — and flatters honestly, with facts.</a:t>
             </a:r>
           </a:p>
           <a:p/>
           <a:p>
             <a:r>
-              <a:t>Key distinction to land: "You've probably all used or evaluated Copilot-style tools. Those make an engineer type faster. Devin is different — you hand it the whole task. 'Upgrade this repo from Angular 14 to 18, keep tests green' — and it comes back with reviewed-ready PRs."</a:t>
+              <a:t>Talk track: "Three reasons this conversation makes more sense here than almost anywhere else. First, scale: at ~$13B a year in tech, even a small percentage of engineering capacity reclaimed from maintenance is enormous in absolute terms. Second, you're not AI-skeptics — Erica, the patent portfolio, your leadership's public statements — the organizational muscle to adopt this already exists. Third, and counterintuitively: your regulated environment is an advantage. Devin works through pull requests and leaves a complete session log — it was built for places where every change needs a paper trail."</a:t>
             </a:r>
           </a:p>
           <a:p/>
           <a:p>
             <a:r>
-              <a:t>Compliance hook for the Security Engineer: "Everything Devin does is captured in a session log — every command, every file change, every test run. For a bank, that's a better audit trail than most human engineers leave behind."</a:t>
+              <a:t>[ASK] "Where do you feel the maintenance-vs-greenfield squeeze most acutely right now?" — their answer tells you which use cases to propose in next steps. Write it down.</a:t>
             </a:r>
           </a:p>
           <a:p/>
           <a:p>
             <a:r>
-              <a:t>[ASK] calibration question: "What's your mental model of tools like this — copilot, contractor, or something else? I'll calibrate to that." It surfaces skepticism early, on your terms, instead of mid-demo.</a:t>
+              <a:t>DERAIL-PREP: If someone says "scale cuts both ways — our estate is too messy for this": "That's exactly why we start with a bounded pilot on one slice, not a big-bang rollout. Messy is normal; we'll see how Devin handles it on your code."</a:t>
             </a:r>
           </a:p>
           <a:p/>
           <a:p>
             <a:r>
-              <a:t>DERAIL-PREP:</a:t>
-            </a:r>
-          </a:p>
-          <a:p>
-            <a:r>
-              <a:t>- "We tried AI coding tools and they hallucinate": "Fair — most tools generate code and hope. Devin runs the code. It compiles, executes tests, and iterates until they pass. You'll see that live in about 60 seconds."</a:t>
-            </a:r>
-          </a:p>
-          <a:p>
-            <a:r>
-              <a:t>- "What model is it? Where does our code go?": Don't improvise. "Great question — deployment options include VPC and data-isolation controls; I'll bring our security team for a proper review as part of next steps." [RESEARCH: know Cognition's current enterprise deployment/data-residency story cold before the meeting.]</a:t>
+              <a:t>[RESEARCH BEFORE MEETING]</a:t>
+            </a:r>
+          </a:p>
+          <a:p>
+            <a:r>
+              <a:t>- Verify the tech-spend figure and Erica stats from the latest earnings call (same items as the agenda-slide checklist).</a:t>
+            </a:r>
+          </a:p>
+          <a:p>
+            <a:r>
+              <a:t>- Find 1–2 public BofA exec quotes on GenAI for developers to cite verbatim.</a:t>
             </a:r>
           </a:p>
         </p:txBody>
@@ -1251,50 +1373,41 @@
           <a:lstStyle/>
           <a:p>
             <a:r>
-              <a:t>This slide is your engagement insurance policy. Naming each person's likely concern out loud — before they raise it — earns trust and takes the wind out of ambushes.</a:t>
+              <a:t>Keep this SHORT — five minutes max. Execs don't want an architecture lecture; they want to know what it is, where it fits, and what stays under their control.</a:t>
             </a:r>
           </a:p>
           <a:p/>
           <a:p>
             <a:r>
-              <a:t>Delivery tip: address each column TO that person, by name, with eye contact. "For you, [VP name], my guess is the question is team capacity..." Then [ASK]: "I took a guess at what each of you cares about. Did I get it roughly right — and what did I miss? I'd rather demo to your real concerns than my imagined ones." Let each of the three respond. Budget 3–4 minutes; this is where buy-in starts.</a:t>
+              <a:t>Key distinction to land: "You've probably all used or evaluated Copilot-style tools. Those make an engineer type faster. Devin is different — you hand it the whole task. 'Upgrade this repo from Angular 14 to 18, keep tests green' — and it comes back with reviewed-ready PRs."</a:t>
             </a:r>
           </a:p>
           <a:p/>
           <a:p>
             <a:r>
-              <a:t>DERAIL-PREP (opinionated execs):</a:t>
-            </a:r>
-          </a:p>
-          <a:p>
-            <a:r>
-              <a:t>- If one person dominates: "That's a thread I want to pull on — but I want to make sure I hear [other person]'s take before the demo, since it changes what I show."</a:t>
-            </a:r>
-          </a:p>
-          <a:p>
-            <a:r>
-              <a:t>- If someone is openly skeptical/hostile: don't defend, redirect to evidence. "Totally fair to be skeptical. Can I earn the benefit of the doubt with the demo? If it doesn't hold up, tear it apart."</a:t>
-            </a:r>
-          </a:p>
-          <a:p>
-            <a:r>
-              <a:t>- If they push into pricing/procurement early: "I'll cover commercial structure in next steps — short version: we typically start with a bounded pilot so you're not buying on faith."</a:t>
+              <a:t>Compliance hook for the Security Engineer: "Everything Devin does is captured in a session log — every command, every file change, every test run. For a bank, that's a better audit trail than most human engineers leave behind."</a:t>
             </a:r>
           </a:p>
           <a:p/>
           <a:p>
             <a:r>
-              <a:t>[RESEARCH BEFORE MEETING]</a:t>
-            </a:r>
-          </a:p>
-          <a:p>
-            <a:r>
-              <a:t>- Get the attendees' actual names/backgrounds (LinkedIn) — tailor each column's phrasing to how their org actually talks.</a:t>
-            </a:r>
-          </a:p>
-          <a:p>
-            <a:r>
-              <a:t>- Check BofA's public statements on responsible-AI governance (they have an internal AI governance framework) — mirror their language when talking about human oversight.</a:t>
+              <a:t>[ASK] calibration question: "What's your mental model of tools like this — copilot, contractor, or something else? I'll calibrate to that." It surfaces skepticism early, on your terms, instead of mid-demo.</a:t>
+            </a:r>
+          </a:p>
+          <a:p/>
+          <a:p>
+            <a:r>
+              <a:t>DERAIL-PREP:</a:t>
+            </a:r>
+          </a:p>
+          <a:p>
+            <a:r>
+              <a:t>- "We tried AI coding tools and they hallucinate": "Fair — most tools generate code and hope. Devin runs the code. It compiles, executes tests, and iterates until they pass. You'll see that live in about 60 seconds."</a:t>
+            </a:r>
+          </a:p>
+          <a:p>
+            <a:r>
+              <a:t>- "What model is it? Where does our code go?": Don't improvise. "Great question — deployment options include VPC and data-isolation controls; I'll bring our security team for a proper review as part of next steps." [RESEARCH: know Cognition's current enterprise deployment/data-residency story cold before the meeting.]</a:t>
             </a:r>
           </a:p>
         </p:txBody>
@@ -1364,77 +1477,50 @@
           <a:lstStyle/>
           <a:p>
             <a:r>
-              <a:t>Switch to the live demo here (the !bofa_demo playbook flow). This slide is the map you leave up briefly so they know what they're about to see, then you go live.</a:t>
+              <a:t>This slide is your engagement insurance policy. Naming each person's likely concern out loud — before they raise it — earns trust and takes the wind out of ambushes.</a:t>
             </a:r>
           </a:p>
           <a:p/>
           <a:p>
             <a:r>
-              <a:t>While it runs, invite interaction: "Shout out anything you'd want to inspect — a diff, a test, a log. This is your demo, not my script."</a:t>
+              <a:t>Delivery tip: address each column TO that person, by name, with eye contact. "For you, [VP name], my guess is the question is team capacity..." Then [ASK]: "I took a guess at what each of you cares about. Did I get it roughly right — and what did I miss? I'd rather demo to your real concerns than my imagined ones." Let each of the three respond. Budget 3–4 minutes; this is where buy-in starts.</a:t>
             </a:r>
           </a:p>
           <a:p/>
           <a:p>
             <a:r>
-              <a:t>Narrate value, not syntax: each of the 5 patterns has a business hook —</a:t>
-            </a:r>
-          </a:p>
-          <a:p>
-            <a:r>
-              <a:t>1. HttpParams → "API evolution handled systematically, not by grep-and-pray."</a:t>
-            </a:r>
-          </a:p>
-          <a:p>
-            <a:r>
-              <a:t>2. Standalone components → "Adopting Angular 18 the right way, not just compiling on it."</a:t>
-            </a:r>
-          </a:p>
-          <a:p>
-            <a:r>
-              <a:t>3. TestBed → "Your test suite migrates too — most manual upgrades leave tests rotting."</a:t>
-            </a:r>
-          </a:p>
-          <a:p>
-            <a:r>
-              <a:t>4. any types in financial models → point at the Security Engineer: "Type safety on money-handling code. This is a defect class disappearing."</a:t>
-            </a:r>
-          </a:p>
-          <a:p>
-            <a:r>
-              <a:t>5. *ngFor → @for → point at the Architect: "Template modernization applied identically across the whole library — consistency at scale."</a:t>
+              <a:t>DERAIL-PREP (opinionated execs):</a:t>
+            </a:r>
+          </a:p>
+          <a:p>
+            <a:r>
+              <a:t>- If one person dominates: "That's a thread I want to pull on — but I want to make sure I hear [other person]'s take before the demo, since it changes what I show."</a:t>
+            </a:r>
+          </a:p>
+          <a:p>
+            <a:r>
+              <a:t>- If someone is openly skeptical/hostile: don't defend, redirect to evidence. "Totally fair to be skeptical. Can I earn the benefit of the doubt with the demo? If it doesn't hold up, tear it apart."</a:t>
+            </a:r>
+          </a:p>
+          <a:p>
+            <a:r>
+              <a:t>- If they push into pricing/procurement early: "I'll cover commercial structure in next steps — short version: we typically start with a bounded pilot so you're not buying on faith."</a:t>
             </a:r>
           </a:p>
           <a:p/>
           <a:p>
             <a:r>
-              <a:t>Pattern 4 and the downstream-teams story are your strongest moments — slow down there.</a:t>
-            </a:r>
-          </a:p>
-          <a:p/>
-          <a:p>
-            <a:r>
-              <a:t>[PAUSE] moments: after the baseline goes green ("that's the safety net"), and after the final validation scan ("zero legacy patterns — that's the compliance evidence your audit file wants").</a:t>
-            </a:r>
-          </a:p>
-          <a:p/>
-          <a:p>
-            <a:r>
-              <a:t>DERAIL-PREP:</a:t>
-            </a:r>
-          </a:p>
-          <a:p>
-            <a:r>
-              <a:t>- Demo breaks: stay calm, it's rehearsed — you have git-reset recovery branches and a recorded run as backup. "Live demos, right? Here's the recorded run while I reset."</a:t>
-            </a:r>
-          </a:p>
-          <a:p>
-            <a:r>
-              <a:t>- "This demo repo is toy-sized; ours is 100x bigger": "Completely true — and that's the point of the pilot: we prove it on a real slice of YOUR codebase in week one. Scale is Devin's advantage: it parallelizes; humans don't."</a:t>
-            </a:r>
-          </a:p>
-          <a:p>
-            <a:r>
-              <a:t>- "Devin wrote this demo repo, of course it can fix it": "Fair — which is why next step is your code, not mine." </a:t>
+              <a:t>[RESEARCH BEFORE MEETING]</a:t>
+            </a:r>
+          </a:p>
+          <a:p>
+            <a:r>
+              <a:t>- Get the attendees' actual names/backgrounds (LinkedIn) — tailor each column's phrasing to how their org actually talks.</a:t>
+            </a:r>
+          </a:p>
+          <a:p>
+            <a:r>
+              <a:t>- Check BofA's public statements on responsible-AI governance (they have an internal AI governance framework) — mirror their language when talking about human oversight.</a:t>
             </a:r>
           </a:p>
         </p:txBody>
@@ -1504,41 +1590,77 @@
           <a:lstStyle/>
           <a:p>
             <a:r>
-              <a:t>Bridge from demo to their world: "What you just saw on five patterns is exactly what runs across your real repos — the difference is scale, and scale is where this gets interesting."</a:t>
+              <a:t>Switch to the live demo here (the !bofa_demo playbook flow). This slide is the map you leave up briefly so they know what they're about to see, then you go live.</a:t>
             </a:r>
           </a:p>
           <a:p/>
           <a:p>
             <a:r>
-              <a:t>The killer point for the Architect is step 3: parallelization. "A human team upgrades one repo at a time and coordinates by meeting. Devin runs one session per downstream app simultaneously. Your critical path goes from 'sum of 12 teams' calendars' to 'longest single review cycle.'"</a:t>
+              <a:t>While it runs, invite interaction: "Shout out anything you'd want to inspect — a diff, a test, a log. This is your demo, not my script."</a:t>
             </a:r>
           </a:p>
           <a:p/>
           <a:p>
             <a:r>
-              <a:t>For the Security Engineer, step 4: "You don't build the audit story at the end — every session IS the audit story."</a:t>
+              <a:t>Narrate value, not syntax: each of the 5 patterns has a business hook —</a:t>
+            </a:r>
+          </a:p>
+          <a:p>
+            <a:r>
+              <a:t>1. HttpParams → "API evolution handled systematically, not by grep-and-pray."</a:t>
+            </a:r>
+          </a:p>
+          <a:p>
+            <a:r>
+              <a:t>2. Standalone components → "Adopting Angular 18 the right way, not just compiling on it."</a:t>
+            </a:r>
+          </a:p>
+          <a:p>
+            <a:r>
+              <a:t>3. TestBed → "Your test suite migrates too — most manual upgrades leave tests rotting."</a:t>
+            </a:r>
+          </a:p>
+          <a:p>
+            <a:r>
+              <a:t>4. any types in financial models → point at the Security Engineer: "Type safety on money-handling code. This is a defect class disappearing."</a:t>
+            </a:r>
+          </a:p>
+          <a:p>
+            <a:r>
+              <a:t>5. *ngFor → @for → point at the Architect: "Template modernization applied identically across the whole library — consistency at scale."</a:t>
             </a:r>
           </a:p>
           <a:p/>
           <a:p>
             <a:r>
-              <a:t>[ASK] the Architect directly: "If we upgraded the shared library first and handed each consuming team a passing PR, what would still worry you?" — whatever they say becomes a pilot success criterion. Write it down.</a:t>
+              <a:t>Pattern 4 and the downstream-teams story are your strongest moments — slow down there.</a:t>
             </a:r>
           </a:p>
           <a:p/>
           <a:p>
             <a:r>
+              <a:t>[PAUSE] moments: after the baseline goes green ("that's the safety net"), and after the final validation scan ("zero legacy patterns — that's the compliance evidence your audit file wants").</a:t>
+            </a:r>
+          </a:p>
+          <a:p/>
+          <a:p>
+            <a:r>
               <a:t>DERAIL-PREP:</a:t>
             </a:r>
           </a:p>
           <a:p>
             <a:r>
-              <a:t>- "Our repos are on internal GitHub Enterprise / restricted network": "Supported — deployment specifics are exactly what the week-0 security review covers." [RESEARCH: confirm Cognition's current GHE/VPC/network-isolation options before the meeting so you don't overpromise.]</a:t>
-            </a:r>
-          </a:p>
-          <a:p>
-            <a:r>
-              <a:t>- "Who's liable if Devin introduces a bug?": "Same person as today — the reviewing engineer and your existing release process. Devin doesn't get commit rights your policies wouldn't give a contractor." </a:t>
+              <a:t>- Demo breaks: stay calm, it's rehearsed — you have git-reset recovery branches and a recorded run as backup. "Live demos, right? Here's the recorded run while I reset."</a:t>
+            </a:r>
+          </a:p>
+          <a:p>
+            <a:r>
+              <a:t>- "This demo repo is toy-sized; ours is 100x bigger": "Completely true — and that's the point of the pilot: we prove it on a real slice of YOUR codebase in week one. Scale is Devin's advantage: it parallelizes; humans don't."</a:t>
+            </a:r>
+          </a:p>
+          <a:p>
+            <a:r>
+              <a:t>- "Devin wrote this demo repo, of course it can fix it": "Fair — which is why next step is your code, not mine." </a:t>
             </a:r>
           </a:p>
         </p:txBody>
@@ -1608,34 +1730,41 @@
           <a:lstStyle/>
           <a:p>
             <a:r>
-              <a:t>Paint the after-picture in THEIR terms, one beat per persona:</a:t>
-            </a:r>
-          </a:p>
-          <a:p>
-            <a:r>
-              <a:t>- VP Eng: capacity back + deadline met without roadmap carnage.</a:t>
-            </a:r>
-          </a:p>
-          <a:p>
-            <a:r>
-              <a:t>- Security: policy violation resolved, plus a standing audit trail for every future change.</a:t>
-            </a:r>
-          </a:p>
-          <a:p>
-            <a:r>
-              <a:t>- Architect: consistency enforced mechanically across the estate; migrations become boring (the highest compliment in architecture).</a:t>
+              <a:t>Bridge from demo to their world: "What you just saw on five patterns is exactly what runs across your real repos — the difference is scale, and scale is where this gets interesting."</a:t>
             </a:r>
           </a:p>
           <a:p/>
           <a:p>
             <a:r>
-              <a:t>The third card is deliberately the expansion story — mention the other two use cases from their own list (cloud migration, test coverage) briefly: "And to be direct, the same machinery applies to the Lambda migration and the OCC test-coverage push you mentioned. But let's earn that with this one first." Referencing their own pre-shared initiatives shows you listened.</a:t>
+              <a:t>The killer point for the Architect is step 3: parallelization. "A human team upgrades one repo at a time and coordinates by meeting. Devin runs one session per downstream app simultaneously. Your critical path goes from 'sum of 12 teams' calendars' to 'longest single review cycle.'"</a:t>
             </a:r>
           </a:p>
           <a:p/>
           <a:p>
             <a:r>
-              <a:t>[ASK] gut-check: "If this end state showed up on time, what would it be worth to your org? I'm asking seriously — it should anchor how we scope the pilot." [PAUSE] and let them put a number or a feeling on it. Whatever value they articulate becomes YOUR value framing in follow-up emails — their words, not yours.</a:t>
+              <a:t>For the Security Engineer, step 4: "You don't build the audit story at the end — every session IS the audit story."</a:t>
+            </a:r>
+          </a:p>
+          <a:p/>
+          <a:p>
+            <a:r>
+              <a:t>[ASK] the Architect directly: "If we upgraded the shared library first and handed each consuming team a passing PR, what would still worry you?" — whatever they say becomes a pilot success criterion. Write it down.</a:t>
+            </a:r>
+          </a:p>
+          <a:p/>
+          <a:p>
+            <a:r>
+              <a:t>DERAIL-PREP:</a:t>
+            </a:r>
+          </a:p>
+          <a:p>
+            <a:r>
+              <a:t>- "Our repos are on internal GitHub Enterprise / restricted network": "Supported — deployment specifics are exactly what the week-0 security review covers." [RESEARCH: confirm Cognition's current GHE/VPC/network-isolation options before the meeting so you don't overpromise.]</a:t>
+            </a:r>
+          </a:p>
+          <a:p>
+            <a:r>
+              <a:t>- "Who's liable if Devin introduces a bug?": "Same person as today — the reviewing engineer and your existing release process. Devin doesn't get commit rights your policies wouldn't give a contractor." </a:t>
             </a:r>
           </a:p>
         </p:txBody>
@@ -1705,52 +1834,34 @@
           <a:lstStyle/>
           <a:p>
             <a:r>
-              <a:t>End with a specific, low-risk ask and assign owners in the room — that's what turns a nice meeting into a pipeline.</a:t>
+              <a:t>Paint the after-picture in THEIR terms, one beat per persona:</a:t>
+            </a:r>
+          </a:p>
+          <a:p>
+            <a:r>
+              <a:t>- VP Eng: capacity back + deadline met without roadmap carnage.</a:t>
+            </a:r>
+          </a:p>
+          <a:p>
+            <a:r>
+              <a:t>- Security: policy violation resolved, plus a standing audit trail for every future change.</a:t>
+            </a:r>
+          </a:p>
+          <a:p>
+            <a:r>
+              <a:t>- Architect: consistency enforced mechanically across the estate; migrations become boring (the highest compliment in architecture).</a:t>
             </a:r>
           </a:p>
           <a:p/>
           <a:p>
             <a:r>
-              <a:t>Talk track: "I'm not asking you to bet the bank. I'm asking for one repo and four weeks, measured against criteria YOU define. If Devin doesn't earn its keep, you've spent almost nothing finding out."</a:t>
+              <a:t>The third card is deliberately the expansion story — mention the other two use cases from their own list (cloud migration, test coverage) briefly: "And to be direct, the same machinery applies to the Lambda migration and the OCC test-coverage push you mentioned. But let's earn that with this one first." Referencing their own pre-shared initiatives shows you listened.</a:t>
             </a:r>
           </a:p>
           <a:p/>
           <a:p>
             <a:r>
-              <a:t>Assign ownership live: security review → Security Engineer; pilot repo + success criteria → Chief Architect; sponsorship/capacity → VP Eng. People who own a step show up to the next meeting.</a:t>
-            </a:r>
-          </a:p>
-          <a:p/>
-          <a:p>
-            <a:r>
-              <a:t>[ASK] the closing question and get a name and a date before you leave the room. "Who should I follow up with, and does end of this week work for the security call?"</a:t>
-            </a:r>
-          </a:p>
-          <a:p/>
-          <a:p>
-            <a:r>
-              <a:t>DERAIL-PREP:</a:t>
-            </a:r>
-          </a:p>
-          <a:p>
-            <a:r>
-              <a:t>- "We need to run this through procurement/vendor risk first": "Understood — that's exactly why step 1 is the security review; it feeds your vendor-risk process. Can we start that in parallel?"</a:t>
-            </a:r>
-          </a:p>
-          <a:p>
-            <a:r>
-              <a:t>- "Send us materials and we'll get back to you": counter gently with a smaller yes: "Happy to — can I also pencil the security call so materials land with momentum? Easy to cancel."</a:t>
-            </a:r>
-          </a:p>
-          <a:p>
-            <a:r>
-              <a:t>- If the room is split (one enthusiast, one skeptic): scope the pilot around the skeptic's concern explicitly — "Let's make [skeptic]'s question the primary success criterion."</a:t>
-            </a:r>
-          </a:p>
-          <a:p/>
-          <a:p>
-            <a:r>
-              <a:t>Post-meeting: send notes + promised materials within 24–48h, restate the owners and dates they agreed to.</a:t>
+              <a:t>[ASK] gut-check: "If this end state showed up on time, what would it be worth to your org? I'm asking seriously — it should anchor how we scope the pilot." [PAUSE] and let them put a number or a feeling on it. Whatever value they articulate becomes YOUR value framing in follow-up emails — their words, not yours.</a:t>
             </a:r>
           </a:p>
         </p:txBody>
@@ -5016,7 +5127,7 @@
         <p:spPr>
           <a:xfrm>
             <a:off x="0" y="0"/>
-            <a:ext cx="12191695" cy="6858000"/>
+            <a:ext cx="12191695" cy="1170432"/>
           </a:xfrm>
           <a:prstGeom prst="rect">
             <a:avLst/>
@@ -5059,8 +5170,8 @@
         </p:nvSpPr>
         <p:spPr>
           <a:xfrm>
-            <a:off x="0" y="3566160"/>
-            <a:ext cx="12191695" cy="54864"/>
+            <a:off x="0" y="1170432"/>
+            <a:ext cx="12191695" cy="50292"/>
           </a:xfrm>
           <a:prstGeom prst="rect">
             <a:avLst/>
@@ -5103,8 +5214,8 @@
         </p:nvSpPr>
         <p:spPr>
           <a:xfrm>
-            <a:off x="822960" y="2651760"/>
-            <a:ext cx="10515600" cy="822960"/>
+            <a:off x="502920" y="146304"/>
+            <a:ext cx="9601200" cy="320040"/>
           </a:xfrm>
           <a:prstGeom prst="rect">
             <a:avLst/>
@@ -5126,13 +5237,13 @@
               </a:spcAft>
             </a:pPr>
             <a:r>
-              <a:rPr sz="3400" b="1" i="0">
-                <a:solidFill>
-                  <a:srgbClr val="FFFFFF"/>
-                </a:solidFill>
-                <a:latin typeface="Roboto"/>
-              </a:rPr>
-              <a:t>Appendix — Prep Material (not presented)</a:t>
+              <a:rPr sz="1100" b="1" i="0">
+                <a:solidFill>
+                  <a:srgbClr val="9FB4E0"/>
+                </a:solidFill>
+                <a:latin typeface="Roboto"/>
+              </a:rPr>
+              <a:t>LEAVING WITH A DECISION, NOT A DECK</a:t>
             </a:r>
           </a:p>
         </p:txBody>
@@ -5145,8 +5256,50 @@
         </p:nvSpPr>
         <p:spPr>
           <a:xfrm>
-            <a:off x="822960" y="3794760"/>
-            <a:ext cx="10058400" cy="914400"/>
+            <a:off x="502920" y="384048"/>
+            <a:ext cx="10424160" cy="731520"/>
+          </a:xfrm>
+          <a:prstGeom prst="rect">
+            <a:avLst/>
+          </a:prstGeom>
+          <a:noFill/>
+        </p:spPr>
+        <p:txBody>
+          <a:bodyPr wrap="square" anchor="ctr">
+            <a:spAutoFit/>
+          </a:bodyPr>
+          <a:lstStyle/>
+          <a:p>
+            <a:pPr algn="l">
+              <a:lnSpc>
+                <a:spcPct val="100000"/>
+              </a:lnSpc>
+              <a:spcAft>
+                <a:spcPts val="600"/>
+              </a:spcAft>
+            </a:pPr>
+            <a:r>
+              <a:rPr sz="2700" b="1" i="0">
+                <a:solidFill>
+                  <a:srgbClr val="FFFFFF"/>
+                </a:solidFill>
+                <a:latin typeface="Roboto"/>
+              </a:rPr>
+              <a:t>Proposed next steps</a:t>
+            </a:r>
+          </a:p>
+        </p:txBody>
+      </p:sp>
+      <p:sp>
+        <p:nvSpPr>
+          <p:cNvPr id="6" name="TextBox 5"/>
+          <p:cNvSpPr txBox="1"/>
+          <p:nvPr/>
+        </p:nvSpPr>
+        <p:spPr>
+          <a:xfrm>
+            <a:off x="11247120" y="384048"/>
+            <a:ext cx="640080" cy="731520"/>
           </a:xfrm>
           <a:prstGeom prst="rect">
             <a:avLst/>
@@ -5159,6 +5312,180 @@
           </a:bodyPr>
           <a:lstStyle/>
           <a:p>
+            <a:pPr algn="r">
+              <a:lnSpc>
+                <a:spcPct val="100000"/>
+              </a:lnSpc>
+              <a:spcAft>
+                <a:spcPts val="600"/>
+              </a:spcAft>
+            </a:pPr>
+            <a:r>
+              <a:rPr sz="1400" b="0" i="0">
+                <a:solidFill>
+                  <a:srgbClr val="9FB4E0"/>
+                </a:solidFill>
+                <a:latin typeface="Roboto"/>
+              </a:rPr>
+              <a:t>10</a:t>
+            </a:r>
+          </a:p>
+        </p:txBody>
+      </p:sp>
+      <p:sp>
+        <p:nvSpPr>
+          <p:cNvPr id="7" name="Rounded Rectangle 6"/>
+          <p:cNvSpPr/>
+          <p:nvPr/>
+        </p:nvSpPr>
+        <p:spPr>
+          <a:xfrm>
+            <a:off x="502920" y="1481328"/>
+            <a:ext cx="11201400" cy="932688"/>
+          </a:xfrm>
+          <a:prstGeom prst="roundRect">
+            <a:avLst>
+              <a:gd name="adj" fmla="val 10000"/>
+            </a:avLst>
+          </a:prstGeom>
+          <a:solidFill>
+            <a:srgbClr val="F4F6F9"/>
+          </a:solidFill>
+          <a:ln>
+            <a:noFill/>
+          </a:ln>
+          <a:effectLst/>
+        </p:spPr>
+        <p:style>
+          <a:lnRef idx="1">
+            <a:schemeClr val="accent1"/>
+          </a:lnRef>
+          <a:fillRef idx="3">
+            <a:schemeClr val="accent1"/>
+          </a:fillRef>
+          <a:effectRef idx="2">
+            <a:schemeClr val="accent1"/>
+          </a:effectRef>
+          <a:fontRef idx="minor">
+            <a:schemeClr val="lt1"/>
+          </a:fontRef>
+        </p:style>
+        <p:txBody>
+          <a:bodyPr rtlCol="0" anchor="ctr"/>
+          <a:lstStyle/>
+          <a:p>
+            <a:pPr algn="ctr"/>
+          </a:p>
+        </p:txBody>
+      </p:sp>
+      <p:sp>
+        <p:nvSpPr>
+          <p:cNvPr id="8" name="Oval 7"/>
+          <p:cNvSpPr/>
+          <p:nvPr/>
+        </p:nvSpPr>
+        <p:spPr>
+          <a:xfrm>
+            <a:off x="658368" y="1682496"/>
+            <a:ext cx="530352" cy="530352"/>
+          </a:xfrm>
+          <a:prstGeom prst="ellipse">
+            <a:avLst/>
+          </a:prstGeom>
+          <a:solidFill>
+            <a:srgbClr val="E31837"/>
+          </a:solidFill>
+          <a:ln>
+            <a:noFill/>
+          </a:ln>
+          <a:effectLst/>
+        </p:spPr>
+        <p:style>
+          <a:lnRef idx="1">
+            <a:schemeClr val="accent1"/>
+          </a:lnRef>
+          <a:fillRef idx="3">
+            <a:schemeClr val="accent1"/>
+          </a:fillRef>
+          <a:effectRef idx="2">
+            <a:schemeClr val="accent1"/>
+          </a:effectRef>
+          <a:fontRef idx="minor">
+            <a:schemeClr val="lt1"/>
+          </a:fontRef>
+        </p:style>
+        <p:txBody>
+          <a:bodyPr rtlCol="0" anchor="ctr"/>
+          <a:lstStyle/>
+          <a:p>
+            <a:pPr algn="ctr"/>
+          </a:p>
+        </p:txBody>
+      </p:sp>
+      <p:sp>
+        <p:nvSpPr>
+          <p:cNvPr id="9" name="TextBox 8"/>
+          <p:cNvSpPr txBox="1"/>
+          <p:nvPr/>
+        </p:nvSpPr>
+        <p:spPr>
+          <a:xfrm>
+            <a:off x="658368" y="1755648"/>
+            <a:ext cx="530352" cy="402336"/>
+          </a:xfrm>
+          <a:prstGeom prst="rect">
+            <a:avLst/>
+          </a:prstGeom>
+          <a:noFill/>
+        </p:spPr>
+        <p:txBody>
+          <a:bodyPr wrap="square" anchor="t">
+            <a:spAutoFit/>
+          </a:bodyPr>
+          <a:lstStyle/>
+          <a:p>
+            <a:pPr algn="ctr">
+              <a:lnSpc>
+                <a:spcPct val="100000"/>
+              </a:lnSpc>
+              <a:spcAft>
+                <a:spcPts val="600"/>
+              </a:spcAft>
+            </a:pPr>
+            <a:r>
+              <a:rPr sz="1700" b="1" i="0">
+                <a:solidFill>
+                  <a:srgbClr val="FFFFFF"/>
+                </a:solidFill>
+                <a:latin typeface="Roboto"/>
+              </a:rPr>
+              <a:t>1</a:t>
+            </a:r>
+          </a:p>
+        </p:txBody>
+      </p:sp>
+      <p:sp>
+        <p:nvSpPr>
+          <p:cNvPr id="10" name="TextBox 9"/>
+          <p:cNvSpPr txBox="1"/>
+          <p:nvPr/>
+        </p:nvSpPr>
+        <p:spPr>
+          <a:xfrm>
+            <a:off x="1417320" y="1591056"/>
+            <a:ext cx="1417320" cy="685800"/>
+          </a:xfrm>
+          <a:prstGeom prst="rect">
+            <a:avLst/>
+          </a:prstGeom>
+          <a:noFill/>
+        </p:spPr>
+        <p:txBody>
+          <a:bodyPr wrap="square" anchor="t">
+            <a:spAutoFit/>
+          </a:bodyPr>
+          <a:lstStyle/>
+          <a:p>
             <a:pPr algn="l">
               <a:lnSpc>
                 <a:spcPct val="100000"/>
@@ -5168,15 +5495,38 @@
               </a:spcAft>
             </a:pPr>
             <a:r>
-              <a:rPr sz="1600" b="0" i="0">
-                <a:solidFill>
-                  <a:srgbClr val="C9D4EC"/>
-                </a:solidFill>
-                <a:latin typeface="Roboto"/>
-              </a:rPr>
-              <a:t>A. Objection handling — if the room pushes back</a:t>
-            </a:r>
-          </a:p>
+              <a:rPr sz="1150" b="1" i="0">
+                <a:solidFill>
+                  <a:srgbClr val="E31837"/>
+                </a:solidFill>
+                <a:latin typeface="Roboto"/>
+              </a:rPr>
+              <a:t>This week</a:t>
+            </a:r>
+          </a:p>
+        </p:txBody>
+      </p:sp>
+      <p:sp>
+        <p:nvSpPr>
+          <p:cNvPr id="11" name="TextBox 10"/>
+          <p:cNvSpPr txBox="1"/>
+          <p:nvPr/>
+        </p:nvSpPr>
+        <p:spPr>
+          <a:xfrm>
+            <a:off x="2834640" y="1591056"/>
+            <a:ext cx="8595360" cy="365760"/>
+          </a:xfrm>
+          <a:prstGeom prst="rect">
+            <a:avLst/>
+          </a:prstGeom>
+          <a:noFill/>
+        </p:spPr>
+        <p:txBody>
+          <a:bodyPr wrap="square" anchor="t">
+            <a:spAutoFit/>
+          </a:bodyPr>
+          <a:lstStyle/>
           <a:p>
             <a:pPr algn="l">
               <a:lnSpc>
@@ -5187,13 +5537,922 @@
               </a:spcAft>
             </a:pPr>
             <a:r>
-              <a:rPr sz="1600" b="0" i="0">
-                <a:solidFill>
-                  <a:srgbClr val="C9D4EC"/>
-                </a:solidFill>
-                <a:latin typeface="Roboto"/>
-              </a:rPr>
-              <a:t>B. Pre-meeting research checklist</a:t>
+              <a:rPr sz="1450" b="1" i="0">
+                <a:solidFill>
+                  <a:srgbClr val="012169"/>
+                </a:solidFill>
+                <a:latin typeface="Roboto"/>
+              </a:rPr>
+              <a:t>Pick 3 use cases together</a:t>
+            </a:r>
+          </a:p>
+        </p:txBody>
+      </p:sp>
+      <p:sp>
+        <p:nvSpPr>
+          <p:cNvPr id="12" name="TextBox 11"/>
+          <p:cNvSpPr txBox="1"/>
+          <p:nvPr/>
+        </p:nvSpPr>
+        <p:spPr>
+          <a:xfrm>
+            <a:off x="2834640" y="1938528"/>
+            <a:ext cx="8595360" cy="411480"/>
+          </a:xfrm>
+          <a:prstGeom prst="rect">
+            <a:avLst/>
+          </a:prstGeom>
+          <a:noFill/>
+        </p:spPr>
+        <p:txBody>
+          <a:bodyPr wrap="square" anchor="t">
+            <a:spAutoFit/>
+          </a:bodyPr>
+          <a:lstStyle/>
+          <a:p>
+            <a:pPr algn="l">
+              <a:lnSpc>
+                <a:spcPct val="100000"/>
+              </a:lnSpc>
+              <a:spcAft>
+                <a:spcPts val="600"/>
+              </a:spcAft>
+            </a:pPr>
+            <a:r>
+              <a:rPr sz="1150" b="0" i="0">
+                <a:solidFill>
+                  <a:srgbClr val="1C2430"/>
+                </a:solidFill>
+                <a:latin typeface="Roboto"/>
+              </a:rPr>
+              <a:t>Start with work like today's demo — upgrades, migrations, test debt</a:t>
+            </a:r>
+          </a:p>
+        </p:txBody>
+      </p:sp>
+      <p:sp>
+        <p:nvSpPr>
+          <p:cNvPr id="13" name="Rounded Rectangle 12"/>
+          <p:cNvSpPr/>
+          <p:nvPr/>
+        </p:nvSpPr>
+        <p:spPr>
+          <a:xfrm>
+            <a:off x="502920" y="2505456"/>
+            <a:ext cx="11201400" cy="932688"/>
+          </a:xfrm>
+          <a:prstGeom prst="roundRect">
+            <a:avLst>
+              <a:gd name="adj" fmla="val 10000"/>
+            </a:avLst>
+          </a:prstGeom>
+          <a:solidFill>
+            <a:srgbClr val="F4F6F9"/>
+          </a:solidFill>
+          <a:ln>
+            <a:noFill/>
+          </a:ln>
+          <a:effectLst/>
+        </p:spPr>
+        <p:style>
+          <a:lnRef idx="1">
+            <a:schemeClr val="accent1"/>
+          </a:lnRef>
+          <a:fillRef idx="3">
+            <a:schemeClr val="accent1"/>
+          </a:fillRef>
+          <a:effectRef idx="2">
+            <a:schemeClr val="accent1"/>
+          </a:effectRef>
+          <a:fontRef idx="minor">
+            <a:schemeClr val="lt1"/>
+          </a:fontRef>
+        </p:style>
+        <p:txBody>
+          <a:bodyPr rtlCol="0" anchor="ctr"/>
+          <a:lstStyle/>
+          <a:p>
+            <a:pPr algn="ctr"/>
+          </a:p>
+        </p:txBody>
+      </p:sp>
+      <p:sp>
+        <p:nvSpPr>
+          <p:cNvPr id="14" name="Oval 13"/>
+          <p:cNvSpPr/>
+          <p:nvPr/>
+        </p:nvSpPr>
+        <p:spPr>
+          <a:xfrm>
+            <a:off x="658368" y="2706624"/>
+            <a:ext cx="530352" cy="530352"/>
+          </a:xfrm>
+          <a:prstGeom prst="ellipse">
+            <a:avLst/>
+          </a:prstGeom>
+          <a:solidFill>
+            <a:srgbClr val="E31837"/>
+          </a:solidFill>
+          <a:ln>
+            <a:noFill/>
+          </a:ln>
+          <a:effectLst/>
+        </p:spPr>
+        <p:style>
+          <a:lnRef idx="1">
+            <a:schemeClr val="accent1"/>
+          </a:lnRef>
+          <a:fillRef idx="3">
+            <a:schemeClr val="accent1"/>
+          </a:fillRef>
+          <a:effectRef idx="2">
+            <a:schemeClr val="accent1"/>
+          </a:effectRef>
+          <a:fontRef idx="minor">
+            <a:schemeClr val="lt1"/>
+          </a:fontRef>
+        </p:style>
+        <p:txBody>
+          <a:bodyPr rtlCol="0" anchor="ctr"/>
+          <a:lstStyle/>
+          <a:p>
+            <a:pPr algn="ctr"/>
+          </a:p>
+        </p:txBody>
+      </p:sp>
+      <p:sp>
+        <p:nvSpPr>
+          <p:cNvPr id="15" name="TextBox 14"/>
+          <p:cNvSpPr txBox="1"/>
+          <p:nvPr/>
+        </p:nvSpPr>
+        <p:spPr>
+          <a:xfrm>
+            <a:off x="658368" y="2779776"/>
+            <a:ext cx="530352" cy="402336"/>
+          </a:xfrm>
+          <a:prstGeom prst="rect">
+            <a:avLst/>
+          </a:prstGeom>
+          <a:noFill/>
+        </p:spPr>
+        <p:txBody>
+          <a:bodyPr wrap="square" anchor="t">
+            <a:spAutoFit/>
+          </a:bodyPr>
+          <a:lstStyle/>
+          <a:p>
+            <a:pPr algn="ctr">
+              <a:lnSpc>
+                <a:spcPct val="100000"/>
+              </a:lnSpc>
+              <a:spcAft>
+                <a:spcPts val="600"/>
+              </a:spcAft>
+            </a:pPr>
+            <a:r>
+              <a:rPr sz="1700" b="1" i="0">
+                <a:solidFill>
+                  <a:srgbClr val="FFFFFF"/>
+                </a:solidFill>
+                <a:latin typeface="Roboto"/>
+              </a:rPr>
+              <a:t>2</a:t>
+            </a:r>
+          </a:p>
+        </p:txBody>
+      </p:sp>
+      <p:sp>
+        <p:nvSpPr>
+          <p:cNvPr id="16" name="TextBox 15"/>
+          <p:cNvSpPr txBox="1"/>
+          <p:nvPr/>
+        </p:nvSpPr>
+        <p:spPr>
+          <a:xfrm>
+            <a:off x="1417320" y="2615184"/>
+            <a:ext cx="1417320" cy="685800"/>
+          </a:xfrm>
+          <a:prstGeom prst="rect">
+            <a:avLst/>
+          </a:prstGeom>
+          <a:noFill/>
+        </p:spPr>
+        <p:txBody>
+          <a:bodyPr wrap="square" anchor="t">
+            <a:spAutoFit/>
+          </a:bodyPr>
+          <a:lstStyle/>
+          <a:p>
+            <a:pPr algn="l">
+              <a:lnSpc>
+                <a:spcPct val="100000"/>
+              </a:lnSpc>
+              <a:spcAft>
+                <a:spcPts val="600"/>
+              </a:spcAft>
+            </a:pPr>
+            <a:r>
+              <a:rPr sz="1150" b="1" i="0">
+                <a:solidFill>
+                  <a:srgbClr val="E31837"/>
+                </a:solidFill>
+                <a:latin typeface="Roboto"/>
+              </a:rPr>
+              <a:t>Next week</a:t>
+            </a:r>
+          </a:p>
+        </p:txBody>
+      </p:sp>
+      <p:sp>
+        <p:nvSpPr>
+          <p:cNvPr id="17" name="TextBox 16"/>
+          <p:cNvSpPr txBox="1"/>
+          <p:nvPr/>
+        </p:nvSpPr>
+        <p:spPr>
+          <a:xfrm>
+            <a:off x="2834640" y="2615184"/>
+            <a:ext cx="8595360" cy="365760"/>
+          </a:xfrm>
+          <a:prstGeom prst="rect">
+            <a:avLst/>
+          </a:prstGeom>
+          <a:noFill/>
+        </p:spPr>
+        <p:txBody>
+          <a:bodyPr wrap="square" anchor="t">
+            <a:spAutoFit/>
+          </a:bodyPr>
+          <a:lstStyle/>
+          <a:p>
+            <a:pPr algn="l">
+              <a:lnSpc>
+                <a:spcPct val="100000"/>
+              </a:lnSpc>
+              <a:spcAft>
+                <a:spcPts val="600"/>
+              </a:spcAft>
+            </a:pPr>
+            <a:r>
+              <a:rPr sz="1450" b="1" i="0">
+                <a:solidFill>
+                  <a:srgbClr val="012169"/>
+                </a:solidFill>
+                <a:latin typeface="Roboto"/>
+              </a:rPr>
+              <a:t>Security &amp; data review</a:t>
+            </a:r>
+          </a:p>
+        </p:txBody>
+      </p:sp>
+      <p:sp>
+        <p:nvSpPr>
+          <p:cNvPr id="18" name="TextBox 17"/>
+          <p:cNvSpPr txBox="1"/>
+          <p:nvPr/>
+        </p:nvSpPr>
+        <p:spPr>
+          <a:xfrm>
+            <a:off x="2834640" y="2962656"/>
+            <a:ext cx="8595360" cy="411480"/>
+          </a:xfrm>
+          <a:prstGeom prst="rect">
+            <a:avLst/>
+          </a:prstGeom>
+          <a:noFill/>
+        </p:spPr>
+        <p:txBody>
+          <a:bodyPr wrap="square" anchor="t">
+            <a:spAutoFit/>
+          </a:bodyPr>
+          <a:lstStyle/>
+          <a:p>
+            <a:pPr algn="l">
+              <a:lnSpc>
+                <a:spcPct val="100000"/>
+              </a:lnSpc>
+              <a:spcAft>
+                <a:spcPts val="600"/>
+              </a:spcAft>
+            </a:pPr>
+            <a:r>
+              <a:rPr sz="1150" b="0" i="0">
+                <a:solidFill>
+                  <a:srgbClr val="1C2430"/>
+                </a:solidFill>
+                <a:latin typeface="Roboto"/>
+              </a:rPr>
+              <a:t>Your security team + ours · define success criteria</a:t>
+            </a:r>
+          </a:p>
+        </p:txBody>
+      </p:sp>
+      <p:sp>
+        <p:nvSpPr>
+          <p:cNvPr id="19" name="Rounded Rectangle 18"/>
+          <p:cNvSpPr/>
+          <p:nvPr/>
+        </p:nvSpPr>
+        <p:spPr>
+          <a:xfrm>
+            <a:off x="502920" y="3529584"/>
+            <a:ext cx="11201400" cy="932688"/>
+          </a:xfrm>
+          <a:prstGeom prst="roundRect">
+            <a:avLst>
+              <a:gd name="adj" fmla="val 10000"/>
+            </a:avLst>
+          </a:prstGeom>
+          <a:solidFill>
+            <a:srgbClr val="F4F6F9"/>
+          </a:solidFill>
+          <a:ln>
+            <a:noFill/>
+          </a:ln>
+          <a:effectLst/>
+        </p:spPr>
+        <p:style>
+          <a:lnRef idx="1">
+            <a:schemeClr val="accent1"/>
+          </a:lnRef>
+          <a:fillRef idx="3">
+            <a:schemeClr val="accent1"/>
+          </a:fillRef>
+          <a:effectRef idx="2">
+            <a:schemeClr val="accent1"/>
+          </a:effectRef>
+          <a:fontRef idx="minor">
+            <a:schemeClr val="lt1"/>
+          </a:fontRef>
+        </p:style>
+        <p:txBody>
+          <a:bodyPr rtlCol="0" anchor="ctr"/>
+          <a:lstStyle/>
+          <a:p>
+            <a:pPr algn="ctr"/>
+          </a:p>
+        </p:txBody>
+      </p:sp>
+      <p:sp>
+        <p:nvSpPr>
+          <p:cNvPr id="20" name="Oval 19"/>
+          <p:cNvSpPr/>
+          <p:nvPr/>
+        </p:nvSpPr>
+        <p:spPr>
+          <a:xfrm>
+            <a:off x="658368" y="3730752"/>
+            <a:ext cx="530352" cy="530352"/>
+          </a:xfrm>
+          <a:prstGeom prst="ellipse">
+            <a:avLst/>
+          </a:prstGeom>
+          <a:solidFill>
+            <a:srgbClr val="E31837"/>
+          </a:solidFill>
+          <a:ln>
+            <a:noFill/>
+          </a:ln>
+          <a:effectLst/>
+        </p:spPr>
+        <p:style>
+          <a:lnRef idx="1">
+            <a:schemeClr val="accent1"/>
+          </a:lnRef>
+          <a:fillRef idx="3">
+            <a:schemeClr val="accent1"/>
+          </a:fillRef>
+          <a:effectRef idx="2">
+            <a:schemeClr val="accent1"/>
+          </a:effectRef>
+          <a:fontRef idx="minor">
+            <a:schemeClr val="lt1"/>
+          </a:fontRef>
+        </p:style>
+        <p:txBody>
+          <a:bodyPr rtlCol="0" anchor="ctr"/>
+          <a:lstStyle/>
+          <a:p>
+            <a:pPr algn="ctr"/>
+          </a:p>
+        </p:txBody>
+      </p:sp>
+      <p:sp>
+        <p:nvSpPr>
+          <p:cNvPr id="21" name="TextBox 20"/>
+          <p:cNvSpPr txBox="1"/>
+          <p:nvPr/>
+        </p:nvSpPr>
+        <p:spPr>
+          <a:xfrm>
+            <a:off x="658368" y="3803904"/>
+            <a:ext cx="530352" cy="402336"/>
+          </a:xfrm>
+          <a:prstGeom prst="rect">
+            <a:avLst/>
+          </a:prstGeom>
+          <a:noFill/>
+        </p:spPr>
+        <p:txBody>
+          <a:bodyPr wrap="square" anchor="t">
+            <a:spAutoFit/>
+          </a:bodyPr>
+          <a:lstStyle/>
+          <a:p>
+            <a:pPr algn="ctr">
+              <a:lnSpc>
+                <a:spcPct val="100000"/>
+              </a:lnSpc>
+              <a:spcAft>
+                <a:spcPts val="600"/>
+              </a:spcAft>
+            </a:pPr>
+            <a:r>
+              <a:rPr sz="1700" b="1" i="0">
+                <a:solidFill>
+                  <a:srgbClr val="FFFFFF"/>
+                </a:solidFill>
+                <a:latin typeface="Roboto"/>
+              </a:rPr>
+              <a:t>3</a:t>
+            </a:r>
+          </a:p>
+        </p:txBody>
+      </p:sp>
+      <p:sp>
+        <p:nvSpPr>
+          <p:cNvPr id="22" name="TextBox 21"/>
+          <p:cNvSpPr txBox="1"/>
+          <p:nvPr/>
+        </p:nvSpPr>
+        <p:spPr>
+          <a:xfrm>
+            <a:off x="1417320" y="3639312"/>
+            <a:ext cx="1417320" cy="685800"/>
+          </a:xfrm>
+          <a:prstGeom prst="rect">
+            <a:avLst/>
+          </a:prstGeom>
+          <a:noFill/>
+        </p:spPr>
+        <p:txBody>
+          <a:bodyPr wrap="square" anchor="t">
+            <a:spAutoFit/>
+          </a:bodyPr>
+          <a:lstStyle/>
+          <a:p>
+            <a:pPr algn="l">
+              <a:lnSpc>
+                <a:spcPct val="100000"/>
+              </a:lnSpc>
+              <a:spcAft>
+                <a:spcPts val="600"/>
+              </a:spcAft>
+            </a:pPr>
+            <a:r>
+              <a:rPr sz="1150" b="1" i="0">
+                <a:solidFill>
+                  <a:srgbClr val="E31837"/>
+                </a:solidFill>
+                <a:latin typeface="Roboto"/>
+              </a:rPr>
+              <a:t>Weeks 2–4</a:t>
+            </a:r>
+          </a:p>
+        </p:txBody>
+      </p:sp>
+      <p:sp>
+        <p:nvSpPr>
+          <p:cNvPr id="23" name="TextBox 22"/>
+          <p:cNvSpPr txBox="1"/>
+          <p:nvPr/>
+        </p:nvSpPr>
+        <p:spPr>
+          <a:xfrm>
+            <a:off x="2834640" y="3639312"/>
+            <a:ext cx="8595360" cy="365760"/>
+          </a:xfrm>
+          <a:prstGeom prst="rect">
+            <a:avLst/>
+          </a:prstGeom>
+          <a:noFill/>
+        </p:spPr>
+        <p:txBody>
+          <a:bodyPr wrap="square" anchor="t">
+            <a:spAutoFit/>
+          </a:bodyPr>
+          <a:lstStyle/>
+          <a:p>
+            <a:pPr algn="l">
+              <a:lnSpc>
+                <a:spcPct val="100000"/>
+              </a:lnSpc>
+              <a:spcAft>
+                <a:spcPts val="600"/>
+              </a:spcAft>
+            </a:pPr>
+            <a:r>
+              <a:rPr sz="1450" b="1" i="0">
+                <a:solidFill>
+                  <a:srgbClr val="012169"/>
+                </a:solidFill>
+                <a:latin typeface="Roboto"/>
+              </a:rPr>
+              <a:t>Run a pilot for you</a:t>
+            </a:r>
+          </a:p>
+        </p:txBody>
+      </p:sp>
+      <p:sp>
+        <p:nvSpPr>
+          <p:cNvPr id="24" name="TextBox 23"/>
+          <p:cNvSpPr txBox="1"/>
+          <p:nvPr/>
+        </p:nvSpPr>
+        <p:spPr>
+          <a:xfrm>
+            <a:off x="2834640" y="3986784"/>
+            <a:ext cx="8595360" cy="411480"/>
+          </a:xfrm>
+          <a:prstGeom prst="rect">
+            <a:avLst/>
+          </a:prstGeom>
+          <a:noFill/>
+        </p:spPr>
+        <p:txBody>
+          <a:bodyPr wrap="square" anchor="t">
+            <a:spAutoFit/>
+          </a:bodyPr>
+          <a:lstStyle/>
+          <a:p>
+            <a:pPr algn="l">
+              <a:lnSpc>
+                <a:spcPct val="100000"/>
+              </a:lnSpc>
+              <a:spcAft>
+                <a:spcPts val="600"/>
+              </a:spcAft>
+            </a:pPr>
+            <a:r>
+              <a:rPr sz="1150" b="0" i="0">
+                <a:solidFill>
+                  <a:srgbClr val="1C2430"/>
+                </a:solidFill>
+                <a:latin typeface="Roboto"/>
+              </a:rPr>
+              <a:t>Devin works one real use case; your engineers review; we measure</a:t>
+            </a:r>
+          </a:p>
+        </p:txBody>
+      </p:sp>
+      <p:sp>
+        <p:nvSpPr>
+          <p:cNvPr id="25" name="Rounded Rectangle 24"/>
+          <p:cNvSpPr/>
+          <p:nvPr/>
+        </p:nvSpPr>
+        <p:spPr>
+          <a:xfrm>
+            <a:off x="502920" y="4553712"/>
+            <a:ext cx="11201400" cy="932688"/>
+          </a:xfrm>
+          <a:prstGeom prst="roundRect">
+            <a:avLst>
+              <a:gd name="adj" fmla="val 10000"/>
+            </a:avLst>
+          </a:prstGeom>
+          <a:solidFill>
+            <a:srgbClr val="F4F6F9"/>
+          </a:solidFill>
+          <a:ln>
+            <a:noFill/>
+          </a:ln>
+          <a:effectLst/>
+        </p:spPr>
+        <p:style>
+          <a:lnRef idx="1">
+            <a:schemeClr val="accent1"/>
+          </a:lnRef>
+          <a:fillRef idx="3">
+            <a:schemeClr val="accent1"/>
+          </a:fillRef>
+          <a:effectRef idx="2">
+            <a:schemeClr val="accent1"/>
+          </a:effectRef>
+          <a:fontRef idx="minor">
+            <a:schemeClr val="lt1"/>
+          </a:fontRef>
+        </p:style>
+        <p:txBody>
+          <a:bodyPr rtlCol="0" anchor="ctr"/>
+          <a:lstStyle/>
+          <a:p>
+            <a:pPr algn="ctr"/>
+          </a:p>
+        </p:txBody>
+      </p:sp>
+      <p:sp>
+        <p:nvSpPr>
+          <p:cNvPr id="26" name="Oval 25"/>
+          <p:cNvSpPr/>
+          <p:nvPr/>
+        </p:nvSpPr>
+        <p:spPr>
+          <a:xfrm>
+            <a:off x="658368" y="4754880"/>
+            <a:ext cx="530352" cy="530352"/>
+          </a:xfrm>
+          <a:prstGeom prst="ellipse">
+            <a:avLst/>
+          </a:prstGeom>
+          <a:solidFill>
+            <a:srgbClr val="E31837"/>
+          </a:solidFill>
+          <a:ln>
+            <a:noFill/>
+          </a:ln>
+          <a:effectLst/>
+        </p:spPr>
+        <p:style>
+          <a:lnRef idx="1">
+            <a:schemeClr val="accent1"/>
+          </a:lnRef>
+          <a:fillRef idx="3">
+            <a:schemeClr val="accent1"/>
+          </a:fillRef>
+          <a:effectRef idx="2">
+            <a:schemeClr val="accent1"/>
+          </a:effectRef>
+          <a:fontRef idx="minor">
+            <a:schemeClr val="lt1"/>
+          </a:fontRef>
+        </p:style>
+        <p:txBody>
+          <a:bodyPr rtlCol="0" anchor="ctr"/>
+          <a:lstStyle/>
+          <a:p>
+            <a:pPr algn="ctr"/>
+          </a:p>
+        </p:txBody>
+      </p:sp>
+      <p:sp>
+        <p:nvSpPr>
+          <p:cNvPr id="27" name="TextBox 26"/>
+          <p:cNvSpPr txBox="1"/>
+          <p:nvPr/>
+        </p:nvSpPr>
+        <p:spPr>
+          <a:xfrm>
+            <a:off x="658368" y="4828032"/>
+            <a:ext cx="530352" cy="402336"/>
+          </a:xfrm>
+          <a:prstGeom prst="rect">
+            <a:avLst/>
+          </a:prstGeom>
+          <a:noFill/>
+        </p:spPr>
+        <p:txBody>
+          <a:bodyPr wrap="square" anchor="t">
+            <a:spAutoFit/>
+          </a:bodyPr>
+          <a:lstStyle/>
+          <a:p>
+            <a:pPr algn="ctr">
+              <a:lnSpc>
+                <a:spcPct val="100000"/>
+              </a:lnSpc>
+              <a:spcAft>
+                <a:spcPts val="600"/>
+              </a:spcAft>
+            </a:pPr>
+            <a:r>
+              <a:rPr sz="1700" b="1" i="0">
+                <a:solidFill>
+                  <a:srgbClr val="FFFFFF"/>
+                </a:solidFill>
+                <a:latin typeface="Roboto"/>
+              </a:rPr>
+              <a:t>4</a:t>
+            </a:r>
+          </a:p>
+        </p:txBody>
+      </p:sp>
+      <p:sp>
+        <p:nvSpPr>
+          <p:cNvPr id="28" name="TextBox 27"/>
+          <p:cNvSpPr txBox="1"/>
+          <p:nvPr/>
+        </p:nvSpPr>
+        <p:spPr>
+          <a:xfrm>
+            <a:off x="1417320" y="4663440"/>
+            <a:ext cx="1417320" cy="685800"/>
+          </a:xfrm>
+          <a:prstGeom prst="rect">
+            <a:avLst/>
+          </a:prstGeom>
+          <a:noFill/>
+        </p:spPr>
+        <p:txBody>
+          <a:bodyPr wrap="square" anchor="t">
+            <a:spAutoFit/>
+          </a:bodyPr>
+          <a:lstStyle/>
+          <a:p>
+            <a:pPr algn="l">
+              <a:lnSpc>
+                <a:spcPct val="100000"/>
+              </a:lnSpc>
+              <a:spcAft>
+                <a:spcPts val="600"/>
+              </a:spcAft>
+            </a:pPr>
+            <a:r>
+              <a:rPr sz="1150" b="1" i="0">
+                <a:solidFill>
+                  <a:srgbClr val="E31837"/>
+                </a:solidFill>
+                <a:latin typeface="Roboto"/>
+              </a:rPr>
+              <a:t>Week 4</a:t>
+            </a:r>
+          </a:p>
+        </p:txBody>
+      </p:sp>
+      <p:sp>
+        <p:nvSpPr>
+          <p:cNvPr id="29" name="TextBox 28"/>
+          <p:cNvSpPr txBox="1"/>
+          <p:nvPr/>
+        </p:nvSpPr>
+        <p:spPr>
+          <a:xfrm>
+            <a:off x="2834640" y="4663440"/>
+            <a:ext cx="8595360" cy="365760"/>
+          </a:xfrm>
+          <a:prstGeom prst="rect">
+            <a:avLst/>
+          </a:prstGeom>
+          <a:noFill/>
+        </p:spPr>
+        <p:txBody>
+          <a:bodyPr wrap="square" anchor="t">
+            <a:spAutoFit/>
+          </a:bodyPr>
+          <a:lstStyle/>
+          <a:p>
+            <a:pPr algn="l">
+              <a:lnSpc>
+                <a:spcPct val="100000"/>
+              </a:lnSpc>
+              <a:spcAft>
+                <a:spcPts val="600"/>
+              </a:spcAft>
+            </a:pPr>
+            <a:r>
+              <a:rPr sz="1450" b="1" i="0">
+                <a:solidFill>
+                  <a:srgbClr val="012169"/>
+                </a:solidFill>
+                <a:latin typeface="Roboto"/>
+              </a:rPr>
+              <a:t>Go / no-go readout</a:t>
+            </a:r>
+          </a:p>
+        </p:txBody>
+      </p:sp>
+      <p:sp>
+        <p:nvSpPr>
+          <p:cNvPr id="30" name="TextBox 29"/>
+          <p:cNvSpPr txBox="1"/>
+          <p:nvPr/>
+        </p:nvSpPr>
+        <p:spPr>
+          <a:xfrm>
+            <a:off x="2834640" y="5010912"/>
+            <a:ext cx="8595360" cy="411480"/>
+          </a:xfrm>
+          <a:prstGeom prst="rect">
+            <a:avLst/>
+          </a:prstGeom>
+          <a:noFill/>
+        </p:spPr>
+        <p:txBody>
+          <a:bodyPr wrap="square" anchor="t">
+            <a:spAutoFit/>
+          </a:bodyPr>
+          <a:lstStyle/>
+          <a:p>
+            <a:pPr algn="l">
+              <a:lnSpc>
+                <a:spcPct val="100000"/>
+              </a:lnSpc>
+              <a:spcAft>
+                <a:spcPts val="600"/>
+              </a:spcAft>
+            </a:pPr>
+            <a:r>
+              <a:rPr sz="1150" b="0" i="0">
+                <a:solidFill>
+                  <a:srgbClr val="1C2430"/>
+                </a:solidFill>
+                <a:latin typeface="Roboto"/>
+              </a:rPr>
+              <a:t>Results in front of this room — then scale to the other two</a:t>
+            </a:r>
+          </a:p>
+        </p:txBody>
+      </p:sp>
+      <p:sp>
+        <p:nvSpPr>
+          <p:cNvPr id="31" name="TextBox 30"/>
+          <p:cNvSpPr txBox="1"/>
+          <p:nvPr/>
+        </p:nvSpPr>
+        <p:spPr>
+          <a:xfrm>
+            <a:off x="502920" y="5715000"/>
+            <a:ext cx="11201400" cy="548640"/>
+          </a:xfrm>
+          <a:prstGeom prst="rect">
+            <a:avLst/>
+          </a:prstGeom>
+          <a:noFill/>
+        </p:spPr>
+        <p:txBody>
+          <a:bodyPr wrap="square" anchor="t">
+            <a:spAutoFit/>
+          </a:bodyPr>
+          <a:lstStyle/>
+          <a:p>
+            <a:pPr algn="l">
+              <a:lnSpc>
+                <a:spcPct val="100000"/>
+              </a:lnSpc>
+              <a:spcAft>
+                <a:spcPts val="600"/>
+              </a:spcAft>
+            </a:pPr>
+            <a:r>
+              <a:rPr sz="1400" b="1" i="0">
+                <a:solidFill>
+                  <a:srgbClr val="E31837"/>
+                </a:solidFill>
+                <a:latin typeface="Roboto"/>
+              </a:rPr>
+              <a:t>The ask:  </a:t>
+            </a:r>
+            <a:r>
+              <a:rPr sz="1400" b="1" i="0">
+                <a:solidFill>
+                  <a:srgbClr val="012169"/>
+                </a:solidFill>
+                <a:latin typeface="Roboto"/>
+              </a:rPr>
+              <a:t>three use cases, one pilot, four weeks, your success criteria.</a:t>
+            </a:r>
+          </a:p>
+        </p:txBody>
+      </p:sp>
+      <p:sp>
+        <p:nvSpPr>
+          <p:cNvPr id="32" name="TextBox 31"/>
+          <p:cNvSpPr txBox="1"/>
+          <p:nvPr/>
+        </p:nvSpPr>
+        <p:spPr>
+          <a:xfrm>
+            <a:off x="502920" y="6473952"/>
+            <a:ext cx="7315200" cy="292608"/>
+          </a:xfrm>
+          <a:prstGeom prst="rect">
+            <a:avLst/>
+          </a:prstGeom>
+          <a:noFill/>
+        </p:spPr>
+        <p:txBody>
+          <a:bodyPr wrap="square" anchor="t">
+            <a:spAutoFit/>
+          </a:bodyPr>
+          <a:lstStyle/>
+          <a:p>
+            <a:pPr algn="l">
+              <a:lnSpc>
+                <a:spcPct val="100000"/>
+              </a:lnSpc>
+              <a:spcAft>
+                <a:spcPts val="600"/>
+              </a:spcAft>
+            </a:pPr>
+            <a:r>
+              <a:rPr sz="900" b="0" i="0">
+                <a:solidFill>
+                  <a:srgbClr val="5A6472"/>
+                </a:solidFill>
+                <a:latin typeface="Roboto"/>
+              </a:rPr>
+              <a:t>Bank of America  ×  Cognition</a:t>
             </a:r>
           </a:p>
         </p:txBody>
@@ -5225,7 +6484,7 @@
         <p:spPr>
           <a:xfrm>
             <a:off x="0" y="0"/>
-            <a:ext cx="12191695" cy="1170432"/>
+            <a:ext cx="12191695" cy="6858000"/>
           </a:xfrm>
           <a:prstGeom prst="rect">
             <a:avLst/>
@@ -5268,8 +6527,8 @@
         </p:nvSpPr>
         <p:spPr>
           <a:xfrm>
-            <a:off x="0" y="1170432"/>
-            <a:ext cx="12191695" cy="50292"/>
+            <a:off x="0" y="3566160"/>
+            <a:ext cx="12191695" cy="54864"/>
           </a:xfrm>
           <a:prstGeom prst="rect">
             <a:avLst/>
@@ -5312,8 +6571,8 @@
         </p:nvSpPr>
         <p:spPr>
           <a:xfrm>
-            <a:off x="502920" y="146304"/>
-            <a:ext cx="9601200" cy="320040"/>
+            <a:off x="822960" y="2651760"/>
+            <a:ext cx="10515600" cy="822960"/>
           </a:xfrm>
           <a:prstGeom prst="rect">
             <a:avLst/>
@@ -5335,13 +6594,13 @@
               </a:spcAft>
             </a:pPr>
             <a:r>
-              <a:rPr sz="1100" b="1" i="0">
-                <a:solidFill>
-                  <a:srgbClr val="9FB4E0"/>
-                </a:solidFill>
-                <a:latin typeface="Roboto"/>
-              </a:rPr>
-              <a:t>APPENDIX A</a:t>
+              <a:rPr sz="3400" b="1" i="0">
+                <a:solidFill>
+                  <a:srgbClr val="FFFFFF"/>
+                </a:solidFill>
+                <a:latin typeface="Roboto"/>
+              </a:rPr>
+              <a:t>Appendix — Prep Material (not presented)</a:t>
             </a:r>
           </a:p>
         </p:txBody>
@@ -5354,50 +6613,8 @@
         </p:nvSpPr>
         <p:spPr>
           <a:xfrm>
-            <a:off x="502920" y="384048"/>
-            <a:ext cx="10424160" cy="731520"/>
-          </a:xfrm>
-          <a:prstGeom prst="rect">
-            <a:avLst/>
-          </a:prstGeom>
-          <a:noFill/>
-        </p:spPr>
-        <p:txBody>
-          <a:bodyPr wrap="square" anchor="ctr">
-            <a:spAutoFit/>
-          </a:bodyPr>
-          <a:lstStyle/>
-          <a:p>
-            <a:pPr algn="l">
-              <a:lnSpc>
-                <a:spcPct val="100000"/>
-              </a:lnSpc>
-              <a:spcAft>
-                <a:spcPts val="600"/>
-              </a:spcAft>
-            </a:pPr>
-            <a:r>
-              <a:rPr sz="2200" b="1" i="0">
-                <a:solidFill>
-                  <a:srgbClr val="FFFFFF"/>
-                </a:solidFill>
-                <a:latin typeface="Roboto"/>
-              </a:rPr>
-              <a:t>If the room pushes back: objections &amp; responses</a:t>
-            </a:r>
-          </a:p>
-        </p:txBody>
-      </p:sp>
-      <p:sp>
-        <p:nvSpPr>
-          <p:cNvPr id="6" name="TextBox 5"/>
-          <p:cNvSpPr txBox="1"/>
-          <p:nvPr/>
-        </p:nvSpPr>
-        <p:spPr>
-          <a:xfrm>
-            <a:off x="11247120" y="384048"/>
-            <a:ext cx="640080" cy="731520"/>
+            <a:off x="822960" y="3794760"/>
+            <a:ext cx="10058400" cy="914400"/>
           </a:xfrm>
           <a:prstGeom prst="rect">
             <a:avLst/>
@@ -5410,7 +6627,7 @@
           </a:bodyPr>
           <a:lstStyle/>
           <a:p>
-            <a:pPr algn="r">
+            <a:pPr algn="l">
               <a:lnSpc>
                 <a:spcPct val="100000"/>
               </a:lnSpc>
@@ -5419,835 +6636,32 @@
               </a:spcAft>
             </a:pPr>
             <a:r>
-              <a:rPr sz="1400" b="0" i="0">
-                <a:solidFill>
-                  <a:srgbClr val="9FB4E0"/>
-                </a:solidFill>
-                <a:latin typeface="Roboto"/>
-              </a:rPr>
-              <a:t>A</a:t>
-            </a:r>
-          </a:p>
-        </p:txBody>
-      </p:sp>
-      <p:sp>
-        <p:nvSpPr>
-          <p:cNvPr id="7" name="Rounded Rectangle 6"/>
-          <p:cNvSpPr/>
-          <p:nvPr/>
-        </p:nvSpPr>
-        <p:spPr>
-          <a:xfrm>
-            <a:off x="502920" y="1417320"/>
-            <a:ext cx="11201400" cy="749808"/>
-          </a:xfrm>
-          <a:prstGeom prst="roundRect">
-            <a:avLst>
-              <a:gd name="adj" fmla="val 10000"/>
-            </a:avLst>
-          </a:prstGeom>
-          <a:solidFill>
-            <a:srgbClr val="F4F6F9"/>
-          </a:solidFill>
-          <a:ln>
-            <a:noFill/>
-          </a:ln>
-          <a:effectLst/>
-        </p:spPr>
-        <p:style>
-          <a:lnRef idx="1">
-            <a:schemeClr val="accent1"/>
-          </a:lnRef>
-          <a:fillRef idx="3">
-            <a:schemeClr val="accent1"/>
-          </a:fillRef>
-          <a:effectRef idx="2">
-            <a:schemeClr val="accent1"/>
-          </a:effectRef>
-          <a:fontRef idx="minor">
-            <a:schemeClr val="lt1"/>
-          </a:fontRef>
-        </p:style>
-        <p:txBody>
-          <a:bodyPr rtlCol="0" anchor="ctr"/>
-          <a:lstStyle/>
-          <a:p>
-            <a:pPr algn="ctr"/>
-          </a:p>
-        </p:txBody>
-      </p:sp>
-      <p:sp>
-        <p:nvSpPr>
-          <p:cNvPr id="8" name="TextBox 7"/>
-          <p:cNvSpPr txBox="1"/>
-          <p:nvPr/>
-        </p:nvSpPr>
-        <p:spPr>
-          <a:xfrm>
-            <a:off x="731520" y="1472184"/>
-            <a:ext cx="4160520" cy="658368"/>
-          </a:xfrm>
-          <a:prstGeom prst="rect">
-            <a:avLst/>
-          </a:prstGeom>
-          <a:noFill/>
-        </p:spPr>
-        <p:txBody>
-          <a:bodyPr wrap="square" anchor="t">
-            <a:spAutoFit/>
-          </a:bodyPr>
-          <a:lstStyle/>
+              <a:rPr sz="1600" b="0" i="0">
+                <a:solidFill>
+                  <a:srgbClr val="C9D4EC"/>
+                </a:solidFill>
+                <a:latin typeface="Roboto"/>
+              </a:rPr>
+              <a:t>A. Objection handling — if the room pushes back</a:t>
+            </a:r>
+          </a:p>
           <a:p>
             <a:pPr algn="l">
               <a:lnSpc>
-                <a:spcPct val="95000"/>
+                <a:spcPct val="100000"/>
               </a:lnSpc>
               <a:spcAft>
                 <a:spcPts val="600"/>
               </a:spcAft>
             </a:pPr>
             <a:r>
-              <a:rPr sz="1050" b="1" i="1">
-                <a:solidFill>
-                  <a:srgbClr val="012169"/>
-                </a:solidFill>
-                <a:latin typeface="Roboto"/>
-              </a:rPr>
-              <a:t>“AI writing code for a bank? Our regulators will never allow it.”</a:t>
-            </a:r>
-          </a:p>
-        </p:txBody>
-      </p:sp>
-      <p:sp>
-        <p:nvSpPr>
-          <p:cNvPr id="9" name="TextBox 8"/>
-          <p:cNvSpPr txBox="1"/>
-          <p:nvPr/>
-        </p:nvSpPr>
-        <p:spPr>
-          <a:xfrm>
-            <a:off x="5029200" y="1472184"/>
-            <a:ext cx="6537960" cy="658368"/>
-          </a:xfrm>
-          <a:prstGeom prst="rect">
-            <a:avLst/>
-          </a:prstGeom>
-          <a:noFill/>
-        </p:spPr>
-        <p:txBody>
-          <a:bodyPr wrap="square" anchor="t">
-            <a:spAutoFit/>
-          </a:bodyPr>
-          <a:lstStyle/>
-          <a:p>
-            <a:pPr algn="l">
-              <a:lnSpc>
-                <a:spcPct val="95000"/>
-              </a:lnSpc>
-              <a:spcAft>
-                <a:spcPts val="600"/>
-              </a:spcAft>
-            </a:pPr>
-            <a:r>
-              <a:rPr sz="1000" b="0" i="0">
-                <a:solidFill>
-                  <a:srgbClr val="1C2430"/>
-                </a:solidFill>
-                <a:latin typeface="Roboto"/>
-              </a:rPr>
-              <a:t>Devin changes who types, not who approves. Every change goes through your existing review, CI, and release gates — the same controls you'd apply to a contractor. And it leaves a better audit trail than a human.</a:t>
-            </a:r>
-          </a:p>
-        </p:txBody>
-      </p:sp>
-      <p:sp>
-        <p:nvSpPr>
-          <p:cNvPr id="10" name="Rounded Rectangle 9"/>
-          <p:cNvSpPr/>
-          <p:nvPr/>
-        </p:nvSpPr>
-        <p:spPr>
-          <a:xfrm>
-            <a:off x="502920" y="2240280"/>
-            <a:ext cx="11201400" cy="749808"/>
-          </a:xfrm>
-          <a:prstGeom prst="roundRect">
-            <a:avLst>
-              <a:gd name="adj" fmla="val 10000"/>
-            </a:avLst>
-          </a:prstGeom>
-          <a:solidFill>
-            <a:srgbClr val="F4F6F9"/>
-          </a:solidFill>
-          <a:ln>
-            <a:noFill/>
-          </a:ln>
-          <a:effectLst/>
-        </p:spPr>
-        <p:style>
-          <a:lnRef idx="1">
-            <a:schemeClr val="accent1"/>
-          </a:lnRef>
-          <a:fillRef idx="3">
-            <a:schemeClr val="accent1"/>
-          </a:fillRef>
-          <a:effectRef idx="2">
-            <a:schemeClr val="accent1"/>
-          </a:effectRef>
-          <a:fontRef idx="minor">
-            <a:schemeClr val="lt1"/>
-          </a:fontRef>
-        </p:style>
-        <p:txBody>
-          <a:bodyPr rtlCol="0" anchor="ctr"/>
-          <a:lstStyle/>
-          <a:p>
-            <a:pPr algn="ctr"/>
-          </a:p>
-        </p:txBody>
-      </p:sp>
-      <p:sp>
-        <p:nvSpPr>
-          <p:cNvPr id="11" name="TextBox 10"/>
-          <p:cNvSpPr txBox="1"/>
-          <p:nvPr/>
-        </p:nvSpPr>
-        <p:spPr>
-          <a:xfrm>
-            <a:off x="731520" y="2295144"/>
-            <a:ext cx="4160520" cy="658368"/>
-          </a:xfrm>
-          <a:prstGeom prst="rect">
-            <a:avLst/>
-          </a:prstGeom>
-          <a:noFill/>
-        </p:spPr>
-        <p:txBody>
-          <a:bodyPr wrap="square" anchor="t">
-            <a:spAutoFit/>
-          </a:bodyPr>
-          <a:lstStyle/>
-          <a:p>
-            <a:pPr algn="l">
-              <a:lnSpc>
-                <a:spcPct val="95000"/>
-              </a:lnSpc>
-              <a:spcAft>
-                <a:spcPts val="600"/>
-              </a:spcAft>
-            </a:pPr>
-            <a:r>
-              <a:rPr sz="1050" b="1" i="1">
-                <a:solidFill>
-                  <a:srgbClr val="012169"/>
-                </a:solidFill>
-                <a:latin typeface="Roboto"/>
-              </a:rPr>
-              <a:t>“We already have Copilot / internal AI tools.”</a:t>
-            </a:r>
-          </a:p>
-        </p:txBody>
-      </p:sp>
-      <p:sp>
-        <p:nvSpPr>
-          <p:cNvPr id="12" name="TextBox 11"/>
-          <p:cNvSpPr txBox="1"/>
-          <p:nvPr/>
-        </p:nvSpPr>
-        <p:spPr>
-          <a:xfrm>
-            <a:off x="5029200" y="2295144"/>
-            <a:ext cx="6537960" cy="658368"/>
-          </a:xfrm>
-          <a:prstGeom prst="rect">
-            <a:avLst/>
-          </a:prstGeom>
-          <a:noFill/>
-        </p:spPr>
-        <p:txBody>
-          <a:bodyPr wrap="square" anchor="t">
-            <a:spAutoFit/>
-          </a:bodyPr>
-          <a:lstStyle/>
-          <a:p>
-            <a:pPr algn="l">
-              <a:lnSpc>
-                <a:spcPct val="95000"/>
-              </a:lnSpc>
-              <a:spcAft>
-                <a:spcPts val="600"/>
-              </a:spcAft>
-            </a:pPr>
-            <a:r>
-              <a:rPr sz="1000" b="0" i="0">
-                <a:solidFill>
-                  <a:srgbClr val="1C2430"/>
-                </a:solidFill>
-                <a:latin typeface="Roboto"/>
-              </a:rPr>
-              <a:t>Complementary, not competing. Copilot accelerates an engineer who's already assigned. Devin absorbs whole task categories nobody wants assigned — migrations, upgrades, test debt.</a:t>
-            </a:r>
-          </a:p>
-        </p:txBody>
-      </p:sp>
-      <p:sp>
-        <p:nvSpPr>
-          <p:cNvPr id="13" name="Rounded Rectangle 12"/>
-          <p:cNvSpPr/>
-          <p:nvPr/>
-        </p:nvSpPr>
-        <p:spPr>
-          <a:xfrm>
-            <a:off x="502920" y="3063240"/>
-            <a:ext cx="11201400" cy="749808"/>
-          </a:xfrm>
-          <a:prstGeom prst="roundRect">
-            <a:avLst>
-              <a:gd name="adj" fmla="val 10000"/>
-            </a:avLst>
-          </a:prstGeom>
-          <a:solidFill>
-            <a:srgbClr val="F4F6F9"/>
-          </a:solidFill>
-          <a:ln>
-            <a:noFill/>
-          </a:ln>
-          <a:effectLst/>
-        </p:spPr>
-        <p:style>
-          <a:lnRef idx="1">
-            <a:schemeClr val="accent1"/>
-          </a:lnRef>
-          <a:fillRef idx="3">
-            <a:schemeClr val="accent1"/>
-          </a:fillRef>
-          <a:effectRef idx="2">
-            <a:schemeClr val="accent1"/>
-          </a:effectRef>
-          <a:fontRef idx="minor">
-            <a:schemeClr val="lt1"/>
-          </a:fontRef>
-        </p:style>
-        <p:txBody>
-          <a:bodyPr rtlCol="0" anchor="ctr"/>
-          <a:lstStyle/>
-          <a:p>
-            <a:pPr algn="ctr"/>
-          </a:p>
-        </p:txBody>
-      </p:sp>
-      <p:sp>
-        <p:nvSpPr>
-          <p:cNvPr id="14" name="TextBox 13"/>
-          <p:cNvSpPr txBox="1"/>
-          <p:nvPr/>
-        </p:nvSpPr>
-        <p:spPr>
-          <a:xfrm>
-            <a:off x="731520" y="3118104"/>
-            <a:ext cx="4160520" cy="658368"/>
-          </a:xfrm>
-          <a:prstGeom prst="rect">
-            <a:avLst/>
-          </a:prstGeom>
-          <a:noFill/>
-        </p:spPr>
-        <p:txBody>
-          <a:bodyPr wrap="square" anchor="t">
-            <a:spAutoFit/>
-          </a:bodyPr>
-          <a:lstStyle/>
-          <a:p>
-            <a:pPr algn="l">
-              <a:lnSpc>
-                <a:spcPct val="95000"/>
-              </a:lnSpc>
-              <a:spcAft>
-                <a:spcPts val="600"/>
-              </a:spcAft>
-            </a:pPr>
-            <a:r>
-              <a:rPr sz="1050" b="1" i="1">
-                <a:solidFill>
-                  <a:srgbClr val="012169"/>
-                </a:solidFill>
-                <a:latin typeface="Roboto"/>
-              </a:rPr>
-              <a:t>“Our codebase is far bigger and messier than any demo.”</a:t>
-            </a:r>
-          </a:p>
-        </p:txBody>
-      </p:sp>
-      <p:sp>
-        <p:nvSpPr>
-          <p:cNvPr id="15" name="TextBox 14"/>
-          <p:cNvSpPr txBox="1"/>
-          <p:nvPr/>
-        </p:nvSpPr>
-        <p:spPr>
-          <a:xfrm>
-            <a:off x="5029200" y="3118104"/>
-            <a:ext cx="6537960" cy="658368"/>
-          </a:xfrm>
-          <a:prstGeom prst="rect">
-            <a:avLst/>
-          </a:prstGeom>
-          <a:noFill/>
-        </p:spPr>
-        <p:txBody>
-          <a:bodyPr wrap="square" anchor="t">
-            <a:spAutoFit/>
-          </a:bodyPr>
-          <a:lstStyle/>
-          <a:p>
-            <a:pPr algn="l">
-              <a:lnSpc>
-                <a:spcPct val="95000"/>
-              </a:lnSpc>
-              <a:spcAft>
-                <a:spcPts val="600"/>
-              </a:spcAft>
-            </a:pPr>
-            <a:r>
-              <a:rPr sz="1000" b="0" i="0">
-                <a:solidFill>
-                  <a:srgbClr val="1C2430"/>
-                </a:solidFill>
-                <a:latin typeface="Roboto"/>
-              </a:rPr>
-              <a:t>Agreed — that's why the pilot is on your code, your criteria, in four weeks. Scale actually favors Devin: it parallelizes across repos; humans don't.</a:t>
-            </a:r>
-          </a:p>
-        </p:txBody>
-      </p:sp>
-      <p:sp>
-        <p:nvSpPr>
-          <p:cNvPr id="16" name="Rounded Rectangle 15"/>
-          <p:cNvSpPr/>
-          <p:nvPr/>
-        </p:nvSpPr>
-        <p:spPr>
-          <a:xfrm>
-            <a:off x="502920" y="3886200"/>
-            <a:ext cx="11201400" cy="749808"/>
-          </a:xfrm>
-          <a:prstGeom prst="roundRect">
-            <a:avLst>
-              <a:gd name="adj" fmla="val 10000"/>
-            </a:avLst>
-          </a:prstGeom>
-          <a:solidFill>
-            <a:srgbClr val="F4F6F9"/>
-          </a:solidFill>
-          <a:ln>
-            <a:noFill/>
-          </a:ln>
-          <a:effectLst/>
-        </p:spPr>
-        <p:style>
-          <a:lnRef idx="1">
-            <a:schemeClr val="accent1"/>
-          </a:lnRef>
-          <a:fillRef idx="3">
-            <a:schemeClr val="accent1"/>
-          </a:fillRef>
-          <a:effectRef idx="2">
-            <a:schemeClr val="accent1"/>
-          </a:effectRef>
-          <a:fontRef idx="minor">
-            <a:schemeClr val="lt1"/>
-          </a:fontRef>
-        </p:style>
-        <p:txBody>
-          <a:bodyPr rtlCol="0" anchor="ctr"/>
-          <a:lstStyle/>
-          <a:p>
-            <a:pPr algn="ctr"/>
-          </a:p>
-        </p:txBody>
-      </p:sp>
-      <p:sp>
-        <p:nvSpPr>
-          <p:cNvPr id="17" name="TextBox 16"/>
-          <p:cNvSpPr txBox="1"/>
-          <p:nvPr/>
-        </p:nvSpPr>
-        <p:spPr>
-          <a:xfrm>
-            <a:off x="731520" y="3941063"/>
-            <a:ext cx="4160520" cy="658368"/>
-          </a:xfrm>
-          <a:prstGeom prst="rect">
-            <a:avLst/>
-          </a:prstGeom>
-          <a:noFill/>
-        </p:spPr>
-        <p:txBody>
-          <a:bodyPr wrap="square" anchor="t">
-            <a:spAutoFit/>
-          </a:bodyPr>
-          <a:lstStyle/>
-          <a:p>
-            <a:pPr algn="l">
-              <a:lnSpc>
-                <a:spcPct val="95000"/>
-              </a:lnSpc>
-              <a:spcAft>
-                <a:spcPts val="600"/>
-              </a:spcAft>
-            </a:pPr>
-            <a:r>
-              <a:rPr sz="1050" b="1" i="1">
-                <a:solidFill>
-                  <a:srgbClr val="012169"/>
-                </a:solidFill>
-                <a:latin typeface="Roboto"/>
-              </a:rPr>
-              <a:t>“What about hallucinations / wrong code?”</a:t>
-            </a:r>
-          </a:p>
-        </p:txBody>
-      </p:sp>
-      <p:sp>
-        <p:nvSpPr>
-          <p:cNvPr id="18" name="TextBox 17"/>
-          <p:cNvSpPr txBox="1"/>
-          <p:nvPr/>
-        </p:nvSpPr>
-        <p:spPr>
-          <a:xfrm>
-            <a:off x="5029200" y="3941063"/>
-            <a:ext cx="6537960" cy="658368"/>
-          </a:xfrm>
-          <a:prstGeom prst="rect">
-            <a:avLst/>
-          </a:prstGeom>
-          <a:noFill/>
-        </p:spPr>
-        <p:txBody>
-          <a:bodyPr wrap="square" anchor="t">
-            <a:spAutoFit/>
-          </a:bodyPr>
-          <a:lstStyle/>
-          <a:p>
-            <a:pPr algn="l">
-              <a:lnSpc>
-                <a:spcPct val="95000"/>
-              </a:lnSpc>
-              <a:spcAft>
-                <a:spcPts val="600"/>
-              </a:spcAft>
-            </a:pPr>
-            <a:r>
-              <a:rPr sz="1000" b="0" i="0">
-                <a:solidFill>
-                  <a:srgbClr val="1C2430"/>
-                </a:solidFill>
-                <a:latin typeface="Roboto"/>
-              </a:rPr>
-              <a:t>Devin executes what it writes — builds, tests, and iterates until green before opening a PR. Wrong code fails your test suite and never reaches a human's desk, let alone production.</a:t>
-            </a:r>
-          </a:p>
-        </p:txBody>
-      </p:sp>
-      <p:sp>
-        <p:nvSpPr>
-          <p:cNvPr id="19" name="Rounded Rectangle 18"/>
-          <p:cNvSpPr/>
-          <p:nvPr/>
-        </p:nvSpPr>
-        <p:spPr>
-          <a:xfrm>
-            <a:off x="502920" y="4709160"/>
-            <a:ext cx="11201400" cy="749808"/>
-          </a:xfrm>
-          <a:prstGeom prst="roundRect">
-            <a:avLst>
-              <a:gd name="adj" fmla="val 10000"/>
-            </a:avLst>
-          </a:prstGeom>
-          <a:solidFill>
-            <a:srgbClr val="F4F6F9"/>
-          </a:solidFill>
-          <a:ln>
-            <a:noFill/>
-          </a:ln>
-          <a:effectLst/>
-        </p:spPr>
-        <p:style>
-          <a:lnRef idx="1">
-            <a:schemeClr val="accent1"/>
-          </a:lnRef>
-          <a:fillRef idx="3">
-            <a:schemeClr val="accent1"/>
-          </a:fillRef>
-          <a:effectRef idx="2">
-            <a:schemeClr val="accent1"/>
-          </a:effectRef>
-          <a:fontRef idx="minor">
-            <a:schemeClr val="lt1"/>
-          </a:fontRef>
-        </p:style>
-        <p:txBody>
-          <a:bodyPr rtlCol="0" anchor="ctr"/>
-          <a:lstStyle/>
-          <a:p>
-            <a:pPr algn="ctr"/>
-          </a:p>
-        </p:txBody>
-      </p:sp>
-      <p:sp>
-        <p:nvSpPr>
-          <p:cNvPr id="20" name="TextBox 19"/>
-          <p:cNvSpPr txBox="1"/>
-          <p:nvPr/>
-        </p:nvSpPr>
-        <p:spPr>
-          <a:xfrm>
-            <a:off x="731520" y="4764024"/>
-            <a:ext cx="4160520" cy="658368"/>
-          </a:xfrm>
-          <a:prstGeom prst="rect">
-            <a:avLst/>
-          </a:prstGeom>
-          <a:noFill/>
-        </p:spPr>
-        <p:txBody>
-          <a:bodyPr wrap="square" anchor="t">
-            <a:spAutoFit/>
-          </a:bodyPr>
-          <a:lstStyle/>
-          <a:p>
-            <a:pPr algn="l">
-              <a:lnSpc>
-                <a:spcPct val="95000"/>
-              </a:lnSpc>
-              <a:spcAft>
-                <a:spcPts val="600"/>
-              </a:spcAft>
-            </a:pPr>
-            <a:r>
-              <a:rPr sz="1050" b="1" i="1">
-                <a:solidFill>
-                  <a:srgbClr val="012169"/>
-                </a:solidFill>
-                <a:latin typeface="Roboto"/>
-              </a:rPr>
-              <a:t>“Is this going to replace my engineers?”</a:t>
-            </a:r>
-          </a:p>
-        </p:txBody>
-      </p:sp>
-      <p:sp>
-        <p:nvSpPr>
-          <p:cNvPr id="21" name="TextBox 20"/>
-          <p:cNvSpPr txBox="1"/>
-          <p:nvPr/>
-        </p:nvSpPr>
-        <p:spPr>
-          <a:xfrm>
-            <a:off x="5029200" y="4764024"/>
-            <a:ext cx="6537960" cy="658368"/>
-          </a:xfrm>
-          <a:prstGeom prst="rect">
-            <a:avLst/>
-          </a:prstGeom>
-          <a:noFill/>
-        </p:spPr>
-        <p:txBody>
-          <a:bodyPr wrap="square" anchor="t">
-            <a:spAutoFit/>
-          </a:bodyPr>
-          <a:lstStyle/>
-          <a:p>
-            <a:pPr algn="l">
-              <a:lnSpc>
-                <a:spcPct val="95000"/>
-              </a:lnSpc>
-              <a:spcAft>
-                <a:spcPts val="600"/>
-              </a:spcAft>
-            </a:pPr>
-            <a:r>
-              <a:rPr sz="1000" b="0" i="0">
-                <a:solidFill>
-                  <a:srgbClr val="1C2430"/>
-                </a:solidFill>
-                <a:latin typeface="Roboto"/>
-              </a:rPr>
-              <a:t>It replaces the work your engineers resent, not the engineers. The pitch to your team: nobody hand-migrates *ngFor loops anymore; everyone reviews, designs, and ships features.</a:t>
-            </a:r>
-          </a:p>
-        </p:txBody>
-      </p:sp>
-      <p:sp>
-        <p:nvSpPr>
-          <p:cNvPr id="22" name="Rounded Rectangle 21"/>
-          <p:cNvSpPr/>
-          <p:nvPr/>
-        </p:nvSpPr>
-        <p:spPr>
-          <a:xfrm>
-            <a:off x="502920" y="5532120"/>
-            <a:ext cx="11201400" cy="749808"/>
-          </a:xfrm>
-          <a:prstGeom prst="roundRect">
-            <a:avLst>
-              <a:gd name="adj" fmla="val 10000"/>
-            </a:avLst>
-          </a:prstGeom>
-          <a:solidFill>
-            <a:srgbClr val="F4F6F9"/>
-          </a:solidFill>
-          <a:ln>
-            <a:noFill/>
-          </a:ln>
-          <a:effectLst/>
-        </p:spPr>
-        <p:style>
-          <a:lnRef idx="1">
-            <a:schemeClr val="accent1"/>
-          </a:lnRef>
-          <a:fillRef idx="3">
-            <a:schemeClr val="accent1"/>
-          </a:fillRef>
-          <a:effectRef idx="2">
-            <a:schemeClr val="accent1"/>
-          </a:effectRef>
-          <a:fontRef idx="minor">
-            <a:schemeClr val="lt1"/>
-          </a:fontRef>
-        </p:style>
-        <p:txBody>
-          <a:bodyPr rtlCol="0" anchor="ctr"/>
-          <a:lstStyle/>
-          <a:p>
-            <a:pPr algn="ctr"/>
-          </a:p>
-        </p:txBody>
-      </p:sp>
-      <p:sp>
-        <p:nvSpPr>
-          <p:cNvPr id="23" name="TextBox 22"/>
-          <p:cNvSpPr txBox="1"/>
-          <p:nvPr/>
-        </p:nvSpPr>
-        <p:spPr>
-          <a:xfrm>
-            <a:off x="731520" y="5586984"/>
-            <a:ext cx="4160520" cy="658368"/>
-          </a:xfrm>
-          <a:prstGeom prst="rect">
-            <a:avLst/>
-          </a:prstGeom>
-          <a:noFill/>
-        </p:spPr>
-        <p:txBody>
-          <a:bodyPr wrap="square" anchor="t">
-            <a:spAutoFit/>
-          </a:bodyPr>
-          <a:lstStyle/>
-          <a:p>
-            <a:pPr algn="l">
-              <a:lnSpc>
-                <a:spcPct val="95000"/>
-              </a:lnSpc>
-              <a:spcAft>
-                <a:spcPts val="600"/>
-              </a:spcAft>
-            </a:pPr>
-            <a:r>
-              <a:rPr sz="1050" b="1" i="1">
-                <a:solidFill>
-                  <a:srgbClr val="012169"/>
-                </a:solidFill>
-                <a:latin typeface="Roboto"/>
-              </a:rPr>
-              <a:t>“Where does our code go? Data security?”</a:t>
-            </a:r>
-          </a:p>
-        </p:txBody>
-      </p:sp>
-      <p:sp>
-        <p:nvSpPr>
-          <p:cNvPr id="24" name="TextBox 23"/>
-          <p:cNvSpPr txBox="1"/>
-          <p:nvPr/>
-        </p:nvSpPr>
-        <p:spPr>
-          <a:xfrm>
-            <a:off x="5029200" y="5586984"/>
-            <a:ext cx="6537960" cy="658368"/>
-          </a:xfrm>
-          <a:prstGeom prst="rect">
-            <a:avLst/>
-          </a:prstGeom>
-          <a:noFill/>
-        </p:spPr>
-        <p:txBody>
-          <a:bodyPr wrap="square" anchor="t">
-            <a:spAutoFit/>
-          </a:bodyPr>
-          <a:lstStyle/>
-          <a:p>
-            <a:pPr algn="l">
-              <a:lnSpc>
-                <a:spcPct val="95000"/>
-              </a:lnSpc>
-              <a:spcAft>
-                <a:spcPts val="600"/>
-              </a:spcAft>
-            </a:pPr>
-            <a:r>
-              <a:rPr sz="1000" b="0" i="0">
-                <a:solidFill>
-                  <a:srgbClr val="1C2430"/>
-                </a:solidFill>
-                <a:latin typeface="Roboto"/>
-              </a:rPr>
-              <a:t>Answered properly in the week-0 security review — enterprise deployment and data-isolation options exist. Don't accept a hand-wave from me; bring your security team.</a:t>
-            </a:r>
-          </a:p>
-        </p:txBody>
-      </p:sp>
-      <p:sp>
-        <p:nvSpPr>
-          <p:cNvPr id="25" name="TextBox 24"/>
-          <p:cNvSpPr txBox="1"/>
-          <p:nvPr/>
-        </p:nvSpPr>
-        <p:spPr>
-          <a:xfrm>
-            <a:off x="502920" y="6473952"/>
-            <a:ext cx="7315200" cy="292608"/>
-          </a:xfrm>
-          <a:prstGeom prst="rect">
-            <a:avLst/>
-          </a:prstGeom>
-          <a:noFill/>
-        </p:spPr>
-        <p:txBody>
-          <a:bodyPr wrap="square" anchor="t">
-            <a:spAutoFit/>
-          </a:bodyPr>
-          <a:lstStyle/>
-          <a:p>
-            <a:pPr algn="l">
-              <a:lnSpc>
-                <a:spcPct val="100000"/>
-              </a:lnSpc>
-              <a:spcAft>
-                <a:spcPts val="600"/>
-              </a:spcAft>
-            </a:pPr>
-            <a:r>
-              <a:rPr sz="900" b="0" i="0">
-                <a:solidFill>
-                  <a:srgbClr val="5A6472"/>
-                </a:solidFill>
-                <a:latin typeface="Roboto"/>
-              </a:rPr>
-              <a:t>Bank of America  ×  Cognition</a:t>
+              <a:rPr sz="1600" b="0" i="0">
+                <a:solidFill>
+                  <a:srgbClr val="C9D4EC"/>
+                </a:solidFill>
+                <a:latin typeface="Roboto"/>
+              </a:rPr>
+              <a:t>B. Pre-meeting research checklist</a:t>
             </a:r>
           </a:p>
         </p:txBody>
@@ -6395,6 +6809,1060 @@
                 </a:solidFill>
                 <a:latin typeface="Roboto"/>
               </a:rPr>
+              <a:t>APPENDIX A</a:t>
+            </a:r>
+          </a:p>
+        </p:txBody>
+      </p:sp>
+      <p:sp>
+        <p:nvSpPr>
+          <p:cNvPr id="5" name="TextBox 4"/>
+          <p:cNvSpPr txBox="1"/>
+          <p:nvPr/>
+        </p:nvSpPr>
+        <p:spPr>
+          <a:xfrm>
+            <a:off x="502920" y="384048"/>
+            <a:ext cx="10424160" cy="731520"/>
+          </a:xfrm>
+          <a:prstGeom prst="rect">
+            <a:avLst/>
+          </a:prstGeom>
+          <a:noFill/>
+        </p:spPr>
+        <p:txBody>
+          <a:bodyPr wrap="square" anchor="ctr">
+            <a:spAutoFit/>
+          </a:bodyPr>
+          <a:lstStyle/>
+          <a:p>
+            <a:pPr algn="l">
+              <a:lnSpc>
+                <a:spcPct val="100000"/>
+              </a:lnSpc>
+              <a:spcAft>
+                <a:spcPts val="600"/>
+              </a:spcAft>
+            </a:pPr>
+            <a:r>
+              <a:rPr sz="2200" b="1" i="0">
+                <a:solidFill>
+                  <a:srgbClr val="FFFFFF"/>
+                </a:solidFill>
+                <a:latin typeface="Roboto"/>
+              </a:rPr>
+              <a:t>If the room pushes back: objections &amp; responses</a:t>
+            </a:r>
+          </a:p>
+        </p:txBody>
+      </p:sp>
+      <p:sp>
+        <p:nvSpPr>
+          <p:cNvPr id="6" name="TextBox 5"/>
+          <p:cNvSpPr txBox="1"/>
+          <p:nvPr/>
+        </p:nvSpPr>
+        <p:spPr>
+          <a:xfrm>
+            <a:off x="11247120" y="384048"/>
+            <a:ext cx="640080" cy="731520"/>
+          </a:xfrm>
+          <a:prstGeom prst="rect">
+            <a:avLst/>
+          </a:prstGeom>
+          <a:noFill/>
+        </p:spPr>
+        <p:txBody>
+          <a:bodyPr wrap="square" anchor="t">
+            <a:spAutoFit/>
+          </a:bodyPr>
+          <a:lstStyle/>
+          <a:p>
+            <a:pPr algn="r">
+              <a:lnSpc>
+                <a:spcPct val="100000"/>
+              </a:lnSpc>
+              <a:spcAft>
+                <a:spcPts val="600"/>
+              </a:spcAft>
+            </a:pPr>
+            <a:r>
+              <a:rPr sz="1400" b="0" i="0">
+                <a:solidFill>
+                  <a:srgbClr val="9FB4E0"/>
+                </a:solidFill>
+                <a:latin typeface="Roboto"/>
+              </a:rPr>
+              <a:t>A</a:t>
+            </a:r>
+          </a:p>
+        </p:txBody>
+      </p:sp>
+      <p:sp>
+        <p:nvSpPr>
+          <p:cNvPr id="7" name="Rounded Rectangle 6"/>
+          <p:cNvSpPr/>
+          <p:nvPr/>
+        </p:nvSpPr>
+        <p:spPr>
+          <a:xfrm>
+            <a:off x="502920" y="1417320"/>
+            <a:ext cx="11201400" cy="749808"/>
+          </a:xfrm>
+          <a:prstGeom prst="roundRect">
+            <a:avLst>
+              <a:gd name="adj" fmla="val 10000"/>
+            </a:avLst>
+          </a:prstGeom>
+          <a:solidFill>
+            <a:srgbClr val="F4F6F9"/>
+          </a:solidFill>
+          <a:ln>
+            <a:noFill/>
+          </a:ln>
+          <a:effectLst/>
+        </p:spPr>
+        <p:style>
+          <a:lnRef idx="1">
+            <a:schemeClr val="accent1"/>
+          </a:lnRef>
+          <a:fillRef idx="3">
+            <a:schemeClr val="accent1"/>
+          </a:fillRef>
+          <a:effectRef idx="2">
+            <a:schemeClr val="accent1"/>
+          </a:effectRef>
+          <a:fontRef idx="minor">
+            <a:schemeClr val="lt1"/>
+          </a:fontRef>
+        </p:style>
+        <p:txBody>
+          <a:bodyPr rtlCol="0" anchor="ctr"/>
+          <a:lstStyle/>
+          <a:p>
+            <a:pPr algn="ctr"/>
+          </a:p>
+        </p:txBody>
+      </p:sp>
+      <p:sp>
+        <p:nvSpPr>
+          <p:cNvPr id="8" name="TextBox 7"/>
+          <p:cNvSpPr txBox="1"/>
+          <p:nvPr/>
+        </p:nvSpPr>
+        <p:spPr>
+          <a:xfrm>
+            <a:off x="731520" y="1472184"/>
+            <a:ext cx="4160520" cy="658368"/>
+          </a:xfrm>
+          <a:prstGeom prst="rect">
+            <a:avLst/>
+          </a:prstGeom>
+          <a:noFill/>
+        </p:spPr>
+        <p:txBody>
+          <a:bodyPr wrap="square" anchor="t">
+            <a:spAutoFit/>
+          </a:bodyPr>
+          <a:lstStyle/>
+          <a:p>
+            <a:pPr algn="l">
+              <a:lnSpc>
+                <a:spcPct val="95000"/>
+              </a:lnSpc>
+              <a:spcAft>
+                <a:spcPts val="600"/>
+              </a:spcAft>
+            </a:pPr>
+            <a:r>
+              <a:rPr sz="1050" b="1" i="1">
+                <a:solidFill>
+                  <a:srgbClr val="012169"/>
+                </a:solidFill>
+                <a:latin typeface="Roboto"/>
+              </a:rPr>
+              <a:t>“AI writing code for a bank? Our regulators will never allow it.”</a:t>
+            </a:r>
+          </a:p>
+        </p:txBody>
+      </p:sp>
+      <p:sp>
+        <p:nvSpPr>
+          <p:cNvPr id="9" name="TextBox 8"/>
+          <p:cNvSpPr txBox="1"/>
+          <p:nvPr/>
+        </p:nvSpPr>
+        <p:spPr>
+          <a:xfrm>
+            <a:off x="5029200" y="1472184"/>
+            <a:ext cx="6537960" cy="658368"/>
+          </a:xfrm>
+          <a:prstGeom prst="rect">
+            <a:avLst/>
+          </a:prstGeom>
+          <a:noFill/>
+        </p:spPr>
+        <p:txBody>
+          <a:bodyPr wrap="square" anchor="t">
+            <a:spAutoFit/>
+          </a:bodyPr>
+          <a:lstStyle/>
+          <a:p>
+            <a:pPr algn="l">
+              <a:lnSpc>
+                <a:spcPct val="95000"/>
+              </a:lnSpc>
+              <a:spcAft>
+                <a:spcPts val="600"/>
+              </a:spcAft>
+            </a:pPr>
+            <a:r>
+              <a:rPr sz="1000" b="0" i="0">
+                <a:solidFill>
+                  <a:srgbClr val="1C2430"/>
+                </a:solidFill>
+                <a:latin typeface="Roboto"/>
+              </a:rPr>
+              <a:t>Devin changes who types, not who approves. Every change goes through your existing review, CI, and release gates — the same controls you'd apply to a contractor. And it leaves a better audit trail than a human.</a:t>
+            </a:r>
+          </a:p>
+        </p:txBody>
+      </p:sp>
+      <p:sp>
+        <p:nvSpPr>
+          <p:cNvPr id="10" name="Rounded Rectangle 9"/>
+          <p:cNvSpPr/>
+          <p:nvPr/>
+        </p:nvSpPr>
+        <p:spPr>
+          <a:xfrm>
+            <a:off x="502920" y="2240280"/>
+            <a:ext cx="11201400" cy="749808"/>
+          </a:xfrm>
+          <a:prstGeom prst="roundRect">
+            <a:avLst>
+              <a:gd name="adj" fmla="val 10000"/>
+            </a:avLst>
+          </a:prstGeom>
+          <a:solidFill>
+            <a:srgbClr val="F4F6F9"/>
+          </a:solidFill>
+          <a:ln>
+            <a:noFill/>
+          </a:ln>
+          <a:effectLst/>
+        </p:spPr>
+        <p:style>
+          <a:lnRef idx="1">
+            <a:schemeClr val="accent1"/>
+          </a:lnRef>
+          <a:fillRef idx="3">
+            <a:schemeClr val="accent1"/>
+          </a:fillRef>
+          <a:effectRef idx="2">
+            <a:schemeClr val="accent1"/>
+          </a:effectRef>
+          <a:fontRef idx="minor">
+            <a:schemeClr val="lt1"/>
+          </a:fontRef>
+        </p:style>
+        <p:txBody>
+          <a:bodyPr rtlCol="0" anchor="ctr"/>
+          <a:lstStyle/>
+          <a:p>
+            <a:pPr algn="ctr"/>
+          </a:p>
+        </p:txBody>
+      </p:sp>
+      <p:sp>
+        <p:nvSpPr>
+          <p:cNvPr id="11" name="TextBox 10"/>
+          <p:cNvSpPr txBox="1"/>
+          <p:nvPr/>
+        </p:nvSpPr>
+        <p:spPr>
+          <a:xfrm>
+            <a:off x="731520" y="2295144"/>
+            <a:ext cx="4160520" cy="658368"/>
+          </a:xfrm>
+          <a:prstGeom prst="rect">
+            <a:avLst/>
+          </a:prstGeom>
+          <a:noFill/>
+        </p:spPr>
+        <p:txBody>
+          <a:bodyPr wrap="square" anchor="t">
+            <a:spAutoFit/>
+          </a:bodyPr>
+          <a:lstStyle/>
+          <a:p>
+            <a:pPr algn="l">
+              <a:lnSpc>
+                <a:spcPct val="95000"/>
+              </a:lnSpc>
+              <a:spcAft>
+                <a:spcPts val="600"/>
+              </a:spcAft>
+            </a:pPr>
+            <a:r>
+              <a:rPr sz="1050" b="1" i="1">
+                <a:solidFill>
+                  <a:srgbClr val="012169"/>
+                </a:solidFill>
+                <a:latin typeface="Roboto"/>
+              </a:rPr>
+              <a:t>“We already have Copilot / internal AI tools.”</a:t>
+            </a:r>
+          </a:p>
+        </p:txBody>
+      </p:sp>
+      <p:sp>
+        <p:nvSpPr>
+          <p:cNvPr id="12" name="TextBox 11"/>
+          <p:cNvSpPr txBox="1"/>
+          <p:nvPr/>
+        </p:nvSpPr>
+        <p:spPr>
+          <a:xfrm>
+            <a:off x="5029200" y="2295144"/>
+            <a:ext cx="6537960" cy="658368"/>
+          </a:xfrm>
+          <a:prstGeom prst="rect">
+            <a:avLst/>
+          </a:prstGeom>
+          <a:noFill/>
+        </p:spPr>
+        <p:txBody>
+          <a:bodyPr wrap="square" anchor="t">
+            <a:spAutoFit/>
+          </a:bodyPr>
+          <a:lstStyle/>
+          <a:p>
+            <a:pPr algn="l">
+              <a:lnSpc>
+                <a:spcPct val="95000"/>
+              </a:lnSpc>
+              <a:spcAft>
+                <a:spcPts val="600"/>
+              </a:spcAft>
+            </a:pPr>
+            <a:r>
+              <a:rPr sz="1000" b="0" i="0">
+                <a:solidFill>
+                  <a:srgbClr val="1C2430"/>
+                </a:solidFill>
+                <a:latin typeface="Roboto"/>
+              </a:rPr>
+              <a:t>Complementary, not competing. Copilot accelerates an engineer who's already assigned. Devin absorbs whole task categories nobody wants assigned — migrations, upgrades, test debt.</a:t>
+            </a:r>
+          </a:p>
+        </p:txBody>
+      </p:sp>
+      <p:sp>
+        <p:nvSpPr>
+          <p:cNvPr id="13" name="Rounded Rectangle 12"/>
+          <p:cNvSpPr/>
+          <p:nvPr/>
+        </p:nvSpPr>
+        <p:spPr>
+          <a:xfrm>
+            <a:off x="502920" y="3063240"/>
+            <a:ext cx="11201400" cy="749808"/>
+          </a:xfrm>
+          <a:prstGeom prst="roundRect">
+            <a:avLst>
+              <a:gd name="adj" fmla="val 10000"/>
+            </a:avLst>
+          </a:prstGeom>
+          <a:solidFill>
+            <a:srgbClr val="F4F6F9"/>
+          </a:solidFill>
+          <a:ln>
+            <a:noFill/>
+          </a:ln>
+          <a:effectLst/>
+        </p:spPr>
+        <p:style>
+          <a:lnRef idx="1">
+            <a:schemeClr val="accent1"/>
+          </a:lnRef>
+          <a:fillRef idx="3">
+            <a:schemeClr val="accent1"/>
+          </a:fillRef>
+          <a:effectRef idx="2">
+            <a:schemeClr val="accent1"/>
+          </a:effectRef>
+          <a:fontRef idx="minor">
+            <a:schemeClr val="lt1"/>
+          </a:fontRef>
+        </p:style>
+        <p:txBody>
+          <a:bodyPr rtlCol="0" anchor="ctr"/>
+          <a:lstStyle/>
+          <a:p>
+            <a:pPr algn="ctr"/>
+          </a:p>
+        </p:txBody>
+      </p:sp>
+      <p:sp>
+        <p:nvSpPr>
+          <p:cNvPr id="14" name="TextBox 13"/>
+          <p:cNvSpPr txBox="1"/>
+          <p:nvPr/>
+        </p:nvSpPr>
+        <p:spPr>
+          <a:xfrm>
+            <a:off x="731520" y="3118104"/>
+            <a:ext cx="4160520" cy="658368"/>
+          </a:xfrm>
+          <a:prstGeom prst="rect">
+            <a:avLst/>
+          </a:prstGeom>
+          <a:noFill/>
+        </p:spPr>
+        <p:txBody>
+          <a:bodyPr wrap="square" anchor="t">
+            <a:spAutoFit/>
+          </a:bodyPr>
+          <a:lstStyle/>
+          <a:p>
+            <a:pPr algn="l">
+              <a:lnSpc>
+                <a:spcPct val="95000"/>
+              </a:lnSpc>
+              <a:spcAft>
+                <a:spcPts val="600"/>
+              </a:spcAft>
+            </a:pPr>
+            <a:r>
+              <a:rPr sz="1050" b="1" i="1">
+                <a:solidFill>
+                  <a:srgbClr val="012169"/>
+                </a:solidFill>
+                <a:latin typeface="Roboto"/>
+              </a:rPr>
+              <a:t>“Our codebase is far bigger and messier than any demo.”</a:t>
+            </a:r>
+          </a:p>
+        </p:txBody>
+      </p:sp>
+      <p:sp>
+        <p:nvSpPr>
+          <p:cNvPr id="15" name="TextBox 14"/>
+          <p:cNvSpPr txBox="1"/>
+          <p:nvPr/>
+        </p:nvSpPr>
+        <p:spPr>
+          <a:xfrm>
+            <a:off x="5029200" y="3118104"/>
+            <a:ext cx="6537960" cy="658368"/>
+          </a:xfrm>
+          <a:prstGeom prst="rect">
+            <a:avLst/>
+          </a:prstGeom>
+          <a:noFill/>
+        </p:spPr>
+        <p:txBody>
+          <a:bodyPr wrap="square" anchor="t">
+            <a:spAutoFit/>
+          </a:bodyPr>
+          <a:lstStyle/>
+          <a:p>
+            <a:pPr algn="l">
+              <a:lnSpc>
+                <a:spcPct val="95000"/>
+              </a:lnSpc>
+              <a:spcAft>
+                <a:spcPts val="600"/>
+              </a:spcAft>
+            </a:pPr>
+            <a:r>
+              <a:rPr sz="1000" b="0" i="0">
+                <a:solidFill>
+                  <a:srgbClr val="1C2430"/>
+                </a:solidFill>
+                <a:latin typeface="Roboto"/>
+              </a:rPr>
+              <a:t>Agreed — that's why the pilot is on your code, your criteria, in four weeks. Scale actually favors Devin: it parallelizes across repos; humans don't.</a:t>
+            </a:r>
+          </a:p>
+        </p:txBody>
+      </p:sp>
+      <p:sp>
+        <p:nvSpPr>
+          <p:cNvPr id="16" name="Rounded Rectangle 15"/>
+          <p:cNvSpPr/>
+          <p:nvPr/>
+        </p:nvSpPr>
+        <p:spPr>
+          <a:xfrm>
+            <a:off x="502920" y="3886200"/>
+            <a:ext cx="11201400" cy="749808"/>
+          </a:xfrm>
+          <a:prstGeom prst="roundRect">
+            <a:avLst>
+              <a:gd name="adj" fmla="val 10000"/>
+            </a:avLst>
+          </a:prstGeom>
+          <a:solidFill>
+            <a:srgbClr val="F4F6F9"/>
+          </a:solidFill>
+          <a:ln>
+            <a:noFill/>
+          </a:ln>
+          <a:effectLst/>
+        </p:spPr>
+        <p:style>
+          <a:lnRef idx="1">
+            <a:schemeClr val="accent1"/>
+          </a:lnRef>
+          <a:fillRef idx="3">
+            <a:schemeClr val="accent1"/>
+          </a:fillRef>
+          <a:effectRef idx="2">
+            <a:schemeClr val="accent1"/>
+          </a:effectRef>
+          <a:fontRef idx="minor">
+            <a:schemeClr val="lt1"/>
+          </a:fontRef>
+        </p:style>
+        <p:txBody>
+          <a:bodyPr rtlCol="0" anchor="ctr"/>
+          <a:lstStyle/>
+          <a:p>
+            <a:pPr algn="ctr"/>
+          </a:p>
+        </p:txBody>
+      </p:sp>
+      <p:sp>
+        <p:nvSpPr>
+          <p:cNvPr id="17" name="TextBox 16"/>
+          <p:cNvSpPr txBox="1"/>
+          <p:nvPr/>
+        </p:nvSpPr>
+        <p:spPr>
+          <a:xfrm>
+            <a:off x="731520" y="3941063"/>
+            <a:ext cx="4160520" cy="658368"/>
+          </a:xfrm>
+          <a:prstGeom prst="rect">
+            <a:avLst/>
+          </a:prstGeom>
+          <a:noFill/>
+        </p:spPr>
+        <p:txBody>
+          <a:bodyPr wrap="square" anchor="t">
+            <a:spAutoFit/>
+          </a:bodyPr>
+          <a:lstStyle/>
+          <a:p>
+            <a:pPr algn="l">
+              <a:lnSpc>
+                <a:spcPct val="95000"/>
+              </a:lnSpc>
+              <a:spcAft>
+                <a:spcPts val="600"/>
+              </a:spcAft>
+            </a:pPr>
+            <a:r>
+              <a:rPr sz="1050" b="1" i="1">
+                <a:solidFill>
+                  <a:srgbClr val="012169"/>
+                </a:solidFill>
+                <a:latin typeface="Roboto"/>
+              </a:rPr>
+              <a:t>“What about hallucinations / wrong code?”</a:t>
+            </a:r>
+          </a:p>
+        </p:txBody>
+      </p:sp>
+      <p:sp>
+        <p:nvSpPr>
+          <p:cNvPr id="18" name="TextBox 17"/>
+          <p:cNvSpPr txBox="1"/>
+          <p:nvPr/>
+        </p:nvSpPr>
+        <p:spPr>
+          <a:xfrm>
+            <a:off x="5029200" y="3941063"/>
+            <a:ext cx="6537960" cy="658368"/>
+          </a:xfrm>
+          <a:prstGeom prst="rect">
+            <a:avLst/>
+          </a:prstGeom>
+          <a:noFill/>
+        </p:spPr>
+        <p:txBody>
+          <a:bodyPr wrap="square" anchor="t">
+            <a:spAutoFit/>
+          </a:bodyPr>
+          <a:lstStyle/>
+          <a:p>
+            <a:pPr algn="l">
+              <a:lnSpc>
+                <a:spcPct val="95000"/>
+              </a:lnSpc>
+              <a:spcAft>
+                <a:spcPts val="600"/>
+              </a:spcAft>
+            </a:pPr>
+            <a:r>
+              <a:rPr sz="1000" b="0" i="0">
+                <a:solidFill>
+                  <a:srgbClr val="1C2430"/>
+                </a:solidFill>
+                <a:latin typeface="Roboto"/>
+              </a:rPr>
+              <a:t>Devin executes what it writes — builds, tests, and iterates until green before opening a PR. Wrong code fails your test suite and never reaches a human's desk, let alone production.</a:t>
+            </a:r>
+          </a:p>
+        </p:txBody>
+      </p:sp>
+      <p:sp>
+        <p:nvSpPr>
+          <p:cNvPr id="19" name="Rounded Rectangle 18"/>
+          <p:cNvSpPr/>
+          <p:nvPr/>
+        </p:nvSpPr>
+        <p:spPr>
+          <a:xfrm>
+            <a:off x="502920" y="4709160"/>
+            <a:ext cx="11201400" cy="749808"/>
+          </a:xfrm>
+          <a:prstGeom prst="roundRect">
+            <a:avLst>
+              <a:gd name="adj" fmla="val 10000"/>
+            </a:avLst>
+          </a:prstGeom>
+          <a:solidFill>
+            <a:srgbClr val="F4F6F9"/>
+          </a:solidFill>
+          <a:ln>
+            <a:noFill/>
+          </a:ln>
+          <a:effectLst/>
+        </p:spPr>
+        <p:style>
+          <a:lnRef idx="1">
+            <a:schemeClr val="accent1"/>
+          </a:lnRef>
+          <a:fillRef idx="3">
+            <a:schemeClr val="accent1"/>
+          </a:fillRef>
+          <a:effectRef idx="2">
+            <a:schemeClr val="accent1"/>
+          </a:effectRef>
+          <a:fontRef idx="minor">
+            <a:schemeClr val="lt1"/>
+          </a:fontRef>
+        </p:style>
+        <p:txBody>
+          <a:bodyPr rtlCol="0" anchor="ctr"/>
+          <a:lstStyle/>
+          <a:p>
+            <a:pPr algn="ctr"/>
+          </a:p>
+        </p:txBody>
+      </p:sp>
+      <p:sp>
+        <p:nvSpPr>
+          <p:cNvPr id="20" name="TextBox 19"/>
+          <p:cNvSpPr txBox="1"/>
+          <p:nvPr/>
+        </p:nvSpPr>
+        <p:spPr>
+          <a:xfrm>
+            <a:off x="731520" y="4764024"/>
+            <a:ext cx="4160520" cy="658368"/>
+          </a:xfrm>
+          <a:prstGeom prst="rect">
+            <a:avLst/>
+          </a:prstGeom>
+          <a:noFill/>
+        </p:spPr>
+        <p:txBody>
+          <a:bodyPr wrap="square" anchor="t">
+            <a:spAutoFit/>
+          </a:bodyPr>
+          <a:lstStyle/>
+          <a:p>
+            <a:pPr algn="l">
+              <a:lnSpc>
+                <a:spcPct val="95000"/>
+              </a:lnSpc>
+              <a:spcAft>
+                <a:spcPts val="600"/>
+              </a:spcAft>
+            </a:pPr>
+            <a:r>
+              <a:rPr sz="1050" b="1" i="1">
+                <a:solidFill>
+                  <a:srgbClr val="012169"/>
+                </a:solidFill>
+                <a:latin typeface="Roboto"/>
+              </a:rPr>
+              <a:t>“Is this going to replace my engineers?”</a:t>
+            </a:r>
+          </a:p>
+        </p:txBody>
+      </p:sp>
+      <p:sp>
+        <p:nvSpPr>
+          <p:cNvPr id="21" name="TextBox 20"/>
+          <p:cNvSpPr txBox="1"/>
+          <p:nvPr/>
+        </p:nvSpPr>
+        <p:spPr>
+          <a:xfrm>
+            <a:off x="5029200" y="4764024"/>
+            <a:ext cx="6537960" cy="658368"/>
+          </a:xfrm>
+          <a:prstGeom prst="rect">
+            <a:avLst/>
+          </a:prstGeom>
+          <a:noFill/>
+        </p:spPr>
+        <p:txBody>
+          <a:bodyPr wrap="square" anchor="t">
+            <a:spAutoFit/>
+          </a:bodyPr>
+          <a:lstStyle/>
+          <a:p>
+            <a:pPr algn="l">
+              <a:lnSpc>
+                <a:spcPct val="95000"/>
+              </a:lnSpc>
+              <a:spcAft>
+                <a:spcPts val="600"/>
+              </a:spcAft>
+            </a:pPr>
+            <a:r>
+              <a:rPr sz="1000" b="0" i="0">
+                <a:solidFill>
+                  <a:srgbClr val="1C2430"/>
+                </a:solidFill>
+                <a:latin typeface="Roboto"/>
+              </a:rPr>
+              <a:t>It replaces the work your engineers resent, not the engineers. The pitch to your team: nobody hand-migrates *ngFor loops anymore; everyone reviews, designs, and ships features.</a:t>
+            </a:r>
+          </a:p>
+        </p:txBody>
+      </p:sp>
+      <p:sp>
+        <p:nvSpPr>
+          <p:cNvPr id="22" name="Rounded Rectangle 21"/>
+          <p:cNvSpPr/>
+          <p:nvPr/>
+        </p:nvSpPr>
+        <p:spPr>
+          <a:xfrm>
+            <a:off x="502920" y="5532120"/>
+            <a:ext cx="11201400" cy="749808"/>
+          </a:xfrm>
+          <a:prstGeom prst="roundRect">
+            <a:avLst>
+              <a:gd name="adj" fmla="val 10000"/>
+            </a:avLst>
+          </a:prstGeom>
+          <a:solidFill>
+            <a:srgbClr val="F4F6F9"/>
+          </a:solidFill>
+          <a:ln>
+            <a:noFill/>
+          </a:ln>
+          <a:effectLst/>
+        </p:spPr>
+        <p:style>
+          <a:lnRef idx="1">
+            <a:schemeClr val="accent1"/>
+          </a:lnRef>
+          <a:fillRef idx="3">
+            <a:schemeClr val="accent1"/>
+          </a:fillRef>
+          <a:effectRef idx="2">
+            <a:schemeClr val="accent1"/>
+          </a:effectRef>
+          <a:fontRef idx="minor">
+            <a:schemeClr val="lt1"/>
+          </a:fontRef>
+        </p:style>
+        <p:txBody>
+          <a:bodyPr rtlCol="0" anchor="ctr"/>
+          <a:lstStyle/>
+          <a:p>
+            <a:pPr algn="ctr"/>
+          </a:p>
+        </p:txBody>
+      </p:sp>
+      <p:sp>
+        <p:nvSpPr>
+          <p:cNvPr id="23" name="TextBox 22"/>
+          <p:cNvSpPr txBox="1"/>
+          <p:nvPr/>
+        </p:nvSpPr>
+        <p:spPr>
+          <a:xfrm>
+            <a:off x="731520" y="5586984"/>
+            <a:ext cx="4160520" cy="658368"/>
+          </a:xfrm>
+          <a:prstGeom prst="rect">
+            <a:avLst/>
+          </a:prstGeom>
+          <a:noFill/>
+        </p:spPr>
+        <p:txBody>
+          <a:bodyPr wrap="square" anchor="t">
+            <a:spAutoFit/>
+          </a:bodyPr>
+          <a:lstStyle/>
+          <a:p>
+            <a:pPr algn="l">
+              <a:lnSpc>
+                <a:spcPct val="95000"/>
+              </a:lnSpc>
+              <a:spcAft>
+                <a:spcPts val="600"/>
+              </a:spcAft>
+            </a:pPr>
+            <a:r>
+              <a:rPr sz="1050" b="1" i="1">
+                <a:solidFill>
+                  <a:srgbClr val="012169"/>
+                </a:solidFill>
+                <a:latin typeface="Roboto"/>
+              </a:rPr>
+              <a:t>“Where does our code go? Data security?”</a:t>
+            </a:r>
+          </a:p>
+        </p:txBody>
+      </p:sp>
+      <p:sp>
+        <p:nvSpPr>
+          <p:cNvPr id="24" name="TextBox 23"/>
+          <p:cNvSpPr txBox="1"/>
+          <p:nvPr/>
+        </p:nvSpPr>
+        <p:spPr>
+          <a:xfrm>
+            <a:off x="5029200" y="5586984"/>
+            <a:ext cx="6537960" cy="658368"/>
+          </a:xfrm>
+          <a:prstGeom prst="rect">
+            <a:avLst/>
+          </a:prstGeom>
+          <a:noFill/>
+        </p:spPr>
+        <p:txBody>
+          <a:bodyPr wrap="square" anchor="t">
+            <a:spAutoFit/>
+          </a:bodyPr>
+          <a:lstStyle/>
+          <a:p>
+            <a:pPr algn="l">
+              <a:lnSpc>
+                <a:spcPct val="95000"/>
+              </a:lnSpc>
+              <a:spcAft>
+                <a:spcPts val="600"/>
+              </a:spcAft>
+            </a:pPr>
+            <a:r>
+              <a:rPr sz="1000" b="0" i="0">
+                <a:solidFill>
+                  <a:srgbClr val="1C2430"/>
+                </a:solidFill>
+                <a:latin typeface="Roboto"/>
+              </a:rPr>
+              <a:t>Answered properly in the week-0 security review — enterprise deployment and data-isolation options exist. Don't accept a hand-wave from me; bring your security team.</a:t>
+            </a:r>
+          </a:p>
+        </p:txBody>
+      </p:sp>
+      <p:sp>
+        <p:nvSpPr>
+          <p:cNvPr id="25" name="TextBox 24"/>
+          <p:cNvSpPr txBox="1"/>
+          <p:nvPr/>
+        </p:nvSpPr>
+        <p:spPr>
+          <a:xfrm>
+            <a:off x="502920" y="6473952"/>
+            <a:ext cx="7315200" cy="292608"/>
+          </a:xfrm>
+          <a:prstGeom prst="rect">
+            <a:avLst/>
+          </a:prstGeom>
+          <a:noFill/>
+        </p:spPr>
+        <p:txBody>
+          <a:bodyPr wrap="square" anchor="t">
+            <a:spAutoFit/>
+          </a:bodyPr>
+          <a:lstStyle/>
+          <a:p>
+            <a:pPr algn="l">
+              <a:lnSpc>
+                <a:spcPct val="100000"/>
+              </a:lnSpc>
+              <a:spcAft>
+                <a:spcPts val="600"/>
+              </a:spcAft>
+            </a:pPr>
+            <a:r>
+              <a:rPr sz="900" b="0" i="0">
+                <a:solidFill>
+                  <a:srgbClr val="5A6472"/>
+                </a:solidFill>
+                <a:latin typeface="Roboto"/>
+              </a:rPr>
+              <a:t>Bank of America  ×  Cognition</a:t>
+            </a:r>
+          </a:p>
+        </p:txBody>
+      </p:sp>
+    </p:spTree>
+  </p:cSld>
+  <p:clrMapOvr>
+    <a:masterClrMapping/>
+  </p:clrMapOvr>
+</p:sld>
+</file>
+
+<file path=ppt/slides/slide13.xml><?xml version="1.0" encoding="utf-8"?>
+<p:sld xmlns:a="http://schemas.openxmlformats.org/drawingml/2006/main" xmlns:p="http://schemas.openxmlformats.org/presentationml/2006/main" xmlns:r="http://schemas.openxmlformats.org/officeDocument/2006/relationships">
+  <p:cSld>
+    <p:spTree>
+      <p:nvGrpSpPr>
+        <p:cNvPr id="1" name=""/>
+        <p:cNvGrpSpPr/>
+        <p:nvPr/>
+      </p:nvGrpSpPr>
+      <p:grpSpPr/>
+      <p:sp>
+        <p:nvSpPr>
+          <p:cNvPr id="2" name="Rectangle 1"/>
+          <p:cNvSpPr/>
+          <p:nvPr/>
+        </p:nvSpPr>
+        <p:spPr>
+          <a:xfrm>
+            <a:off x="0" y="0"/>
+            <a:ext cx="12191695" cy="1170432"/>
+          </a:xfrm>
+          <a:prstGeom prst="rect">
+            <a:avLst/>
+          </a:prstGeom>
+          <a:solidFill>
+            <a:srgbClr val="012169"/>
+          </a:solidFill>
+          <a:ln>
+            <a:noFill/>
+          </a:ln>
+          <a:effectLst/>
+        </p:spPr>
+        <p:style>
+          <a:lnRef idx="1">
+            <a:schemeClr val="accent1"/>
+          </a:lnRef>
+          <a:fillRef idx="3">
+            <a:schemeClr val="accent1"/>
+          </a:fillRef>
+          <a:effectRef idx="2">
+            <a:schemeClr val="accent1"/>
+          </a:effectRef>
+          <a:fontRef idx="minor">
+            <a:schemeClr val="lt1"/>
+          </a:fontRef>
+        </p:style>
+        <p:txBody>
+          <a:bodyPr rtlCol="0" anchor="ctr"/>
+          <a:lstStyle/>
+          <a:p>
+            <a:pPr algn="ctr"/>
+          </a:p>
+        </p:txBody>
+      </p:sp>
+      <p:sp>
+        <p:nvSpPr>
+          <p:cNvPr id="3" name="Rectangle 2"/>
+          <p:cNvSpPr/>
+          <p:nvPr/>
+        </p:nvSpPr>
+        <p:spPr>
+          <a:xfrm>
+            <a:off x="0" y="1170432"/>
+            <a:ext cx="12191695" cy="50292"/>
+          </a:xfrm>
+          <a:prstGeom prst="rect">
+            <a:avLst/>
+          </a:prstGeom>
+          <a:solidFill>
+            <a:srgbClr val="E31837"/>
+          </a:solidFill>
+          <a:ln>
+            <a:noFill/>
+          </a:ln>
+          <a:effectLst/>
+        </p:spPr>
+        <p:style>
+          <a:lnRef idx="1">
+            <a:schemeClr val="accent1"/>
+          </a:lnRef>
+          <a:fillRef idx="3">
+            <a:schemeClr val="accent1"/>
+          </a:fillRef>
+          <a:effectRef idx="2">
+            <a:schemeClr val="accent1"/>
+          </a:effectRef>
+          <a:fontRef idx="minor">
+            <a:schemeClr val="lt1"/>
+          </a:fontRef>
+        </p:style>
+        <p:txBody>
+          <a:bodyPr rtlCol="0" anchor="ctr"/>
+          <a:lstStyle/>
+          <a:p>
+            <a:pPr algn="ctr"/>
+          </a:p>
+        </p:txBody>
+      </p:sp>
+      <p:sp>
+        <p:nvSpPr>
+          <p:cNvPr id="4" name="TextBox 3"/>
+          <p:cNvSpPr txBox="1"/>
+          <p:nvPr/>
+        </p:nvSpPr>
+        <p:spPr>
+          <a:xfrm>
+            <a:off x="502920" y="146304"/>
+            <a:ext cx="9601200" cy="320040"/>
+          </a:xfrm>
+          <a:prstGeom prst="rect">
+            <a:avLst/>
+          </a:prstGeom>
+          <a:noFill/>
+        </p:spPr>
+        <p:txBody>
+          <a:bodyPr wrap="square" anchor="t">
+            <a:spAutoFit/>
+          </a:bodyPr>
+          <a:lstStyle/>
+          <a:p>
+            <a:pPr algn="l">
+              <a:lnSpc>
+                <a:spcPct val="100000"/>
+              </a:lnSpc>
+              <a:spcAft>
+                <a:spcPts val="600"/>
+              </a:spcAft>
+            </a:pPr>
+            <a:r>
+              <a:rPr sz="1100" b="1" i="0">
+                <a:solidFill>
+                  <a:srgbClr val="9FB4E0"/>
+                </a:solidFill>
+                <a:latin typeface="Roboto"/>
+              </a:rPr>
               <a:t>APPENDIX B</a:t>
             </a:r>
           </a:p>
@@ -7478,7 +8946,7 @@
                 </a:solidFill>
                 <a:latin typeface="Roboto"/>
               </a:rPr>
-              <a:t>Why I'm here (and why BofA)</a:t>
+              <a:t>Why I'm here</a:t>
             </a:r>
           </a:p>
         </p:txBody>
@@ -7736,7 +9204,7 @@
                 </a:solidFill>
                 <a:latin typeface="Roboto"/>
               </a:rPr>
-              <a:t>Your problem</a:t>
+              <a:t>Your problem — and why BofA</a:t>
             </a:r>
           </a:p>
         </p:txBody>
@@ -10034,7 +11502,7 @@
                 </a:solidFill>
                 <a:latin typeface="Roboto"/>
               </a:rPr>
-              <a:t>THE 2-MINUTE VERSION</a:t>
+              <a:t>WHY THIS CONVERSATION, HERE</a:t>
             </a:r>
           </a:p>
         </p:txBody>
@@ -10076,7 +11544,7 @@
                 </a:solidFill>
                 <a:latin typeface="Roboto"/>
               </a:rPr>
-              <a:t>What is Devin?</a:t>
+              <a:t>Why Bank of America is a strong candidate</a:t>
             </a:r>
           </a:p>
         </p:txBody>
@@ -10125,65 +11593,14 @@
       </p:sp>
       <p:sp>
         <p:nvSpPr>
-          <p:cNvPr id="7" name="TextBox 6"/>
-          <p:cNvSpPr txBox="1"/>
-          <p:nvPr/>
-        </p:nvSpPr>
-        <p:spPr>
-          <a:xfrm>
-            <a:off x="502920" y="1371600"/>
-            <a:ext cx="11201400" cy="548640"/>
-          </a:xfrm>
-          <a:prstGeom prst="rect">
-            <a:avLst/>
-          </a:prstGeom>
-          <a:noFill/>
-        </p:spPr>
-        <p:txBody>
-          <a:bodyPr wrap="square" anchor="t">
-            <a:spAutoFit/>
-          </a:bodyPr>
-          <a:lstStyle/>
-          <a:p>
-            <a:pPr algn="l">
-              <a:lnSpc>
-                <a:spcPct val="100000"/>
-              </a:lnSpc>
-              <a:spcAft>
-                <a:spcPts val="600"/>
-              </a:spcAft>
-            </a:pPr>
-            <a:r>
-              <a:rPr sz="1800" b="1" i="0">
-                <a:solidFill>
-                  <a:srgbClr val="012169"/>
-                </a:solidFill>
-                <a:latin typeface="Roboto"/>
-              </a:rPr>
-              <a:t>An AI software engineer</a:t>
-            </a:r>
-            <a:r>
-              <a:rPr sz="1800" b="0" i="0">
-                <a:solidFill>
-                  <a:srgbClr val="1C2430"/>
-                </a:solidFill>
-                <a:latin typeface="Roboto"/>
-              </a:rPr>
-              <a:t> — you assign the task; it plans, codes, tests, and ships a PR.</a:t>
-            </a:r>
-          </a:p>
-        </p:txBody>
-      </p:sp>
-      <p:sp>
-        <p:nvSpPr>
-          <p:cNvPr id="8" name="Rounded Rectangle 7"/>
+          <p:cNvPr id="7" name="Rounded Rectangle 6"/>
           <p:cNvSpPr/>
           <p:nvPr/>
         </p:nvSpPr>
         <p:spPr>
           <a:xfrm>
-            <a:off x="502920" y="2148840"/>
-            <a:ext cx="3611880" cy="2240280"/>
+            <a:off x="502920" y="1645920"/>
+            <a:ext cx="3611880" cy="2377440"/>
           </a:xfrm>
           <a:prstGeom prst="roundRect">
             <a:avLst>
@@ -10222,14 +11639,14 @@
       </p:sp>
       <p:sp>
         <p:nvSpPr>
-          <p:cNvPr id="9" name="Rectangle 8"/>
+          <p:cNvPr id="8" name="Rectangle 7"/>
           <p:cNvSpPr/>
           <p:nvPr/>
         </p:nvSpPr>
         <p:spPr>
           <a:xfrm>
-            <a:off x="502920" y="2258568"/>
-            <a:ext cx="54864" cy="2020824"/>
+            <a:off x="502920" y="1755648"/>
+            <a:ext cx="54864" cy="2157984"/>
           </a:xfrm>
           <a:prstGeom prst="rect">
             <a:avLst/>
@@ -10266,13 +11683,13 @@
       </p:sp>
       <p:sp>
         <p:nvSpPr>
-          <p:cNvPr id="10" name="TextBox 9"/>
+          <p:cNvPr id="9" name="TextBox 8"/>
           <p:cNvSpPr txBox="1"/>
           <p:nvPr/>
         </p:nvSpPr>
         <p:spPr>
           <a:xfrm>
-            <a:off x="704088" y="2258568"/>
+            <a:off x="704088" y="1755648"/>
             <a:ext cx="3246120" cy="365760"/>
           </a:xfrm>
           <a:prstGeom prst="rect">
@@ -10301,21 +11718,21 @@
                 </a:solidFill>
                 <a:latin typeface="Roboto"/>
               </a:rPr>
-              <a:t>Works like an engineer</a:t>
-            </a:r>
-          </a:p>
-        </p:txBody>
-      </p:sp>
-      <p:sp>
-        <p:nvSpPr>
-          <p:cNvPr id="11" name="TextBox 10"/>
+              <a:t>The scale</a:t>
+            </a:r>
+          </a:p>
+        </p:txBody>
+      </p:sp>
+      <p:sp>
+        <p:nvSpPr>
+          <p:cNvPr id="10" name="TextBox 9"/>
           <p:cNvSpPr txBox="1"/>
           <p:nvPr/>
         </p:nvSpPr>
         <p:spPr>
           <a:xfrm>
-            <a:off x="704088" y="2624328"/>
-            <a:ext cx="3246120" cy="1645920"/>
+            <a:off x="704088" y="2121408"/>
+            <a:ext cx="3246120" cy="1783080"/>
           </a:xfrm>
           <a:prstGeom prst="rect">
             <a:avLst/>
@@ -10343,7 +11760,7 @@
                 </a:solidFill>
                 <a:latin typeface="Roboto"/>
               </a:rPr>
-              <a:t>Own shell, editor, browser</a:t>
+              <a:t>~$13B annual tech spend</a:t>
             </a:r>
           </a:p>
           <a:p>
@@ -10362,21 +11779,21 @@
                 </a:solidFill>
                 <a:latin typeface="Roboto"/>
               </a:rPr>
-              <a:t>Runs builds &amp; tests as it goes</a:t>
-            </a:r>
-          </a:p>
-        </p:txBody>
-      </p:sp>
-      <p:sp>
-        <p:nvSpPr>
-          <p:cNvPr id="12" name="Rounded Rectangle 11"/>
+              <a:t>One of the largest engineering orgs anywhere</a:t>
+            </a:r>
+          </a:p>
+        </p:txBody>
+      </p:sp>
+      <p:sp>
+        <p:nvSpPr>
+          <p:cNvPr id="11" name="Rounded Rectangle 10"/>
           <p:cNvSpPr/>
           <p:nvPr/>
         </p:nvSpPr>
         <p:spPr>
           <a:xfrm>
-            <a:off x="4297680" y="2148840"/>
-            <a:ext cx="3611880" cy="2240280"/>
+            <a:off x="4297680" y="1645920"/>
+            <a:ext cx="3611880" cy="2377440"/>
           </a:xfrm>
           <a:prstGeom prst="roundRect">
             <a:avLst>
@@ -10415,14 +11832,14 @@
       </p:sp>
       <p:sp>
         <p:nvSpPr>
-          <p:cNvPr id="13" name="Rectangle 12"/>
+          <p:cNvPr id="12" name="Rectangle 11"/>
           <p:cNvSpPr/>
           <p:nvPr/>
         </p:nvSpPr>
         <p:spPr>
           <a:xfrm>
-            <a:off x="4297680" y="2258568"/>
-            <a:ext cx="54864" cy="2020824"/>
+            <a:off x="4297680" y="1755648"/>
+            <a:ext cx="54864" cy="2157984"/>
           </a:xfrm>
           <a:prstGeom prst="rect">
             <a:avLst/>
@@ -10459,13 +11876,13 @@
       </p:sp>
       <p:sp>
         <p:nvSpPr>
-          <p:cNvPr id="14" name="TextBox 13"/>
+          <p:cNvPr id="13" name="TextBox 12"/>
           <p:cNvSpPr txBox="1"/>
           <p:nvPr/>
         </p:nvSpPr>
         <p:spPr>
           <a:xfrm>
-            <a:off x="4498848" y="2258568"/>
+            <a:off x="4498848" y="1755648"/>
             <a:ext cx="3246120" cy="365760"/>
           </a:xfrm>
           <a:prstGeom prst="rect">
@@ -10494,21 +11911,21 @@
                 </a:solidFill>
                 <a:latin typeface="Roboto"/>
               </a:rPr>
-              <a:t>Fits your SDLC</a:t>
-            </a:r>
-          </a:p>
-        </p:txBody>
-      </p:sp>
-      <p:sp>
-        <p:nvSpPr>
-          <p:cNvPr id="15" name="TextBox 14"/>
+              <a:t>The AI posture</a:t>
+            </a:r>
+          </a:p>
+        </p:txBody>
+      </p:sp>
+      <p:sp>
+        <p:nvSpPr>
+          <p:cNvPr id="14" name="TextBox 13"/>
           <p:cNvSpPr txBox="1"/>
           <p:nvPr/>
         </p:nvSpPr>
         <p:spPr>
           <a:xfrm>
-            <a:off x="4498848" y="2624328"/>
-            <a:ext cx="3246120" cy="1645920"/>
+            <a:off x="4498848" y="2121408"/>
+            <a:ext cx="3246120" cy="1783080"/>
           </a:xfrm>
           <a:prstGeom prst="rect">
             <a:avLst/>
@@ -10536,7 +11953,7 @@
                 </a:solidFill>
                 <a:latin typeface="Roboto"/>
               </a:rPr>
-              <a:t>Everything lands as a PR</a:t>
+              <a:t>Erica · AI patent leader</a:t>
             </a:r>
           </a:p>
           <a:p>
@@ -10555,21 +11972,21 @@
                 </a:solidFill>
                 <a:latin typeface="Roboto"/>
               </a:rPr>
-              <a:t>Your CI, your approvals — unchanged</a:t>
-            </a:r>
-          </a:p>
-        </p:txBody>
-      </p:sp>
-      <p:sp>
-        <p:nvSpPr>
-          <p:cNvPr id="16" name="Rounded Rectangle 15"/>
+              <a:t>Exec buy-in for AI already exists</a:t>
+            </a:r>
+          </a:p>
+        </p:txBody>
+      </p:sp>
+      <p:sp>
+        <p:nvSpPr>
+          <p:cNvPr id="15" name="Rounded Rectangle 14"/>
           <p:cNvSpPr/>
           <p:nvPr/>
         </p:nvSpPr>
         <p:spPr>
           <a:xfrm>
-            <a:off x="8092440" y="2148840"/>
-            <a:ext cx="3611880" cy="2240280"/>
+            <a:off x="8092440" y="1645920"/>
+            <a:ext cx="3611880" cy="2377440"/>
           </a:xfrm>
           <a:prstGeom prst="roundRect">
             <a:avLst>
@@ -10608,14 +12025,14 @@
       </p:sp>
       <p:sp>
         <p:nvSpPr>
-          <p:cNvPr id="17" name="Rectangle 16"/>
+          <p:cNvPr id="16" name="Rectangle 15"/>
           <p:cNvSpPr/>
           <p:nvPr/>
         </p:nvSpPr>
         <p:spPr>
           <a:xfrm>
-            <a:off x="8092440" y="2258568"/>
-            <a:ext cx="54864" cy="2020824"/>
+            <a:off x="8092440" y="1755648"/>
+            <a:ext cx="54864" cy="2157984"/>
           </a:xfrm>
           <a:prstGeom prst="rect">
             <a:avLst/>
@@ -10652,13 +12069,13 @@
       </p:sp>
       <p:sp>
         <p:nvSpPr>
-          <p:cNvPr id="18" name="TextBox 17"/>
+          <p:cNvPr id="17" name="TextBox 16"/>
           <p:cNvSpPr txBox="1"/>
           <p:nvPr/>
         </p:nvSpPr>
         <p:spPr>
           <a:xfrm>
-            <a:off x="8293608" y="2258568"/>
+            <a:off x="8293608" y="1755648"/>
             <a:ext cx="3246120" cy="365760"/>
           </a:xfrm>
           <a:prstGeom prst="rect">
@@ -10687,21 +12104,21 @@
                 </a:solidFill>
                 <a:latin typeface="Roboto"/>
               </a:rPr>
-              <a:t>Built for this work</a:t>
-            </a:r>
-          </a:p>
-        </p:txBody>
-      </p:sp>
-      <p:sp>
-        <p:nvSpPr>
-          <p:cNvPr id="19" name="TextBox 18"/>
+              <a:t>The environment</a:t>
+            </a:r>
+          </a:p>
+        </p:txBody>
+      </p:sp>
+      <p:sp>
+        <p:nvSpPr>
+          <p:cNvPr id="18" name="TextBox 17"/>
           <p:cNvSpPr txBox="1"/>
           <p:nvPr/>
         </p:nvSpPr>
         <p:spPr>
           <a:xfrm>
-            <a:off x="8293608" y="2624328"/>
-            <a:ext cx="3246120" cy="1645920"/>
+            <a:off x="8293608" y="2121408"/>
+            <a:ext cx="3246120" cy="1783080"/>
           </a:xfrm>
           <a:prstGeom prst="rect">
             <a:avLst/>
@@ -10729,7 +12146,7 @@
                 </a:solidFill>
                 <a:latin typeface="Roboto"/>
               </a:rPr>
-              <a:t>Migrations, upgrades, refactors</a:t>
+              <a:t>Regulated, audit-first culture</a:t>
             </a:r>
           </a:p>
           <a:p>
@@ -10748,20 +12165,20 @@
                 </a:solidFill>
                 <a:latin typeface="Roboto"/>
               </a:rPr>
-              <a:t>Parallel sessions · full audit log</a:t>
-            </a:r>
-          </a:p>
-        </p:txBody>
-      </p:sp>
-      <p:sp>
-        <p:nvSpPr>
-          <p:cNvPr id="20" name="Rounded Rectangle 19"/>
+              <a:t>Devin's PR + log model fits it natively</a:t>
+            </a:r>
+          </a:p>
+        </p:txBody>
+      </p:sp>
+      <p:sp>
+        <p:nvSpPr>
+          <p:cNvPr id="19" name="Rounded Rectangle 18"/>
           <p:cNvSpPr/>
           <p:nvPr/>
         </p:nvSpPr>
         <p:spPr>
           <a:xfrm>
-            <a:off x="502920" y="4617720"/>
+            <a:off x="502920" y="4343400"/>
             <a:ext cx="11201400" cy="868680"/>
           </a:xfrm>
           <a:prstGeom prst="roundRect">
@@ -10770,7 +12187,7 @@
             </a:avLst>
           </a:prstGeom>
           <a:solidFill>
-            <a:srgbClr val="012169"/>
+            <a:srgbClr val="F4F6F9"/>
           </a:solidFill>
           <a:ln>
             <a:noFill/>
@@ -10801,13 +12218,13 @@
       </p:sp>
       <p:sp>
         <p:nvSpPr>
-          <p:cNvPr id="21" name="TextBox 20"/>
+          <p:cNvPr id="20" name="TextBox 19"/>
           <p:cNvSpPr txBox="1"/>
           <p:nvPr/>
         </p:nvSpPr>
         <p:spPr>
           <a:xfrm>
-            <a:off x="777240" y="4828032"/>
+            <a:off x="777240" y="4553712"/>
             <a:ext cx="10698480" cy="594360"/>
           </a:xfrm>
           <a:prstGeom prst="rect">
@@ -10832,18 +12249,18 @@
             <a:r>
               <a:rPr sz="1600" b="1" i="0">
                 <a:solidFill>
-                  <a:srgbClr val="FFFFFF"/>
-                </a:solidFill>
-                <a:latin typeface="Roboto"/>
-              </a:rPr>
-              <a:t>Your engineers stop being typists and become reviewers.</a:t>
-            </a:r>
-          </a:p>
-        </p:txBody>
-      </p:sp>
-      <p:sp>
-        <p:nvSpPr>
-          <p:cNvPr id="22" name="TextBox 21"/>
+                  <a:srgbClr val="012169"/>
+                </a:solidFill>
+                <a:latin typeface="Roboto"/>
+              </a:rPr>
+              <a:t>The bigger the estate, the bigger the payoff from doing this systematically.</a:t>
+            </a:r>
+          </a:p>
+        </p:txBody>
+      </p:sp>
+      <p:sp>
+        <p:nvSpPr>
+          <p:cNvPr id="21" name="TextBox 20"/>
           <p:cNvSpPr txBox="1"/>
           <p:nvPr/>
         </p:nvSpPr>
@@ -11026,7 +12443,7 @@
                 </a:solidFill>
                 <a:latin typeface="Roboto"/>
               </a:rPr>
-              <a:t>ADDRESSING THE ELEPHANTS IN THE ROOM</a:t>
+              <a:t>THE 2-MINUTE VERSION</a:t>
             </a:r>
           </a:p>
         </p:txBody>
@@ -11068,7 +12485,7 @@
                 </a:solidFill>
                 <a:latin typeface="Roboto"/>
               </a:rPr>
-              <a:t>What each of you is probably thinking</a:t>
+              <a:t>What is Devin?</a:t>
             </a:r>
           </a:p>
         </p:txBody>
@@ -11117,14 +12534,65 @@
       </p:sp>
       <p:sp>
         <p:nvSpPr>
-          <p:cNvPr id="7" name="Rounded Rectangle 6"/>
+          <p:cNvPr id="7" name="TextBox 6"/>
+          <p:cNvSpPr txBox="1"/>
+          <p:nvPr/>
+        </p:nvSpPr>
+        <p:spPr>
+          <a:xfrm>
+            <a:off x="502920" y="1371600"/>
+            <a:ext cx="11201400" cy="548640"/>
+          </a:xfrm>
+          <a:prstGeom prst="rect">
+            <a:avLst/>
+          </a:prstGeom>
+          <a:noFill/>
+        </p:spPr>
+        <p:txBody>
+          <a:bodyPr wrap="square" anchor="t">
+            <a:spAutoFit/>
+          </a:bodyPr>
+          <a:lstStyle/>
+          <a:p>
+            <a:pPr algn="l">
+              <a:lnSpc>
+                <a:spcPct val="100000"/>
+              </a:lnSpc>
+              <a:spcAft>
+                <a:spcPts val="600"/>
+              </a:spcAft>
+            </a:pPr>
+            <a:r>
+              <a:rPr sz="1800" b="1" i="0">
+                <a:solidFill>
+                  <a:srgbClr val="012169"/>
+                </a:solidFill>
+                <a:latin typeface="Roboto"/>
+              </a:rPr>
+              <a:t>An AI software engineer</a:t>
+            </a:r>
+            <a:r>
+              <a:rPr sz="1800" b="0" i="0">
+                <a:solidFill>
+                  <a:srgbClr val="1C2430"/>
+                </a:solidFill>
+                <a:latin typeface="Roboto"/>
+              </a:rPr>
+              <a:t> — you assign the task; it plans, codes, tests, and ships a PR.</a:t>
+            </a:r>
+          </a:p>
+        </p:txBody>
+      </p:sp>
+      <p:sp>
+        <p:nvSpPr>
+          <p:cNvPr id="8" name="Rounded Rectangle 7"/>
           <p:cNvSpPr/>
           <p:nvPr/>
         </p:nvSpPr>
         <p:spPr>
           <a:xfrm>
-            <a:off x="502920" y="1481328"/>
-            <a:ext cx="3611880" cy="3291840"/>
+            <a:off x="502920" y="2148840"/>
+            <a:ext cx="3611880" cy="2240280"/>
           </a:xfrm>
           <a:prstGeom prst="roundRect">
             <a:avLst>
@@ -11163,14 +12631,14 @@
       </p:sp>
       <p:sp>
         <p:nvSpPr>
-          <p:cNvPr id="8" name="Rectangle 7"/>
+          <p:cNvPr id="9" name="Rectangle 8"/>
           <p:cNvSpPr/>
           <p:nvPr/>
         </p:nvSpPr>
         <p:spPr>
           <a:xfrm>
-            <a:off x="502920" y="1591056"/>
-            <a:ext cx="54864" cy="3072384"/>
+            <a:off x="502920" y="2258568"/>
+            <a:ext cx="54864" cy="2020824"/>
           </a:xfrm>
           <a:prstGeom prst="rect">
             <a:avLst/>
@@ -11207,13 +12675,13 @@
       </p:sp>
       <p:sp>
         <p:nvSpPr>
-          <p:cNvPr id="9" name="TextBox 8"/>
+          <p:cNvPr id="10" name="TextBox 9"/>
           <p:cNvSpPr txBox="1"/>
           <p:nvPr/>
         </p:nvSpPr>
         <p:spPr>
           <a:xfrm>
-            <a:off x="704088" y="1591056"/>
+            <a:off x="704088" y="2258568"/>
             <a:ext cx="3246120" cy="365760"/>
           </a:xfrm>
           <a:prstGeom prst="rect">
@@ -11242,21 +12710,21 @@
                 </a:solidFill>
                 <a:latin typeface="Roboto"/>
               </a:rPr>
-              <a:t>VP of Engineering</a:t>
-            </a:r>
-          </a:p>
-        </p:txBody>
-      </p:sp>
-      <p:sp>
-        <p:nvSpPr>
-          <p:cNvPr id="10" name="TextBox 9"/>
+              <a:t>Works like an engineer</a:t>
+            </a:r>
+          </a:p>
+        </p:txBody>
+      </p:sp>
+      <p:sp>
+        <p:nvSpPr>
+          <p:cNvPr id="11" name="TextBox 10"/>
           <p:cNvSpPr txBox="1"/>
           <p:nvPr/>
         </p:nvSpPr>
         <p:spPr>
           <a:xfrm>
-            <a:off x="704088" y="1956816"/>
-            <a:ext cx="3246120" cy="2697480"/>
+            <a:off x="704088" y="2624328"/>
+            <a:ext cx="3246120" cy="1645920"/>
           </a:xfrm>
           <a:prstGeom prst="rect">
             <a:avLst/>
@@ -11278,13 +12746,13 @@
               </a:spcAft>
             </a:pPr>
             <a:r>
-              <a:rPr sz="1350" b="0" i="1">
-                <a:solidFill>
-                  <a:srgbClr val="5A6472"/>
-                </a:solidFill>
-                <a:latin typeface="Roboto"/>
-              </a:rPr>
-              <a:t>“Is this a time-saver or a babysitting job?”</a:t>
+              <a:rPr sz="1400" b="0" i="0">
+                <a:solidFill>
+                  <a:srgbClr val="1C2430"/>
+                </a:solidFill>
+                <a:latin typeface="Roboto"/>
+              </a:rPr>
+              <a:t>Own shell, editor, browser</a:t>
             </a:r>
           </a:p>
           <a:p>
@@ -11297,64 +12765,27 @@
               </a:spcAft>
             </a:pPr>
             <a:r>
-              <a:rPr sz="1350" b="1" i="0">
-                <a:solidFill>
-                  <a:srgbClr val="E31837"/>
-                </a:solidFill>
-                <a:latin typeface="Roboto"/>
-              </a:rPr>
-              <a:t>→ </a:t>
-            </a:r>
-            <a:r>
-              <a:rPr sz="1350" b="0" i="0">
+              <a:rPr sz="1400" b="0" i="0">
                 <a:solidFill>
                   <a:srgbClr val="1C2430"/>
                 </a:solidFill>
                 <a:latin typeface="Roboto"/>
               </a:rPr>
-              <a:t>Reviewing ≪ writing</a:t>
-            </a:r>
-          </a:p>
-          <a:p>
-            <a:pPr algn="l">
-              <a:lnSpc>
-                <a:spcPct val="105000"/>
-              </a:lnSpc>
-              <a:spcAft>
-                <a:spcPts val="500"/>
-              </a:spcAft>
-            </a:pPr>
-            <a:r>
-              <a:rPr sz="1350" b="1" i="0">
-                <a:solidFill>
-                  <a:srgbClr val="E31837"/>
-                </a:solidFill>
-                <a:latin typeface="Roboto"/>
-              </a:rPr>
-              <a:t>→ </a:t>
-            </a:r>
-            <a:r>
-              <a:rPr sz="1350" b="0" i="0">
-                <a:solidFill>
-                  <a:srgbClr val="1C2430"/>
-                </a:solidFill>
-                <a:latin typeface="Roboto"/>
-              </a:rPr>
-              <a:t>Roadmap keeps moving</a:t>
-            </a:r>
-          </a:p>
-        </p:txBody>
-      </p:sp>
-      <p:sp>
-        <p:nvSpPr>
-          <p:cNvPr id="11" name="Rounded Rectangle 10"/>
+              <a:t>Runs builds &amp; tests as it goes</a:t>
+            </a:r>
+          </a:p>
+        </p:txBody>
+      </p:sp>
+      <p:sp>
+        <p:nvSpPr>
+          <p:cNvPr id="12" name="Rounded Rectangle 11"/>
           <p:cNvSpPr/>
           <p:nvPr/>
         </p:nvSpPr>
         <p:spPr>
           <a:xfrm>
-            <a:off x="4297680" y="1481328"/>
-            <a:ext cx="3611880" cy="3291840"/>
+            <a:off x="4297680" y="2148840"/>
+            <a:ext cx="3611880" cy="2240280"/>
           </a:xfrm>
           <a:prstGeom prst="roundRect">
             <a:avLst>
@@ -11393,14 +12824,14 @@
       </p:sp>
       <p:sp>
         <p:nvSpPr>
-          <p:cNvPr id="12" name="Rectangle 11"/>
+          <p:cNvPr id="13" name="Rectangle 12"/>
           <p:cNvSpPr/>
           <p:nvPr/>
         </p:nvSpPr>
         <p:spPr>
           <a:xfrm>
-            <a:off x="4297680" y="1591056"/>
-            <a:ext cx="54864" cy="3072384"/>
+            <a:off x="4297680" y="2258568"/>
+            <a:ext cx="54864" cy="2020824"/>
           </a:xfrm>
           <a:prstGeom prst="rect">
             <a:avLst/>
@@ -11437,13 +12868,13 @@
       </p:sp>
       <p:sp>
         <p:nvSpPr>
-          <p:cNvPr id="13" name="TextBox 12"/>
+          <p:cNvPr id="14" name="TextBox 13"/>
           <p:cNvSpPr txBox="1"/>
           <p:nvPr/>
         </p:nvSpPr>
         <p:spPr>
           <a:xfrm>
-            <a:off x="4498848" y="1591056"/>
+            <a:off x="4498848" y="2258568"/>
             <a:ext cx="3246120" cy="365760"/>
           </a:xfrm>
           <a:prstGeom prst="rect">
@@ -11472,21 +12903,21 @@
                 </a:solidFill>
                 <a:latin typeface="Roboto"/>
               </a:rPr>
-              <a:t>Security Engineer</a:t>
-            </a:r>
-          </a:p>
-        </p:txBody>
-      </p:sp>
-      <p:sp>
-        <p:nvSpPr>
-          <p:cNvPr id="14" name="TextBox 13"/>
+              <a:t>Fits your SDLC</a:t>
+            </a:r>
+          </a:p>
+        </p:txBody>
+      </p:sp>
+      <p:sp>
+        <p:nvSpPr>
+          <p:cNvPr id="15" name="TextBox 14"/>
           <p:cNvSpPr txBox="1"/>
           <p:nvPr/>
         </p:nvSpPr>
         <p:spPr>
           <a:xfrm>
-            <a:off x="4498848" y="1956816"/>
-            <a:ext cx="3246120" cy="2697480"/>
+            <a:off x="4498848" y="2624328"/>
+            <a:ext cx="3246120" cy="1645920"/>
           </a:xfrm>
           <a:prstGeom prst="rect">
             <a:avLst/>
@@ -11508,13 +12939,13 @@
               </a:spcAft>
             </a:pPr>
             <a:r>
-              <a:rPr sz="1350" b="0" i="1">
-                <a:solidFill>
-                  <a:srgbClr val="5A6472"/>
-                </a:solidFill>
-                <a:latin typeface="Roboto"/>
-              </a:rPr>
-              <a:t>“An autonomous agent in a bank's codebase?”</a:t>
+              <a:rPr sz="1400" b="0" i="0">
+                <a:solidFill>
+                  <a:srgbClr val="1C2430"/>
+                </a:solidFill>
+                <a:latin typeface="Roboto"/>
+              </a:rPr>
+              <a:t>Everything lands as a PR</a:t>
             </a:r>
           </a:p>
           <a:p>
@@ -11527,64 +12958,27 @@
               </a:spcAft>
             </a:pPr>
             <a:r>
-              <a:rPr sz="1350" b="1" i="0">
-                <a:solidFill>
-                  <a:srgbClr val="E31837"/>
-                </a:solidFill>
-                <a:latin typeface="Roboto"/>
-              </a:rPr>
-              <a:t>→ </a:t>
-            </a:r>
-            <a:r>
-              <a:rPr sz="1350" b="0" i="0">
+              <a:rPr sz="1400" b="0" i="0">
                 <a:solidFill>
                   <a:srgbClr val="1C2430"/>
                 </a:solidFill>
                 <a:latin typeface="Roboto"/>
               </a:rPr>
-              <a:t>Nothing merges without human approval</a:t>
-            </a:r>
-          </a:p>
-          <a:p>
-            <a:pPr algn="l">
-              <a:lnSpc>
-                <a:spcPct val="105000"/>
-              </a:lnSpc>
-              <a:spcAft>
-                <a:spcPts val="500"/>
-              </a:spcAft>
-            </a:pPr>
-            <a:r>
-              <a:rPr sz="1350" b="1" i="0">
-                <a:solidFill>
-                  <a:srgbClr val="E31837"/>
-                </a:solidFill>
-                <a:latin typeface="Roboto"/>
-              </a:rPr>
-              <a:t>→ </a:t>
-            </a:r>
-            <a:r>
-              <a:rPr sz="1350" b="0" i="0">
-                <a:solidFill>
-                  <a:srgbClr val="1C2430"/>
-                </a:solidFill>
-                <a:latin typeface="Roboto"/>
-              </a:rPr>
-              <a:t>Every action logged &amp; replayable</a:t>
-            </a:r>
-          </a:p>
-        </p:txBody>
-      </p:sp>
-      <p:sp>
-        <p:nvSpPr>
-          <p:cNvPr id="15" name="Rounded Rectangle 14"/>
+              <a:t>Your CI, your approvals — unchanged</a:t>
+            </a:r>
+          </a:p>
+        </p:txBody>
+      </p:sp>
+      <p:sp>
+        <p:nvSpPr>
+          <p:cNvPr id="16" name="Rounded Rectangle 15"/>
           <p:cNvSpPr/>
           <p:nvPr/>
         </p:nvSpPr>
         <p:spPr>
           <a:xfrm>
-            <a:off x="8092440" y="1481328"/>
-            <a:ext cx="3611880" cy="3291840"/>
+            <a:off x="8092440" y="2148840"/>
+            <a:ext cx="3611880" cy="2240280"/>
           </a:xfrm>
           <a:prstGeom prst="roundRect">
             <a:avLst>
@@ -11623,14 +13017,14 @@
       </p:sp>
       <p:sp>
         <p:nvSpPr>
-          <p:cNvPr id="16" name="Rectangle 15"/>
+          <p:cNvPr id="17" name="Rectangle 16"/>
           <p:cNvSpPr/>
           <p:nvPr/>
         </p:nvSpPr>
         <p:spPr>
           <a:xfrm>
-            <a:off x="8092440" y="1591056"/>
-            <a:ext cx="54864" cy="3072384"/>
+            <a:off x="8092440" y="2258568"/>
+            <a:ext cx="54864" cy="2020824"/>
           </a:xfrm>
           <a:prstGeom prst="rect">
             <a:avLst/>
@@ -11667,13 +13061,13 @@
       </p:sp>
       <p:sp>
         <p:nvSpPr>
-          <p:cNvPr id="17" name="TextBox 16"/>
+          <p:cNvPr id="18" name="TextBox 17"/>
           <p:cNvSpPr txBox="1"/>
           <p:nvPr/>
         </p:nvSpPr>
         <p:spPr>
           <a:xfrm>
-            <a:off x="8293608" y="1591056"/>
+            <a:off x="8293608" y="2258568"/>
             <a:ext cx="3246120" cy="365760"/>
           </a:xfrm>
           <a:prstGeom prst="rect">
@@ -11702,21 +13096,21 @@
                 </a:solidFill>
                 <a:latin typeface="Roboto"/>
               </a:rPr>
-              <a:t>Chief Architect</a:t>
-            </a:r>
-          </a:p>
-        </p:txBody>
-      </p:sp>
-      <p:sp>
-        <p:nvSpPr>
-          <p:cNvPr id="18" name="TextBox 17"/>
+              <a:t>Built for this work</a:t>
+            </a:r>
+          </a:p>
+        </p:txBody>
+      </p:sp>
+      <p:sp>
+        <p:nvSpPr>
+          <p:cNvPr id="19" name="TextBox 18"/>
           <p:cNvSpPr txBox="1"/>
           <p:nvPr/>
         </p:nvSpPr>
         <p:spPr>
           <a:xfrm>
-            <a:off x="8293608" y="1956816"/>
-            <a:ext cx="3246120" cy="2697480"/>
+            <a:off x="8293608" y="2624328"/>
+            <a:ext cx="3246120" cy="1645920"/>
           </a:xfrm>
           <a:prstGeom prst="rect">
             <a:avLst/>
@@ -11738,13 +13132,13 @@
               </a:spcAft>
             </a:pPr>
             <a:r>
-              <a:rPr sz="1350" b="0" i="1">
-                <a:solidFill>
-                  <a:srgbClr val="5A6472"/>
-                </a:solidFill>
-                <a:latin typeface="Roboto"/>
-              </a:rPr>
-              <a:t>“Will it respect our standards?”</a:t>
+              <a:rPr sz="1400" b="0" i="0">
+                <a:solidFill>
+                  <a:srgbClr val="1C2430"/>
+                </a:solidFill>
+                <a:latin typeface="Roboto"/>
+              </a:rPr>
+              <a:t>Migrations, upgrades, refactors</a:t>
             </a:r>
           </a:p>
           <a:p>
@@ -11757,57 +13151,108 @@
               </a:spcAft>
             </a:pPr>
             <a:r>
-              <a:rPr sz="1350" b="1" i="0">
-                <a:solidFill>
-                  <a:srgbClr val="E31837"/>
-                </a:solidFill>
-                <a:latin typeface="Roboto"/>
-              </a:rPr>
-              <a:t>→ </a:t>
-            </a:r>
-            <a:r>
-              <a:rPr sz="1350" b="0" i="0">
+              <a:rPr sz="1400" b="0" i="0">
                 <a:solidFill>
                   <a:srgbClr val="1C2430"/>
                 </a:solidFill>
                 <a:latin typeface="Roboto"/>
               </a:rPr>
-              <a:t>Your conventions, applied consistently</a:t>
-            </a:r>
-          </a:p>
+              <a:t>Parallel sessions · full audit log</a:t>
+            </a:r>
+          </a:p>
+        </p:txBody>
+      </p:sp>
+      <p:sp>
+        <p:nvSpPr>
+          <p:cNvPr id="20" name="Rounded Rectangle 19"/>
+          <p:cNvSpPr/>
+          <p:nvPr/>
+        </p:nvSpPr>
+        <p:spPr>
+          <a:xfrm>
+            <a:off x="502920" y="4617720"/>
+            <a:ext cx="11201400" cy="868680"/>
+          </a:xfrm>
+          <a:prstGeom prst="roundRect">
+            <a:avLst>
+              <a:gd name="adj" fmla="val 10000"/>
+            </a:avLst>
+          </a:prstGeom>
+          <a:solidFill>
+            <a:srgbClr val="012169"/>
+          </a:solidFill>
+          <a:ln>
+            <a:noFill/>
+          </a:ln>
+          <a:effectLst/>
+        </p:spPr>
+        <p:style>
+          <a:lnRef idx="1">
+            <a:schemeClr val="accent1"/>
+          </a:lnRef>
+          <a:fillRef idx="3">
+            <a:schemeClr val="accent1"/>
+          </a:fillRef>
+          <a:effectRef idx="2">
+            <a:schemeClr val="accent1"/>
+          </a:effectRef>
+          <a:fontRef idx="minor">
+            <a:schemeClr val="lt1"/>
+          </a:fontRef>
+        </p:style>
+        <p:txBody>
+          <a:bodyPr rtlCol="0" anchor="ctr"/>
+          <a:lstStyle/>
+          <a:p>
+            <a:pPr algn="ctr"/>
+          </a:p>
+        </p:txBody>
+      </p:sp>
+      <p:sp>
+        <p:nvSpPr>
+          <p:cNvPr id="21" name="TextBox 20"/>
+          <p:cNvSpPr txBox="1"/>
+          <p:nvPr/>
+        </p:nvSpPr>
+        <p:spPr>
+          <a:xfrm>
+            <a:off x="777240" y="4828032"/>
+            <a:ext cx="10698480" cy="594360"/>
+          </a:xfrm>
+          <a:prstGeom prst="rect">
+            <a:avLst/>
+          </a:prstGeom>
+          <a:noFill/>
+        </p:spPr>
+        <p:txBody>
+          <a:bodyPr wrap="square" anchor="t">
+            <a:spAutoFit/>
+          </a:bodyPr>
+          <a:lstStyle/>
           <a:p>
             <a:pPr algn="l">
               <a:lnSpc>
-                <a:spcPct val="105000"/>
-              </a:lnSpc>
-              <a:spcAft>
-                <a:spcPts val="500"/>
-              </a:spcAft>
-            </a:pPr>
-            <a:r>
-              <a:rPr sz="1350" b="1" i="0">
-                <a:solidFill>
-                  <a:srgbClr val="E31837"/>
-                </a:solidFill>
-                <a:latin typeface="Roboto"/>
-              </a:rPr>
-              <a:t>→ </a:t>
-            </a:r>
-            <a:r>
-              <a:rPr sz="1350" b="0" i="0">
-                <a:solidFill>
-                  <a:srgbClr val="1C2430"/>
-                </a:solidFill>
-                <a:latin typeface="Roboto"/>
-              </a:rPr>
-              <a:t>Library validated before downstream</a:t>
-            </a:r>
-          </a:p>
-        </p:txBody>
-      </p:sp>
-      <p:sp>
-        <p:nvSpPr>
-          <p:cNvPr id="19" name="TextBox 18"/>
+                <a:spcPct val="100000"/>
+              </a:lnSpc>
+              <a:spcAft>
+                <a:spcPts val="600"/>
+              </a:spcAft>
+            </a:pPr>
+            <a:r>
+              <a:rPr sz="1600" b="1" i="0">
+                <a:solidFill>
+                  <a:srgbClr val="FFFFFF"/>
+                </a:solidFill>
+                <a:latin typeface="Roboto"/>
+              </a:rPr>
+              <a:t>Your engineers stop being typists and become reviewers.</a:t>
+            </a:r>
+          </a:p>
+        </p:txBody>
+      </p:sp>
+      <p:sp>
+        <p:nvSpPr>
+          <p:cNvPr id="22" name="TextBox 21"/>
           <p:cNvSpPr txBox="1"/>
           <p:nvPr/>
         </p:nvSpPr>
@@ -11990,7 +13435,7 @@
                 </a:solidFill>
                 <a:latin typeface="Roboto"/>
               </a:rPr>
-              <a:t>ENOUGH SLIDES — LET'S WATCH IT WORK</a:t>
+              <a:t>ADDRESSING THE ELEPHANTS IN THE ROOM</a:t>
             </a:r>
           </a:p>
         </p:txBody>
@@ -12026,13 +13471,13 @@
               </a:spcAft>
             </a:pPr>
             <a:r>
-              <a:rPr sz="2200" b="1" i="0">
+              <a:rPr sz="2700" b="1" i="0">
                 <a:solidFill>
                   <a:srgbClr val="FFFFFF"/>
                 </a:solidFill>
                 <a:latin typeface="Roboto"/>
               </a:rPr>
-              <a:t>Live demo: Devin migrates a BofA-shaped banking app, 14 → 18</a:t>
+              <a:t>What each of you is probably thinking</a:t>
             </a:r>
           </a:p>
         </p:txBody>
@@ -12088,7 +13533,7 @@
         <p:spPr>
           <a:xfrm>
             <a:off x="502920" y="1481328"/>
-            <a:ext cx="4846320" cy="3931920"/>
+            <a:ext cx="3611880" cy="3291840"/>
           </a:xfrm>
           <a:prstGeom prst="roundRect">
             <a:avLst>
@@ -12134,7 +13579,7 @@
         <p:spPr>
           <a:xfrm>
             <a:off x="502920" y="1591056"/>
-            <a:ext cx="54864" cy="3712463"/>
+            <a:ext cx="54864" cy="3072384"/>
           </a:xfrm>
           <a:prstGeom prst="rect">
             <a:avLst/>
@@ -12178,7 +13623,7 @@
         <p:spPr>
           <a:xfrm>
             <a:off x="704088" y="1591056"/>
-            <a:ext cx="4480559" cy="365760"/>
+            <a:ext cx="3246120" cy="365760"/>
           </a:xfrm>
           <a:prstGeom prst="rect">
             <a:avLst/>
@@ -12206,7 +13651,7 @@
                 </a:solidFill>
                 <a:latin typeface="Roboto"/>
               </a:rPr>
-              <a:t>A codebase shaped like yours</a:t>
+              <a:t>VP of Engineering</a:t>
             </a:r>
           </a:p>
         </p:txBody>
@@ -12220,7 +13665,7 @@
         <p:spPr>
           <a:xfrm>
             <a:off x="704088" y="1956816"/>
-            <a:ext cx="4480559" cy="3337560"/>
+            <a:ext cx="3246120" cy="2697480"/>
           </a:xfrm>
           <a:prstGeom prst="rect">
             <a:avLst/>
@@ -12242,13 +13687,41 @@
               </a:spcAft>
             </a:pPr>
             <a:r>
-              <a:rPr sz="1400" b="1" i="0">
+              <a:rPr sz="1350" b="0" i="1">
+                <a:solidFill>
+                  <a:srgbClr val="5A6472"/>
+                </a:solidFill>
+                <a:latin typeface="Roboto"/>
+              </a:rPr>
+              <a:t>“Is this a time-saver or a babysitting job?”</a:t>
+            </a:r>
+          </a:p>
+          <a:p>
+            <a:pPr algn="l">
+              <a:lnSpc>
+                <a:spcPct val="105000"/>
+              </a:lnSpc>
+              <a:spcAft>
+                <a:spcPts val="500"/>
+              </a:spcAft>
+            </a:pPr>
+            <a:r>
+              <a:rPr sz="1350" b="1" i="0">
+                <a:solidFill>
+                  <a:srgbClr val="E31837"/>
+                </a:solidFill>
+                <a:latin typeface="Roboto"/>
+              </a:rPr>
+              <a:t>→ </a:t>
+            </a:r>
+            <a:r>
+              <a:rPr sz="1350" b="0" i="0">
                 <a:solidFill>
                   <a:srgbClr val="1C2430"/>
                 </a:solidFill>
                 <a:latin typeface="Roboto"/>
               </a:rPr>
-              <a:t>Shared component library</a:t>
+              <a:t>Reviewing ≪ writing</a:t>
             </a:r>
           </a:p>
           <a:p>
@@ -12261,51 +13734,22 @@
               </a:spcAft>
             </a:pPr>
             <a:r>
-              <a:rPr sz="1400" b="0" i="0">
+              <a:rPr sz="1350" b="1" i="0">
+                <a:solidFill>
+                  <a:srgbClr val="E31837"/>
+                </a:solidFill>
+                <a:latin typeface="Roboto"/>
+              </a:rPr>
+              <a:t>→ </a:t>
+            </a:r>
+            <a:r>
+              <a:rPr sz="1350" b="0" i="0">
                 <a:solidFill>
                   <a:srgbClr val="1C2430"/>
                 </a:solidFill>
                 <a:latin typeface="Roboto"/>
               </a:rPr>
-              <a:t>SSO/MFA · analytics SDK · financial data</a:t>
-            </a:r>
-          </a:p>
-          <a:p>
-            <a:pPr algn="l">
-              <a:lnSpc>
-                <a:spcPct val="105000"/>
-              </a:lnSpc>
-              <a:spcAft>
-                <a:spcPts val="500"/>
-              </a:spcAft>
-            </a:pPr>
-            <a:r>
-              <a:rPr sz="1400" b="0" i="0">
-                <a:solidFill>
-                  <a:srgbClr val="1C2430"/>
-                </a:solidFill>
-                <a:latin typeface="Roboto"/>
-              </a:rPr>
-              <a:t>Custom design system on Angular Material</a:t>
-            </a:r>
-          </a:p>
-          <a:p>
-            <a:pPr algn="l">
-              <a:lnSpc>
-                <a:spcPct val="105000"/>
-              </a:lnSpc>
-              <a:spcAft>
-                <a:spcPts val="500"/>
-              </a:spcAft>
-            </a:pPr>
-            <a:r>
-              <a:rPr sz="1400" b="0" i="1">
-                <a:solidFill>
-                  <a:srgbClr val="5A6472"/>
-                </a:solidFill>
-                <a:latin typeface="Roboto"/>
-              </a:rPr>
-              <a:t>Mock code, real architecture.</a:t>
+              <a:t>Roadmap keeps moving</a:t>
             </a:r>
           </a:p>
         </p:txBody>
@@ -12318,8 +13762,8 @@
         </p:nvSpPr>
         <p:spPr>
           <a:xfrm>
-            <a:off x="5532120" y="1481328"/>
-            <a:ext cx="6172200" cy="3931920"/>
+            <a:off x="4297680" y="1481328"/>
+            <a:ext cx="3611880" cy="3291840"/>
           </a:xfrm>
           <a:prstGeom prst="roundRect">
             <a:avLst>
@@ -12364,8 +13808,8 @@
         </p:nvSpPr>
         <p:spPr>
           <a:xfrm>
-            <a:off x="5532120" y="1591056"/>
-            <a:ext cx="54864" cy="3712463"/>
+            <a:off x="4297680" y="1591056"/>
+            <a:ext cx="54864" cy="3072384"/>
           </a:xfrm>
           <a:prstGeom prst="rect">
             <a:avLst/>
@@ -12408,8 +13852,8 @@
         </p:nvSpPr>
         <p:spPr>
           <a:xfrm>
-            <a:off x="5733288" y="1591056"/>
-            <a:ext cx="5806440" cy="365760"/>
+            <a:off x="4498848" y="1591056"/>
+            <a:ext cx="3246120" cy="365760"/>
           </a:xfrm>
           <a:prstGeom prst="rect">
             <a:avLst/>
@@ -12437,7 +13881,7 @@
                 </a:solidFill>
                 <a:latin typeface="Roboto"/>
               </a:rPr>
-              <a:t>What Devin will do</a:t>
+              <a:t>Security Engineer</a:t>
             </a:r>
           </a:p>
         </p:txBody>
@@ -12450,8 +13894,8 @@
         </p:nvSpPr>
         <p:spPr>
           <a:xfrm>
-            <a:off x="5733288" y="1956816"/>
-            <a:ext cx="5806440" cy="3337560"/>
+            <a:off x="4498848" y="1956816"/>
+            <a:ext cx="3246120" cy="2697480"/>
           </a:xfrm>
           <a:prstGeom prst="rect">
             <a:avLst/>
@@ -12473,22 +13917,271 @@
               </a:spcAft>
             </a:pPr>
             <a:r>
+              <a:rPr sz="1350" b="0" i="1">
+                <a:solidFill>
+                  <a:srgbClr val="5A6472"/>
+                </a:solidFill>
+                <a:latin typeface="Roboto"/>
+              </a:rPr>
+              <a:t>“An autonomous agent in a bank's codebase?”</a:t>
+            </a:r>
+          </a:p>
+          <a:p>
+            <a:pPr algn="l">
+              <a:lnSpc>
+                <a:spcPct val="105000"/>
+              </a:lnSpc>
+              <a:spcAft>
+                <a:spcPts val="500"/>
+              </a:spcAft>
+            </a:pPr>
+            <a:r>
+              <a:rPr sz="1350" b="1" i="0">
+                <a:solidFill>
+                  <a:srgbClr val="E31837"/>
+                </a:solidFill>
+                <a:latin typeface="Roboto"/>
+              </a:rPr>
+              <a:t>→ </a:t>
+            </a:r>
+            <a:r>
+              <a:rPr sz="1350" b="0" i="0">
+                <a:solidFill>
+                  <a:srgbClr val="1C2430"/>
+                </a:solidFill>
+                <a:latin typeface="Roboto"/>
+              </a:rPr>
+              <a:t>Nothing merges without human approval</a:t>
+            </a:r>
+          </a:p>
+          <a:p>
+            <a:pPr algn="l">
+              <a:lnSpc>
+                <a:spcPct val="105000"/>
+              </a:lnSpc>
+              <a:spcAft>
+                <a:spcPts val="500"/>
+              </a:spcAft>
+            </a:pPr>
+            <a:r>
+              <a:rPr sz="1350" b="1" i="0">
+                <a:solidFill>
+                  <a:srgbClr val="E31837"/>
+                </a:solidFill>
+                <a:latin typeface="Roboto"/>
+              </a:rPr>
+              <a:t>→ </a:t>
+            </a:r>
+            <a:r>
+              <a:rPr sz="1350" b="0" i="0">
+                <a:solidFill>
+                  <a:srgbClr val="1C2430"/>
+                </a:solidFill>
+                <a:latin typeface="Roboto"/>
+              </a:rPr>
+              <a:t>Every action logged &amp; replayable</a:t>
+            </a:r>
+          </a:p>
+        </p:txBody>
+      </p:sp>
+      <p:sp>
+        <p:nvSpPr>
+          <p:cNvPr id="15" name="Rounded Rectangle 14"/>
+          <p:cNvSpPr/>
+          <p:nvPr/>
+        </p:nvSpPr>
+        <p:spPr>
+          <a:xfrm>
+            <a:off x="8092440" y="1481328"/>
+            <a:ext cx="3611880" cy="3291840"/>
+          </a:xfrm>
+          <a:prstGeom prst="roundRect">
+            <a:avLst>
+              <a:gd name="adj" fmla="val 6000"/>
+            </a:avLst>
+          </a:prstGeom>
+          <a:solidFill>
+            <a:srgbClr val="F4F6F9"/>
+          </a:solidFill>
+          <a:ln>
+            <a:noFill/>
+          </a:ln>
+          <a:effectLst/>
+        </p:spPr>
+        <p:style>
+          <a:lnRef idx="1">
+            <a:schemeClr val="accent1"/>
+          </a:lnRef>
+          <a:fillRef idx="3">
+            <a:schemeClr val="accent1"/>
+          </a:fillRef>
+          <a:effectRef idx="2">
+            <a:schemeClr val="accent1"/>
+          </a:effectRef>
+          <a:fontRef idx="minor">
+            <a:schemeClr val="lt1"/>
+          </a:fontRef>
+        </p:style>
+        <p:txBody>
+          <a:bodyPr rtlCol="0" anchor="ctr"/>
+          <a:lstStyle/>
+          <a:p>
+            <a:pPr algn="ctr"/>
+          </a:p>
+        </p:txBody>
+      </p:sp>
+      <p:sp>
+        <p:nvSpPr>
+          <p:cNvPr id="16" name="Rectangle 15"/>
+          <p:cNvSpPr/>
+          <p:nvPr/>
+        </p:nvSpPr>
+        <p:spPr>
+          <a:xfrm>
+            <a:off x="8092440" y="1591056"/>
+            <a:ext cx="54864" cy="3072384"/>
+          </a:xfrm>
+          <a:prstGeom prst="rect">
+            <a:avLst/>
+          </a:prstGeom>
+          <a:solidFill>
+            <a:srgbClr val="E31837"/>
+          </a:solidFill>
+          <a:ln>
+            <a:noFill/>
+          </a:ln>
+          <a:effectLst/>
+        </p:spPr>
+        <p:style>
+          <a:lnRef idx="1">
+            <a:schemeClr val="accent1"/>
+          </a:lnRef>
+          <a:fillRef idx="3">
+            <a:schemeClr val="accent1"/>
+          </a:fillRef>
+          <a:effectRef idx="2">
+            <a:schemeClr val="accent1"/>
+          </a:effectRef>
+          <a:fontRef idx="minor">
+            <a:schemeClr val="lt1"/>
+          </a:fontRef>
+        </p:style>
+        <p:txBody>
+          <a:bodyPr rtlCol="0" anchor="ctr"/>
+          <a:lstStyle/>
+          <a:p>
+            <a:pPr algn="ctr"/>
+          </a:p>
+        </p:txBody>
+      </p:sp>
+      <p:sp>
+        <p:nvSpPr>
+          <p:cNvPr id="17" name="TextBox 16"/>
+          <p:cNvSpPr txBox="1"/>
+          <p:nvPr/>
+        </p:nvSpPr>
+        <p:spPr>
+          <a:xfrm>
+            <a:off x="8293608" y="1591056"/>
+            <a:ext cx="3246120" cy="365760"/>
+          </a:xfrm>
+          <a:prstGeom prst="rect">
+            <a:avLst/>
+          </a:prstGeom>
+          <a:noFill/>
+        </p:spPr>
+        <p:txBody>
+          <a:bodyPr wrap="square" anchor="t">
+            <a:spAutoFit/>
+          </a:bodyPr>
+          <a:lstStyle/>
+          <a:p>
+            <a:pPr algn="l">
+              <a:lnSpc>
+                <a:spcPct val="100000"/>
+              </a:lnSpc>
+              <a:spcAft>
+                <a:spcPts val="600"/>
+              </a:spcAft>
+            </a:pPr>
+            <a:r>
               <a:rPr sz="1400" b="1" i="0">
                 <a:solidFill>
+                  <a:srgbClr val="012169"/>
+                </a:solidFill>
+                <a:latin typeface="Roboto"/>
+              </a:rPr>
+              <a:t>Chief Architect</a:t>
+            </a:r>
+          </a:p>
+        </p:txBody>
+      </p:sp>
+      <p:sp>
+        <p:nvSpPr>
+          <p:cNvPr id="18" name="TextBox 17"/>
+          <p:cNvSpPr txBox="1"/>
+          <p:nvPr/>
+        </p:nvSpPr>
+        <p:spPr>
+          <a:xfrm>
+            <a:off x="8293608" y="1956816"/>
+            <a:ext cx="3246120" cy="2697480"/>
+          </a:xfrm>
+          <a:prstGeom prst="rect">
+            <a:avLst/>
+          </a:prstGeom>
+          <a:noFill/>
+        </p:spPr>
+        <p:txBody>
+          <a:bodyPr wrap="square" anchor="t">
+            <a:spAutoFit/>
+          </a:bodyPr>
+          <a:lstStyle/>
+          <a:p>
+            <a:pPr algn="l">
+              <a:lnSpc>
+                <a:spcPct val="105000"/>
+              </a:lnSpc>
+              <a:spcAft>
+                <a:spcPts val="500"/>
+              </a:spcAft>
+            </a:pPr>
+            <a:r>
+              <a:rPr sz="1350" b="0" i="1">
+                <a:solidFill>
+                  <a:srgbClr val="5A6472"/>
+                </a:solidFill>
+                <a:latin typeface="Roboto"/>
+              </a:rPr>
+              <a:t>“Will it respect our standards?”</a:t>
+            </a:r>
+          </a:p>
+          <a:p>
+            <a:pPr algn="l">
+              <a:lnSpc>
+                <a:spcPct val="105000"/>
+              </a:lnSpc>
+              <a:spcAft>
+                <a:spcPts val="500"/>
+              </a:spcAft>
+            </a:pPr>
+            <a:r>
+              <a:rPr sz="1350" b="1" i="0">
+                <a:solidFill>
                   <a:srgbClr val="E31837"/>
                 </a:solidFill>
                 <a:latin typeface="Roboto"/>
               </a:rPr>
-              <a:t>1. </a:t>
-            </a:r>
-            <a:r>
-              <a:rPr sz="1400" b="0" i="0">
+              <a:t>→ </a:t>
+            </a:r>
+            <a:r>
+              <a:rPr sz="1350" b="0" i="0">
                 <a:solidFill>
                   <a:srgbClr val="1C2430"/>
                 </a:solidFill>
                 <a:latin typeface="Roboto"/>
               </a:rPr>
-              <a:t>Baseline — build + tests green</a:t>
+              <a:t>Your conventions, applied consistently</a:t>
             </a:r>
           </a:p>
           <a:p>
@@ -12501,113 +14194,29 @@
               </a:spcAft>
             </a:pPr>
             <a:r>
-              <a:rPr sz="1400" b="1" i="0">
+              <a:rPr sz="1350" b="1" i="0">
                 <a:solidFill>
                   <a:srgbClr val="E31837"/>
                 </a:solidFill>
                 <a:latin typeface="Roboto"/>
               </a:rPr>
-              <a:t>2. </a:t>
-            </a:r>
-            <a:r>
-              <a:rPr sz="1400" b="0" i="0">
+              <a:t>→ </a:t>
+            </a:r>
+            <a:r>
+              <a:rPr sz="1350" b="0" i="0">
                 <a:solidFill>
                   <a:srgbClr val="1C2430"/>
                 </a:solidFill>
                 <a:latin typeface="Roboto"/>
               </a:rPr>
-              <a:t>Stepwise ng update 14→15→16→17→18</a:t>
-            </a:r>
-          </a:p>
-          <a:p>
-            <a:pPr algn="l">
-              <a:lnSpc>
-                <a:spcPct val="105000"/>
-              </a:lnSpc>
-              <a:spcAft>
-                <a:spcPts val="500"/>
-              </a:spcAft>
-            </a:pPr>
-            <a:r>
-              <a:rPr sz="1400" b="1" i="0">
-                <a:solidFill>
-                  <a:srgbClr val="E31837"/>
-                </a:solidFill>
-                <a:latin typeface="Roboto"/>
-              </a:rPr>
-              <a:t>3. </a:t>
-            </a:r>
-            <a:r>
-              <a:rPr sz="1400" b="0" i="0">
-                <a:solidFill>
-                  <a:srgbClr val="1C2430"/>
-                </a:solidFill>
-                <a:latin typeface="Roboto"/>
-              </a:rPr>
-              <a:t>Modernize 5 legacy patterns</a:t>
-            </a:r>
-          </a:p>
-          <a:p>
-            <a:pPr algn="l">
-              <a:lnSpc>
-                <a:spcPct val="105000"/>
-              </a:lnSpc>
-              <a:spcAft>
-                <a:spcPts val="500"/>
-              </a:spcAft>
-            </a:pPr>
-            <a:r>
-              <a:rPr sz="1400" b="1" i="0">
-                <a:solidFill>
-                  <a:srgbClr val="E31837"/>
-                </a:solidFill>
-                <a:latin typeface="Roboto"/>
-              </a:rPr>
-              <a:t>4. </a:t>
-            </a:r>
-            <a:r>
-              <a:rPr sz="1400" b="0" i="0">
-                <a:solidFill>
-                  <a:srgbClr val="1C2430"/>
-                </a:solidFill>
-                <a:latin typeface="Roboto"/>
-              </a:rPr>
-              <a:t>Validate — zero legacy patterns remain</a:t>
-            </a:r>
-          </a:p>
-          <a:p>
-            <a:pPr algn="l">
-              <a:lnSpc>
-                <a:spcPct val="105000"/>
-              </a:lnSpc>
-              <a:spcAft>
-                <a:spcPts val="500"/>
-              </a:spcAft>
-            </a:pPr>
-            <a:r>
-              <a:rPr sz="1400" b="1" i="0">
-                <a:solidFill>
-                  <a:srgbClr val="E31837"/>
-                </a:solidFill>
-                <a:latin typeface="Roboto"/>
-              </a:rPr>
-              <a:t>5. </a:t>
-            </a:r>
-            <a:r>
-              <a:rPr sz="1400" b="0" i="0">
-                <a:solidFill>
-                  <a:srgbClr val="1C2430"/>
-                </a:solidFill>
-                <a:latin typeface="Roboto"/>
-              </a:rPr>
-              <a:t>Deliver — reviewable PRs</a:t>
-            </a:r>
-          </a:p>
-        </p:txBody>
-      </p:sp>
-      <p:sp>
-        <p:nvSpPr>
-          <p:cNvPr id="15" name="TextBox 14"/>
+              <a:t>Library validated before downstream</a:t>
+            </a:r>
+          </a:p>
+        </p:txBody>
+      </p:sp>
+      <p:sp>
+        <p:nvSpPr>
+          <p:cNvPr id="19" name="TextBox 18"/>
           <p:cNvSpPr txBox="1"/>
           <p:nvPr/>
         </p:nvSpPr>
@@ -12790,7 +14399,7 @@
                 </a:solidFill>
                 <a:latin typeface="Roboto"/>
               </a:rPr>
-              <a:t>FROM DEMO TO YOUR REALITY</a:t>
+              <a:t>ENOUGH SLIDES — LET'S WATCH IT WORK</a:t>
             </a:r>
           </a:p>
         </p:txBody>
@@ -12826,13 +14435,13 @@
               </a:spcAft>
             </a:pPr>
             <a:r>
-              <a:rPr sz="2700" b="1" i="0">
+              <a:rPr sz="2200" b="1" i="0">
                 <a:solidFill>
                   <a:srgbClr val="FFFFFF"/>
                 </a:solidFill>
                 <a:latin typeface="Roboto"/>
               </a:rPr>
-              <a:t>How this maps to BofA's actual migration</a:t>
+              <a:t>Live demo: Devin migrates a BofA-shaped banking app, 14 → 18</a:t>
             </a:r>
           </a:p>
         </p:txBody>
@@ -12888,11 +14497,11 @@
         <p:spPr>
           <a:xfrm>
             <a:off x="502920" y="1481328"/>
-            <a:ext cx="11201400" cy="932688"/>
+            <a:ext cx="4846320" cy="3931920"/>
           </a:xfrm>
           <a:prstGeom prst="roundRect">
             <a:avLst>
-              <a:gd name="adj" fmla="val 10000"/>
+              <a:gd name="adj" fmla="val 6000"/>
             </a:avLst>
           </a:prstGeom>
           <a:solidFill>
@@ -12927,22 +14536,20 @@
       </p:sp>
       <p:sp>
         <p:nvSpPr>
-          <p:cNvPr id="8" name="Rounded Rectangle 7"/>
+          <p:cNvPr id="8" name="Rectangle 7"/>
           <p:cNvSpPr/>
           <p:nvPr/>
         </p:nvSpPr>
         <p:spPr>
           <a:xfrm>
-            <a:off x="685800" y="1645920"/>
-            <a:ext cx="1371600" cy="603504"/>
-          </a:xfrm>
-          <a:prstGeom prst="roundRect">
-            <a:avLst>
-              <a:gd name="adj" fmla="val 18000"/>
-            </a:avLst>
+            <a:off x="502920" y="1591056"/>
+            <a:ext cx="54864" cy="3712463"/>
+          </a:xfrm>
+          <a:prstGeom prst="rect">
+            <a:avLst/>
           </a:prstGeom>
           <a:solidFill>
-            <a:srgbClr val="012169"/>
+            <a:srgbClr val="E31837"/>
           </a:solidFill>
           <a:ln>
             <a:noFill/>
@@ -12979,8 +14586,8 @@
         </p:nvSpPr>
         <p:spPr>
           <a:xfrm>
-            <a:off x="685800" y="1783080"/>
-            <a:ext cx="1371600" cy="365760"/>
+            <a:off x="704088" y="1591056"/>
+            <a:ext cx="4480559" cy="365760"/>
           </a:xfrm>
           <a:prstGeom prst="rect">
             <a:avLst/>
@@ -12993,7 +14600,7 @@
           </a:bodyPr>
           <a:lstStyle/>
           <a:p>
-            <a:pPr algn="ctr">
+            <a:pPr algn="l">
               <a:lnSpc>
                 <a:spcPct val="100000"/>
               </a:lnSpc>
@@ -13002,13 +14609,13 @@
               </a:spcAft>
             </a:pPr>
             <a:r>
-              <a:rPr sz="1200" b="1" i="0">
-                <a:solidFill>
-                  <a:srgbClr val="FFFFFF"/>
-                </a:solidFill>
-                <a:latin typeface="Roboto"/>
-              </a:rPr>
-              <a:t>Week 0</a:t>
+              <a:rPr sz="1400" b="1" i="0">
+                <a:solidFill>
+                  <a:srgbClr val="012169"/>
+                </a:solidFill>
+                <a:latin typeface="Roboto"/>
+              </a:rPr>
+              <a:t>A codebase shaped like yours</a:t>
             </a:r>
           </a:p>
         </p:txBody>
@@ -13021,8 +14628,8 @@
         </p:nvSpPr>
         <p:spPr>
           <a:xfrm>
-            <a:off x="2286000" y="1591056"/>
-            <a:ext cx="9144000" cy="365760"/>
+            <a:off x="704088" y="1956816"/>
+            <a:ext cx="4480559" cy="3337560"/>
           </a:xfrm>
           <a:prstGeom prst="rect">
             <a:avLst/>
@@ -13037,298 +14644,95 @@
           <a:p>
             <a:pPr algn="l">
               <a:lnSpc>
-                <a:spcPct val="100000"/>
-              </a:lnSpc>
-              <a:spcAft>
-                <a:spcPts val="600"/>
-              </a:spcAft>
-            </a:pPr>
-            <a:r>
-              <a:rPr sz="1450" b="1" i="0">
-                <a:solidFill>
-                  <a:srgbClr val="012169"/>
-                </a:solidFill>
-                <a:latin typeface="Roboto"/>
-              </a:rPr>
-              <a:t>Scope &amp; safety rails</a:t>
-            </a:r>
-          </a:p>
-        </p:txBody>
-      </p:sp>
-      <p:sp>
-        <p:nvSpPr>
-          <p:cNvPr id="11" name="TextBox 10"/>
-          <p:cNvSpPr txBox="1"/>
-          <p:nvPr/>
-        </p:nvSpPr>
-        <p:spPr>
-          <a:xfrm>
-            <a:off x="2286000" y="1938528"/>
-            <a:ext cx="9144000" cy="411480"/>
-          </a:xfrm>
-          <a:prstGeom prst="rect">
-            <a:avLst/>
-          </a:prstGeom>
-          <a:noFill/>
-        </p:spPr>
-        <p:txBody>
-          <a:bodyPr wrap="square" anchor="t">
-            <a:spAutoFit/>
-          </a:bodyPr>
-          <a:lstStyle/>
+                <a:spcPct val="105000"/>
+              </a:lnSpc>
+              <a:spcAft>
+                <a:spcPts val="500"/>
+              </a:spcAft>
+            </a:pPr>
+            <a:r>
+              <a:rPr sz="1400" b="1" i="0">
+                <a:solidFill>
+                  <a:srgbClr val="1C2430"/>
+                </a:solidFill>
+                <a:latin typeface="Roboto"/>
+              </a:rPr>
+              <a:t>Shared component library</a:t>
+            </a:r>
+          </a:p>
           <a:p>
             <a:pPr algn="l">
               <a:lnSpc>
-                <a:spcPct val="100000"/>
-              </a:lnSpc>
-              <a:spcAft>
-                <a:spcPts val="600"/>
-              </a:spcAft>
-            </a:pPr>
-            <a:r>
-              <a:rPr sz="1200" b="0" i="0">
+                <a:spcPct val="105000"/>
+              </a:lnSpc>
+              <a:spcAft>
+                <a:spcPts val="500"/>
+              </a:spcAft>
+            </a:pPr>
+            <a:r>
+              <a:rPr sz="1400" b="0" i="0">
                 <a:solidFill>
                   <a:srgbClr val="1C2430"/>
                 </a:solidFill>
                 <a:latin typeface="Roboto"/>
               </a:rPr>
-              <a:t>Security review · success criteria</a:t>
-            </a:r>
-          </a:p>
-        </p:txBody>
-      </p:sp>
-      <p:sp>
-        <p:nvSpPr>
-          <p:cNvPr id="12" name="Rounded Rectangle 11"/>
+              <a:t>SSO/MFA · analytics SDK · financial data</a:t>
+            </a:r>
+          </a:p>
+          <a:p>
+            <a:pPr algn="l">
+              <a:lnSpc>
+                <a:spcPct val="105000"/>
+              </a:lnSpc>
+              <a:spcAft>
+                <a:spcPts val="500"/>
+              </a:spcAft>
+            </a:pPr>
+            <a:r>
+              <a:rPr sz="1400" b="0" i="0">
+                <a:solidFill>
+                  <a:srgbClr val="1C2430"/>
+                </a:solidFill>
+                <a:latin typeface="Roboto"/>
+              </a:rPr>
+              <a:t>Custom design system on Angular Material</a:t>
+            </a:r>
+          </a:p>
+          <a:p>
+            <a:pPr algn="l">
+              <a:lnSpc>
+                <a:spcPct val="105000"/>
+              </a:lnSpc>
+              <a:spcAft>
+                <a:spcPts val="500"/>
+              </a:spcAft>
+            </a:pPr>
+            <a:r>
+              <a:rPr sz="1400" b="0" i="1">
+                <a:solidFill>
+                  <a:srgbClr val="5A6472"/>
+                </a:solidFill>
+                <a:latin typeface="Roboto"/>
+              </a:rPr>
+              <a:t>Mock code, real architecture.</a:t>
+            </a:r>
+          </a:p>
+        </p:txBody>
+      </p:sp>
+      <p:sp>
+        <p:nvSpPr>
+          <p:cNvPr id="11" name="Rounded Rectangle 10"/>
           <p:cNvSpPr/>
           <p:nvPr/>
         </p:nvSpPr>
         <p:spPr>
           <a:xfrm>
-            <a:off x="502920" y="2505456"/>
-            <a:ext cx="11201400" cy="932688"/>
+            <a:off x="5532120" y="1481328"/>
+            <a:ext cx="6172200" cy="3931920"/>
           </a:xfrm>
           <a:prstGeom prst="roundRect">
             <a:avLst>
-              <a:gd name="adj" fmla="val 10000"/>
-            </a:avLst>
-          </a:prstGeom>
-          <a:solidFill>
-            <a:srgbClr val="FFFFFF"/>
-          </a:solidFill>
-          <a:ln>
-            <a:noFill/>
-          </a:ln>
-          <a:effectLst/>
-        </p:spPr>
-        <p:style>
-          <a:lnRef idx="1">
-            <a:schemeClr val="accent1"/>
-          </a:lnRef>
-          <a:fillRef idx="3">
-            <a:schemeClr val="accent1"/>
-          </a:fillRef>
-          <a:effectRef idx="2">
-            <a:schemeClr val="accent1"/>
-          </a:effectRef>
-          <a:fontRef idx="minor">
-            <a:schemeClr val="lt1"/>
-          </a:fontRef>
-        </p:style>
-        <p:txBody>
-          <a:bodyPr rtlCol="0" anchor="ctr"/>
-          <a:lstStyle/>
-          <a:p>
-            <a:pPr algn="ctr"/>
-          </a:p>
-        </p:txBody>
-      </p:sp>
-      <p:sp>
-        <p:nvSpPr>
-          <p:cNvPr id="13" name="Rounded Rectangle 12"/>
-          <p:cNvSpPr/>
-          <p:nvPr/>
-        </p:nvSpPr>
-        <p:spPr>
-          <a:xfrm>
-            <a:off x="685800" y="2670048"/>
-            <a:ext cx="1371600" cy="603504"/>
-          </a:xfrm>
-          <a:prstGeom prst="roundRect">
-            <a:avLst>
-              <a:gd name="adj" fmla="val 18000"/>
-            </a:avLst>
-          </a:prstGeom>
-          <a:solidFill>
-            <a:srgbClr val="012169"/>
-          </a:solidFill>
-          <a:ln>
-            <a:noFill/>
-          </a:ln>
-          <a:effectLst/>
-        </p:spPr>
-        <p:style>
-          <a:lnRef idx="1">
-            <a:schemeClr val="accent1"/>
-          </a:lnRef>
-          <a:fillRef idx="3">
-            <a:schemeClr val="accent1"/>
-          </a:fillRef>
-          <a:effectRef idx="2">
-            <a:schemeClr val="accent1"/>
-          </a:effectRef>
-          <a:fontRef idx="minor">
-            <a:schemeClr val="lt1"/>
-          </a:fontRef>
-        </p:style>
-        <p:txBody>
-          <a:bodyPr rtlCol="0" anchor="ctr"/>
-          <a:lstStyle/>
-          <a:p>
-            <a:pPr algn="ctr"/>
-          </a:p>
-        </p:txBody>
-      </p:sp>
-      <p:sp>
-        <p:nvSpPr>
-          <p:cNvPr id="14" name="TextBox 13"/>
-          <p:cNvSpPr txBox="1"/>
-          <p:nvPr/>
-        </p:nvSpPr>
-        <p:spPr>
-          <a:xfrm>
-            <a:off x="685800" y="2807208"/>
-            <a:ext cx="1371600" cy="365760"/>
-          </a:xfrm>
-          <a:prstGeom prst="rect">
-            <a:avLst/>
-          </a:prstGeom>
-          <a:noFill/>
-        </p:spPr>
-        <p:txBody>
-          <a:bodyPr wrap="square" anchor="t">
-            <a:spAutoFit/>
-          </a:bodyPr>
-          <a:lstStyle/>
-          <a:p>
-            <a:pPr algn="ctr">
-              <a:lnSpc>
-                <a:spcPct val="100000"/>
-              </a:lnSpc>
-              <a:spcAft>
-                <a:spcPts val="600"/>
-              </a:spcAft>
-            </a:pPr>
-            <a:r>
-              <a:rPr sz="1200" b="1" i="0">
-                <a:solidFill>
-                  <a:srgbClr val="FFFFFF"/>
-                </a:solidFill>
-                <a:latin typeface="Roboto"/>
-              </a:rPr>
-              <a:t>Weeks 1–2</a:t>
-            </a:r>
-          </a:p>
-        </p:txBody>
-      </p:sp>
-      <p:sp>
-        <p:nvSpPr>
-          <p:cNvPr id="15" name="TextBox 14"/>
-          <p:cNvSpPr txBox="1"/>
-          <p:nvPr/>
-        </p:nvSpPr>
-        <p:spPr>
-          <a:xfrm>
-            <a:off x="2286000" y="2615184"/>
-            <a:ext cx="9144000" cy="365760"/>
-          </a:xfrm>
-          <a:prstGeom prst="rect">
-            <a:avLst/>
-          </a:prstGeom>
-          <a:noFill/>
-        </p:spPr>
-        <p:txBody>
-          <a:bodyPr wrap="square" anchor="t">
-            <a:spAutoFit/>
-          </a:bodyPr>
-          <a:lstStyle/>
-          <a:p>
-            <a:pPr algn="l">
-              <a:lnSpc>
-                <a:spcPct val="100000"/>
-              </a:lnSpc>
-              <a:spcAft>
-                <a:spcPts val="600"/>
-              </a:spcAft>
-            </a:pPr>
-            <a:r>
-              <a:rPr sz="1450" b="1" i="0">
-                <a:solidFill>
-                  <a:srgbClr val="012169"/>
-                </a:solidFill>
-                <a:latin typeface="Roboto"/>
-              </a:rPr>
-              <a:t>Shared library first</a:t>
-            </a:r>
-          </a:p>
-        </p:txBody>
-      </p:sp>
-      <p:sp>
-        <p:nvSpPr>
-          <p:cNvPr id="16" name="TextBox 15"/>
-          <p:cNvSpPr txBox="1"/>
-          <p:nvPr/>
-        </p:nvSpPr>
-        <p:spPr>
-          <a:xfrm>
-            <a:off x="2286000" y="2962656"/>
-            <a:ext cx="9144000" cy="411480"/>
-          </a:xfrm>
-          <a:prstGeom prst="rect">
-            <a:avLst/>
-          </a:prstGeom>
-          <a:noFill/>
-        </p:spPr>
-        <p:txBody>
-          <a:bodyPr wrap="square" anchor="t">
-            <a:spAutoFit/>
-          </a:bodyPr>
-          <a:lstStyle/>
-          <a:p>
-            <a:pPr algn="l">
-              <a:lnSpc>
-                <a:spcPct val="100000"/>
-              </a:lnSpc>
-              <a:spcAft>
-                <a:spcPts val="600"/>
-              </a:spcAft>
-            </a:pPr>
-            <a:r>
-              <a:rPr sz="1200" b="0" i="0">
-                <a:solidFill>
-                  <a:srgbClr val="1C2430"/>
-                </a:solidFill>
-                <a:latin typeface="Roboto"/>
-              </a:rPr>
-              <a:t>Root of the dependency tree — your team reviews every PR</a:t>
-            </a:r>
-          </a:p>
-        </p:txBody>
-      </p:sp>
-      <p:sp>
-        <p:nvSpPr>
-          <p:cNvPr id="17" name="Rounded Rectangle 16"/>
-          <p:cNvSpPr/>
-          <p:nvPr/>
-        </p:nvSpPr>
-        <p:spPr>
-          <a:xfrm>
-            <a:off x="502920" y="3529584"/>
-            <a:ext cx="11201400" cy="932688"/>
-          </a:xfrm>
-          <a:prstGeom prst="roundRect">
-            <a:avLst>
-              <a:gd name="adj" fmla="val 10000"/>
+              <a:gd name="adj" fmla="val 6000"/>
             </a:avLst>
           </a:prstGeom>
           <a:solidFill>
@@ -13363,22 +14767,20 @@
       </p:sp>
       <p:sp>
         <p:nvSpPr>
-          <p:cNvPr id="18" name="Rounded Rectangle 17"/>
+          <p:cNvPr id="12" name="Rectangle 11"/>
           <p:cNvSpPr/>
           <p:nvPr/>
         </p:nvSpPr>
         <p:spPr>
           <a:xfrm>
-            <a:off x="685800" y="3694176"/>
-            <a:ext cx="1371600" cy="603504"/>
-          </a:xfrm>
-          <a:prstGeom prst="roundRect">
-            <a:avLst>
-              <a:gd name="adj" fmla="val 18000"/>
-            </a:avLst>
+            <a:off x="5532120" y="1591056"/>
+            <a:ext cx="54864" cy="3712463"/>
+          </a:xfrm>
+          <a:prstGeom prst="rect">
+            <a:avLst/>
           </a:prstGeom>
           <a:solidFill>
-            <a:srgbClr val="012169"/>
+            <a:srgbClr val="E31837"/>
           </a:solidFill>
           <a:ln>
             <a:noFill/>
@@ -13409,14 +14811,14 @@
       </p:sp>
       <p:sp>
         <p:nvSpPr>
-          <p:cNvPr id="19" name="TextBox 18"/>
+          <p:cNvPr id="13" name="TextBox 12"/>
           <p:cNvSpPr txBox="1"/>
           <p:nvPr/>
         </p:nvSpPr>
         <p:spPr>
           <a:xfrm>
-            <a:off x="685800" y="3831336"/>
-            <a:ext cx="1371600" cy="365760"/>
+            <a:off x="5733288" y="1591056"/>
+            <a:ext cx="5806440" cy="365760"/>
           </a:xfrm>
           <a:prstGeom prst="rect">
             <a:avLst/>
@@ -13429,7 +14831,7 @@
           </a:bodyPr>
           <a:lstStyle/>
           <a:p>
-            <a:pPr algn="ctr">
+            <a:pPr algn="l">
               <a:lnSpc>
                 <a:spcPct val="100000"/>
               </a:lnSpc>
@@ -13438,27 +14840,27 @@
               </a:spcAft>
             </a:pPr>
             <a:r>
-              <a:rPr sz="1200" b="1" i="0">
-                <a:solidFill>
-                  <a:srgbClr val="FFFFFF"/>
-                </a:solidFill>
-                <a:latin typeface="Roboto"/>
-              </a:rPr>
-              <a:t>Weeks 2–3</a:t>
-            </a:r>
-          </a:p>
-        </p:txBody>
-      </p:sp>
-      <p:sp>
-        <p:nvSpPr>
-          <p:cNvPr id="20" name="TextBox 19"/>
+              <a:rPr sz="1400" b="1" i="0">
+                <a:solidFill>
+                  <a:srgbClr val="012169"/>
+                </a:solidFill>
+                <a:latin typeface="Roboto"/>
+              </a:rPr>
+              <a:t>What Devin will do</a:t>
+            </a:r>
+          </a:p>
+        </p:txBody>
+      </p:sp>
+      <p:sp>
+        <p:nvSpPr>
+          <p:cNvPr id="14" name="TextBox 13"/>
           <p:cNvSpPr txBox="1"/>
           <p:nvPr/>
         </p:nvSpPr>
         <p:spPr>
           <a:xfrm>
-            <a:off x="2286000" y="3639312"/>
-            <a:ext cx="9144000" cy="365760"/>
+            <a:off x="5733288" y="1956816"/>
+            <a:ext cx="5806440" cy="3337560"/>
           </a:xfrm>
           <a:prstGeom prst="rect">
             <a:avLst/>
@@ -13473,375 +14875,148 @@
           <a:p>
             <a:pPr algn="l">
               <a:lnSpc>
-                <a:spcPct val="100000"/>
-              </a:lnSpc>
-              <a:spcAft>
-                <a:spcPts val="600"/>
-              </a:spcAft>
-            </a:pPr>
-            <a:r>
-              <a:rPr sz="1450" b="1" i="0">
-                <a:solidFill>
-                  <a:srgbClr val="012169"/>
-                </a:solidFill>
-                <a:latin typeface="Roboto"/>
-              </a:rPr>
-              <a:t>Downstream in parallel</a:t>
-            </a:r>
-          </a:p>
-        </p:txBody>
-      </p:sp>
-      <p:sp>
-        <p:nvSpPr>
-          <p:cNvPr id="21" name="TextBox 20"/>
-          <p:cNvSpPr txBox="1"/>
-          <p:nvPr/>
-        </p:nvSpPr>
-        <p:spPr>
-          <a:xfrm>
-            <a:off x="2286000" y="3986784"/>
-            <a:ext cx="9144000" cy="411480"/>
-          </a:xfrm>
-          <a:prstGeom prst="rect">
-            <a:avLst/>
-          </a:prstGeom>
-          <a:noFill/>
-        </p:spPr>
-        <p:txBody>
-          <a:bodyPr wrap="square" anchor="t">
-            <a:spAutoFit/>
-          </a:bodyPr>
-          <a:lstStyle/>
+                <a:spcPct val="105000"/>
+              </a:lnSpc>
+              <a:spcAft>
+                <a:spcPts val="500"/>
+              </a:spcAft>
+            </a:pPr>
+            <a:r>
+              <a:rPr sz="1400" b="1" i="0">
+                <a:solidFill>
+                  <a:srgbClr val="E31837"/>
+                </a:solidFill>
+                <a:latin typeface="Roboto"/>
+              </a:rPr>
+              <a:t>1. </a:t>
+            </a:r>
+            <a:r>
+              <a:rPr sz="1400" b="0" i="0">
+                <a:solidFill>
+                  <a:srgbClr val="1C2430"/>
+                </a:solidFill>
+                <a:latin typeface="Roboto"/>
+              </a:rPr>
+              <a:t>Baseline — build + tests green</a:t>
+            </a:r>
+          </a:p>
           <a:p>
             <a:pPr algn="l">
               <a:lnSpc>
-                <a:spcPct val="100000"/>
-              </a:lnSpc>
-              <a:spcAft>
-                <a:spcPts val="600"/>
-              </a:spcAft>
-            </a:pPr>
-            <a:r>
-              <a:rPr sz="1200" b="0" i="0">
+                <a:spcPct val="105000"/>
+              </a:lnSpc>
+              <a:spcAft>
+                <a:spcPts val="500"/>
+              </a:spcAft>
+            </a:pPr>
+            <a:r>
+              <a:rPr sz="1400" b="1" i="0">
+                <a:solidFill>
+                  <a:srgbClr val="E31837"/>
+                </a:solidFill>
+                <a:latin typeface="Roboto"/>
+              </a:rPr>
+              <a:t>2. </a:t>
+            </a:r>
+            <a:r>
+              <a:rPr sz="1400" b="0" i="0">
                 <a:solidFill>
                   <a:srgbClr val="1C2430"/>
                 </a:solidFill>
                 <a:latin typeface="Roboto"/>
               </a:rPr>
-              <a:t>One Devin per consuming app — the coordination tax collapses</a:t>
-            </a:r>
-          </a:p>
-        </p:txBody>
-      </p:sp>
-      <p:sp>
-        <p:nvSpPr>
-          <p:cNvPr id="22" name="Rounded Rectangle 21"/>
-          <p:cNvSpPr/>
-          <p:nvPr/>
-        </p:nvSpPr>
-        <p:spPr>
-          <a:xfrm>
-            <a:off x="502920" y="4553712"/>
-            <a:ext cx="11201400" cy="932688"/>
-          </a:xfrm>
-          <a:prstGeom prst="roundRect">
-            <a:avLst>
-              <a:gd name="adj" fmla="val 10000"/>
-            </a:avLst>
-          </a:prstGeom>
-          <a:solidFill>
-            <a:srgbClr val="FFFFFF"/>
-          </a:solidFill>
-          <a:ln>
-            <a:noFill/>
-          </a:ln>
-          <a:effectLst/>
-        </p:spPr>
-        <p:style>
-          <a:lnRef idx="1">
-            <a:schemeClr val="accent1"/>
-          </a:lnRef>
-          <a:fillRef idx="3">
-            <a:schemeClr val="accent1"/>
-          </a:fillRef>
-          <a:effectRef idx="2">
-            <a:schemeClr val="accent1"/>
-          </a:effectRef>
-          <a:fontRef idx="minor">
-            <a:schemeClr val="lt1"/>
-          </a:fontRef>
-        </p:style>
-        <p:txBody>
-          <a:bodyPr rtlCol="0" anchor="ctr"/>
-          <a:lstStyle/>
-          <a:p>
-            <a:pPr algn="ctr"/>
-          </a:p>
-        </p:txBody>
-      </p:sp>
-      <p:sp>
-        <p:nvSpPr>
-          <p:cNvPr id="23" name="Rounded Rectangle 22"/>
-          <p:cNvSpPr/>
-          <p:nvPr/>
-        </p:nvSpPr>
-        <p:spPr>
-          <a:xfrm>
-            <a:off x="685800" y="4718304"/>
-            <a:ext cx="1371600" cy="603504"/>
-          </a:xfrm>
-          <a:prstGeom prst="roundRect">
-            <a:avLst>
-              <a:gd name="adj" fmla="val 18000"/>
-            </a:avLst>
-          </a:prstGeom>
-          <a:solidFill>
-            <a:srgbClr val="012169"/>
-          </a:solidFill>
-          <a:ln>
-            <a:noFill/>
-          </a:ln>
-          <a:effectLst/>
-        </p:spPr>
-        <p:style>
-          <a:lnRef idx="1">
-            <a:schemeClr val="accent1"/>
-          </a:lnRef>
-          <a:fillRef idx="3">
-            <a:schemeClr val="accent1"/>
-          </a:fillRef>
-          <a:effectRef idx="2">
-            <a:schemeClr val="accent1"/>
-          </a:effectRef>
-          <a:fontRef idx="minor">
-            <a:schemeClr val="lt1"/>
-          </a:fontRef>
-        </p:style>
-        <p:txBody>
-          <a:bodyPr rtlCol="0" anchor="ctr"/>
-          <a:lstStyle/>
-          <a:p>
-            <a:pPr algn="ctr"/>
-          </a:p>
-        </p:txBody>
-      </p:sp>
-      <p:sp>
-        <p:nvSpPr>
-          <p:cNvPr id="24" name="TextBox 23"/>
-          <p:cNvSpPr txBox="1"/>
-          <p:nvPr/>
-        </p:nvSpPr>
-        <p:spPr>
-          <a:xfrm>
-            <a:off x="685800" y="4855464"/>
-            <a:ext cx="1371600" cy="365760"/>
-          </a:xfrm>
-          <a:prstGeom prst="rect">
-            <a:avLst/>
-          </a:prstGeom>
-          <a:noFill/>
-        </p:spPr>
-        <p:txBody>
-          <a:bodyPr wrap="square" anchor="t">
-            <a:spAutoFit/>
-          </a:bodyPr>
-          <a:lstStyle/>
-          <a:p>
-            <a:pPr algn="ctr">
-              <a:lnSpc>
-                <a:spcPct val="100000"/>
-              </a:lnSpc>
-              <a:spcAft>
-                <a:spcPts val="600"/>
-              </a:spcAft>
-            </a:pPr>
-            <a:r>
-              <a:rPr sz="1200" b="1" i="0">
-                <a:solidFill>
-                  <a:srgbClr val="FFFFFF"/>
-                </a:solidFill>
-                <a:latin typeface="Roboto"/>
-              </a:rPr>
-              <a:t>Ongoing</a:t>
-            </a:r>
-          </a:p>
-        </p:txBody>
-      </p:sp>
-      <p:sp>
-        <p:nvSpPr>
-          <p:cNvPr id="25" name="TextBox 24"/>
-          <p:cNvSpPr txBox="1"/>
-          <p:nvPr/>
-        </p:nvSpPr>
-        <p:spPr>
-          <a:xfrm>
-            <a:off x="2286000" y="4663440"/>
-            <a:ext cx="9144000" cy="365760"/>
-          </a:xfrm>
-          <a:prstGeom prst="rect">
-            <a:avLst/>
-          </a:prstGeom>
-          <a:noFill/>
-        </p:spPr>
-        <p:txBody>
-          <a:bodyPr wrap="square" anchor="t">
-            <a:spAutoFit/>
-          </a:bodyPr>
-          <a:lstStyle/>
+              <a:t>Stepwise ng update 14→15→16→17→18</a:t>
+            </a:r>
+          </a:p>
           <a:p>
             <a:pPr algn="l">
               <a:lnSpc>
-                <a:spcPct val="100000"/>
-              </a:lnSpc>
-              <a:spcAft>
-                <a:spcPts val="600"/>
-              </a:spcAft>
-            </a:pPr>
-            <a:r>
-              <a:rPr sz="1450" b="1" i="0">
-                <a:solidFill>
-                  <a:srgbClr val="012169"/>
-                </a:solidFill>
-                <a:latin typeface="Roboto"/>
-              </a:rPr>
-              <a:t>Evidence as you go</a:t>
-            </a:r>
-          </a:p>
-        </p:txBody>
-      </p:sp>
-      <p:sp>
-        <p:nvSpPr>
-          <p:cNvPr id="26" name="TextBox 25"/>
-          <p:cNvSpPr txBox="1"/>
-          <p:nvPr/>
-        </p:nvSpPr>
-        <p:spPr>
-          <a:xfrm>
-            <a:off x="2286000" y="5010912"/>
-            <a:ext cx="9144000" cy="411480"/>
-          </a:xfrm>
-          <a:prstGeom prst="rect">
-            <a:avLst/>
-          </a:prstGeom>
-          <a:noFill/>
-        </p:spPr>
-        <p:txBody>
-          <a:bodyPr wrap="square" anchor="t">
-            <a:spAutoFit/>
-          </a:bodyPr>
-          <a:lstStyle/>
+                <a:spcPct val="105000"/>
+              </a:lnSpc>
+              <a:spcAft>
+                <a:spcPts val="500"/>
+              </a:spcAft>
+            </a:pPr>
+            <a:r>
+              <a:rPr sz="1400" b="1" i="0">
+                <a:solidFill>
+                  <a:srgbClr val="E31837"/>
+                </a:solidFill>
+                <a:latin typeface="Roboto"/>
+              </a:rPr>
+              <a:t>3. </a:t>
+            </a:r>
+            <a:r>
+              <a:rPr sz="1400" b="0" i="0">
+                <a:solidFill>
+                  <a:srgbClr val="1C2430"/>
+                </a:solidFill>
+                <a:latin typeface="Roboto"/>
+              </a:rPr>
+              <a:t>Modernize 5 legacy patterns</a:t>
+            </a:r>
+          </a:p>
           <a:p>
             <a:pPr algn="l">
               <a:lnSpc>
-                <a:spcPct val="100000"/>
-              </a:lnSpc>
-              <a:spcAft>
-                <a:spcPts val="600"/>
-              </a:spcAft>
-            </a:pPr>
-            <a:r>
-              <a:rPr sz="1200" b="0" i="0">
+                <a:spcPct val="105000"/>
+              </a:lnSpc>
+              <a:spcAft>
+                <a:spcPts val="500"/>
+              </a:spcAft>
+            </a:pPr>
+            <a:r>
+              <a:rPr sz="1400" b="1" i="0">
+                <a:solidFill>
+                  <a:srgbClr val="E31837"/>
+                </a:solidFill>
+                <a:latin typeface="Roboto"/>
+              </a:rPr>
+              <a:t>4. </a:t>
+            </a:r>
+            <a:r>
+              <a:rPr sz="1400" b="0" i="0">
                 <a:solidFill>
                   <a:srgbClr val="1C2430"/>
                 </a:solidFill>
                 <a:latin typeface="Roboto"/>
               </a:rPr>
-              <a:t>Logs + tests + scans = audit file, automatically</a:t>
-            </a:r>
-          </a:p>
-        </p:txBody>
-      </p:sp>
-      <p:sp>
-        <p:nvSpPr>
-          <p:cNvPr id="27" name="Rounded Rectangle 26"/>
-          <p:cNvSpPr/>
-          <p:nvPr/>
-        </p:nvSpPr>
-        <p:spPr>
-          <a:xfrm>
-            <a:off x="502920" y="5669280"/>
-            <a:ext cx="11201400" cy="658368"/>
-          </a:xfrm>
-          <a:prstGeom prst="roundRect">
-            <a:avLst>
-              <a:gd name="adj" fmla="val 10000"/>
-            </a:avLst>
-          </a:prstGeom>
-          <a:solidFill>
-            <a:srgbClr val="012169"/>
-          </a:solidFill>
-          <a:ln>
-            <a:noFill/>
-          </a:ln>
-          <a:effectLst/>
-        </p:spPr>
-        <p:style>
-          <a:lnRef idx="1">
-            <a:schemeClr val="accent1"/>
-          </a:lnRef>
-          <a:fillRef idx="3">
-            <a:schemeClr val="accent1"/>
-          </a:fillRef>
-          <a:effectRef idx="2">
-            <a:schemeClr val="accent1"/>
-          </a:effectRef>
-          <a:fontRef idx="minor">
-            <a:schemeClr val="lt1"/>
-          </a:fontRef>
-        </p:style>
-        <p:txBody>
-          <a:bodyPr rtlCol="0" anchor="ctr"/>
-          <a:lstStyle/>
-          <a:p>
-            <a:pPr algn="ctr"/>
-          </a:p>
-        </p:txBody>
-      </p:sp>
-      <p:sp>
-        <p:nvSpPr>
-          <p:cNvPr id="28" name="TextBox 27"/>
-          <p:cNvSpPr txBox="1"/>
-          <p:nvPr/>
-        </p:nvSpPr>
-        <p:spPr>
-          <a:xfrm>
-            <a:off x="777240" y="5788152"/>
-            <a:ext cx="10698480" cy="457200"/>
-          </a:xfrm>
-          <a:prstGeom prst="rect">
-            <a:avLst/>
-          </a:prstGeom>
-          <a:noFill/>
-        </p:spPr>
-        <p:txBody>
-          <a:bodyPr wrap="square" anchor="t">
-            <a:spAutoFit/>
-          </a:bodyPr>
-          <a:lstStyle/>
+              <a:t>Validate — zero legacy patterns remain</a:t>
+            </a:r>
+          </a:p>
           <a:p>
             <a:pPr algn="l">
               <a:lnSpc>
-                <a:spcPct val="100000"/>
-              </a:lnSpc>
-              <a:spcAft>
-                <a:spcPts val="600"/>
-              </a:spcAft>
-            </a:pPr>
-            <a:r>
-              <a:rPr sz="1500" b="1" i="0">
-                <a:solidFill>
-                  <a:srgbClr val="FFFFFF"/>
-                </a:solidFill>
-                <a:latin typeface="Roboto"/>
-              </a:rPr>
-              <a:t>Devin changes who does the labor — never who's in control.</a:t>
-            </a:r>
-          </a:p>
-        </p:txBody>
-      </p:sp>
-      <p:sp>
-        <p:nvSpPr>
-          <p:cNvPr id="29" name="TextBox 28"/>
+                <a:spcPct val="105000"/>
+              </a:lnSpc>
+              <a:spcAft>
+                <a:spcPts val="500"/>
+              </a:spcAft>
+            </a:pPr>
+            <a:r>
+              <a:rPr sz="1400" b="1" i="0">
+                <a:solidFill>
+                  <a:srgbClr val="E31837"/>
+                </a:solidFill>
+                <a:latin typeface="Roboto"/>
+              </a:rPr>
+              <a:t>5. </a:t>
+            </a:r>
+            <a:r>
+              <a:rPr sz="1400" b="0" i="0">
+                <a:solidFill>
+                  <a:srgbClr val="1C2430"/>
+                </a:solidFill>
+                <a:latin typeface="Roboto"/>
+              </a:rPr>
+              <a:t>Deliver — reviewable PRs</a:t>
+            </a:r>
+          </a:p>
+        </p:txBody>
+      </p:sp>
+      <p:sp>
+        <p:nvSpPr>
+          <p:cNvPr id="15" name="TextBox 14"/>
           <p:cNvSpPr txBox="1"/>
           <p:nvPr/>
         </p:nvSpPr>
@@ -14024,7 +15199,7 @@
                 </a:solidFill>
                 <a:latin typeface="Roboto"/>
               </a:rPr>
-              <a:t>WHAT GOOD LOOKS LIKE</a:t>
+              <a:t>FROM DEMO TO YOUR REALITY</a:t>
             </a:r>
           </a:p>
         </p:txBody>
@@ -14066,7 +15241,7 @@
                 </a:solidFill>
                 <a:latin typeface="Roboto"/>
               </a:rPr>
-              <a:t>The end state: BofA running on Devin</a:t>
+              <a:t>How this maps to BofA's actual migration</a:t>
             </a:r>
           </a:p>
         </p:txBody>
@@ -14122,11 +15297,11 @@
         <p:spPr>
           <a:xfrm>
             <a:off x="502920" y="1481328"/>
-            <a:ext cx="3611880" cy="2286000"/>
+            <a:ext cx="11201400" cy="932688"/>
           </a:xfrm>
           <a:prstGeom prst="roundRect">
             <a:avLst>
-              <a:gd name="adj" fmla="val 6000"/>
+              <a:gd name="adj" fmla="val 10000"/>
             </a:avLst>
           </a:prstGeom>
           <a:solidFill>
@@ -14161,20 +15336,22 @@
       </p:sp>
       <p:sp>
         <p:nvSpPr>
-          <p:cNvPr id="8" name="Rectangle 7"/>
+          <p:cNvPr id="8" name="Rounded Rectangle 7"/>
           <p:cNvSpPr/>
           <p:nvPr/>
         </p:nvSpPr>
         <p:spPr>
           <a:xfrm>
-            <a:off x="502920" y="1591056"/>
-            <a:ext cx="54864" cy="2066543"/>
-          </a:xfrm>
-          <a:prstGeom prst="rect">
-            <a:avLst/>
+            <a:off x="685800" y="1645920"/>
+            <a:ext cx="1371600" cy="603504"/>
+          </a:xfrm>
+          <a:prstGeom prst="roundRect">
+            <a:avLst>
+              <a:gd name="adj" fmla="val 18000"/>
+            </a:avLst>
           </a:prstGeom>
           <a:solidFill>
-            <a:srgbClr val="E31837"/>
+            <a:srgbClr val="012169"/>
           </a:solidFill>
           <a:ln>
             <a:noFill/>
@@ -14211,8 +15388,8 @@
         </p:nvSpPr>
         <p:spPr>
           <a:xfrm>
-            <a:off x="704088" y="1591056"/>
-            <a:ext cx="3246120" cy="365760"/>
+            <a:off x="685800" y="1783080"/>
+            <a:ext cx="1371600" cy="365760"/>
           </a:xfrm>
           <a:prstGeom prst="rect">
             <a:avLst/>
@@ -14225,7 +15402,7 @@
           </a:bodyPr>
           <a:lstStyle/>
           <a:p>
-            <a:pPr algn="l">
+            <a:pPr algn="ctr">
               <a:lnSpc>
                 <a:spcPct val="100000"/>
               </a:lnSpc>
@@ -14234,13 +15411,13 @@
               </a:spcAft>
             </a:pPr>
             <a:r>
-              <a:rPr sz="1400" b="1" i="0">
-                <a:solidFill>
-                  <a:srgbClr val="012169"/>
-                </a:solidFill>
-                <a:latin typeface="Roboto"/>
-              </a:rPr>
-              <a:t>This migration</a:t>
+              <a:rPr sz="1200" b="1" i="0">
+                <a:solidFill>
+                  <a:srgbClr val="FFFFFF"/>
+                </a:solidFill>
+                <a:latin typeface="Roboto"/>
+              </a:rPr>
+              <a:t>Week 0</a:t>
             </a:r>
           </a:p>
         </p:txBody>
@@ -14253,8 +15430,8 @@
         </p:nvSpPr>
         <p:spPr>
           <a:xfrm>
-            <a:off x="704088" y="1956816"/>
-            <a:ext cx="3246120" cy="1691640"/>
+            <a:off x="2286000" y="1591056"/>
+            <a:ext cx="9144000" cy="365760"/>
           </a:xfrm>
           <a:prstGeom prst="rect">
             <a:avLst/>
@@ -14269,76 +15446,298 @@
           <a:p>
             <a:pPr algn="l">
               <a:lnSpc>
-                <a:spcPct val="105000"/>
-              </a:lnSpc>
-              <a:spcAft>
-                <a:spcPts val="500"/>
-              </a:spcAft>
-            </a:pPr>
-            <a:r>
-              <a:rPr sz="1400" b="0" i="0">
+                <a:spcPct val="100000"/>
+              </a:lnSpc>
+              <a:spcAft>
+                <a:spcPts val="600"/>
+              </a:spcAft>
+            </a:pPr>
+            <a:r>
+              <a:rPr sz="1450" b="1" i="0">
+                <a:solidFill>
+                  <a:srgbClr val="012169"/>
+                </a:solidFill>
+                <a:latin typeface="Roboto"/>
+              </a:rPr>
+              <a:t>Scope &amp; safety rails</a:t>
+            </a:r>
+          </a:p>
+        </p:txBody>
+      </p:sp>
+      <p:sp>
+        <p:nvSpPr>
+          <p:cNvPr id="11" name="TextBox 10"/>
+          <p:cNvSpPr txBox="1"/>
+          <p:nvPr/>
+        </p:nvSpPr>
+        <p:spPr>
+          <a:xfrm>
+            <a:off x="2286000" y="1938528"/>
+            <a:ext cx="9144000" cy="411480"/>
+          </a:xfrm>
+          <a:prstGeom prst="rect">
+            <a:avLst/>
+          </a:prstGeom>
+          <a:noFill/>
+        </p:spPr>
+        <p:txBody>
+          <a:bodyPr wrap="square" anchor="t">
+            <a:spAutoFit/>
+          </a:bodyPr>
+          <a:lstStyle/>
+          <a:p>
+            <a:pPr algn="l">
+              <a:lnSpc>
+                <a:spcPct val="100000"/>
+              </a:lnSpc>
+              <a:spcAft>
+                <a:spcPts val="600"/>
+              </a:spcAft>
+            </a:pPr>
+            <a:r>
+              <a:rPr sz="1200" b="0" i="0">
                 <a:solidFill>
                   <a:srgbClr val="1C2430"/>
                 </a:solidFill>
                 <a:latin typeface="Roboto"/>
               </a:rPr>
-              <a:t>Angular 18 before the deadline</a:t>
-            </a:r>
-          </a:p>
-          <a:p>
-            <a:pPr algn="l">
-              <a:lnSpc>
-                <a:spcPct val="105000"/>
-              </a:lnSpc>
-              <a:spcAft>
-                <a:spcPts val="500"/>
-              </a:spcAft>
-            </a:pPr>
-            <a:r>
-              <a:rPr sz="1400" b="0" i="0">
-                <a:solidFill>
-                  <a:srgbClr val="1C2430"/>
-                </a:solidFill>
-                <a:latin typeface="Roboto"/>
-              </a:rPr>
-              <a:t>12+ teams unbroken</a:t>
-            </a:r>
-          </a:p>
-          <a:p>
-            <a:pPr algn="l">
-              <a:lnSpc>
-                <a:spcPct val="105000"/>
-              </a:lnSpc>
-              <a:spcAft>
-                <a:spcPts val="500"/>
-              </a:spcAft>
-            </a:pPr>
-            <a:r>
-              <a:rPr sz="1400" b="0" i="0">
-                <a:solidFill>
-                  <a:srgbClr val="1C2430"/>
-                </a:solidFill>
-                <a:latin typeface="Roboto"/>
-              </a:rPr>
-              <a:t>Audit trail, automatic</a:t>
-            </a:r>
-          </a:p>
-        </p:txBody>
-      </p:sp>
-      <p:sp>
-        <p:nvSpPr>
-          <p:cNvPr id="11" name="Rounded Rectangle 10"/>
+              <a:t>Security review · success criteria</a:t>
+            </a:r>
+          </a:p>
+        </p:txBody>
+      </p:sp>
+      <p:sp>
+        <p:nvSpPr>
+          <p:cNvPr id="12" name="Rounded Rectangle 11"/>
           <p:cNvSpPr/>
           <p:nvPr/>
         </p:nvSpPr>
         <p:spPr>
           <a:xfrm>
-            <a:off x="4297680" y="1481328"/>
-            <a:ext cx="3611880" cy="2286000"/>
+            <a:off x="502920" y="2505456"/>
+            <a:ext cx="11201400" cy="932688"/>
           </a:xfrm>
           <a:prstGeom prst="roundRect">
             <a:avLst>
-              <a:gd name="adj" fmla="val 6000"/>
+              <a:gd name="adj" fmla="val 10000"/>
+            </a:avLst>
+          </a:prstGeom>
+          <a:solidFill>
+            <a:srgbClr val="FFFFFF"/>
+          </a:solidFill>
+          <a:ln>
+            <a:noFill/>
+          </a:ln>
+          <a:effectLst/>
+        </p:spPr>
+        <p:style>
+          <a:lnRef idx="1">
+            <a:schemeClr val="accent1"/>
+          </a:lnRef>
+          <a:fillRef idx="3">
+            <a:schemeClr val="accent1"/>
+          </a:fillRef>
+          <a:effectRef idx="2">
+            <a:schemeClr val="accent1"/>
+          </a:effectRef>
+          <a:fontRef idx="minor">
+            <a:schemeClr val="lt1"/>
+          </a:fontRef>
+        </p:style>
+        <p:txBody>
+          <a:bodyPr rtlCol="0" anchor="ctr"/>
+          <a:lstStyle/>
+          <a:p>
+            <a:pPr algn="ctr"/>
+          </a:p>
+        </p:txBody>
+      </p:sp>
+      <p:sp>
+        <p:nvSpPr>
+          <p:cNvPr id="13" name="Rounded Rectangle 12"/>
+          <p:cNvSpPr/>
+          <p:nvPr/>
+        </p:nvSpPr>
+        <p:spPr>
+          <a:xfrm>
+            <a:off x="685800" y="2670048"/>
+            <a:ext cx="1371600" cy="603504"/>
+          </a:xfrm>
+          <a:prstGeom prst="roundRect">
+            <a:avLst>
+              <a:gd name="adj" fmla="val 18000"/>
+            </a:avLst>
+          </a:prstGeom>
+          <a:solidFill>
+            <a:srgbClr val="012169"/>
+          </a:solidFill>
+          <a:ln>
+            <a:noFill/>
+          </a:ln>
+          <a:effectLst/>
+        </p:spPr>
+        <p:style>
+          <a:lnRef idx="1">
+            <a:schemeClr val="accent1"/>
+          </a:lnRef>
+          <a:fillRef idx="3">
+            <a:schemeClr val="accent1"/>
+          </a:fillRef>
+          <a:effectRef idx="2">
+            <a:schemeClr val="accent1"/>
+          </a:effectRef>
+          <a:fontRef idx="minor">
+            <a:schemeClr val="lt1"/>
+          </a:fontRef>
+        </p:style>
+        <p:txBody>
+          <a:bodyPr rtlCol="0" anchor="ctr"/>
+          <a:lstStyle/>
+          <a:p>
+            <a:pPr algn="ctr"/>
+          </a:p>
+        </p:txBody>
+      </p:sp>
+      <p:sp>
+        <p:nvSpPr>
+          <p:cNvPr id="14" name="TextBox 13"/>
+          <p:cNvSpPr txBox="1"/>
+          <p:nvPr/>
+        </p:nvSpPr>
+        <p:spPr>
+          <a:xfrm>
+            <a:off x="685800" y="2807208"/>
+            <a:ext cx="1371600" cy="365760"/>
+          </a:xfrm>
+          <a:prstGeom prst="rect">
+            <a:avLst/>
+          </a:prstGeom>
+          <a:noFill/>
+        </p:spPr>
+        <p:txBody>
+          <a:bodyPr wrap="square" anchor="t">
+            <a:spAutoFit/>
+          </a:bodyPr>
+          <a:lstStyle/>
+          <a:p>
+            <a:pPr algn="ctr">
+              <a:lnSpc>
+                <a:spcPct val="100000"/>
+              </a:lnSpc>
+              <a:spcAft>
+                <a:spcPts val="600"/>
+              </a:spcAft>
+            </a:pPr>
+            <a:r>
+              <a:rPr sz="1200" b="1" i="0">
+                <a:solidFill>
+                  <a:srgbClr val="FFFFFF"/>
+                </a:solidFill>
+                <a:latin typeface="Roboto"/>
+              </a:rPr>
+              <a:t>Weeks 1–2</a:t>
+            </a:r>
+          </a:p>
+        </p:txBody>
+      </p:sp>
+      <p:sp>
+        <p:nvSpPr>
+          <p:cNvPr id="15" name="TextBox 14"/>
+          <p:cNvSpPr txBox="1"/>
+          <p:nvPr/>
+        </p:nvSpPr>
+        <p:spPr>
+          <a:xfrm>
+            <a:off x="2286000" y="2615184"/>
+            <a:ext cx="9144000" cy="365760"/>
+          </a:xfrm>
+          <a:prstGeom prst="rect">
+            <a:avLst/>
+          </a:prstGeom>
+          <a:noFill/>
+        </p:spPr>
+        <p:txBody>
+          <a:bodyPr wrap="square" anchor="t">
+            <a:spAutoFit/>
+          </a:bodyPr>
+          <a:lstStyle/>
+          <a:p>
+            <a:pPr algn="l">
+              <a:lnSpc>
+                <a:spcPct val="100000"/>
+              </a:lnSpc>
+              <a:spcAft>
+                <a:spcPts val="600"/>
+              </a:spcAft>
+            </a:pPr>
+            <a:r>
+              <a:rPr sz="1450" b="1" i="0">
+                <a:solidFill>
+                  <a:srgbClr val="012169"/>
+                </a:solidFill>
+                <a:latin typeface="Roboto"/>
+              </a:rPr>
+              <a:t>Shared library first</a:t>
+            </a:r>
+          </a:p>
+        </p:txBody>
+      </p:sp>
+      <p:sp>
+        <p:nvSpPr>
+          <p:cNvPr id="16" name="TextBox 15"/>
+          <p:cNvSpPr txBox="1"/>
+          <p:nvPr/>
+        </p:nvSpPr>
+        <p:spPr>
+          <a:xfrm>
+            <a:off x="2286000" y="2962656"/>
+            <a:ext cx="9144000" cy="411480"/>
+          </a:xfrm>
+          <a:prstGeom prst="rect">
+            <a:avLst/>
+          </a:prstGeom>
+          <a:noFill/>
+        </p:spPr>
+        <p:txBody>
+          <a:bodyPr wrap="square" anchor="t">
+            <a:spAutoFit/>
+          </a:bodyPr>
+          <a:lstStyle/>
+          <a:p>
+            <a:pPr algn="l">
+              <a:lnSpc>
+                <a:spcPct val="100000"/>
+              </a:lnSpc>
+              <a:spcAft>
+                <a:spcPts val="600"/>
+              </a:spcAft>
+            </a:pPr>
+            <a:r>
+              <a:rPr sz="1200" b="0" i="0">
+                <a:solidFill>
+                  <a:srgbClr val="1C2430"/>
+                </a:solidFill>
+                <a:latin typeface="Roboto"/>
+              </a:rPr>
+              <a:t>Root of the dependency tree — your team reviews every PR</a:t>
+            </a:r>
+          </a:p>
+        </p:txBody>
+      </p:sp>
+      <p:sp>
+        <p:nvSpPr>
+          <p:cNvPr id="17" name="Rounded Rectangle 16"/>
+          <p:cNvSpPr/>
+          <p:nvPr/>
+        </p:nvSpPr>
+        <p:spPr>
+          <a:xfrm>
+            <a:off x="502920" y="3529584"/>
+            <a:ext cx="11201400" cy="932688"/>
+          </a:xfrm>
+          <a:prstGeom prst="roundRect">
+            <a:avLst>
+              <a:gd name="adj" fmla="val 10000"/>
             </a:avLst>
           </a:prstGeom>
           <a:solidFill>
@@ -14373,20 +15772,22 @@
       </p:sp>
       <p:sp>
         <p:nvSpPr>
-          <p:cNvPr id="12" name="Rectangle 11"/>
+          <p:cNvPr id="18" name="Rounded Rectangle 17"/>
           <p:cNvSpPr/>
           <p:nvPr/>
         </p:nvSpPr>
         <p:spPr>
           <a:xfrm>
-            <a:off x="4297680" y="1591056"/>
-            <a:ext cx="54864" cy="2066543"/>
-          </a:xfrm>
-          <a:prstGeom prst="rect">
-            <a:avLst/>
+            <a:off x="685800" y="3694176"/>
+            <a:ext cx="1371600" cy="603504"/>
+          </a:xfrm>
+          <a:prstGeom prst="roundRect">
+            <a:avLst>
+              <a:gd name="adj" fmla="val 18000"/>
+            </a:avLst>
           </a:prstGeom>
           <a:solidFill>
-            <a:srgbClr val="E31837"/>
+            <a:srgbClr val="012169"/>
           </a:solidFill>
           <a:ln>
             <a:noFill/>
@@ -14417,14 +15818,14 @@
       </p:sp>
       <p:sp>
         <p:nvSpPr>
-          <p:cNvPr id="13" name="TextBox 12"/>
+          <p:cNvPr id="19" name="TextBox 18"/>
           <p:cNvSpPr txBox="1"/>
           <p:nvPr/>
         </p:nvSpPr>
         <p:spPr>
           <a:xfrm>
-            <a:off x="4498848" y="1591056"/>
-            <a:ext cx="3246120" cy="365760"/>
+            <a:off x="685800" y="3831336"/>
+            <a:ext cx="1371600" cy="365760"/>
           </a:xfrm>
           <a:prstGeom prst="rect">
             <a:avLst/>
@@ -14437,7 +15838,7 @@
           </a:bodyPr>
           <a:lstStyle/>
           <a:p>
-            <a:pPr algn="l">
+            <a:pPr algn="ctr">
               <a:lnSpc>
                 <a:spcPct val="100000"/>
               </a:lnSpc>
@@ -14446,27 +15847,27 @@
               </a:spcAft>
             </a:pPr>
             <a:r>
-              <a:rPr sz="1400" b="1" i="0">
-                <a:solidFill>
-                  <a:srgbClr val="012169"/>
-                </a:solidFill>
-                <a:latin typeface="Roboto"/>
-              </a:rPr>
-              <a:t>Your engineers</a:t>
-            </a:r>
-          </a:p>
-        </p:txBody>
-      </p:sp>
-      <p:sp>
-        <p:nvSpPr>
-          <p:cNvPr id="14" name="TextBox 13"/>
+              <a:rPr sz="1200" b="1" i="0">
+                <a:solidFill>
+                  <a:srgbClr val="FFFFFF"/>
+                </a:solidFill>
+                <a:latin typeface="Roboto"/>
+              </a:rPr>
+              <a:t>Weeks 2–3</a:t>
+            </a:r>
+          </a:p>
+        </p:txBody>
+      </p:sp>
+      <p:sp>
+        <p:nvSpPr>
+          <p:cNvPr id="20" name="TextBox 19"/>
           <p:cNvSpPr txBox="1"/>
           <p:nvPr/>
         </p:nvSpPr>
         <p:spPr>
           <a:xfrm>
-            <a:off x="4498848" y="1956816"/>
-            <a:ext cx="3246120" cy="1691640"/>
+            <a:off x="2286000" y="3639312"/>
+            <a:ext cx="9144000" cy="365760"/>
           </a:xfrm>
           <a:prstGeom prst="rect">
             <a:avLst/>
@@ -14481,61 +15882,84 @@
           <a:p>
             <a:pPr algn="l">
               <a:lnSpc>
-                <a:spcPct val="105000"/>
-              </a:lnSpc>
-              <a:spcAft>
-                <a:spcPts val="500"/>
-              </a:spcAft>
-            </a:pPr>
-            <a:r>
-              <a:rPr sz="1400" b="0" i="0">
+                <a:spcPct val="100000"/>
+              </a:lnSpc>
+              <a:spcAft>
+                <a:spcPts val="600"/>
+              </a:spcAft>
+            </a:pPr>
+            <a:r>
+              <a:rPr sz="1450" b="1" i="0">
+                <a:solidFill>
+                  <a:srgbClr val="012169"/>
+                </a:solidFill>
+                <a:latin typeface="Roboto"/>
+              </a:rPr>
+              <a:t>Downstream in parallel</a:t>
+            </a:r>
+          </a:p>
+        </p:txBody>
+      </p:sp>
+      <p:sp>
+        <p:nvSpPr>
+          <p:cNvPr id="21" name="TextBox 20"/>
+          <p:cNvSpPr txBox="1"/>
+          <p:nvPr/>
+        </p:nvSpPr>
+        <p:spPr>
+          <a:xfrm>
+            <a:off x="2286000" y="3986784"/>
+            <a:ext cx="9144000" cy="411480"/>
+          </a:xfrm>
+          <a:prstGeom prst="rect">
+            <a:avLst/>
+          </a:prstGeom>
+          <a:noFill/>
+        </p:spPr>
+        <p:txBody>
+          <a:bodyPr wrap="square" anchor="t">
+            <a:spAutoFit/>
+          </a:bodyPr>
+          <a:lstStyle/>
+          <a:p>
+            <a:pPr algn="l">
+              <a:lnSpc>
+                <a:spcPct val="100000"/>
+              </a:lnSpc>
+              <a:spcAft>
+                <a:spcPts val="600"/>
+              </a:spcAft>
+            </a:pPr>
+            <a:r>
+              <a:rPr sz="1200" b="0" i="0">
                 <a:solidFill>
                   <a:srgbClr val="1C2430"/>
                 </a:solidFill>
                 <a:latin typeface="Roboto"/>
               </a:rPr>
-              <a:t>Back on revenue features</a:t>
-            </a:r>
-          </a:p>
-          <a:p>
-            <a:pPr algn="l">
-              <a:lnSpc>
-                <a:spcPct val="105000"/>
-              </a:lnSpc>
-              <a:spcAft>
-                <a:spcPts val="500"/>
-              </a:spcAft>
-            </a:pPr>
-            <a:r>
-              <a:rPr sz="1400" b="0" i="0">
-                <a:solidFill>
-                  <a:srgbClr val="1C2430"/>
-                </a:solidFill>
-                <a:latin typeface="Roboto"/>
-              </a:rPr>
-              <a:t>Reviewing, not hand-migrating</a:t>
-            </a:r>
-          </a:p>
-        </p:txBody>
-      </p:sp>
-      <p:sp>
-        <p:nvSpPr>
-          <p:cNvPr id="15" name="Rounded Rectangle 14"/>
+              <a:t>One Devin per consuming app — the coordination tax collapses</a:t>
+            </a:r>
+          </a:p>
+        </p:txBody>
+      </p:sp>
+      <p:sp>
+        <p:nvSpPr>
+          <p:cNvPr id="22" name="Rounded Rectangle 21"/>
           <p:cNvSpPr/>
           <p:nvPr/>
         </p:nvSpPr>
         <p:spPr>
           <a:xfrm>
-            <a:off x="8092440" y="1481328"/>
-            <a:ext cx="3611880" cy="2286000"/>
+            <a:off x="502920" y="4553712"/>
+            <a:ext cx="11201400" cy="932688"/>
           </a:xfrm>
           <a:prstGeom prst="roundRect">
             <a:avLst>
-              <a:gd name="adj" fmla="val 6000"/>
+              <a:gd name="adj" fmla="val 10000"/>
             </a:avLst>
           </a:prstGeom>
           <a:solidFill>
-            <a:srgbClr val="F4F6F9"/>
+            <a:srgbClr val="FFFFFF"/>
           </a:solidFill>
           <a:ln>
             <a:noFill/>
@@ -14566,20 +15990,22 @@
       </p:sp>
       <p:sp>
         <p:nvSpPr>
-          <p:cNvPr id="16" name="Rectangle 15"/>
+          <p:cNvPr id="23" name="Rounded Rectangle 22"/>
           <p:cNvSpPr/>
           <p:nvPr/>
         </p:nvSpPr>
         <p:spPr>
           <a:xfrm>
-            <a:off x="8092440" y="1591056"/>
-            <a:ext cx="54864" cy="2066543"/>
-          </a:xfrm>
-          <a:prstGeom prst="rect">
-            <a:avLst/>
+            <a:off x="685800" y="4718304"/>
+            <a:ext cx="1371600" cy="603504"/>
+          </a:xfrm>
+          <a:prstGeom prst="roundRect">
+            <a:avLst>
+              <a:gd name="adj" fmla="val 18000"/>
+            </a:avLst>
           </a:prstGeom>
           <a:solidFill>
-            <a:srgbClr val="E31837"/>
+            <a:srgbClr val="012169"/>
           </a:solidFill>
           <a:ln>
             <a:noFill/>
@@ -14610,14 +16036,14 @@
       </p:sp>
       <p:sp>
         <p:nvSpPr>
-          <p:cNvPr id="17" name="TextBox 16"/>
+          <p:cNvPr id="24" name="TextBox 23"/>
           <p:cNvSpPr txBox="1"/>
           <p:nvPr/>
         </p:nvSpPr>
         <p:spPr>
           <a:xfrm>
-            <a:off x="8293608" y="1591056"/>
-            <a:ext cx="3246120" cy="365760"/>
+            <a:off x="685800" y="4855464"/>
+            <a:ext cx="1371600" cy="365760"/>
           </a:xfrm>
           <a:prstGeom prst="rect">
             <a:avLst/>
@@ -14630,7 +16056,7 @@
           </a:bodyPr>
           <a:lstStyle/>
           <a:p>
-            <a:pPr algn="l">
+            <a:pPr algn="ctr">
               <a:lnSpc>
                 <a:spcPct val="100000"/>
               </a:lnSpc>
@@ -14639,27 +16065,27 @@
               </a:spcAft>
             </a:pPr>
             <a:r>
-              <a:rPr sz="1400" b="1" i="0">
-                <a:solidFill>
-                  <a:srgbClr val="012169"/>
-                </a:solidFill>
-                <a:latin typeface="Roboto"/>
-              </a:rPr>
-              <a:t>The bigger unlock</a:t>
-            </a:r>
-          </a:p>
-        </p:txBody>
-      </p:sp>
-      <p:sp>
-        <p:nvSpPr>
-          <p:cNvPr id="18" name="TextBox 17"/>
+              <a:rPr sz="1200" b="1" i="0">
+                <a:solidFill>
+                  <a:srgbClr val="FFFFFF"/>
+                </a:solidFill>
+                <a:latin typeface="Roboto"/>
+              </a:rPr>
+              <a:t>Ongoing</a:t>
+            </a:r>
+          </a:p>
+        </p:txBody>
+      </p:sp>
+      <p:sp>
+        <p:nvSpPr>
+          <p:cNvPr id="25" name="TextBox 24"/>
           <p:cNvSpPr txBox="1"/>
           <p:nvPr/>
         </p:nvSpPr>
         <p:spPr>
           <a:xfrm>
-            <a:off x="8293608" y="1956816"/>
-            <a:ext cx="3246120" cy="1691640"/>
+            <a:off x="2286000" y="4663440"/>
+            <a:ext cx="9144000" cy="365760"/>
           </a:xfrm>
           <a:prstGeom prst="rect">
             <a:avLst/>
@@ -14674,53 +16100,76 @@
           <a:p>
             <a:pPr algn="l">
               <a:lnSpc>
-                <a:spcPct val="105000"/>
-              </a:lnSpc>
-              <a:spcAft>
-                <a:spcPts val="500"/>
-              </a:spcAft>
-            </a:pPr>
-            <a:r>
-              <a:rPr sz="1400" b="0" i="0">
+                <a:spcPct val="100000"/>
+              </a:lnSpc>
+              <a:spcAft>
+                <a:spcPts val="600"/>
+              </a:spcAft>
+            </a:pPr>
+            <a:r>
+              <a:rPr sz="1450" b="1" i="0">
+                <a:solidFill>
+                  <a:srgbClr val="012169"/>
+                </a:solidFill>
+                <a:latin typeface="Roboto"/>
+              </a:rPr>
+              <a:t>Evidence as you go</a:t>
+            </a:r>
+          </a:p>
+        </p:txBody>
+      </p:sp>
+      <p:sp>
+        <p:nvSpPr>
+          <p:cNvPr id="26" name="TextBox 25"/>
+          <p:cNvSpPr txBox="1"/>
+          <p:nvPr/>
+        </p:nvSpPr>
+        <p:spPr>
+          <a:xfrm>
+            <a:off x="2286000" y="5010912"/>
+            <a:ext cx="9144000" cy="411480"/>
+          </a:xfrm>
+          <a:prstGeom prst="rect">
+            <a:avLst/>
+          </a:prstGeom>
+          <a:noFill/>
+        </p:spPr>
+        <p:txBody>
+          <a:bodyPr wrap="square" anchor="t">
+            <a:spAutoFit/>
+          </a:bodyPr>
+          <a:lstStyle/>
+          <a:p>
+            <a:pPr algn="l">
+              <a:lnSpc>
+                <a:spcPct val="100000"/>
+              </a:lnSpc>
+              <a:spcAft>
+                <a:spcPts val="600"/>
+              </a:spcAft>
+            </a:pPr>
+            <a:r>
+              <a:rPr sz="1200" b="0" i="0">
                 <a:solidFill>
                   <a:srgbClr val="1C2430"/>
                 </a:solidFill>
                 <a:latin typeface="Roboto"/>
               </a:rPr>
-              <a:t>Angular 19, 20… become routine</a:t>
-            </a:r>
-          </a:p>
-          <a:p>
-            <a:pPr algn="l">
-              <a:lnSpc>
-                <a:spcPct val="105000"/>
-              </a:lnSpc>
-              <a:spcAft>
-                <a:spcPts val="500"/>
-              </a:spcAft>
-            </a:pPr>
-            <a:r>
-              <a:rPr sz="1400" b="0" i="0">
-                <a:solidFill>
-                  <a:srgbClr val="1C2430"/>
-                </a:solidFill>
-                <a:latin typeface="Roboto"/>
-              </a:rPr>
-              <a:t>Same machinery: cloud migration, test coverage</a:t>
-            </a:r>
-          </a:p>
-        </p:txBody>
-      </p:sp>
-      <p:sp>
-        <p:nvSpPr>
-          <p:cNvPr id="19" name="Rounded Rectangle 18"/>
+              <a:t>Logs + tests + scans = audit file, automatically</a:t>
+            </a:r>
+          </a:p>
+        </p:txBody>
+      </p:sp>
+      <p:sp>
+        <p:nvSpPr>
+          <p:cNvPr id="27" name="Rounded Rectangle 26"/>
           <p:cNvSpPr/>
           <p:nvPr/>
         </p:nvSpPr>
         <p:spPr>
           <a:xfrm>
-            <a:off x="502920" y="4023360"/>
-            <a:ext cx="11201400" cy="1051560"/>
+            <a:off x="502920" y="5669280"/>
+            <a:ext cx="11201400" cy="658368"/>
           </a:xfrm>
           <a:prstGeom prst="roundRect">
             <a:avLst>
@@ -14728,7 +16177,7 @@
             </a:avLst>
           </a:prstGeom>
           <a:solidFill>
-            <a:srgbClr val="F4F6F9"/>
+            <a:srgbClr val="012169"/>
           </a:solidFill>
           <a:ln>
             <a:noFill/>
@@ -14759,14 +16208,14 @@
       </p:sp>
       <p:sp>
         <p:nvSpPr>
-          <p:cNvPr id="20" name="TextBox 19"/>
+          <p:cNvPr id="28" name="TextBox 27"/>
           <p:cNvSpPr txBox="1"/>
           <p:nvPr/>
         </p:nvSpPr>
         <p:spPr>
           <a:xfrm>
-            <a:off x="777240" y="4224528"/>
-            <a:ext cx="10698480" cy="777240"/>
+            <a:off x="777240" y="5788152"/>
+            <a:ext cx="10698480" cy="457200"/>
           </a:xfrm>
           <a:prstGeom prst="rect">
             <a:avLst/>
@@ -14788,20 +16237,20 @@
               </a:spcAft>
             </a:pPr>
             <a:r>
-              <a:rPr sz="1700" b="1" i="1">
-                <a:solidFill>
-                  <a:srgbClr val="012169"/>
-                </a:solidFill>
-                <a:latin typeface="Roboto"/>
-              </a:rPr>
-              <a:t>“We met a hard compliance deadline without pausing the roadmap.”</a:t>
-            </a:r>
-          </a:p>
-        </p:txBody>
-      </p:sp>
-      <p:sp>
-        <p:nvSpPr>
-          <p:cNvPr id="21" name="TextBox 20"/>
+              <a:rPr sz="1500" b="1" i="0">
+                <a:solidFill>
+                  <a:srgbClr val="FFFFFF"/>
+                </a:solidFill>
+                <a:latin typeface="Roboto"/>
+              </a:rPr>
+              <a:t>Devin changes who does the labor — never who's in control.</a:t>
+            </a:r>
+          </a:p>
+        </p:txBody>
+      </p:sp>
+      <p:sp>
+        <p:nvSpPr>
+          <p:cNvPr id="29" name="TextBox 28"/>
           <p:cNvSpPr txBox="1"/>
           <p:nvPr/>
         </p:nvSpPr>
@@ -14984,7 +16433,7 @@
                 </a:solidFill>
                 <a:latin typeface="Roboto"/>
               </a:rPr>
-              <a:t>LEAVING WITH A DECISION, NOT A DECK</a:t>
+              <a:t>WHAT GOOD LOOKS LIKE</a:t>
             </a:r>
           </a:p>
         </p:txBody>
@@ -15026,7 +16475,7 @@
                 </a:solidFill>
                 <a:latin typeface="Roboto"/>
               </a:rPr>
-              <a:t>Proposed next steps</a:t>
+              <a:t>The end state: BofA running on Devin</a:t>
             </a:r>
           </a:p>
         </p:txBody>
@@ -15082,11 +16531,11 @@
         <p:spPr>
           <a:xfrm>
             <a:off x="502920" y="1481328"/>
-            <a:ext cx="11201400" cy="932688"/>
+            <a:ext cx="3611880" cy="2286000"/>
           </a:xfrm>
           <a:prstGeom prst="roundRect">
             <a:avLst>
-              <a:gd name="adj" fmla="val 10000"/>
+              <a:gd name="adj" fmla="val 6000"/>
             </a:avLst>
           </a:prstGeom>
           <a:solidFill>
@@ -15121,16 +16570,16 @@
       </p:sp>
       <p:sp>
         <p:nvSpPr>
-          <p:cNvPr id="8" name="Oval 7"/>
+          <p:cNvPr id="8" name="Rectangle 7"/>
           <p:cNvSpPr/>
           <p:nvPr/>
         </p:nvSpPr>
         <p:spPr>
           <a:xfrm>
-            <a:off x="658368" y="1682496"/>
-            <a:ext cx="530352" cy="530352"/>
-          </a:xfrm>
-          <a:prstGeom prst="ellipse">
+            <a:off x="502920" y="1591056"/>
+            <a:ext cx="54864" cy="2066543"/>
+          </a:xfrm>
+          <a:prstGeom prst="rect">
             <a:avLst/>
           </a:prstGeom>
           <a:solidFill>
@@ -15171,8 +16620,8 @@
         </p:nvSpPr>
         <p:spPr>
           <a:xfrm>
-            <a:off x="658368" y="1755648"/>
-            <a:ext cx="530352" cy="402336"/>
+            <a:off x="704088" y="1591056"/>
+            <a:ext cx="3246120" cy="365760"/>
           </a:xfrm>
           <a:prstGeom prst="rect">
             <a:avLst/>
@@ -15185,7 +16634,7 @@
           </a:bodyPr>
           <a:lstStyle/>
           <a:p>
-            <a:pPr algn="ctr">
+            <a:pPr algn="l">
               <a:lnSpc>
                 <a:spcPct val="100000"/>
               </a:lnSpc>
@@ -15194,13 +16643,13 @@
               </a:spcAft>
             </a:pPr>
             <a:r>
-              <a:rPr sz="1700" b="1" i="0">
-                <a:solidFill>
-                  <a:srgbClr val="FFFFFF"/>
-                </a:solidFill>
-                <a:latin typeface="Roboto"/>
-              </a:rPr>
-              <a:t>1</a:t>
+              <a:rPr sz="1400" b="1" i="0">
+                <a:solidFill>
+                  <a:srgbClr val="012169"/>
+                </a:solidFill>
+                <a:latin typeface="Roboto"/>
+              </a:rPr>
+              <a:t>This migration</a:t>
             </a:r>
           </a:p>
         </p:txBody>
@@ -15213,8 +16662,8 @@
         </p:nvSpPr>
         <p:spPr>
           <a:xfrm>
-            <a:off x="1417320" y="1591056"/>
-            <a:ext cx="1417320" cy="685800"/>
+            <a:off x="704088" y="1956816"/>
+            <a:ext cx="3246120" cy="1691640"/>
           </a:xfrm>
           <a:prstGeom prst="rect">
             <a:avLst/>
@@ -15229,122 +16678,76 @@
           <a:p>
             <a:pPr algn="l">
               <a:lnSpc>
-                <a:spcPct val="100000"/>
-              </a:lnSpc>
-              <a:spcAft>
-                <a:spcPts val="600"/>
-              </a:spcAft>
-            </a:pPr>
-            <a:r>
-              <a:rPr sz="1150" b="1" i="0">
-                <a:solidFill>
-                  <a:srgbClr val="E31837"/>
-                </a:solidFill>
-                <a:latin typeface="Roboto"/>
-              </a:rPr>
-              <a:t>This week</a:t>
-            </a:r>
-          </a:p>
-        </p:txBody>
-      </p:sp>
-      <p:sp>
-        <p:nvSpPr>
-          <p:cNvPr id="11" name="TextBox 10"/>
-          <p:cNvSpPr txBox="1"/>
-          <p:nvPr/>
-        </p:nvSpPr>
-        <p:spPr>
-          <a:xfrm>
-            <a:off x="2834640" y="1591056"/>
-            <a:ext cx="8595360" cy="365760"/>
-          </a:xfrm>
-          <a:prstGeom prst="rect">
-            <a:avLst/>
-          </a:prstGeom>
-          <a:noFill/>
-        </p:spPr>
-        <p:txBody>
-          <a:bodyPr wrap="square" anchor="t">
-            <a:spAutoFit/>
-          </a:bodyPr>
-          <a:lstStyle/>
+                <a:spcPct val="105000"/>
+              </a:lnSpc>
+              <a:spcAft>
+                <a:spcPts val="500"/>
+              </a:spcAft>
+            </a:pPr>
+            <a:r>
+              <a:rPr sz="1400" b="0" i="0">
+                <a:solidFill>
+                  <a:srgbClr val="1C2430"/>
+                </a:solidFill>
+                <a:latin typeface="Roboto"/>
+              </a:rPr>
+              <a:t>Angular 18 before the deadline</a:t>
+            </a:r>
+          </a:p>
           <a:p>
             <a:pPr algn="l">
               <a:lnSpc>
-                <a:spcPct val="100000"/>
-              </a:lnSpc>
-              <a:spcAft>
-                <a:spcPts val="600"/>
-              </a:spcAft>
-            </a:pPr>
-            <a:r>
-              <a:rPr sz="1450" b="1" i="0">
-                <a:solidFill>
-                  <a:srgbClr val="012169"/>
-                </a:solidFill>
-                <a:latin typeface="Roboto"/>
-              </a:rPr>
-              <a:t>Security &amp; data review</a:t>
-            </a:r>
-          </a:p>
-        </p:txBody>
-      </p:sp>
-      <p:sp>
-        <p:nvSpPr>
-          <p:cNvPr id="12" name="TextBox 11"/>
-          <p:cNvSpPr txBox="1"/>
-          <p:nvPr/>
-        </p:nvSpPr>
-        <p:spPr>
-          <a:xfrm>
-            <a:off x="2834640" y="1938528"/>
-            <a:ext cx="8595360" cy="411480"/>
-          </a:xfrm>
-          <a:prstGeom prst="rect">
-            <a:avLst/>
-          </a:prstGeom>
-          <a:noFill/>
-        </p:spPr>
-        <p:txBody>
-          <a:bodyPr wrap="square" anchor="t">
-            <a:spAutoFit/>
-          </a:bodyPr>
-          <a:lstStyle/>
+                <a:spcPct val="105000"/>
+              </a:lnSpc>
+              <a:spcAft>
+                <a:spcPts val="500"/>
+              </a:spcAft>
+            </a:pPr>
+            <a:r>
+              <a:rPr sz="1400" b="0" i="0">
+                <a:solidFill>
+                  <a:srgbClr val="1C2430"/>
+                </a:solidFill>
+                <a:latin typeface="Roboto"/>
+              </a:rPr>
+              <a:t>12+ teams unbroken</a:t>
+            </a:r>
+          </a:p>
           <a:p>
             <a:pPr algn="l">
               <a:lnSpc>
-                <a:spcPct val="100000"/>
-              </a:lnSpc>
-              <a:spcAft>
-                <a:spcPts val="600"/>
-              </a:spcAft>
-            </a:pPr>
-            <a:r>
-              <a:rPr sz="1150" b="0" i="0">
+                <a:spcPct val="105000"/>
+              </a:lnSpc>
+              <a:spcAft>
+                <a:spcPts val="500"/>
+              </a:spcAft>
+            </a:pPr>
+            <a:r>
+              <a:rPr sz="1400" b="0" i="0">
                 <a:solidFill>
                   <a:srgbClr val="1C2430"/>
                 </a:solidFill>
                 <a:latin typeface="Roboto"/>
               </a:rPr>
-              <a:t>Your security team + ours</a:t>
-            </a:r>
-          </a:p>
-        </p:txBody>
-      </p:sp>
-      <p:sp>
-        <p:nvSpPr>
-          <p:cNvPr id="13" name="Rounded Rectangle 12"/>
+              <a:t>Audit trail, automatic</a:t>
+            </a:r>
+          </a:p>
+        </p:txBody>
+      </p:sp>
+      <p:sp>
+        <p:nvSpPr>
+          <p:cNvPr id="11" name="Rounded Rectangle 10"/>
           <p:cNvSpPr/>
           <p:nvPr/>
         </p:nvSpPr>
         <p:spPr>
           <a:xfrm>
-            <a:off x="502920" y="2505456"/>
-            <a:ext cx="11201400" cy="932688"/>
+            <a:off x="4297680" y="1481328"/>
+            <a:ext cx="3611880" cy="2286000"/>
           </a:xfrm>
           <a:prstGeom prst="roundRect">
             <a:avLst>
-              <a:gd name="adj" fmla="val 10000"/>
+              <a:gd name="adj" fmla="val 6000"/>
             </a:avLst>
           </a:prstGeom>
           <a:solidFill>
@@ -15379,16 +16782,16 @@
       </p:sp>
       <p:sp>
         <p:nvSpPr>
-          <p:cNvPr id="14" name="Oval 13"/>
+          <p:cNvPr id="12" name="Rectangle 11"/>
           <p:cNvSpPr/>
           <p:nvPr/>
         </p:nvSpPr>
         <p:spPr>
           <a:xfrm>
-            <a:off x="658368" y="2706624"/>
-            <a:ext cx="530352" cy="530352"/>
-          </a:xfrm>
-          <a:prstGeom prst="ellipse">
+            <a:off x="4297680" y="1591056"/>
+            <a:ext cx="54864" cy="2066543"/>
+          </a:xfrm>
+          <a:prstGeom prst="rect">
             <a:avLst/>
           </a:prstGeom>
           <a:solidFill>
@@ -15423,14 +16826,14 @@
       </p:sp>
       <p:sp>
         <p:nvSpPr>
-          <p:cNvPr id="15" name="TextBox 14"/>
+          <p:cNvPr id="13" name="TextBox 12"/>
           <p:cNvSpPr txBox="1"/>
           <p:nvPr/>
         </p:nvSpPr>
         <p:spPr>
           <a:xfrm>
-            <a:off x="658368" y="2779776"/>
-            <a:ext cx="530352" cy="402336"/>
+            <a:off x="4498848" y="1591056"/>
+            <a:ext cx="3246120" cy="365760"/>
           </a:xfrm>
           <a:prstGeom prst="rect">
             <a:avLst/>
@@ -15443,7 +16846,7 @@
           </a:bodyPr>
           <a:lstStyle/>
           <a:p>
-            <a:pPr algn="ctr">
+            <a:pPr algn="l">
               <a:lnSpc>
                 <a:spcPct val="100000"/>
               </a:lnSpc>
@@ -15452,27 +16855,27 @@
               </a:spcAft>
             </a:pPr>
             <a:r>
-              <a:rPr sz="1700" b="1" i="0">
-                <a:solidFill>
-                  <a:srgbClr val="FFFFFF"/>
-                </a:solidFill>
-                <a:latin typeface="Roboto"/>
-              </a:rPr>
-              <a:t>2</a:t>
-            </a:r>
-          </a:p>
-        </p:txBody>
-      </p:sp>
-      <p:sp>
-        <p:nvSpPr>
-          <p:cNvPr id="16" name="TextBox 15"/>
+              <a:rPr sz="1400" b="1" i="0">
+                <a:solidFill>
+                  <a:srgbClr val="012169"/>
+                </a:solidFill>
+                <a:latin typeface="Roboto"/>
+              </a:rPr>
+              <a:t>Your engineers</a:t>
+            </a:r>
+          </a:p>
+        </p:txBody>
+      </p:sp>
+      <p:sp>
+        <p:nvSpPr>
+          <p:cNvPr id="14" name="TextBox 13"/>
           <p:cNvSpPr txBox="1"/>
           <p:nvPr/>
         </p:nvSpPr>
         <p:spPr>
           <a:xfrm>
-            <a:off x="1417320" y="2615184"/>
-            <a:ext cx="1417320" cy="685800"/>
+            <a:off x="4498848" y="1956816"/>
+            <a:ext cx="3246120" cy="1691640"/>
           </a:xfrm>
           <a:prstGeom prst="rect">
             <a:avLst/>
@@ -15487,122 +16890,57 @@
           <a:p>
             <a:pPr algn="l">
               <a:lnSpc>
-                <a:spcPct val="100000"/>
-              </a:lnSpc>
-              <a:spcAft>
-                <a:spcPts val="600"/>
-              </a:spcAft>
-            </a:pPr>
-            <a:r>
-              <a:rPr sz="1150" b="1" i="0">
-                <a:solidFill>
-                  <a:srgbClr val="E31837"/>
-                </a:solidFill>
-                <a:latin typeface="Roboto"/>
-              </a:rPr>
-              <a:t>Next week</a:t>
-            </a:r>
-          </a:p>
-        </p:txBody>
-      </p:sp>
-      <p:sp>
-        <p:nvSpPr>
-          <p:cNvPr id="17" name="TextBox 16"/>
-          <p:cNvSpPr txBox="1"/>
-          <p:nvPr/>
-        </p:nvSpPr>
-        <p:spPr>
-          <a:xfrm>
-            <a:off x="2834640" y="2615184"/>
-            <a:ext cx="8595360" cy="365760"/>
-          </a:xfrm>
-          <a:prstGeom prst="rect">
-            <a:avLst/>
-          </a:prstGeom>
-          <a:noFill/>
-        </p:spPr>
-        <p:txBody>
-          <a:bodyPr wrap="square" anchor="t">
-            <a:spAutoFit/>
-          </a:bodyPr>
-          <a:lstStyle/>
+                <a:spcPct val="105000"/>
+              </a:lnSpc>
+              <a:spcAft>
+                <a:spcPts val="500"/>
+              </a:spcAft>
+            </a:pPr>
+            <a:r>
+              <a:rPr sz="1400" b="0" i="0">
+                <a:solidFill>
+                  <a:srgbClr val="1C2430"/>
+                </a:solidFill>
+                <a:latin typeface="Roboto"/>
+              </a:rPr>
+              <a:t>Back on revenue features</a:t>
+            </a:r>
+          </a:p>
           <a:p>
             <a:pPr algn="l">
               <a:lnSpc>
-                <a:spcPct val="100000"/>
-              </a:lnSpc>
-              <a:spcAft>
-                <a:spcPts val="600"/>
-              </a:spcAft>
-            </a:pPr>
-            <a:r>
-              <a:rPr sz="1450" b="1" i="0">
-                <a:solidFill>
-                  <a:srgbClr val="012169"/>
-                </a:solidFill>
-                <a:latin typeface="Roboto"/>
-              </a:rPr>
-              <a:t>Pick the pilot slice</a:t>
-            </a:r>
-          </a:p>
-        </p:txBody>
-      </p:sp>
-      <p:sp>
-        <p:nvSpPr>
-          <p:cNvPr id="18" name="TextBox 17"/>
-          <p:cNvSpPr txBox="1"/>
-          <p:nvPr/>
-        </p:nvSpPr>
-        <p:spPr>
-          <a:xfrm>
-            <a:off x="2834640" y="2962656"/>
-            <a:ext cx="8595360" cy="411480"/>
-          </a:xfrm>
-          <a:prstGeom prst="rect">
-            <a:avLst/>
-          </a:prstGeom>
-          <a:noFill/>
-        </p:spPr>
-        <p:txBody>
-          <a:bodyPr wrap="square" anchor="t">
-            <a:spAutoFit/>
-          </a:bodyPr>
-          <a:lstStyle/>
-          <a:p>
-            <a:pPr algn="l">
-              <a:lnSpc>
-                <a:spcPct val="100000"/>
-              </a:lnSpc>
-              <a:spcAft>
-                <a:spcPts val="600"/>
-              </a:spcAft>
-            </a:pPr>
-            <a:r>
-              <a:rPr sz="1150" b="0" i="0">
+                <a:spcPct val="105000"/>
+              </a:lnSpc>
+              <a:spcAft>
+                <a:spcPts val="500"/>
+              </a:spcAft>
+            </a:pPr>
+            <a:r>
+              <a:rPr sz="1400" b="0" i="0">
                 <a:solidFill>
                   <a:srgbClr val="1C2430"/>
                 </a:solidFill>
                 <a:latin typeface="Roboto"/>
               </a:rPr>
-              <a:t>One real repo, your success criteria</a:t>
-            </a:r>
-          </a:p>
-        </p:txBody>
-      </p:sp>
-      <p:sp>
-        <p:nvSpPr>
-          <p:cNvPr id="19" name="Rounded Rectangle 18"/>
+              <a:t>Reviewing, not hand-migrating</a:t>
+            </a:r>
+          </a:p>
+        </p:txBody>
+      </p:sp>
+      <p:sp>
+        <p:nvSpPr>
+          <p:cNvPr id="15" name="Rounded Rectangle 14"/>
           <p:cNvSpPr/>
           <p:nvPr/>
         </p:nvSpPr>
         <p:spPr>
           <a:xfrm>
-            <a:off x="502920" y="3529584"/>
-            <a:ext cx="11201400" cy="932688"/>
+            <a:off x="8092440" y="1481328"/>
+            <a:ext cx="3611880" cy="2286000"/>
           </a:xfrm>
           <a:prstGeom prst="roundRect">
             <a:avLst>
-              <a:gd name="adj" fmla="val 10000"/>
+              <a:gd name="adj" fmla="val 6000"/>
             </a:avLst>
           </a:prstGeom>
           <a:solidFill>
@@ -15637,16 +16975,16 @@
       </p:sp>
       <p:sp>
         <p:nvSpPr>
-          <p:cNvPr id="20" name="Oval 19"/>
+          <p:cNvPr id="16" name="Rectangle 15"/>
           <p:cNvSpPr/>
           <p:nvPr/>
         </p:nvSpPr>
         <p:spPr>
           <a:xfrm>
-            <a:off x="658368" y="3730752"/>
-            <a:ext cx="530352" cy="530352"/>
-          </a:xfrm>
-          <a:prstGeom prst="ellipse">
+            <a:off x="8092440" y="1591056"/>
+            <a:ext cx="54864" cy="2066543"/>
+          </a:xfrm>
+          <a:prstGeom prst="rect">
             <a:avLst/>
           </a:prstGeom>
           <a:solidFill>
@@ -15681,14 +17019,14 @@
       </p:sp>
       <p:sp>
         <p:nvSpPr>
-          <p:cNvPr id="21" name="TextBox 20"/>
+          <p:cNvPr id="17" name="TextBox 16"/>
           <p:cNvSpPr txBox="1"/>
           <p:nvPr/>
         </p:nvSpPr>
         <p:spPr>
           <a:xfrm>
-            <a:off x="658368" y="3803904"/>
-            <a:ext cx="530352" cy="402336"/>
+            <a:off x="8293608" y="1591056"/>
+            <a:ext cx="3246120" cy="365760"/>
           </a:xfrm>
           <a:prstGeom prst="rect">
             <a:avLst/>
@@ -15701,7 +17039,7 @@
           </a:bodyPr>
           <a:lstStyle/>
           <a:p>
-            <a:pPr algn="ctr">
+            <a:pPr algn="l">
               <a:lnSpc>
                 <a:spcPct val="100000"/>
               </a:lnSpc>
@@ -15710,27 +17048,27 @@
               </a:spcAft>
             </a:pPr>
             <a:r>
-              <a:rPr sz="1700" b="1" i="0">
-                <a:solidFill>
-                  <a:srgbClr val="FFFFFF"/>
-                </a:solidFill>
-                <a:latin typeface="Roboto"/>
-              </a:rPr>
-              <a:t>3</a:t>
-            </a:r>
-          </a:p>
-        </p:txBody>
-      </p:sp>
-      <p:sp>
-        <p:nvSpPr>
-          <p:cNvPr id="22" name="TextBox 21"/>
+              <a:rPr sz="1400" b="1" i="0">
+                <a:solidFill>
+                  <a:srgbClr val="012169"/>
+                </a:solidFill>
+                <a:latin typeface="Roboto"/>
+              </a:rPr>
+              <a:t>The bigger unlock</a:t>
+            </a:r>
+          </a:p>
+        </p:txBody>
+      </p:sp>
+      <p:sp>
+        <p:nvSpPr>
+          <p:cNvPr id="18" name="TextBox 17"/>
           <p:cNvSpPr txBox="1"/>
           <p:nvPr/>
         </p:nvSpPr>
         <p:spPr>
           <a:xfrm>
-            <a:off x="1417320" y="3639312"/>
-            <a:ext cx="1417320" cy="685800"/>
+            <a:off x="8293608" y="1956816"/>
+            <a:ext cx="3246120" cy="1691640"/>
           </a:xfrm>
           <a:prstGeom prst="rect">
             <a:avLst/>
@@ -15745,118 +17083,53 @@
           <a:p>
             <a:pPr algn="l">
               <a:lnSpc>
-                <a:spcPct val="100000"/>
-              </a:lnSpc>
-              <a:spcAft>
-                <a:spcPts val="600"/>
-              </a:spcAft>
-            </a:pPr>
-            <a:r>
-              <a:rPr sz="1150" b="1" i="0">
-                <a:solidFill>
-                  <a:srgbClr val="E31837"/>
-                </a:solidFill>
-                <a:latin typeface="Roboto"/>
-              </a:rPr>
-              <a:t>Weeks 2–4</a:t>
-            </a:r>
-          </a:p>
-        </p:txBody>
-      </p:sp>
-      <p:sp>
-        <p:nvSpPr>
-          <p:cNvPr id="23" name="TextBox 22"/>
-          <p:cNvSpPr txBox="1"/>
-          <p:nvPr/>
-        </p:nvSpPr>
-        <p:spPr>
-          <a:xfrm>
-            <a:off x="2834640" y="3639312"/>
-            <a:ext cx="8595360" cy="365760"/>
-          </a:xfrm>
-          <a:prstGeom prst="rect">
-            <a:avLst/>
-          </a:prstGeom>
-          <a:noFill/>
-        </p:spPr>
-        <p:txBody>
-          <a:bodyPr wrap="square" anchor="t">
-            <a:spAutoFit/>
-          </a:bodyPr>
-          <a:lstStyle/>
+                <a:spcPct val="105000"/>
+              </a:lnSpc>
+              <a:spcAft>
+                <a:spcPts val="500"/>
+              </a:spcAft>
+            </a:pPr>
+            <a:r>
+              <a:rPr sz="1400" b="0" i="0">
+                <a:solidFill>
+                  <a:srgbClr val="1C2430"/>
+                </a:solidFill>
+                <a:latin typeface="Roboto"/>
+              </a:rPr>
+              <a:t>Angular 19, 20… become routine</a:t>
+            </a:r>
+          </a:p>
           <a:p>
             <a:pPr algn="l">
               <a:lnSpc>
-                <a:spcPct val="100000"/>
-              </a:lnSpc>
-              <a:spcAft>
-                <a:spcPts val="600"/>
-              </a:spcAft>
-            </a:pPr>
-            <a:r>
-              <a:rPr sz="1450" b="1" i="0">
-                <a:solidFill>
-                  <a:srgbClr val="012169"/>
-                </a:solidFill>
-                <a:latin typeface="Roboto"/>
-              </a:rPr>
-              <a:t>Bounded pilot</a:t>
-            </a:r>
-          </a:p>
-        </p:txBody>
-      </p:sp>
-      <p:sp>
-        <p:nvSpPr>
-          <p:cNvPr id="24" name="TextBox 23"/>
-          <p:cNvSpPr txBox="1"/>
-          <p:nvPr/>
-        </p:nvSpPr>
-        <p:spPr>
-          <a:xfrm>
-            <a:off x="2834640" y="3986784"/>
-            <a:ext cx="8595360" cy="411480"/>
-          </a:xfrm>
-          <a:prstGeom prst="rect">
-            <a:avLst/>
-          </a:prstGeom>
-          <a:noFill/>
-        </p:spPr>
-        <p:txBody>
-          <a:bodyPr wrap="square" anchor="t">
-            <a:spAutoFit/>
-          </a:bodyPr>
-          <a:lstStyle/>
-          <a:p>
-            <a:pPr algn="l">
-              <a:lnSpc>
-                <a:spcPct val="100000"/>
-              </a:lnSpc>
-              <a:spcAft>
-                <a:spcPts val="600"/>
-              </a:spcAft>
-            </a:pPr>
-            <a:r>
-              <a:rPr sz="1150" b="0" i="0">
+                <a:spcPct val="105000"/>
+              </a:lnSpc>
+              <a:spcAft>
+                <a:spcPts val="500"/>
+              </a:spcAft>
+            </a:pPr>
+            <a:r>
+              <a:rPr sz="1400" b="0" i="0">
                 <a:solidFill>
                   <a:srgbClr val="1C2430"/>
                 </a:solidFill>
                 <a:latin typeface="Roboto"/>
               </a:rPr>
-              <a:t>Devin migrates it; your engineers review; we measure</a:t>
-            </a:r>
-          </a:p>
-        </p:txBody>
-      </p:sp>
-      <p:sp>
-        <p:nvSpPr>
-          <p:cNvPr id="25" name="Rounded Rectangle 24"/>
+              <a:t>Same machinery: cloud migration, test coverage</a:t>
+            </a:r>
+          </a:p>
+        </p:txBody>
+      </p:sp>
+      <p:sp>
+        <p:nvSpPr>
+          <p:cNvPr id="19" name="Rounded Rectangle 18"/>
           <p:cNvSpPr/>
           <p:nvPr/>
         </p:nvSpPr>
         <p:spPr>
           <a:xfrm>
-            <a:off x="502920" y="4553712"/>
-            <a:ext cx="11201400" cy="932688"/>
+            <a:off x="502920" y="4023360"/>
+            <a:ext cx="11201400" cy="1051560"/>
           </a:xfrm>
           <a:prstGeom prst="roundRect">
             <a:avLst>
@@ -15895,58 +17168,14 @@
       </p:sp>
       <p:sp>
         <p:nvSpPr>
-          <p:cNvPr id="26" name="Oval 25"/>
-          <p:cNvSpPr/>
-          <p:nvPr/>
-        </p:nvSpPr>
-        <p:spPr>
-          <a:xfrm>
-            <a:off x="658368" y="4754880"/>
-            <a:ext cx="530352" cy="530352"/>
-          </a:xfrm>
-          <a:prstGeom prst="ellipse">
-            <a:avLst/>
-          </a:prstGeom>
-          <a:solidFill>
-            <a:srgbClr val="E31837"/>
-          </a:solidFill>
-          <a:ln>
-            <a:noFill/>
-          </a:ln>
-          <a:effectLst/>
-        </p:spPr>
-        <p:style>
-          <a:lnRef idx="1">
-            <a:schemeClr val="accent1"/>
-          </a:lnRef>
-          <a:fillRef idx="3">
-            <a:schemeClr val="accent1"/>
-          </a:fillRef>
-          <a:effectRef idx="2">
-            <a:schemeClr val="accent1"/>
-          </a:effectRef>
-          <a:fontRef idx="minor">
-            <a:schemeClr val="lt1"/>
-          </a:fontRef>
-        </p:style>
-        <p:txBody>
-          <a:bodyPr rtlCol="0" anchor="ctr"/>
-          <a:lstStyle/>
-          <a:p>
-            <a:pPr algn="ctr"/>
-          </a:p>
-        </p:txBody>
-      </p:sp>
-      <p:sp>
-        <p:nvSpPr>
-          <p:cNvPr id="27" name="TextBox 26"/>
+          <p:cNvPr id="20" name="TextBox 19"/>
           <p:cNvSpPr txBox="1"/>
           <p:nvPr/>
         </p:nvSpPr>
         <p:spPr>
           <a:xfrm>
-            <a:off x="658368" y="4828032"/>
-            <a:ext cx="530352" cy="402336"/>
+            <a:off x="777240" y="4224528"/>
+            <a:ext cx="10698480" cy="777240"/>
           </a:xfrm>
           <a:prstGeom prst="rect">
             <a:avLst/>
@@ -15959,7 +17188,7 @@
           </a:bodyPr>
           <a:lstStyle/>
           <a:p>
-            <a:pPr algn="ctr">
+            <a:pPr algn="l">
               <a:lnSpc>
                 <a:spcPct val="100000"/>
               </a:lnSpc>
@@ -15968,197 +17197,20 @@
               </a:spcAft>
             </a:pPr>
             <a:r>
-              <a:rPr sz="1700" b="1" i="0">
-                <a:solidFill>
-                  <a:srgbClr val="FFFFFF"/>
-                </a:solidFill>
-                <a:latin typeface="Roboto"/>
-              </a:rPr>
-              <a:t>4</a:t>
-            </a:r>
-          </a:p>
-        </p:txBody>
-      </p:sp>
-      <p:sp>
-        <p:nvSpPr>
-          <p:cNvPr id="28" name="TextBox 27"/>
-          <p:cNvSpPr txBox="1"/>
-          <p:nvPr/>
-        </p:nvSpPr>
-        <p:spPr>
-          <a:xfrm>
-            <a:off x="1417320" y="4663440"/>
-            <a:ext cx="1417320" cy="685800"/>
-          </a:xfrm>
-          <a:prstGeom prst="rect">
-            <a:avLst/>
-          </a:prstGeom>
-          <a:noFill/>
-        </p:spPr>
-        <p:txBody>
-          <a:bodyPr wrap="square" anchor="t">
-            <a:spAutoFit/>
-          </a:bodyPr>
-          <a:lstStyle/>
-          <a:p>
-            <a:pPr algn="l">
-              <a:lnSpc>
-                <a:spcPct val="100000"/>
-              </a:lnSpc>
-              <a:spcAft>
-                <a:spcPts val="600"/>
-              </a:spcAft>
-            </a:pPr>
-            <a:r>
-              <a:rPr sz="1150" b="1" i="0">
-                <a:solidFill>
-                  <a:srgbClr val="E31837"/>
-                </a:solidFill>
-                <a:latin typeface="Roboto"/>
-              </a:rPr>
-              <a:t>Week 4</a:t>
-            </a:r>
-          </a:p>
-        </p:txBody>
-      </p:sp>
-      <p:sp>
-        <p:nvSpPr>
-          <p:cNvPr id="29" name="TextBox 28"/>
-          <p:cNvSpPr txBox="1"/>
-          <p:nvPr/>
-        </p:nvSpPr>
-        <p:spPr>
-          <a:xfrm>
-            <a:off x="2834640" y="4663440"/>
-            <a:ext cx="8595360" cy="365760"/>
-          </a:xfrm>
-          <a:prstGeom prst="rect">
-            <a:avLst/>
-          </a:prstGeom>
-          <a:noFill/>
-        </p:spPr>
-        <p:txBody>
-          <a:bodyPr wrap="square" anchor="t">
-            <a:spAutoFit/>
-          </a:bodyPr>
-          <a:lstStyle/>
-          <a:p>
-            <a:pPr algn="l">
-              <a:lnSpc>
-                <a:spcPct val="100000"/>
-              </a:lnSpc>
-              <a:spcAft>
-                <a:spcPts val="600"/>
-              </a:spcAft>
-            </a:pPr>
-            <a:r>
-              <a:rPr sz="1450" b="1" i="0">
+              <a:rPr sz="1700" b="1" i="1">
                 <a:solidFill>
                   <a:srgbClr val="012169"/>
                 </a:solidFill>
                 <a:latin typeface="Roboto"/>
               </a:rPr>
-              <a:t>Go / no-go readout</a:t>
-            </a:r>
-          </a:p>
-        </p:txBody>
-      </p:sp>
-      <p:sp>
-        <p:nvSpPr>
-          <p:cNvPr id="30" name="TextBox 29"/>
-          <p:cNvSpPr txBox="1"/>
-          <p:nvPr/>
-        </p:nvSpPr>
-        <p:spPr>
-          <a:xfrm>
-            <a:off x="2834640" y="5010912"/>
-            <a:ext cx="8595360" cy="411480"/>
-          </a:xfrm>
-          <a:prstGeom prst="rect">
-            <a:avLst/>
-          </a:prstGeom>
-          <a:noFill/>
-        </p:spPr>
-        <p:txBody>
-          <a:bodyPr wrap="square" anchor="t">
-            <a:spAutoFit/>
-          </a:bodyPr>
-          <a:lstStyle/>
-          <a:p>
-            <a:pPr algn="l">
-              <a:lnSpc>
-                <a:spcPct val="100000"/>
-              </a:lnSpc>
-              <a:spcAft>
-                <a:spcPts val="600"/>
-              </a:spcAft>
-            </a:pPr>
-            <a:r>
-              <a:rPr sz="1150" b="0" i="0">
-                <a:solidFill>
-                  <a:srgbClr val="1C2430"/>
-                </a:solidFill>
-                <a:latin typeface="Roboto"/>
-              </a:rPr>
-              <a:t>Results in front of this room</a:t>
-            </a:r>
-          </a:p>
-        </p:txBody>
-      </p:sp>
-      <p:sp>
-        <p:nvSpPr>
-          <p:cNvPr id="31" name="TextBox 30"/>
-          <p:cNvSpPr txBox="1"/>
-          <p:nvPr/>
-        </p:nvSpPr>
-        <p:spPr>
-          <a:xfrm>
-            <a:off x="502920" y="5715000"/>
-            <a:ext cx="11201400" cy="548640"/>
-          </a:xfrm>
-          <a:prstGeom prst="rect">
-            <a:avLst/>
-          </a:prstGeom>
-          <a:noFill/>
-        </p:spPr>
-        <p:txBody>
-          <a:bodyPr wrap="square" anchor="t">
-            <a:spAutoFit/>
-          </a:bodyPr>
-          <a:lstStyle/>
-          <a:p>
-            <a:pPr algn="l">
-              <a:lnSpc>
-                <a:spcPct val="100000"/>
-              </a:lnSpc>
-              <a:spcAft>
-                <a:spcPts val="600"/>
-              </a:spcAft>
-            </a:pPr>
-            <a:r>
-              <a:rPr sz="1400" b="1" i="0">
-                <a:solidFill>
-                  <a:srgbClr val="E31837"/>
-                </a:solidFill>
-                <a:latin typeface="Roboto"/>
-              </a:rPr>
-              <a:t>The ask:  </a:t>
-            </a:r>
-            <a:r>
-              <a:rPr sz="1400" b="1" i="0">
-                <a:solidFill>
-                  <a:srgbClr val="012169"/>
-                </a:solidFill>
-                <a:latin typeface="Roboto"/>
-              </a:rPr>
-              <a:t>one repo, four weeks, your success criteria.</a:t>
-            </a:r>
-          </a:p>
-        </p:txBody>
-      </p:sp>
-      <p:sp>
-        <p:nvSpPr>
-          <p:cNvPr id="32" name="TextBox 31"/>
+              <a:t>“We met a hard compliance deadline without pausing the roadmap.”</a:t>
+            </a:r>
+          </a:p>
+        </p:txBody>
+      </p:sp>
+      <p:sp>
+        <p:nvSpPr>
+          <p:cNvPr id="21" name="TextBox 20"/>
           <p:cNvSpPr txBox="1"/>
           <p:nvPr/>
         </p:nvSpPr>

--- a/presentation/BofA_x_Cognition_Devin_Demo.pptx
+++ b/presentation/BofA_x_Cognition_Devin_Demo.pptx
@@ -1023,7 +1023,7 @@
           <a:p/>
           <a:p>
             <a:r>
-              <a:t>--- "WHY I'M HERE (AND WHY BOFA)" — delivered verbally off this slide, ~2 min, no dedicated slide. Keep it brief; you represent Cognition, not your biography:</a:t>
+              <a:t>--- "WHY I'M HERE" — delivered verbally off this slide, ~2 min, no dedicated slide. Keep it brief; you represent Cognition, not your biography:</a:t>
             </a:r>
           </a:p>
           <a:p/>
@@ -1035,7 +1035,7 @@
           <a:p/>
           <a:p>
             <a:r>
-              <a:t>Then pivot to why BofA (one breath, then move on): "And BofA is exactly where this matters most — you're one of the biggest engineering orgs on the planet, ~$13B a year in tech, already AI-forward with Erica. At your scale, a systematic, fully-logged way to do this work isn't a nice-to-have."</a:t>
+              <a:t>Don't make the full why-BofA case here — that now has its own slide (slide 4, right after the problem slide, part of agenda item 2). Just tee it up in one breath: "And I'll say a word in a minute about why I think BofA specifically is the right place for this."</a:t>
             </a:r>
           </a:p>
           <a:p/>

--- a/presentation/BofA_x_Cognition_Devin_Demo.pptx
+++ b/presentation/BofA_x_Cognition_Devin_Demo.pptx
@@ -1144,6 +1144,39 @@
           <a:p/>
           <a:p>
             <a:r>
+              <a:t>The "run the bank" number is your credibility anchor — deliver it slowly: "Consistent with industry benchmarks — McKinsey and Gartner both put it here — roughly 70% of a major bank's IT budget goes to 'run the bank' operational maintenance, leaving limited capacity for the work that actually differentiates you. Applied to your own public numbers — $13.5B in tech spend, $4B+ on new initiatives — that maintenance baseline is on the order of $9.5B a year. That is exactly the category of work Devin takes on."</a:t>
+            </a:r>
+          </a:p>
+          <a:p/>
+          <a:p>
+            <a:r>
+              <a:t>McKinsey quote if they want the source verbatim: "'run the bank' and 'mandatory change' spending often represents up to 70 percent of technology budgets... leaving only limited capacity for investments that can drive competitive differentiation."</a:t>
+            </a:r>
+          </a:p>
+          <a:p/>
+          <a:p>
+            <a:r>
+              <a:t>SOURCES (have these open in a tab):</a:t>
+            </a:r>
+          </a:p>
+          <a:p>
+            <a:r>
+              <a:t>- BofA Fast Facts — $13.5B tech, $4B+ new initiatives: https://newsroom.bankofamerica.com/content/newsroom/company-overview/bank-of-america-fast-facts.html</a:t>
+            </a:r>
+          </a:p>
+          <a:p>
+            <a:r>
+              <a:t>- McKinsey, "Unlocking value from technology in banking": https://www.mckinsey.com/industries/financial-services/our-insights/unlocking-value-from-technology-in-banking-an-investor-lens</a:t>
+            </a:r>
+          </a:p>
+          <a:p>
+            <a:r>
+              <a:t>Be clear the ~$9.5B is your own illustrative math (70% of $13.5B), not a figure BofA published — present it as "on the order of," not a hard number, in case someone checks.</a:t>
+            </a:r>
+          </a:p>
+          <a:p/>
+          <a:p>
+            <a:r>
               <a:t>Bridge to the demo (one line, don't dwell): "Today's concrete example is your Angular 14→18 migration — hard EOL deadline, millions of customers, a shared library with 12+ downstream teams. We'll dig into that live in the demo."</a:t>
             </a:r>
           </a:p>
@@ -1287,6 +1320,18 @@
           <a:p/>
           <a:p>
             <a:r>
+              <a:t>Adoption / "easy to pick up" point (land it on the VP Eng and Architect): "There's almost no new tool for your engineers to learn. Devin works through the same GitHub, the same pull requests, the same CI you already run. Your team's day-to-day changes from writing migrations by hand to reviewing PRs — something every engineer here already does all day. Onboarding is measured in hours, not a training program."</a:t>
+            </a:r>
+          </a:p>
+          <a:p/>
+          <a:p>
+            <a:r>
+              <a:t>Similar customers (social proof): "And you wouldn't be the first regulated enterprise to do this — [name the specific comparable customers/logos Cognition is cleared to reference here]." Only say names you are 100% authorized to share; if you can't name any, keep it general ("large regulated enterprises") rather than implying more than you can back up.</a:t>
+            </a:r>
+          </a:p>
+          <a:p/>
+          <a:p>
+            <a:r>
               <a:t>DERAIL-PREP: If someone says "scale cuts both ways — our estate is too messy for this": "That's exactly why we start with a bounded pilot on one slice, not a big-bang rollout. Messy is normal; we'll see how Devin handles it on your code."</a:t>
             </a:r>
           </a:p>
@@ -1304,6 +1349,11 @@
           <a:p>
             <a:r>
               <a:t>- Find 1–2 public BofA exec quotes on GenAI for developers to cite verbatim.</a:t>
+            </a:r>
+          </a:p>
+          <a:p>
+            <a:r>
+              <a:t>- Confirm which comparable enterprise/financial-services customers Cognition is cleared to name out loud, and have 1–2 ready.</a:t>
             </a:r>
           </a:p>
         </p:txBody>
@@ -11238,15 +11288,15 @@
         <p:spPr>
           <a:xfrm>
             <a:off x="502920" y="4526280"/>
-            <a:ext cx="11201400" cy="868680"/>
+            <a:ext cx="11201400" cy="1234440"/>
           </a:xfrm>
           <a:prstGeom prst="roundRect">
             <a:avLst>
-              <a:gd name="adj" fmla="val 10000"/>
+              <a:gd name="adj" fmla="val 9000"/>
             </a:avLst>
           </a:prstGeom>
           <a:solidFill>
-            <a:srgbClr val="F4F6F9"/>
+            <a:srgbClr val="012169"/>
           </a:solidFill>
           <a:ln>
             <a:noFill/>
@@ -11284,7 +11334,7 @@
         <p:spPr>
           <a:xfrm>
             <a:off x="777240" y="4736592"/>
-            <a:ext cx="10698480" cy="594360"/>
+            <a:ext cx="2468880" cy="868680"/>
           </a:xfrm>
           <a:prstGeom prst="rect">
             <a:avLst/>
@@ -11292,7 +11342,7 @@
           <a:noFill/>
         </p:spPr>
         <p:txBody>
-          <a:bodyPr wrap="square" anchor="t">
+          <a:bodyPr wrap="square" anchor="ctr">
             <a:spAutoFit/>
           </a:bodyPr>
           <a:lstStyle/>
@@ -11306,13 +11356,13 @@
               </a:spcAft>
             </a:pPr>
             <a:r>
-              <a:rPr sz="1600" b="1" i="0">
-                <a:solidFill>
-                  <a:srgbClr val="012169"/>
-                </a:solidFill>
-                <a:latin typeface="Roboto"/>
-              </a:rPr>
-              <a:t>Every quarter spent on maintenance is a quarter not spent building.</a:t>
+              <a:rPr sz="4200" b="1" i="0">
+                <a:solidFill>
+                  <a:srgbClr val="E31837"/>
+                </a:solidFill>
+                <a:latin typeface="Roboto"/>
+              </a:rPr>
+              <a:t>~70%</a:t>
             </a:r>
           </a:p>
         </p:txBody>
@@ -11320,6 +11370,67 @@
       <p:sp>
         <p:nvSpPr>
           <p:cNvPr id="22" name="TextBox 21"/>
+          <p:cNvSpPr txBox="1"/>
+          <p:nvPr/>
+        </p:nvSpPr>
+        <p:spPr>
+          <a:xfrm>
+            <a:off x="3200400" y="4736592"/>
+            <a:ext cx="8229600" cy="868680"/>
+          </a:xfrm>
+          <a:prstGeom prst="rect">
+            <a:avLst/>
+          </a:prstGeom>
+          <a:noFill/>
+        </p:spPr>
+        <p:txBody>
+          <a:bodyPr wrap="square" anchor="ctr">
+            <a:spAutoFit/>
+          </a:bodyPr>
+          <a:lstStyle/>
+          <a:p>
+            <a:pPr algn="l">
+              <a:lnSpc>
+                <a:spcPct val="100000"/>
+              </a:lnSpc>
+              <a:spcAft>
+                <a:spcPts val="600"/>
+              </a:spcAft>
+            </a:pPr>
+            <a:r>
+              <a:rPr sz="1500" b="1" i="0">
+                <a:solidFill>
+                  <a:srgbClr val="FFFFFF"/>
+                </a:solidFill>
+                <a:latin typeface="Roboto"/>
+              </a:rPr>
+              <a:t>of a major bank's tech budget goes to “running the bank,” not building it.</a:t>
+            </a:r>
+          </a:p>
+          <a:p>
+            <a:pPr algn="l">
+              <a:lnSpc>
+                <a:spcPct val="100000"/>
+              </a:lnSpc>
+              <a:spcAft>
+                <a:spcPts val="600"/>
+              </a:spcAft>
+            </a:pPr>
+            <a:r>
+              <a:rPr sz="1250" b="0" i="0">
+                <a:solidFill>
+                  <a:srgbClr val="C9D4EC"/>
+                </a:solidFill>
+                <a:latin typeface="Roboto"/>
+              </a:rPr>
+              <a:t>For BofA that's ~$9.5B of $13.5B — the exact work Devin absorbs.</a:t>
+            </a:r>
+          </a:p>
+        </p:txBody>
+      </p:sp>
+      <p:sp>
+        <p:nvSpPr>
+          <p:cNvPr id="23" name="TextBox 22"/>
           <p:cNvSpPr txBox="1"/>
           <p:nvPr/>
         </p:nvSpPr>
@@ -11760,7 +11871,7 @@
                 </a:solidFill>
                 <a:latin typeface="Roboto"/>
               </a:rPr>
-              <a:t>~$13B annual tech spend</a:t>
+              <a:t>~$13.5B annual tech spend</a:t>
             </a:r>
           </a:p>
           <a:p>
@@ -12104,7 +12215,7 @@
                 </a:solidFill>
                 <a:latin typeface="Roboto"/>
               </a:rPr>
-              <a:t>The environment</a:t>
+              <a:t>The fit</a:t>
             </a:r>
           </a:p>
         </p:txBody>
@@ -12165,7 +12276,7 @@
                 </a:solidFill>
                 <a:latin typeface="Roboto"/>
               </a:rPr>
-              <a:t>Devin's PR + log model fits it natively</a:t>
+              <a:t>Engineers keep their GitHub + PR flow</a:t>
             </a:r>
           </a:p>
         </p:txBody>
@@ -12253,7 +12364,7 @@
                 </a:solidFill>
                 <a:latin typeface="Roboto"/>
               </a:rPr>
-              <a:t>The bigger the estate, the bigger the payoff from doing this systematically.</a:t>
+              <a:t>Low switching cost — and already proven at large, regulated enterprises.</a:t>
             </a:r>
           </a:p>
         </p:txBody>

--- a/presentation/BofA_x_Cognition_Devin_Demo.pptx
+++ b/presentation/BofA_x_Cognition_Devin_Demo.pptx
@@ -920,7 +920,7 @@
           </a:p>
           <a:p>
             <a:r>
-              <a:t>1. The ~$13B tech budget and Erica stats — these are your two 'I did my homework' credibility numbers; get them current and sourced.</a:t>
+              <a:t>1. The ~$13.5B tech budget and Erica stats — these are your two 'I did my homework' credibility numbers; get them current and sourced.</a:t>
             </a:r>
           </a:p>
           <a:p>
@@ -1052,7 +1052,7 @@
           </a:p>
           <a:p>
             <a:r>
-              <a:t>- Verify the current BofA tech budget figure (~$12–13B cited publicly; ~$3.5–4B on new initiatives) from their most recent earnings call.</a:t>
+              <a:t>- Verify the current BofA tech budget figure (~$13.5B total, $4B+ on new initiatives per BofA Fast Facts) from their most recent earnings call / newsroom.</a:t>
             </a:r>
           </a:p>
           <a:p>
@@ -1308,7 +1308,7 @@
           <a:p/>
           <a:p>
             <a:r>
-              <a:t>Talk track: "Three reasons this conversation makes more sense here than almost anywhere else. First, scale: at ~$13B a year in tech, even a small percentage of engineering capacity reclaimed from maintenance is enormous in absolute terms. Second, you're not AI-skeptics — Erica, the patent portfolio, your leadership's public statements — the organizational muscle to adopt this already exists. Third, and counterintuitively: your regulated environment is an advantage. Devin works through pull requests and leaves a complete session log — it was built for places where every change needs a paper trail."</a:t>
+              <a:t>Talk track: "Three reasons this conversation makes more sense here than almost anywhere else. First, scale: at ~$13.5B a year in tech, even a small percentage of engineering capacity reclaimed from maintenance is enormous in absolute terms. Second, you're not AI-skeptics — Erica, the patent portfolio, your leadership's public statements — the organizational muscle to adopt this already exists. Third, and counterintuitively: your regulated environment is an advantage. Devin works through pull requests and leaves a complete session log — it was built for places where every change needs a paper trail."</a:t>
             </a:r>
           </a:p>
           <a:p/>
@@ -8171,7 +8171,7 @@
                 </a:solidFill>
                 <a:latin typeface="Roboto"/>
               </a:rPr>
-              <a:t>BofA tech budget: verify latest figure (~$12–13B total, ~$3.5–4B new initiatives) from most recent earnings call.</a:t>
+              <a:t>BofA tech budget: verify latest figure (~$13.5B total, $4B+ new initiatives per BofA Fast Facts) from most recent earnings call / newsroom.</a:t>
             </a:r>
           </a:p>
           <a:p>

--- a/presentation/BofA_x_Cognition_Devin_Demo.pptx
+++ b/presentation/BofA_x_Cognition_Devin_Demo.pptx
@@ -18,6 +18,7 @@
     <p:sldId id="266" r:id="rId18"/>
     <p:sldId id="267" r:id="rId19"/>
     <p:sldId id="268" r:id="rId20"/>
+    <p:sldId id="269" r:id="rId21"/>
   </p:sldIdLst>
   <p:sldSz cx="12191695" cy="6858000" type="screen4x3"/>
   <p:notesSz cx="6858000" cy="9144000"/>
@@ -618,58 +619,34 @@
           <a:lstStyle/>
           <a:p>
             <a:r>
-              <a:t>End with a specific, low-risk ask and assign owners in the room — that's what turns a nice meeting into a pipeline.</a:t>
+              <a:t>Paint the after-picture in THEIR terms, one beat per persona:</a:t>
+            </a:r>
+          </a:p>
+          <a:p>
+            <a:r>
+              <a:t>- VP Eng: capacity back + deadline met without roadmap carnage.</a:t>
+            </a:r>
+          </a:p>
+          <a:p>
+            <a:r>
+              <a:t>- Security: policy violation resolved, plus a standing audit trail for every future change.</a:t>
+            </a:r>
+          </a:p>
+          <a:p>
+            <a:r>
+              <a:t>- Architect: consistency enforced mechanically across the estate; migrations become boring (the highest compliment in architecture).</a:t>
             </a:r>
           </a:p>
           <a:p/>
           <a:p>
             <a:r>
-              <a:t>Talk track: "Here's what I'd propose. First, we sit down together and pick three use cases — the natural starting points are work like what you just watched: framework upgrades, migrations, test-coverage debt — but you know your backlog; whatever you'd never staff greenfield engineers on is a candidate. Then a security and data review so your team is comfortable. Then we run a pilot on ONE of the three — a real repo, four weeks, measured against criteria you define. If it earns its keep, we scale to the other two. If it doesn't, you've spent almost nothing finding out."</a:t>
+              <a:t>The third card is deliberately the expansion story — mention the other two use cases from their own list (cloud migration, test coverage) briefly: "And to be direct, the same machinery applies to the Lambda migration and the OCC test-coverage push you mentioned. But let's earn that with this one first." Referencing their own pre-shared initiatives shows you listened.</a:t>
             </a:r>
           </a:p>
           <a:p/>
           <a:p>
             <a:r>
-              <a:t>Why 3 use cases but 1 pilot: picking three gets them mentally invested in a roadmap (not a one-off experiment), while piloting one keeps the ask small enough to say yes to today.</a:t>
-            </a:r>
-          </a:p>
-          <a:p/>
-          <a:p>
-            <a:r>
-              <a:t>Assign ownership live: use-case shortlist → VP Eng (it's their backlog); security review → Security Engineer; pilot repo + success criteria → Chief Architect. People who own a step show up to the next meeting.</a:t>
-            </a:r>
-          </a:p>
-          <a:p/>
-          <a:p>
-            <a:r>
-              <a:t>[ASK] the closing question and get a name and a date before you leave the room. "Who should I follow up with, and does end of this week work for the security call?"</a:t>
-            </a:r>
-          </a:p>
-          <a:p/>
-          <a:p>
-            <a:r>
-              <a:t>DERAIL-PREP:</a:t>
-            </a:r>
-          </a:p>
-          <a:p>
-            <a:r>
-              <a:t>- "We need to run this through procurement/vendor risk first": "Understood — that's exactly why step 1 is the security review; it feeds your vendor-risk process. Can we start that in parallel?"</a:t>
-            </a:r>
-          </a:p>
-          <a:p>
-            <a:r>
-              <a:t>- "Send us materials and we'll get back to you": counter gently with a smaller yes: "Happy to — can I also pencil the security call so materials land with momentum? Easy to cancel."</a:t>
-            </a:r>
-          </a:p>
-          <a:p>
-            <a:r>
-              <a:t>- If the room is split (one enthusiast, one skeptic): scope the pilot around the skeptic's concern explicitly — "Let's make [skeptic]'s question the primary success criterion."</a:t>
-            </a:r>
-          </a:p>
-          <a:p/>
-          <a:p>
-            <a:r>
-              <a:t>Post-meeting: send notes + promised materials within 24–48h, restate the owners and dates they agreed to.</a:t>
+              <a:t>[ASK] gut-check: "If this end state showed up on time, what would it be worth to your org? I'm asking seriously — it should anchor how we scope the pilot." [PAUSE] and let them put a number or a feeling on it. Whatever value they articulate becomes YOUR value framing in follow-up emails — their words, not yours.</a:t>
             </a:r>
           </a:p>
         </p:txBody>
@@ -739,7 +716,58 @@
           <a:lstStyle/>
           <a:p>
             <a:r>
-              <a:t>These slides are for your prep only — hide them (right-click → Hide slide) or delete before presenting. Keep them in your back pocket; if the meeting goes deep on an objection, you'll have rehearsed the answer.</a:t>
+              <a:t>End with a specific, low-risk ask and assign owners in the room — that's what turns a nice meeting into a pipeline.</a:t>
+            </a:r>
+          </a:p>
+          <a:p/>
+          <a:p>
+            <a:r>
+              <a:t>Talk track: "Here's what I'd propose. First, we sit down together and pick three use cases — the natural starting points are work like what you just watched: framework upgrades, migrations, test-coverage debt — but you know your backlog; whatever you'd never staff greenfield engineers on is a candidate. Then a security and data review so your team is comfortable. Then we run a pilot on ONE of the three — a real repo, four weeks, measured against criteria you define. If it earns its keep, we scale to the other two. If it doesn't, you've spent almost nothing finding out."</a:t>
+            </a:r>
+          </a:p>
+          <a:p/>
+          <a:p>
+            <a:r>
+              <a:t>Why 3 use cases but 1 pilot: picking three gets them mentally invested in a roadmap (not a one-off experiment), while piloting one keeps the ask small enough to say yes to today.</a:t>
+            </a:r>
+          </a:p>
+          <a:p/>
+          <a:p>
+            <a:r>
+              <a:t>Assign ownership live: use-case shortlist → VP Eng (it's their backlog); security review → Security Engineer; pilot repo + success criteria → Chief Architect. People who own a step show up to the next meeting.</a:t>
+            </a:r>
+          </a:p>
+          <a:p/>
+          <a:p>
+            <a:r>
+              <a:t>[ASK] the closing question and get a name and a date before you leave the room. "Who should I follow up with, and does end of this week work for the security call?"</a:t>
+            </a:r>
+          </a:p>
+          <a:p/>
+          <a:p>
+            <a:r>
+              <a:t>DERAIL-PREP:</a:t>
+            </a:r>
+          </a:p>
+          <a:p>
+            <a:r>
+              <a:t>- "We need to run this through procurement/vendor risk first": "Understood — that's exactly why step 1 is the security review; it feeds your vendor-risk process. Can we start that in parallel?"</a:t>
+            </a:r>
+          </a:p>
+          <a:p>
+            <a:r>
+              <a:t>- "Send us materials and we'll get back to you": counter gently with a smaller yes: "Happy to — can I also pencil the security call so materials land with momentum? Easy to cancel."</a:t>
+            </a:r>
+          </a:p>
+          <a:p>
+            <a:r>
+              <a:t>- If the room is split (one enthusiast, one skeptic): scope the pilot around the skeptic's concern explicitly — "Let's make [skeptic]'s question the primary success criterion."</a:t>
+            </a:r>
+          </a:p>
+          <a:p/>
+          <a:p>
+            <a:r>
+              <a:t>Post-meeting: send notes + promised materials within 24–48h, restate the owners and dates they agreed to.</a:t>
             </a:r>
           </a:p>
         </p:txBody>
@@ -809,37 +837,7 @@
           <a:lstStyle/>
           <a:p>
             <a:r>
-              <a:t>General derailment playbook (for opinionated execs):</a:t>
-            </a:r>
-          </a:p>
-          <a:p>
-            <a:r>
-              <a:t>1. Never argue — agree with the valid kernel, then redirect to evidence ("fair concern; here's what we can measure").</a:t>
-            </a:r>
-          </a:p>
-          <a:p>
-            <a:r>
-              <a:t>2. Park with a return time: "Great question — that's next-steps territory; give me 8 minutes and I'll answer it properly." Then ACTUALLY return to it, by name.</a:t>
-            </a:r>
-          </a:p>
-          <a:p>
-            <a:r>
-              <a:t>3. If two execs start debating each other, don't referee — extract the requirement: "Sounds like the pilot needs to prove X to satisfy both of you. Noted."</a:t>
-            </a:r>
-          </a:p>
-          <a:p>
-            <a:r>
-              <a:t>4. If someone tries to turn it into a vendor bake-off ("how do you compare to X?"): "Happy to do a feature comparison async — in the room, the fastest way to compare is a pilot on the same repo."</a:t>
-            </a:r>
-          </a:p>
-          <a:p>
-            <a:r>
-              <a:t>5. Protect the demo time. If discovery is running long, cut slides 8–9 short, never the demo — the demo is what they'll remember.</a:t>
-            </a:r>
-          </a:p>
-          <a:p>
-            <a:r>
-              <a:t>6. If the meeting is fully derailed by one topic (e.g., security), embrace it: "Let's make this the security deep-dive, and I'll get you the demo recording + a follow-up demo slot." A derailed meeting where one stakeholder gets deeply satisfied still advances the deal.</a:t>
+              <a:t>These slides are for your prep only — hide them (right-click → Hide slide) or delete before presenting. Keep them in your back pocket; if the meeting goes deep on an objection, you'll have rehearsed the answer.</a:t>
             </a:r>
           </a:p>
         </p:txBody>
@@ -909,6 +907,106 @@
           <a:lstStyle/>
           <a:p>
             <a:r>
+              <a:t>General derailment playbook (for opinionated execs):</a:t>
+            </a:r>
+          </a:p>
+          <a:p>
+            <a:r>
+              <a:t>1. Never argue — agree with the valid kernel, then redirect to evidence ("fair concern; here's what we can measure").</a:t>
+            </a:r>
+          </a:p>
+          <a:p>
+            <a:r>
+              <a:t>2. Park with a return time: "Great question — that's next-steps territory; give me 8 minutes and I'll answer it properly." Then ACTUALLY return to it, by name.</a:t>
+            </a:r>
+          </a:p>
+          <a:p>
+            <a:r>
+              <a:t>3. If two execs start debating each other, don't referee — extract the requirement: "Sounds like the pilot needs to prove X to satisfy both of you. Noted."</a:t>
+            </a:r>
+          </a:p>
+          <a:p>
+            <a:r>
+              <a:t>4. If someone tries to turn it into a vendor bake-off ("how do you compare to X?"): "Happy to do a feature comparison async — in the room, the fastest way to compare is a pilot on the same repo."</a:t>
+            </a:r>
+          </a:p>
+          <a:p>
+            <a:r>
+              <a:t>5. Protect the demo time. If discovery is running long, cut slides 8–9 short, never the demo — the demo is what they'll remember.</a:t>
+            </a:r>
+          </a:p>
+          <a:p>
+            <a:r>
+              <a:t>6. If the meeting is fully derailed by one topic (e.g., security), embrace it: "Let's make this the security deep-dive, and I'll get you the demo recording + a follow-up demo slot." A derailed meeting where one stakeholder gets deeply satisfied still advances the deal.</a:t>
+            </a:r>
+          </a:p>
+        </p:txBody>
+      </p:sp>
+      <p:sp>
+        <p:nvSpPr>
+          <p:cNvPr id="4" name="Slide Number Placeholder 3"/>
+          <p:cNvSpPr>
+            <a:spLocks noGrp="1"/>
+          </p:cNvSpPr>
+          <p:nvPr>
+            <p:ph type="sldNum" idx="5" sz="quarter"/>
+          </p:nvPr>
+        </p:nvSpPr>
+        <p:spPr/>
+      </p:sp>
+    </p:spTree>
+  </p:cSld>
+  <p:clrMapOvr>
+    <a:masterClrMapping/>
+  </p:clrMapOvr>
+</p:notes>
+</file>
+
+<file path=ppt/notesSlides/notesSlide14.xml><?xml version="1.0" encoding="utf-8"?>
+<p:notes xmlns:a="http://schemas.openxmlformats.org/drawingml/2006/main" xmlns:p="http://schemas.openxmlformats.org/presentationml/2006/main" xmlns:r="http://schemas.openxmlformats.org/officeDocument/2006/relationships">
+  <p:cSld>
+    <p:spTree>
+      <p:nvGrpSpPr>
+        <p:cNvPr id="1" name=""/>
+        <p:cNvGrpSpPr/>
+        <p:nvPr/>
+      </p:nvGrpSpPr>
+      <p:grpSpPr>
+        <a:xfrm>
+          <a:off x="0" y="0"/>
+          <a:ext cx="0" cy="0"/>
+          <a:chOff x="0" y="0"/>
+          <a:chExt cx="0" cy="0"/>
+        </a:xfrm>
+      </p:grpSpPr>
+      <p:sp>
+        <p:nvSpPr>
+          <p:cNvPr id="2" name="Slide Image Placeholder 1"/>
+          <p:cNvSpPr>
+            <a:spLocks noGrp="1"/>
+          </p:cNvSpPr>
+          <p:nvPr>
+            <p:ph type="sldImg" idx="2"/>
+          </p:nvPr>
+        </p:nvSpPr>
+        <p:spPr/>
+      </p:sp>
+      <p:sp>
+        <p:nvSpPr>
+          <p:cNvPr id="3" name="Notes Placeholder 2"/>
+          <p:cNvSpPr>
+            <a:spLocks noGrp="1"/>
+          </p:cNvSpPr>
+          <p:nvPr>
+            <p:ph type="body" idx="3" sz="quarter"/>
+          </p:nvPr>
+        </p:nvSpPr>
+        <p:spPr/>
+        <p:txBody>
+          <a:bodyPr/>
+          <a:lstStyle/>
+          <a:p>
+            <a:r>
               <a:t>This slide is your homework list — everything the deck references that needs verification or that I (Devin) couldn't confirm as current fact. Delete before presenting.</a:t>
             </a:r>
           </a:p>
@@ -1527,50 +1625,73 @@
           <a:lstStyle/>
           <a:p>
             <a:r>
-              <a:t>This slide is your engagement insurance policy. Naming each person's likely concern out loud — before they raise it — earns trust and takes the wind out of ambushes.</a:t>
+              <a:t>Address this TO the Security Engineer, by name, before they have to raise it. Getting ahead of the security question is the single biggest trust move in the room.</a:t>
             </a:r>
           </a:p>
           <a:p/>
           <a:p>
             <a:r>
-              <a:t>Delivery tip: address each column TO that person, by name, with eye contact. "For you, [VP name], my guess is the question is team capacity..." Then [ASK]: "I took a guess at what each of you cares about. Did I get it roughly right — and what did I miss? I'd rather demo to your real concerns than my imagined ones." Let each of the three respond. Budget 3–4 minutes; this is where buy-in starts.</a:t>
+              <a:t>Architecture talk track: "Two components. The 'brain' — the intelligence — is a stateless service in Cognition's cloud, same architectural pattern as GitHub Copilot. The 'Devbox' — where code actually gets checked out, built, and tested — is a secure, isolated virtual environment. Every session runs on its own isolated machine; customer data is segregated by default and encrypted in transit and at rest."</a:t>
             </a:r>
           </a:p>
           <a:p/>
           <a:p>
             <a:r>
-              <a:t>DERAIL-PREP (opinionated execs):</a:t>
-            </a:r>
-          </a:p>
-          <a:p>
-            <a:r>
-              <a:t>- If one person dominates: "That's a thread I want to pull on — but I want to make sure I hear [other person]'s take before the demo, since it changes what I show."</a:t>
-            </a:r>
-          </a:p>
-          <a:p>
-            <a:r>
-              <a:t>- If someone is openly skeptical/hostile: don't defend, redirect to evidence. "Totally fair to be skeptical. Can I earn the benefit of the doubt with the demo? If it doesn't hold up, tear it apart."</a:t>
-            </a:r>
-          </a:p>
-          <a:p>
-            <a:r>
-              <a:t>- If they push into pricing/procurement early: "I'll cover commercial structure in next steps — short version: we typically start with a bounded pilot so you're not buying on faith."</a:t>
+              <a:t>Deployment talk track (the part that matters for BofA): "Two deployment models. Enterprise Cloud — both pieces in Cognition's secure multi-tenant cloud, running in minutes. For a bank like you, the more likely fit is Customer Dedicated: Cognition hosts Devin in a single-tenant VPC isolated just for you, connected to your network over AWS PrivateLink or an IPSec tunnel. That's how Devin reaches privately networked resources — internal GitHub Enterprise, Artifactory — without anything being exposed publicly. MFA VPN access to internal resources is supported in that model."</a:t>
             </a:r>
           </a:p>
           <a:p/>
           <a:p>
             <a:r>
+              <a:t>Controls: SSO via Okta, Microsoft Entra ID, or any SAML/OIDC IdP. And the control that matters most is the one they already have: Devin only ever proposes PRs — their review, CI, and release gates are unchanged.</a:t>
+            </a:r>
+          </a:p>
+          <a:p/>
+          <a:p>
+            <a:r>
+              <a:t>[ASK the Security Engineer] "What would your vendor-risk process need to see to get comfortable — architecture review, pen-test reports, a questionnaire? Let's make that the first next step." — this converts the toughest stakeholder into the owner of step 1.</a:t>
+            </a:r>
+          </a:p>
+          <a:p/>
+          <a:p>
+            <a:r>
+              <a:t>DERAIL-PREP:</a:t>
+            </a:r>
+          </a:p>
+          <a:p>
+            <a:r>
+              <a:t>- "Does our code train your models?" — don't improvise; bring Cognition's current data-usage/retention answer in writing. [RESEARCH: get the exact current policy language from the security team before the meeting.]</a:t>
+            </a:r>
+          </a:p>
+          <a:p>
+            <a:r>
+              <a:t>- "Can we run it fully on-prem / air-gapped?" — be honest: the brain runs in Cognition's cloud; the dedicated model gives tenant isolation + private networking, not on-prem. Offer the security deep-dive rather than overpromising.</a:t>
+            </a:r>
+          </a:p>
+          <a:p>
+            <a:r>
+              <a:t>- "Can we use our own LLM keys?" — No: Devin is a compound AI system and doesn't take third-party LLM keys. Say it plainly; evasiveness here costs credibility.</a:t>
+            </a:r>
+          </a:p>
+          <a:p/>
+          <a:p>
+            <a:r>
               <a:t>[RESEARCH BEFORE MEETING]</a:t>
             </a:r>
           </a:p>
           <a:p>
             <a:r>
-              <a:t>- Get the attendees' actual names/backgrounds (LinkedIn) — tailor each column's phrasing to how their org actually talks.</a:t>
-            </a:r>
-          </a:p>
-          <a:p>
-            <a:r>
-              <a:t>- Check BofA's public statements on responsible-AI governance (they have an internal AI governance framework) — mirror their language when talking about human oversight.</a:t>
+              <a:t>- Cognition's current compliance posture (SOC 2 etc.), pen-test/report availability, and data-retention policy — have the documents ready to send same-day.</a:t>
+            </a:r>
+          </a:p>
+          <a:p>
+            <a:r>
+              <a:t>- Whether BofA's SCM is internal GitHub Enterprise Server (likely) — that makes the PrivateLink/dedicated story the headline; rehearse it.</a:t>
+            </a:r>
+          </a:p>
+          <a:p>
+            <a:r>
+              <a:t>- Docs to cite: https://docs.devin.ai (Enterprise Deployment page).</a:t>
             </a:r>
           </a:p>
         </p:txBody>
@@ -1640,77 +1761,50 @@
           <a:lstStyle/>
           <a:p>
             <a:r>
-              <a:t>Switch to the live demo here (the !bofa_demo playbook flow). This slide is the map you leave up briefly so they know what they're about to see, then you go live.</a:t>
+              <a:t>This slide is your engagement insurance policy. Naming each person's likely concern out loud — before they raise it — earns trust and takes the wind out of ambushes.</a:t>
             </a:r>
           </a:p>
           <a:p/>
           <a:p>
             <a:r>
-              <a:t>While it runs, invite interaction: "Shout out anything you'd want to inspect — a diff, a test, a log. This is your demo, not my script."</a:t>
+              <a:t>Delivery tip: address each column TO that person, by name, with eye contact. "For you, [VP name], my guess is the question is team capacity..." Then [ASK]: "I took a guess at what each of you cares about. Did I get it roughly right — and what did I miss? I'd rather demo to your real concerns than my imagined ones." Let each of the three respond. Budget 3–4 minutes; this is where buy-in starts.</a:t>
             </a:r>
           </a:p>
           <a:p/>
           <a:p>
             <a:r>
-              <a:t>Narrate value, not syntax: each of the 5 patterns has a business hook —</a:t>
-            </a:r>
-          </a:p>
-          <a:p>
-            <a:r>
-              <a:t>1. HttpParams → "API evolution handled systematically, not by grep-and-pray."</a:t>
-            </a:r>
-          </a:p>
-          <a:p>
-            <a:r>
-              <a:t>2. Standalone components → "Adopting Angular 18 the right way, not just compiling on it."</a:t>
-            </a:r>
-          </a:p>
-          <a:p>
-            <a:r>
-              <a:t>3. TestBed → "Your test suite migrates too — most manual upgrades leave tests rotting."</a:t>
-            </a:r>
-          </a:p>
-          <a:p>
-            <a:r>
-              <a:t>4. any types in financial models → point at the Security Engineer: "Type safety on money-handling code. This is a defect class disappearing."</a:t>
-            </a:r>
-          </a:p>
-          <a:p>
-            <a:r>
-              <a:t>5. *ngFor → @for → point at the Architect: "Template modernization applied identically across the whole library — consistency at scale."</a:t>
+              <a:t>DERAIL-PREP (opinionated execs):</a:t>
+            </a:r>
+          </a:p>
+          <a:p>
+            <a:r>
+              <a:t>- If one person dominates: "That's a thread I want to pull on — but I want to make sure I hear [other person]'s take before the demo, since it changes what I show."</a:t>
+            </a:r>
+          </a:p>
+          <a:p>
+            <a:r>
+              <a:t>- If someone is openly skeptical/hostile: don't defend, redirect to evidence. "Totally fair to be skeptical. Can I earn the benefit of the doubt with the demo? If it doesn't hold up, tear it apart."</a:t>
+            </a:r>
+          </a:p>
+          <a:p>
+            <a:r>
+              <a:t>- If they push into pricing/procurement early: "I'll cover commercial structure in next steps — short version: we typically start with a bounded pilot so you're not buying on faith."</a:t>
             </a:r>
           </a:p>
           <a:p/>
           <a:p>
             <a:r>
-              <a:t>Pattern 4 and the downstream-teams story are your strongest moments — slow down there.</a:t>
-            </a:r>
-          </a:p>
-          <a:p/>
-          <a:p>
-            <a:r>
-              <a:t>[PAUSE] moments: after the baseline goes green ("that's the safety net"), and after the final validation scan ("zero legacy patterns — that's the compliance evidence your audit file wants").</a:t>
-            </a:r>
-          </a:p>
-          <a:p/>
-          <a:p>
-            <a:r>
-              <a:t>DERAIL-PREP:</a:t>
-            </a:r>
-          </a:p>
-          <a:p>
-            <a:r>
-              <a:t>- Demo breaks: stay calm, it's rehearsed — you have git-reset recovery branches and a recorded run as backup. "Live demos, right? Here's the recorded run while I reset."</a:t>
-            </a:r>
-          </a:p>
-          <a:p>
-            <a:r>
-              <a:t>- "This demo repo is toy-sized; ours is 100x bigger": "Completely true — and that's the point of the pilot: we prove it on a real slice of YOUR codebase in week one. Scale is Devin's advantage: it parallelizes; humans don't."</a:t>
-            </a:r>
-          </a:p>
-          <a:p>
-            <a:r>
-              <a:t>- "Devin wrote this demo repo, of course it can fix it": "Fair — which is why next step is your code, not mine." </a:t>
+              <a:t>[RESEARCH BEFORE MEETING]</a:t>
+            </a:r>
+          </a:p>
+          <a:p>
+            <a:r>
+              <a:t>- Get the attendees' actual names/backgrounds (LinkedIn) — tailor each column's phrasing to how their org actually talks.</a:t>
+            </a:r>
+          </a:p>
+          <a:p>
+            <a:r>
+              <a:t>- Check BofA's public statements on responsible-AI governance (they have an internal AI governance framework) — mirror their language when talking about human oversight.</a:t>
             </a:r>
           </a:p>
         </p:txBody>
@@ -1780,41 +1874,77 @@
           <a:lstStyle/>
           <a:p>
             <a:r>
-              <a:t>Bridge from demo to their world: "What you just saw on five patterns is exactly what runs across your real repos — the difference is scale, and scale is where this gets interesting."</a:t>
+              <a:t>Switch to the live demo here (the !bofa_demo playbook flow). This slide is the map you leave up briefly so they know what they're about to see, then you go live.</a:t>
             </a:r>
           </a:p>
           <a:p/>
           <a:p>
             <a:r>
-              <a:t>The killer point for the Architect is step 3: parallelization. "A human team upgrades one repo at a time and coordinates by meeting. Devin runs one session per downstream app simultaneously. Your critical path goes from 'sum of 12 teams' calendars' to 'longest single review cycle.'"</a:t>
+              <a:t>While it runs, invite interaction: "Shout out anything you'd want to inspect — a diff, a test, a log. This is your demo, not my script."</a:t>
             </a:r>
           </a:p>
           <a:p/>
           <a:p>
             <a:r>
-              <a:t>For the Security Engineer, step 4: "You don't build the audit story at the end — every session IS the audit story."</a:t>
+              <a:t>Narrate value, not syntax: each of the 5 patterns has a business hook —</a:t>
+            </a:r>
+          </a:p>
+          <a:p>
+            <a:r>
+              <a:t>1. HttpParams → "API evolution handled systematically, not by grep-and-pray."</a:t>
+            </a:r>
+          </a:p>
+          <a:p>
+            <a:r>
+              <a:t>2. Standalone components → "Adopting Angular 18 the right way, not just compiling on it."</a:t>
+            </a:r>
+          </a:p>
+          <a:p>
+            <a:r>
+              <a:t>3. TestBed → "Your test suite migrates too — most manual upgrades leave tests rotting."</a:t>
+            </a:r>
+          </a:p>
+          <a:p>
+            <a:r>
+              <a:t>4. any types in financial models → point at the Security Engineer: "Type safety on money-handling code. This is a defect class disappearing."</a:t>
+            </a:r>
+          </a:p>
+          <a:p>
+            <a:r>
+              <a:t>5. *ngFor → @for → point at the Architect: "Template modernization applied identically across the whole library — consistency at scale."</a:t>
             </a:r>
           </a:p>
           <a:p/>
           <a:p>
             <a:r>
-              <a:t>[ASK] the Architect directly: "If we upgraded the shared library first and handed each consuming team a passing PR, what would still worry you?" — whatever they say becomes a pilot success criterion. Write it down.</a:t>
+              <a:t>Pattern 4 and the downstream-teams story are your strongest moments — slow down there.</a:t>
             </a:r>
           </a:p>
           <a:p/>
           <a:p>
             <a:r>
+              <a:t>[PAUSE] moments: after the baseline goes green ("that's the safety net"), and after the final validation scan ("zero legacy patterns — that's the compliance evidence your audit file wants").</a:t>
+            </a:r>
+          </a:p>
+          <a:p/>
+          <a:p>
+            <a:r>
               <a:t>DERAIL-PREP:</a:t>
             </a:r>
           </a:p>
           <a:p>
             <a:r>
-              <a:t>- "Our repos are on internal GitHub Enterprise / restricted network": "Supported — deployment specifics are exactly what the week-0 security review covers." [RESEARCH: confirm Cognition's current GHE/VPC/network-isolation options before the meeting so you don't overpromise.]</a:t>
-            </a:r>
-          </a:p>
-          <a:p>
-            <a:r>
-              <a:t>- "Who's liable if Devin introduces a bug?": "Same person as today — the reviewing engineer and your existing release process. Devin doesn't get commit rights your policies wouldn't give a contractor." </a:t>
+              <a:t>- Demo breaks: stay calm, it's rehearsed — you have git-reset recovery branches and a recorded run as backup. "Live demos, right? Here's the recorded run while I reset."</a:t>
+            </a:r>
+          </a:p>
+          <a:p>
+            <a:r>
+              <a:t>- "This demo repo is toy-sized; ours is 100x bigger": "Completely true — and that's the point of the pilot: we prove it on a real slice of YOUR codebase in week one. Scale is Devin's advantage: it parallelizes; humans don't."</a:t>
+            </a:r>
+          </a:p>
+          <a:p>
+            <a:r>
+              <a:t>- "Devin wrote this demo repo, of course it can fix it": "Fair — which is why next step is your code, not mine." </a:t>
             </a:r>
           </a:p>
         </p:txBody>
@@ -1884,34 +2014,41 @@
           <a:lstStyle/>
           <a:p>
             <a:r>
-              <a:t>Paint the after-picture in THEIR terms, one beat per persona:</a:t>
-            </a:r>
-          </a:p>
-          <a:p>
-            <a:r>
-              <a:t>- VP Eng: capacity back + deadline met without roadmap carnage.</a:t>
-            </a:r>
-          </a:p>
-          <a:p>
-            <a:r>
-              <a:t>- Security: policy violation resolved, plus a standing audit trail for every future change.</a:t>
-            </a:r>
-          </a:p>
-          <a:p>
-            <a:r>
-              <a:t>- Architect: consistency enforced mechanically across the estate; migrations become boring (the highest compliment in architecture).</a:t>
+              <a:t>Bridge from demo to their world: "What you just saw on five patterns is exactly what runs across your real repos — the difference is scale, and scale is where this gets interesting."</a:t>
             </a:r>
           </a:p>
           <a:p/>
           <a:p>
             <a:r>
-              <a:t>The third card is deliberately the expansion story — mention the other two use cases from their own list (cloud migration, test coverage) briefly: "And to be direct, the same machinery applies to the Lambda migration and the OCC test-coverage push you mentioned. But let's earn that with this one first." Referencing their own pre-shared initiatives shows you listened.</a:t>
+              <a:t>The killer point for the Architect is step 3: parallelization. "A human team upgrades one repo at a time and coordinates by meeting. Devin runs one session per downstream app simultaneously. Your critical path goes from 'sum of 12 teams' calendars' to 'longest single review cycle.'"</a:t>
             </a:r>
           </a:p>
           <a:p/>
           <a:p>
             <a:r>
-              <a:t>[ASK] gut-check: "If this end state showed up on time, what would it be worth to your org? I'm asking seriously — it should anchor how we scope the pilot." [PAUSE] and let them put a number or a feeling on it. Whatever value they articulate becomes YOUR value framing in follow-up emails — their words, not yours.</a:t>
+              <a:t>For the Security Engineer, step 4: "You don't build the audit story at the end — every session IS the audit story."</a:t>
+            </a:r>
+          </a:p>
+          <a:p/>
+          <a:p>
+            <a:r>
+              <a:t>[ASK] the Architect directly: "If we upgraded the shared library first and handed each consuming team a passing PR, what would still worry you?" — whatever they say becomes a pilot success criterion. Write it down.</a:t>
+            </a:r>
+          </a:p>
+          <a:p/>
+          <a:p>
+            <a:r>
+              <a:t>DERAIL-PREP:</a:t>
+            </a:r>
+          </a:p>
+          <a:p>
+            <a:r>
+              <a:t>- "Our repos are on internal GitHub Enterprise / restricted network": "Supported — deployment specifics are exactly what the week-0 security review covers." [RESEARCH: confirm Cognition's current GHE/VPC/network-isolation options before the meeting so you don't overpromise.]</a:t>
+            </a:r>
+          </a:p>
+          <a:p>
+            <a:r>
+              <a:t>- "Who's liable if Devin introduces a bug?": "Same person as today — the reviewing engineer and your existing release process. Devin doesn't get commit rights your policies wouldn't give a contractor." </a:t>
             </a:r>
           </a:p>
         </p:txBody>
@@ -5293,7 +5430,7 @@
                 </a:solidFill>
                 <a:latin typeface="Roboto"/>
               </a:rPr>
-              <a:t>LEAVING WITH A DECISION, NOT A DECK</a:t>
+              <a:t>WHAT GOOD LOOKS LIKE</a:t>
             </a:r>
           </a:p>
         </p:txBody>
@@ -5335,7 +5472,7 @@
                 </a:solidFill>
                 <a:latin typeface="Roboto"/>
               </a:rPr>
-              <a:t>Proposed next steps</a:t>
+              <a:t>The end state: BofA running on Devin</a:t>
             </a:r>
           </a:p>
         </p:txBody>
@@ -5391,11 +5528,11 @@
         <p:spPr>
           <a:xfrm>
             <a:off x="502920" y="1481328"/>
-            <a:ext cx="11201400" cy="932688"/>
+            <a:ext cx="3611880" cy="2286000"/>
           </a:xfrm>
           <a:prstGeom prst="roundRect">
             <a:avLst>
-              <a:gd name="adj" fmla="val 10000"/>
+              <a:gd name="adj" fmla="val 6000"/>
             </a:avLst>
           </a:prstGeom>
           <a:solidFill>
@@ -5430,16 +5567,16 @@
       </p:sp>
       <p:sp>
         <p:nvSpPr>
-          <p:cNvPr id="8" name="Oval 7"/>
+          <p:cNvPr id="8" name="Rectangle 7"/>
           <p:cNvSpPr/>
           <p:nvPr/>
         </p:nvSpPr>
         <p:spPr>
           <a:xfrm>
-            <a:off x="658368" y="1682496"/>
-            <a:ext cx="530352" cy="530352"/>
-          </a:xfrm>
-          <a:prstGeom prst="ellipse">
+            <a:off x="502920" y="1591056"/>
+            <a:ext cx="54864" cy="2066543"/>
+          </a:xfrm>
+          <a:prstGeom prst="rect">
             <a:avLst/>
           </a:prstGeom>
           <a:solidFill>
@@ -5480,8 +5617,8 @@
         </p:nvSpPr>
         <p:spPr>
           <a:xfrm>
-            <a:off x="658368" y="1755648"/>
-            <a:ext cx="530352" cy="402336"/>
+            <a:off x="704088" y="1591056"/>
+            <a:ext cx="3246120" cy="365760"/>
           </a:xfrm>
           <a:prstGeom prst="rect">
             <a:avLst/>
@@ -5494,7 +5631,7 @@
           </a:bodyPr>
           <a:lstStyle/>
           <a:p>
-            <a:pPr algn="ctr">
+            <a:pPr algn="l">
               <a:lnSpc>
                 <a:spcPct val="100000"/>
               </a:lnSpc>
@@ -5503,13 +5640,13 @@
               </a:spcAft>
             </a:pPr>
             <a:r>
-              <a:rPr sz="1700" b="1" i="0">
-                <a:solidFill>
-                  <a:srgbClr val="FFFFFF"/>
-                </a:solidFill>
-                <a:latin typeface="Roboto"/>
-              </a:rPr>
-              <a:t>1</a:t>
+              <a:rPr sz="1400" b="1" i="0">
+                <a:solidFill>
+                  <a:srgbClr val="012169"/>
+                </a:solidFill>
+                <a:latin typeface="Roboto"/>
+              </a:rPr>
+              <a:t>This migration</a:t>
             </a:r>
           </a:p>
         </p:txBody>
@@ -5522,8 +5659,8 @@
         </p:nvSpPr>
         <p:spPr>
           <a:xfrm>
-            <a:off x="1417320" y="1591056"/>
-            <a:ext cx="1417320" cy="685800"/>
+            <a:off x="704088" y="1956816"/>
+            <a:ext cx="3246120" cy="1691640"/>
           </a:xfrm>
           <a:prstGeom prst="rect">
             <a:avLst/>
@@ -5538,122 +5675,76 @@
           <a:p>
             <a:pPr algn="l">
               <a:lnSpc>
-                <a:spcPct val="100000"/>
-              </a:lnSpc>
-              <a:spcAft>
-                <a:spcPts val="600"/>
-              </a:spcAft>
-            </a:pPr>
-            <a:r>
-              <a:rPr sz="1150" b="1" i="0">
-                <a:solidFill>
-                  <a:srgbClr val="E31837"/>
-                </a:solidFill>
-                <a:latin typeface="Roboto"/>
-              </a:rPr>
-              <a:t>This week</a:t>
-            </a:r>
-          </a:p>
-        </p:txBody>
-      </p:sp>
-      <p:sp>
-        <p:nvSpPr>
-          <p:cNvPr id="11" name="TextBox 10"/>
-          <p:cNvSpPr txBox="1"/>
-          <p:nvPr/>
-        </p:nvSpPr>
-        <p:spPr>
-          <a:xfrm>
-            <a:off x="2834640" y="1591056"/>
-            <a:ext cx="8595360" cy="365760"/>
-          </a:xfrm>
-          <a:prstGeom prst="rect">
-            <a:avLst/>
-          </a:prstGeom>
-          <a:noFill/>
-        </p:spPr>
-        <p:txBody>
-          <a:bodyPr wrap="square" anchor="t">
-            <a:spAutoFit/>
-          </a:bodyPr>
-          <a:lstStyle/>
+                <a:spcPct val="105000"/>
+              </a:lnSpc>
+              <a:spcAft>
+                <a:spcPts val="500"/>
+              </a:spcAft>
+            </a:pPr>
+            <a:r>
+              <a:rPr sz="1400" b="0" i="0">
+                <a:solidFill>
+                  <a:srgbClr val="1C2430"/>
+                </a:solidFill>
+                <a:latin typeface="Roboto"/>
+              </a:rPr>
+              <a:t>Angular 18 before the deadline</a:t>
+            </a:r>
+          </a:p>
           <a:p>
             <a:pPr algn="l">
               <a:lnSpc>
-                <a:spcPct val="100000"/>
-              </a:lnSpc>
-              <a:spcAft>
-                <a:spcPts val="600"/>
-              </a:spcAft>
-            </a:pPr>
-            <a:r>
-              <a:rPr sz="1450" b="1" i="0">
-                <a:solidFill>
-                  <a:srgbClr val="012169"/>
-                </a:solidFill>
-                <a:latin typeface="Roboto"/>
-              </a:rPr>
-              <a:t>Pick 3 use cases together</a:t>
-            </a:r>
-          </a:p>
-        </p:txBody>
-      </p:sp>
-      <p:sp>
-        <p:nvSpPr>
-          <p:cNvPr id="12" name="TextBox 11"/>
-          <p:cNvSpPr txBox="1"/>
-          <p:nvPr/>
-        </p:nvSpPr>
-        <p:spPr>
-          <a:xfrm>
-            <a:off x="2834640" y="1938528"/>
-            <a:ext cx="8595360" cy="411480"/>
-          </a:xfrm>
-          <a:prstGeom prst="rect">
-            <a:avLst/>
-          </a:prstGeom>
-          <a:noFill/>
-        </p:spPr>
-        <p:txBody>
-          <a:bodyPr wrap="square" anchor="t">
-            <a:spAutoFit/>
-          </a:bodyPr>
-          <a:lstStyle/>
+                <a:spcPct val="105000"/>
+              </a:lnSpc>
+              <a:spcAft>
+                <a:spcPts val="500"/>
+              </a:spcAft>
+            </a:pPr>
+            <a:r>
+              <a:rPr sz="1400" b="0" i="0">
+                <a:solidFill>
+                  <a:srgbClr val="1C2430"/>
+                </a:solidFill>
+                <a:latin typeface="Roboto"/>
+              </a:rPr>
+              <a:t>12+ teams unbroken</a:t>
+            </a:r>
+          </a:p>
           <a:p>
             <a:pPr algn="l">
               <a:lnSpc>
-                <a:spcPct val="100000"/>
-              </a:lnSpc>
-              <a:spcAft>
-                <a:spcPts val="600"/>
-              </a:spcAft>
-            </a:pPr>
-            <a:r>
-              <a:rPr sz="1150" b="0" i="0">
+                <a:spcPct val="105000"/>
+              </a:lnSpc>
+              <a:spcAft>
+                <a:spcPts val="500"/>
+              </a:spcAft>
+            </a:pPr>
+            <a:r>
+              <a:rPr sz="1400" b="0" i="0">
                 <a:solidFill>
                   <a:srgbClr val="1C2430"/>
                 </a:solidFill>
                 <a:latin typeface="Roboto"/>
               </a:rPr>
-              <a:t>Start with work like today's demo — upgrades, migrations, test debt</a:t>
-            </a:r>
-          </a:p>
-        </p:txBody>
-      </p:sp>
-      <p:sp>
-        <p:nvSpPr>
-          <p:cNvPr id="13" name="Rounded Rectangle 12"/>
+              <a:t>Audit trail, automatic</a:t>
+            </a:r>
+          </a:p>
+        </p:txBody>
+      </p:sp>
+      <p:sp>
+        <p:nvSpPr>
+          <p:cNvPr id="11" name="Rounded Rectangle 10"/>
           <p:cNvSpPr/>
           <p:nvPr/>
         </p:nvSpPr>
         <p:spPr>
           <a:xfrm>
-            <a:off x="502920" y="2505456"/>
-            <a:ext cx="11201400" cy="932688"/>
+            <a:off x="4297680" y="1481328"/>
+            <a:ext cx="3611880" cy="2286000"/>
           </a:xfrm>
           <a:prstGeom prst="roundRect">
             <a:avLst>
-              <a:gd name="adj" fmla="val 10000"/>
+              <a:gd name="adj" fmla="val 6000"/>
             </a:avLst>
           </a:prstGeom>
           <a:solidFill>
@@ -5688,16 +5779,16 @@
       </p:sp>
       <p:sp>
         <p:nvSpPr>
-          <p:cNvPr id="14" name="Oval 13"/>
+          <p:cNvPr id="12" name="Rectangle 11"/>
           <p:cNvSpPr/>
           <p:nvPr/>
         </p:nvSpPr>
         <p:spPr>
           <a:xfrm>
-            <a:off x="658368" y="2706624"/>
-            <a:ext cx="530352" cy="530352"/>
-          </a:xfrm>
-          <a:prstGeom prst="ellipse">
+            <a:off x="4297680" y="1591056"/>
+            <a:ext cx="54864" cy="2066543"/>
+          </a:xfrm>
+          <a:prstGeom prst="rect">
             <a:avLst/>
           </a:prstGeom>
           <a:solidFill>
@@ -5732,14 +5823,14 @@
       </p:sp>
       <p:sp>
         <p:nvSpPr>
-          <p:cNvPr id="15" name="TextBox 14"/>
+          <p:cNvPr id="13" name="TextBox 12"/>
           <p:cNvSpPr txBox="1"/>
           <p:nvPr/>
         </p:nvSpPr>
         <p:spPr>
           <a:xfrm>
-            <a:off x="658368" y="2779776"/>
-            <a:ext cx="530352" cy="402336"/>
+            <a:off x="4498848" y="1591056"/>
+            <a:ext cx="3246120" cy="365760"/>
           </a:xfrm>
           <a:prstGeom prst="rect">
             <a:avLst/>
@@ -5752,7 +5843,7 @@
           </a:bodyPr>
           <a:lstStyle/>
           <a:p>
-            <a:pPr algn="ctr">
+            <a:pPr algn="l">
               <a:lnSpc>
                 <a:spcPct val="100000"/>
               </a:lnSpc>
@@ -5761,27 +5852,27 @@
               </a:spcAft>
             </a:pPr>
             <a:r>
-              <a:rPr sz="1700" b="1" i="0">
-                <a:solidFill>
-                  <a:srgbClr val="FFFFFF"/>
-                </a:solidFill>
-                <a:latin typeface="Roboto"/>
-              </a:rPr>
-              <a:t>2</a:t>
-            </a:r>
-          </a:p>
-        </p:txBody>
-      </p:sp>
-      <p:sp>
-        <p:nvSpPr>
-          <p:cNvPr id="16" name="TextBox 15"/>
+              <a:rPr sz="1400" b="1" i="0">
+                <a:solidFill>
+                  <a:srgbClr val="012169"/>
+                </a:solidFill>
+                <a:latin typeface="Roboto"/>
+              </a:rPr>
+              <a:t>Your engineers</a:t>
+            </a:r>
+          </a:p>
+        </p:txBody>
+      </p:sp>
+      <p:sp>
+        <p:nvSpPr>
+          <p:cNvPr id="14" name="TextBox 13"/>
           <p:cNvSpPr txBox="1"/>
           <p:nvPr/>
         </p:nvSpPr>
         <p:spPr>
           <a:xfrm>
-            <a:off x="1417320" y="2615184"/>
-            <a:ext cx="1417320" cy="685800"/>
+            <a:off x="4498848" y="1956816"/>
+            <a:ext cx="3246120" cy="1691640"/>
           </a:xfrm>
           <a:prstGeom prst="rect">
             <a:avLst/>
@@ -5796,122 +5887,57 @@
           <a:p>
             <a:pPr algn="l">
               <a:lnSpc>
-                <a:spcPct val="100000"/>
-              </a:lnSpc>
-              <a:spcAft>
-                <a:spcPts val="600"/>
-              </a:spcAft>
-            </a:pPr>
-            <a:r>
-              <a:rPr sz="1150" b="1" i="0">
-                <a:solidFill>
-                  <a:srgbClr val="E31837"/>
-                </a:solidFill>
-                <a:latin typeface="Roboto"/>
-              </a:rPr>
-              <a:t>Next week</a:t>
-            </a:r>
-          </a:p>
-        </p:txBody>
-      </p:sp>
-      <p:sp>
-        <p:nvSpPr>
-          <p:cNvPr id="17" name="TextBox 16"/>
-          <p:cNvSpPr txBox="1"/>
-          <p:nvPr/>
-        </p:nvSpPr>
-        <p:spPr>
-          <a:xfrm>
-            <a:off x="2834640" y="2615184"/>
-            <a:ext cx="8595360" cy="365760"/>
-          </a:xfrm>
-          <a:prstGeom prst="rect">
-            <a:avLst/>
-          </a:prstGeom>
-          <a:noFill/>
-        </p:spPr>
-        <p:txBody>
-          <a:bodyPr wrap="square" anchor="t">
-            <a:spAutoFit/>
-          </a:bodyPr>
-          <a:lstStyle/>
+                <a:spcPct val="105000"/>
+              </a:lnSpc>
+              <a:spcAft>
+                <a:spcPts val="500"/>
+              </a:spcAft>
+            </a:pPr>
+            <a:r>
+              <a:rPr sz="1400" b="0" i="0">
+                <a:solidFill>
+                  <a:srgbClr val="1C2430"/>
+                </a:solidFill>
+                <a:latin typeface="Roboto"/>
+              </a:rPr>
+              <a:t>Back on revenue features</a:t>
+            </a:r>
+          </a:p>
           <a:p>
             <a:pPr algn="l">
               <a:lnSpc>
-                <a:spcPct val="100000"/>
-              </a:lnSpc>
-              <a:spcAft>
-                <a:spcPts val="600"/>
-              </a:spcAft>
-            </a:pPr>
-            <a:r>
-              <a:rPr sz="1450" b="1" i="0">
-                <a:solidFill>
-                  <a:srgbClr val="012169"/>
-                </a:solidFill>
-                <a:latin typeface="Roboto"/>
-              </a:rPr>
-              <a:t>Security &amp; data review</a:t>
-            </a:r>
-          </a:p>
-        </p:txBody>
-      </p:sp>
-      <p:sp>
-        <p:nvSpPr>
-          <p:cNvPr id="18" name="TextBox 17"/>
-          <p:cNvSpPr txBox="1"/>
-          <p:nvPr/>
-        </p:nvSpPr>
-        <p:spPr>
-          <a:xfrm>
-            <a:off x="2834640" y="2962656"/>
-            <a:ext cx="8595360" cy="411480"/>
-          </a:xfrm>
-          <a:prstGeom prst="rect">
-            <a:avLst/>
-          </a:prstGeom>
-          <a:noFill/>
-        </p:spPr>
-        <p:txBody>
-          <a:bodyPr wrap="square" anchor="t">
-            <a:spAutoFit/>
-          </a:bodyPr>
-          <a:lstStyle/>
-          <a:p>
-            <a:pPr algn="l">
-              <a:lnSpc>
-                <a:spcPct val="100000"/>
-              </a:lnSpc>
-              <a:spcAft>
-                <a:spcPts val="600"/>
-              </a:spcAft>
-            </a:pPr>
-            <a:r>
-              <a:rPr sz="1150" b="0" i="0">
+                <a:spcPct val="105000"/>
+              </a:lnSpc>
+              <a:spcAft>
+                <a:spcPts val="500"/>
+              </a:spcAft>
+            </a:pPr>
+            <a:r>
+              <a:rPr sz="1400" b="0" i="0">
                 <a:solidFill>
                   <a:srgbClr val="1C2430"/>
                 </a:solidFill>
                 <a:latin typeface="Roboto"/>
               </a:rPr>
-              <a:t>Your security team + ours · define success criteria</a:t>
-            </a:r>
-          </a:p>
-        </p:txBody>
-      </p:sp>
-      <p:sp>
-        <p:nvSpPr>
-          <p:cNvPr id="19" name="Rounded Rectangle 18"/>
+              <a:t>Reviewing, not hand-migrating</a:t>
+            </a:r>
+          </a:p>
+        </p:txBody>
+      </p:sp>
+      <p:sp>
+        <p:nvSpPr>
+          <p:cNvPr id="15" name="Rounded Rectangle 14"/>
           <p:cNvSpPr/>
           <p:nvPr/>
         </p:nvSpPr>
         <p:spPr>
           <a:xfrm>
-            <a:off x="502920" y="3529584"/>
-            <a:ext cx="11201400" cy="932688"/>
+            <a:off x="8092440" y="1481328"/>
+            <a:ext cx="3611880" cy="2286000"/>
           </a:xfrm>
           <a:prstGeom prst="roundRect">
             <a:avLst>
-              <a:gd name="adj" fmla="val 10000"/>
+              <a:gd name="adj" fmla="val 6000"/>
             </a:avLst>
           </a:prstGeom>
           <a:solidFill>
@@ -5946,16 +5972,16 @@
       </p:sp>
       <p:sp>
         <p:nvSpPr>
-          <p:cNvPr id="20" name="Oval 19"/>
+          <p:cNvPr id="16" name="Rectangle 15"/>
           <p:cNvSpPr/>
           <p:nvPr/>
         </p:nvSpPr>
         <p:spPr>
           <a:xfrm>
-            <a:off x="658368" y="3730752"/>
-            <a:ext cx="530352" cy="530352"/>
-          </a:xfrm>
-          <a:prstGeom prst="ellipse">
+            <a:off x="8092440" y="1591056"/>
+            <a:ext cx="54864" cy="2066543"/>
+          </a:xfrm>
+          <a:prstGeom prst="rect">
             <a:avLst/>
           </a:prstGeom>
           <a:solidFill>
@@ -5990,14 +6016,14 @@
       </p:sp>
       <p:sp>
         <p:nvSpPr>
-          <p:cNvPr id="21" name="TextBox 20"/>
+          <p:cNvPr id="17" name="TextBox 16"/>
           <p:cNvSpPr txBox="1"/>
           <p:nvPr/>
         </p:nvSpPr>
         <p:spPr>
           <a:xfrm>
-            <a:off x="658368" y="3803904"/>
-            <a:ext cx="530352" cy="402336"/>
+            <a:off x="8293608" y="1591056"/>
+            <a:ext cx="3246120" cy="365760"/>
           </a:xfrm>
           <a:prstGeom prst="rect">
             <a:avLst/>
@@ -6010,7 +6036,7 @@
           </a:bodyPr>
           <a:lstStyle/>
           <a:p>
-            <a:pPr algn="ctr">
+            <a:pPr algn="l">
               <a:lnSpc>
                 <a:spcPct val="100000"/>
               </a:lnSpc>
@@ -6019,27 +6045,27 @@
               </a:spcAft>
             </a:pPr>
             <a:r>
-              <a:rPr sz="1700" b="1" i="0">
-                <a:solidFill>
-                  <a:srgbClr val="FFFFFF"/>
-                </a:solidFill>
-                <a:latin typeface="Roboto"/>
-              </a:rPr>
-              <a:t>3</a:t>
-            </a:r>
-          </a:p>
-        </p:txBody>
-      </p:sp>
-      <p:sp>
-        <p:nvSpPr>
-          <p:cNvPr id="22" name="TextBox 21"/>
+              <a:rPr sz="1400" b="1" i="0">
+                <a:solidFill>
+                  <a:srgbClr val="012169"/>
+                </a:solidFill>
+                <a:latin typeface="Roboto"/>
+              </a:rPr>
+              <a:t>The bigger unlock</a:t>
+            </a:r>
+          </a:p>
+        </p:txBody>
+      </p:sp>
+      <p:sp>
+        <p:nvSpPr>
+          <p:cNvPr id="18" name="TextBox 17"/>
           <p:cNvSpPr txBox="1"/>
           <p:nvPr/>
         </p:nvSpPr>
         <p:spPr>
           <a:xfrm>
-            <a:off x="1417320" y="3639312"/>
-            <a:ext cx="1417320" cy="685800"/>
+            <a:off x="8293608" y="1956816"/>
+            <a:ext cx="3246120" cy="1691640"/>
           </a:xfrm>
           <a:prstGeom prst="rect">
             <a:avLst/>
@@ -6054,118 +6080,53 @@
           <a:p>
             <a:pPr algn="l">
               <a:lnSpc>
-                <a:spcPct val="100000"/>
-              </a:lnSpc>
-              <a:spcAft>
-                <a:spcPts val="600"/>
-              </a:spcAft>
-            </a:pPr>
-            <a:r>
-              <a:rPr sz="1150" b="1" i="0">
-                <a:solidFill>
-                  <a:srgbClr val="E31837"/>
-                </a:solidFill>
-                <a:latin typeface="Roboto"/>
-              </a:rPr>
-              <a:t>Weeks 2–4</a:t>
-            </a:r>
-          </a:p>
-        </p:txBody>
-      </p:sp>
-      <p:sp>
-        <p:nvSpPr>
-          <p:cNvPr id="23" name="TextBox 22"/>
-          <p:cNvSpPr txBox="1"/>
-          <p:nvPr/>
-        </p:nvSpPr>
-        <p:spPr>
-          <a:xfrm>
-            <a:off x="2834640" y="3639312"/>
-            <a:ext cx="8595360" cy="365760"/>
-          </a:xfrm>
-          <a:prstGeom prst="rect">
-            <a:avLst/>
-          </a:prstGeom>
-          <a:noFill/>
-        </p:spPr>
-        <p:txBody>
-          <a:bodyPr wrap="square" anchor="t">
-            <a:spAutoFit/>
-          </a:bodyPr>
-          <a:lstStyle/>
+                <a:spcPct val="105000"/>
+              </a:lnSpc>
+              <a:spcAft>
+                <a:spcPts val="500"/>
+              </a:spcAft>
+            </a:pPr>
+            <a:r>
+              <a:rPr sz="1400" b="0" i="0">
+                <a:solidFill>
+                  <a:srgbClr val="1C2430"/>
+                </a:solidFill>
+                <a:latin typeface="Roboto"/>
+              </a:rPr>
+              <a:t>Angular 19, 20… become routine</a:t>
+            </a:r>
+          </a:p>
           <a:p>
             <a:pPr algn="l">
               <a:lnSpc>
-                <a:spcPct val="100000"/>
-              </a:lnSpc>
-              <a:spcAft>
-                <a:spcPts val="600"/>
-              </a:spcAft>
-            </a:pPr>
-            <a:r>
-              <a:rPr sz="1450" b="1" i="0">
-                <a:solidFill>
-                  <a:srgbClr val="012169"/>
-                </a:solidFill>
-                <a:latin typeface="Roboto"/>
-              </a:rPr>
-              <a:t>Run a pilot for you</a:t>
-            </a:r>
-          </a:p>
-        </p:txBody>
-      </p:sp>
-      <p:sp>
-        <p:nvSpPr>
-          <p:cNvPr id="24" name="TextBox 23"/>
-          <p:cNvSpPr txBox="1"/>
-          <p:nvPr/>
-        </p:nvSpPr>
-        <p:spPr>
-          <a:xfrm>
-            <a:off x="2834640" y="3986784"/>
-            <a:ext cx="8595360" cy="411480"/>
-          </a:xfrm>
-          <a:prstGeom prst="rect">
-            <a:avLst/>
-          </a:prstGeom>
-          <a:noFill/>
-        </p:spPr>
-        <p:txBody>
-          <a:bodyPr wrap="square" anchor="t">
-            <a:spAutoFit/>
-          </a:bodyPr>
-          <a:lstStyle/>
-          <a:p>
-            <a:pPr algn="l">
-              <a:lnSpc>
-                <a:spcPct val="100000"/>
-              </a:lnSpc>
-              <a:spcAft>
-                <a:spcPts val="600"/>
-              </a:spcAft>
-            </a:pPr>
-            <a:r>
-              <a:rPr sz="1150" b="0" i="0">
+                <a:spcPct val="105000"/>
+              </a:lnSpc>
+              <a:spcAft>
+                <a:spcPts val="500"/>
+              </a:spcAft>
+            </a:pPr>
+            <a:r>
+              <a:rPr sz="1400" b="0" i="0">
                 <a:solidFill>
                   <a:srgbClr val="1C2430"/>
                 </a:solidFill>
                 <a:latin typeface="Roboto"/>
               </a:rPr>
-              <a:t>Devin works one real use case; your engineers review; we measure</a:t>
-            </a:r>
-          </a:p>
-        </p:txBody>
-      </p:sp>
-      <p:sp>
-        <p:nvSpPr>
-          <p:cNvPr id="25" name="Rounded Rectangle 24"/>
+              <a:t>Same machinery: cloud migration, test coverage</a:t>
+            </a:r>
+          </a:p>
+        </p:txBody>
+      </p:sp>
+      <p:sp>
+        <p:nvSpPr>
+          <p:cNvPr id="19" name="Rounded Rectangle 18"/>
           <p:cNvSpPr/>
           <p:nvPr/>
         </p:nvSpPr>
         <p:spPr>
           <a:xfrm>
-            <a:off x="502920" y="4553712"/>
-            <a:ext cx="11201400" cy="932688"/>
+            <a:off x="502920" y="4023360"/>
+            <a:ext cx="11201400" cy="1051560"/>
           </a:xfrm>
           <a:prstGeom prst="roundRect">
             <a:avLst>
@@ -6204,58 +6165,14 @@
       </p:sp>
       <p:sp>
         <p:nvSpPr>
-          <p:cNvPr id="26" name="Oval 25"/>
-          <p:cNvSpPr/>
-          <p:nvPr/>
-        </p:nvSpPr>
-        <p:spPr>
-          <a:xfrm>
-            <a:off x="658368" y="4754880"/>
-            <a:ext cx="530352" cy="530352"/>
-          </a:xfrm>
-          <a:prstGeom prst="ellipse">
-            <a:avLst/>
-          </a:prstGeom>
-          <a:solidFill>
-            <a:srgbClr val="E31837"/>
-          </a:solidFill>
-          <a:ln>
-            <a:noFill/>
-          </a:ln>
-          <a:effectLst/>
-        </p:spPr>
-        <p:style>
-          <a:lnRef idx="1">
-            <a:schemeClr val="accent1"/>
-          </a:lnRef>
-          <a:fillRef idx="3">
-            <a:schemeClr val="accent1"/>
-          </a:fillRef>
-          <a:effectRef idx="2">
-            <a:schemeClr val="accent1"/>
-          </a:effectRef>
-          <a:fontRef idx="minor">
-            <a:schemeClr val="lt1"/>
-          </a:fontRef>
-        </p:style>
-        <p:txBody>
-          <a:bodyPr rtlCol="0" anchor="ctr"/>
-          <a:lstStyle/>
-          <a:p>
-            <a:pPr algn="ctr"/>
-          </a:p>
-        </p:txBody>
-      </p:sp>
-      <p:sp>
-        <p:nvSpPr>
-          <p:cNvPr id="27" name="TextBox 26"/>
+          <p:cNvPr id="20" name="TextBox 19"/>
           <p:cNvSpPr txBox="1"/>
           <p:nvPr/>
         </p:nvSpPr>
         <p:spPr>
           <a:xfrm>
-            <a:off x="658368" y="4828032"/>
-            <a:ext cx="530352" cy="402336"/>
+            <a:off x="777240" y="4224528"/>
+            <a:ext cx="10698480" cy="777240"/>
           </a:xfrm>
           <a:prstGeom prst="rect">
             <a:avLst/>
@@ -6268,7 +6185,7 @@
           </a:bodyPr>
           <a:lstStyle/>
           <a:p>
-            <a:pPr algn="ctr">
+            <a:pPr algn="l">
               <a:lnSpc>
                 <a:spcPct val="100000"/>
               </a:lnSpc>
@@ -6277,197 +6194,20 @@
               </a:spcAft>
             </a:pPr>
             <a:r>
-              <a:rPr sz="1700" b="1" i="0">
-                <a:solidFill>
-                  <a:srgbClr val="FFFFFF"/>
-                </a:solidFill>
-                <a:latin typeface="Roboto"/>
-              </a:rPr>
-              <a:t>4</a:t>
-            </a:r>
-          </a:p>
-        </p:txBody>
-      </p:sp>
-      <p:sp>
-        <p:nvSpPr>
-          <p:cNvPr id="28" name="TextBox 27"/>
-          <p:cNvSpPr txBox="1"/>
-          <p:nvPr/>
-        </p:nvSpPr>
-        <p:spPr>
-          <a:xfrm>
-            <a:off x="1417320" y="4663440"/>
-            <a:ext cx="1417320" cy="685800"/>
-          </a:xfrm>
-          <a:prstGeom prst="rect">
-            <a:avLst/>
-          </a:prstGeom>
-          <a:noFill/>
-        </p:spPr>
-        <p:txBody>
-          <a:bodyPr wrap="square" anchor="t">
-            <a:spAutoFit/>
-          </a:bodyPr>
-          <a:lstStyle/>
-          <a:p>
-            <a:pPr algn="l">
-              <a:lnSpc>
-                <a:spcPct val="100000"/>
-              </a:lnSpc>
-              <a:spcAft>
-                <a:spcPts val="600"/>
-              </a:spcAft>
-            </a:pPr>
-            <a:r>
-              <a:rPr sz="1150" b="1" i="0">
-                <a:solidFill>
-                  <a:srgbClr val="E31837"/>
-                </a:solidFill>
-                <a:latin typeface="Roboto"/>
-              </a:rPr>
-              <a:t>Week 4</a:t>
-            </a:r>
-          </a:p>
-        </p:txBody>
-      </p:sp>
-      <p:sp>
-        <p:nvSpPr>
-          <p:cNvPr id="29" name="TextBox 28"/>
-          <p:cNvSpPr txBox="1"/>
-          <p:nvPr/>
-        </p:nvSpPr>
-        <p:spPr>
-          <a:xfrm>
-            <a:off x="2834640" y="4663440"/>
-            <a:ext cx="8595360" cy="365760"/>
-          </a:xfrm>
-          <a:prstGeom prst="rect">
-            <a:avLst/>
-          </a:prstGeom>
-          <a:noFill/>
-        </p:spPr>
-        <p:txBody>
-          <a:bodyPr wrap="square" anchor="t">
-            <a:spAutoFit/>
-          </a:bodyPr>
-          <a:lstStyle/>
-          <a:p>
-            <a:pPr algn="l">
-              <a:lnSpc>
-                <a:spcPct val="100000"/>
-              </a:lnSpc>
-              <a:spcAft>
-                <a:spcPts val="600"/>
-              </a:spcAft>
-            </a:pPr>
-            <a:r>
-              <a:rPr sz="1450" b="1" i="0">
+              <a:rPr sz="1700" b="1" i="1">
                 <a:solidFill>
                   <a:srgbClr val="012169"/>
                 </a:solidFill>
                 <a:latin typeface="Roboto"/>
               </a:rPr>
-              <a:t>Go / no-go readout</a:t>
-            </a:r>
-          </a:p>
-        </p:txBody>
-      </p:sp>
-      <p:sp>
-        <p:nvSpPr>
-          <p:cNvPr id="30" name="TextBox 29"/>
-          <p:cNvSpPr txBox="1"/>
-          <p:nvPr/>
-        </p:nvSpPr>
-        <p:spPr>
-          <a:xfrm>
-            <a:off x="2834640" y="5010912"/>
-            <a:ext cx="8595360" cy="411480"/>
-          </a:xfrm>
-          <a:prstGeom prst="rect">
-            <a:avLst/>
-          </a:prstGeom>
-          <a:noFill/>
-        </p:spPr>
-        <p:txBody>
-          <a:bodyPr wrap="square" anchor="t">
-            <a:spAutoFit/>
-          </a:bodyPr>
-          <a:lstStyle/>
-          <a:p>
-            <a:pPr algn="l">
-              <a:lnSpc>
-                <a:spcPct val="100000"/>
-              </a:lnSpc>
-              <a:spcAft>
-                <a:spcPts val="600"/>
-              </a:spcAft>
-            </a:pPr>
-            <a:r>
-              <a:rPr sz="1150" b="0" i="0">
-                <a:solidFill>
-                  <a:srgbClr val="1C2430"/>
-                </a:solidFill>
-                <a:latin typeface="Roboto"/>
-              </a:rPr>
-              <a:t>Results in front of this room — then scale to the other two</a:t>
-            </a:r>
-          </a:p>
-        </p:txBody>
-      </p:sp>
-      <p:sp>
-        <p:nvSpPr>
-          <p:cNvPr id="31" name="TextBox 30"/>
-          <p:cNvSpPr txBox="1"/>
-          <p:nvPr/>
-        </p:nvSpPr>
-        <p:spPr>
-          <a:xfrm>
-            <a:off x="502920" y="5715000"/>
-            <a:ext cx="11201400" cy="548640"/>
-          </a:xfrm>
-          <a:prstGeom prst="rect">
-            <a:avLst/>
-          </a:prstGeom>
-          <a:noFill/>
-        </p:spPr>
-        <p:txBody>
-          <a:bodyPr wrap="square" anchor="t">
-            <a:spAutoFit/>
-          </a:bodyPr>
-          <a:lstStyle/>
-          <a:p>
-            <a:pPr algn="l">
-              <a:lnSpc>
-                <a:spcPct val="100000"/>
-              </a:lnSpc>
-              <a:spcAft>
-                <a:spcPts val="600"/>
-              </a:spcAft>
-            </a:pPr>
-            <a:r>
-              <a:rPr sz="1400" b="1" i="0">
-                <a:solidFill>
-                  <a:srgbClr val="E31837"/>
-                </a:solidFill>
-                <a:latin typeface="Roboto"/>
-              </a:rPr>
-              <a:t>The ask:  </a:t>
-            </a:r>
-            <a:r>
-              <a:rPr sz="1400" b="1" i="0">
-                <a:solidFill>
-                  <a:srgbClr val="012169"/>
-                </a:solidFill>
-                <a:latin typeface="Roboto"/>
-              </a:rPr>
-              <a:t>three use cases, one pilot, four weeks, your success criteria.</a:t>
-            </a:r>
-          </a:p>
-        </p:txBody>
-      </p:sp>
-      <p:sp>
-        <p:nvSpPr>
-          <p:cNvPr id="32" name="TextBox 31"/>
+              <a:t>“We met a hard compliance deadline without pausing the roadmap.”</a:t>
+            </a:r>
+          </a:p>
+        </p:txBody>
+      </p:sp>
+      <p:sp>
+        <p:nvSpPr>
+          <p:cNvPr id="21" name="TextBox 20"/>
           <p:cNvSpPr txBox="1"/>
           <p:nvPr/>
         </p:nvSpPr>
@@ -6534,7 +6274,7 @@
         <p:spPr>
           <a:xfrm>
             <a:off x="0" y="0"/>
-            <a:ext cx="12191695" cy="6858000"/>
+            <a:ext cx="12191695" cy="1170432"/>
           </a:xfrm>
           <a:prstGeom prst="rect">
             <a:avLst/>
@@ -6577,8 +6317,8 @@
         </p:nvSpPr>
         <p:spPr>
           <a:xfrm>
-            <a:off x="0" y="3566160"/>
-            <a:ext cx="12191695" cy="54864"/>
+            <a:off x="0" y="1170432"/>
+            <a:ext cx="12191695" cy="50292"/>
           </a:xfrm>
           <a:prstGeom prst="rect">
             <a:avLst/>
@@ -6621,8 +6361,8 @@
         </p:nvSpPr>
         <p:spPr>
           <a:xfrm>
-            <a:off x="822960" y="2651760"/>
-            <a:ext cx="10515600" cy="822960"/>
+            <a:off x="502920" y="146304"/>
+            <a:ext cx="9601200" cy="320040"/>
           </a:xfrm>
           <a:prstGeom prst="rect">
             <a:avLst/>
@@ -6644,13 +6384,13 @@
               </a:spcAft>
             </a:pPr>
             <a:r>
-              <a:rPr sz="3400" b="1" i="0">
-                <a:solidFill>
-                  <a:srgbClr val="FFFFFF"/>
-                </a:solidFill>
-                <a:latin typeface="Roboto"/>
-              </a:rPr>
-              <a:t>Appendix — Prep Material (not presented)</a:t>
+              <a:rPr sz="1100" b="1" i="0">
+                <a:solidFill>
+                  <a:srgbClr val="9FB4E0"/>
+                </a:solidFill>
+                <a:latin typeface="Roboto"/>
+              </a:rPr>
+              <a:t>LEAVING WITH A DECISION, NOT A DECK</a:t>
             </a:r>
           </a:p>
         </p:txBody>
@@ -6663,8 +6403,50 @@
         </p:nvSpPr>
         <p:spPr>
           <a:xfrm>
-            <a:off x="822960" y="3794760"/>
-            <a:ext cx="10058400" cy="914400"/>
+            <a:off x="502920" y="384048"/>
+            <a:ext cx="10424160" cy="731520"/>
+          </a:xfrm>
+          <a:prstGeom prst="rect">
+            <a:avLst/>
+          </a:prstGeom>
+          <a:noFill/>
+        </p:spPr>
+        <p:txBody>
+          <a:bodyPr wrap="square" anchor="ctr">
+            <a:spAutoFit/>
+          </a:bodyPr>
+          <a:lstStyle/>
+          <a:p>
+            <a:pPr algn="l">
+              <a:lnSpc>
+                <a:spcPct val="100000"/>
+              </a:lnSpc>
+              <a:spcAft>
+                <a:spcPts val="600"/>
+              </a:spcAft>
+            </a:pPr>
+            <a:r>
+              <a:rPr sz="2700" b="1" i="0">
+                <a:solidFill>
+                  <a:srgbClr val="FFFFFF"/>
+                </a:solidFill>
+                <a:latin typeface="Roboto"/>
+              </a:rPr>
+              <a:t>Proposed next steps</a:t>
+            </a:r>
+          </a:p>
+        </p:txBody>
+      </p:sp>
+      <p:sp>
+        <p:nvSpPr>
+          <p:cNvPr id="6" name="TextBox 5"/>
+          <p:cNvSpPr txBox="1"/>
+          <p:nvPr/>
+        </p:nvSpPr>
+        <p:spPr>
+          <a:xfrm>
+            <a:off x="11247120" y="384048"/>
+            <a:ext cx="640080" cy="731520"/>
           </a:xfrm>
           <a:prstGeom prst="rect">
             <a:avLst/>
@@ -6677,6 +6459,180 @@
           </a:bodyPr>
           <a:lstStyle/>
           <a:p>
+            <a:pPr algn="r">
+              <a:lnSpc>
+                <a:spcPct val="100000"/>
+              </a:lnSpc>
+              <a:spcAft>
+                <a:spcPts val="600"/>
+              </a:spcAft>
+            </a:pPr>
+            <a:r>
+              <a:rPr sz="1400" b="0" i="0">
+                <a:solidFill>
+                  <a:srgbClr val="9FB4E0"/>
+                </a:solidFill>
+                <a:latin typeface="Roboto"/>
+              </a:rPr>
+              <a:t>11</a:t>
+            </a:r>
+          </a:p>
+        </p:txBody>
+      </p:sp>
+      <p:sp>
+        <p:nvSpPr>
+          <p:cNvPr id="7" name="Rounded Rectangle 6"/>
+          <p:cNvSpPr/>
+          <p:nvPr/>
+        </p:nvSpPr>
+        <p:spPr>
+          <a:xfrm>
+            <a:off x="502920" y="1481328"/>
+            <a:ext cx="11201400" cy="932688"/>
+          </a:xfrm>
+          <a:prstGeom prst="roundRect">
+            <a:avLst>
+              <a:gd name="adj" fmla="val 10000"/>
+            </a:avLst>
+          </a:prstGeom>
+          <a:solidFill>
+            <a:srgbClr val="F4F6F9"/>
+          </a:solidFill>
+          <a:ln>
+            <a:noFill/>
+          </a:ln>
+          <a:effectLst/>
+        </p:spPr>
+        <p:style>
+          <a:lnRef idx="1">
+            <a:schemeClr val="accent1"/>
+          </a:lnRef>
+          <a:fillRef idx="3">
+            <a:schemeClr val="accent1"/>
+          </a:fillRef>
+          <a:effectRef idx="2">
+            <a:schemeClr val="accent1"/>
+          </a:effectRef>
+          <a:fontRef idx="minor">
+            <a:schemeClr val="lt1"/>
+          </a:fontRef>
+        </p:style>
+        <p:txBody>
+          <a:bodyPr rtlCol="0" anchor="ctr"/>
+          <a:lstStyle/>
+          <a:p>
+            <a:pPr algn="ctr"/>
+          </a:p>
+        </p:txBody>
+      </p:sp>
+      <p:sp>
+        <p:nvSpPr>
+          <p:cNvPr id="8" name="Oval 7"/>
+          <p:cNvSpPr/>
+          <p:nvPr/>
+        </p:nvSpPr>
+        <p:spPr>
+          <a:xfrm>
+            <a:off x="658368" y="1682496"/>
+            <a:ext cx="530352" cy="530352"/>
+          </a:xfrm>
+          <a:prstGeom prst="ellipse">
+            <a:avLst/>
+          </a:prstGeom>
+          <a:solidFill>
+            <a:srgbClr val="E31837"/>
+          </a:solidFill>
+          <a:ln>
+            <a:noFill/>
+          </a:ln>
+          <a:effectLst/>
+        </p:spPr>
+        <p:style>
+          <a:lnRef idx="1">
+            <a:schemeClr val="accent1"/>
+          </a:lnRef>
+          <a:fillRef idx="3">
+            <a:schemeClr val="accent1"/>
+          </a:fillRef>
+          <a:effectRef idx="2">
+            <a:schemeClr val="accent1"/>
+          </a:effectRef>
+          <a:fontRef idx="minor">
+            <a:schemeClr val="lt1"/>
+          </a:fontRef>
+        </p:style>
+        <p:txBody>
+          <a:bodyPr rtlCol="0" anchor="ctr"/>
+          <a:lstStyle/>
+          <a:p>
+            <a:pPr algn="ctr"/>
+          </a:p>
+        </p:txBody>
+      </p:sp>
+      <p:sp>
+        <p:nvSpPr>
+          <p:cNvPr id="9" name="TextBox 8"/>
+          <p:cNvSpPr txBox="1"/>
+          <p:nvPr/>
+        </p:nvSpPr>
+        <p:spPr>
+          <a:xfrm>
+            <a:off x="658368" y="1755648"/>
+            <a:ext cx="530352" cy="402336"/>
+          </a:xfrm>
+          <a:prstGeom prst="rect">
+            <a:avLst/>
+          </a:prstGeom>
+          <a:noFill/>
+        </p:spPr>
+        <p:txBody>
+          <a:bodyPr wrap="square" anchor="t">
+            <a:spAutoFit/>
+          </a:bodyPr>
+          <a:lstStyle/>
+          <a:p>
+            <a:pPr algn="ctr">
+              <a:lnSpc>
+                <a:spcPct val="100000"/>
+              </a:lnSpc>
+              <a:spcAft>
+                <a:spcPts val="600"/>
+              </a:spcAft>
+            </a:pPr>
+            <a:r>
+              <a:rPr sz="1700" b="1" i="0">
+                <a:solidFill>
+                  <a:srgbClr val="FFFFFF"/>
+                </a:solidFill>
+                <a:latin typeface="Roboto"/>
+              </a:rPr>
+              <a:t>1</a:t>
+            </a:r>
+          </a:p>
+        </p:txBody>
+      </p:sp>
+      <p:sp>
+        <p:nvSpPr>
+          <p:cNvPr id="10" name="TextBox 9"/>
+          <p:cNvSpPr txBox="1"/>
+          <p:nvPr/>
+        </p:nvSpPr>
+        <p:spPr>
+          <a:xfrm>
+            <a:off x="1417320" y="1591056"/>
+            <a:ext cx="1417320" cy="685800"/>
+          </a:xfrm>
+          <a:prstGeom prst="rect">
+            <a:avLst/>
+          </a:prstGeom>
+          <a:noFill/>
+        </p:spPr>
+        <p:txBody>
+          <a:bodyPr wrap="square" anchor="t">
+            <a:spAutoFit/>
+          </a:bodyPr>
+          <a:lstStyle/>
+          <a:p>
             <a:pPr algn="l">
               <a:lnSpc>
                 <a:spcPct val="100000"/>
@@ -6686,15 +6642,38 @@
               </a:spcAft>
             </a:pPr>
             <a:r>
-              <a:rPr sz="1600" b="0" i="0">
-                <a:solidFill>
-                  <a:srgbClr val="C9D4EC"/>
-                </a:solidFill>
-                <a:latin typeface="Roboto"/>
-              </a:rPr>
-              <a:t>A. Objection handling — if the room pushes back</a:t>
-            </a:r>
-          </a:p>
+              <a:rPr sz="1150" b="1" i="0">
+                <a:solidFill>
+                  <a:srgbClr val="E31837"/>
+                </a:solidFill>
+                <a:latin typeface="Roboto"/>
+              </a:rPr>
+              <a:t>This week</a:t>
+            </a:r>
+          </a:p>
+        </p:txBody>
+      </p:sp>
+      <p:sp>
+        <p:nvSpPr>
+          <p:cNvPr id="11" name="TextBox 10"/>
+          <p:cNvSpPr txBox="1"/>
+          <p:nvPr/>
+        </p:nvSpPr>
+        <p:spPr>
+          <a:xfrm>
+            <a:off x="2834640" y="1591056"/>
+            <a:ext cx="8595360" cy="365760"/>
+          </a:xfrm>
+          <a:prstGeom prst="rect">
+            <a:avLst/>
+          </a:prstGeom>
+          <a:noFill/>
+        </p:spPr>
+        <p:txBody>
+          <a:bodyPr wrap="square" anchor="t">
+            <a:spAutoFit/>
+          </a:bodyPr>
+          <a:lstStyle/>
           <a:p>
             <a:pPr algn="l">
               <a:lnSpc>
@@ -6705,13 +6684,922 @@
               </a:spcAft>
             </a:pPr>
             <a:r>
-              <a:rPr sz="1600" b="0" i="0">
-                <a:solidFill>
-                  <a:srgbClr val="C9D4EC"/>
-                </a:solidFill>
-                <a:latin typeface="Roboto"/>
-              </a:rPr>
-              <a:t>B. Pre-meeting research checklist</a:t>
+              <a:rPr sz="1450" b="1" i="0">
+                <a:solidFill>
+                  <a:srgbClr val="012169"/>
+                </a:solidFill>
+                <a:latin typeface="Roboto"/>
+              </a:rPr>
+              <a:t>Pick 3 use cases together</a:t>
+            </a:r>
+          </a:p>
+        </p:txBody>
+      </p:sp>
+      <p:sp>
+        <p:nvSpPr>
+          <p:cNvPr id="12" name="TextBox 11"/>
+          <p:cNvSpPr txBox="1"/>
+          <p:nvPr/>
+        </p:nvSpPr>
+        <p:spPr>
+          <a:xfrm>
+            <a:off x="2834640" y="1938528"/>
+            <a:ext cx="8595360" cy="411480"/>
+          </a:xfrm>
+          <a:prstGeom prst="rect">
+            <a:avLst/>
+          </a:prstGeom>
+          <a:noFill/>
+        </p:spPr>
+        <p:txBody>
+          <a:bodyPr wrap="square" anchor="t">
+            <a:spAutoFit/>
+          </a:bodyPr>
+          <a:lstStyle/>
+          <a:p>
+            <a:pPr algn="l">
+              <a:lnSpc>
+                <a:spcPct val="100000"/>
+              </a:lnSpc>
+              <a:spcAft>
+                <a:spcPts val="600"/>
+              </a:spcAft>
+            </a:pPr>
+            <a:r>
+              <a:rPr sz="1150" b="0" i="0">
+                <a:solidFill>
+                  <a:srgbClr val="1C2430"/>
+                </a:solidFill>
+                <a:latin typeface="Roboto"/>
+              </a:rPr>
+              <a:t>Start with work like today's demo — upgrades, migrations, test debt</a:t>
+            </a:r>
+          </a:p>
+        </p:txBody>
+      </p:sp>
+      <p:sp>
+        <p:nvSpPr>
+          <p:cNvPr id="13" name="Rounded Rectangle 12"/>
+          <p:cNvSpPr/>
+          <p:nvPr/>
+        </p:nvSpPr>
+        <p:spPr>
+          <a:xfrm>
+            <a:off x="502920" y="2505456"/>
+            <a:ext cx="11201400" cy="932688"/>
+          </a:xfrm>
+          <a:prstGeom prst="roundRect">
+            <a:avLst>
+              <a:gd name="adj" fmla="val 10000"/>
+            </a:avLst>
+          </a:prstGeom>
+          <a:solidFill>
+            <a:srgbClr val="F4F6F9"/>
+          </a:solidFill>
+          <a:ln>
+            <a:noFill/>
+          </a:ln>
+          <a:effectLst/>
+        </p:spPr>
+        <p:style>
+          <a:lnRef idx="1">
+            <a:schemeClr val="accent1"/>
+          </a:lnRef>
+          <a:fillRef idx="3">
+            <a:schemeClr val="accent1"/>
+          </a:fillRef>
+          <a:effectRef idx="2">
+            <a:schemeClr val="accent1"/>
+          </a:effectRef>
+          <a:fontRef idx="minor">
+            <a:schemeClr val="lt1"/>
+          </a:fontRef>
+        </p:style>
+        <p:txBody>
+          <a:bodyPr rtlCol="0" anchor="ctr"/>
+          <a:lstStyle/>
+          <a:p>
+            <a:pPr algn="ctr"/>
+          </a:p>
+        </p:txBody>
+      </p:sp>
+      <p:sp>
+        <p:nvSpPr>
+          <p:cNvPr id="14" name="Oval 13"/>
+          <p:cNvSpPr/>
+          <p:nvPr/>
+        </p:nvSpPr>
+        <p:spPr>
+          <a:xfrm>
+            <a:off x="658368" y="2706624"/>
+            <a:ext cx="530352" cy="530352"/>
+          </a:xfrm>
+          <a:prstGeom prst="ellipse">
+            <a:avLst/>
+          </a:prstGeom>
+          <a:solidFill>
+            <a:srgbClr val="E31837"/>
+          </a:solidFill>
+          <a:ln>
+            <a:noFill/>
+          </a:ln>
+          <a:effectLst/>
+        </p:spPr>
+        <p:style>
+          <a:lnRef idx="1">
+            <a:schemeClr val="accent1"/>
+          </a:lnRef>
+          <a:fillRef idx="3">
+            <a:schemeClr val="accent1"/>
+          </a:fillRef>
+          <a:effectRef idx="2">
+            <a:schemeClr val="accent1"/>
+          </a:effectRef>
+          <a:fontRef idx="minor">
+            <a:schemeClr val="lt1"/>
+          </a:fontRef>
+        </p:style>
+        <p:txBody>
+          <a:bodyPr rtlCol="0" anchor="ctr"/>
+          <a:lstStyle/>
+          <a:p>
+            <a:pPr algn="ctr"/>
+          </a:p>
+        </p:txBody>
+      </p:sp>
+      <p:sp>
+        <p:nvSpPr>
+          <p:cNvPr id="15" name="TextBox 14"/>
+          <p:cNvSpPr txBox="1"/>
+          <p:nvPr/>
+        </p:nvSpPr>
+        <p:spPr>
+          <a:xfrm>
+            <a:off x="658368" y="2779776"/>
+            <a:ext cx="530352" cy="402336"/>
+          </a:xfrm>
+          <a:prstGeom prst="rect">
+            <a:avLst/>
+          </a:prstGeom>
+          <a:noFill/>
+        </p:spPr>
+        <p:txBody>
+          <a:bodyPr wrap="square" anchor="t">
+            <a:spAutoFit/>
+          </a:bodyPr>
+          <a:lstStyle/>
+          <a:p>
+            <a:pPr algn="ctr">
+              <a:lnSpc>
+                <a:spcPct val="100000"/>
+              </a:lnSpc>
+              <a:spcAft>
+                <a:spcPts val="600"/>
+              </a:spcAft>
+            </a:pPr>
+            <a:r>
+              <a:rPr sz="1700" b="1" i="0">
+                <a:solidFill>
+                  <a:srgbClr val="FFFFFF"/>
+                </a:solidFill>
+                <a:latin typeface="Roboto"/>
+              </a:rPr>
+              <a:t>2</a:t>
+            </a:r>
+          </a:p>
+        </p:txBody>
+      </p:sp>
+      <p:sp>
+        <p:nvSpPr>
+          <p:cNvPr id="16" name="TextBox 15"/>
+          <p:cNvSpPr txBox="1"/>
+          <p:nvPr/>
+        </p:nvSpPr>
+        <p:spPr>
+          <a:xfrm>
+            <a:off x="1417320" y="2615184"/>
+            <a:ext cx="1417320" cy="685800"/>
+          </a:xfrm>
+          <a:prstGeom prst="rect">
+            <a:avLst/>
+          </a:prstGeom>
+          <a:noFill/>
+        </p:spPr>
+        <p:txBody>
+          <a:bodyPr wrap="square" anchor="t">
+            <a:spAutoFit/>
+          </a:bodyPr>
+          <a:lstStyle/>
+          <a:p>
+            <a:pPr algn="l">
+              <a:lnSpc>
+                <a:spcPct val="100000"/>
+              </a:lnSpc>
+              <a:spcAft>
+                <a:spcPts val="600"/>
+              </a:spcAft>
+            </a:pPr>
+            <a:r>
+              <a:rPr sz="1150" b="1" i="0">
+                <a:solidFill>
+                  <a:srgbClr val="E31837"/>
+                </a:solidFill>
+                <a:latin typeface="Roboto"/>
+              </a:rPr>
+              <a:t>Next week</a:t>
+            </a:r>
+          </a:p>
+        </p:txBody>
+      </p:sp>
+      <p:sp>
+        <p:nvSpPr>
+          <p:cNvPr id="17" name="TextBox 16"/>
+          <p:cNvSpPr txBox="1"/>
+          <p:nvPr/>
+        </p:nvSpPr>
+        <p:spPr>
+          <a:xfrm>
+            <a:off x="2834640" y="2615184"/>
+            <a:ext cx="8595360" cy="365760"/>
+          </a:xfrm>
+          <a:prstGeom prst="rect">
+            <a:avLst/>
+          </a:prstGeom>
+          <a:noFill/>
+        </p:spPr>
+        <p:txBody>
+          <a:bodyPr wrap="square" anchor="t">
+            <a:spAutoFit/>
+          </a:bodyPr>
+          <a:lstStyle/>
+          <a:p>
+            <a:pPr algn="l">
+              <a:lnSpc>
+                <a:spcPct val="100000"/>
+              </a:lnSpc>
+              <a:spcAft>
+                <a:spcPts val="600"/>
+              </a:spcAft>
+            </a:pPr>
+            <a:r>
+              <a:rPr sz="1450" b="1" i="0">
+                <a:solidFill>
+                  <a:srgbClr val="012169"/>
+                </a:solidFill>
+                <a:latin typeface="Roboto"/>
+              </a:rPr>
+              <a:t>Security &amp; data review</a:t>
+            </a:r>
+          </a:p>
+        </p:txBody>
+      </p:sp>
+      <p:sp>
+        <p:nvSpPr>
+          <p:cNvPr id="18" name="TextBox 17"/>
+          <p:cNvSpPr txBox="1"/>
+          <p:nvPr/>
+        </p:nvSpPr>
+        <p:spPr>
+          <a:xfrm>
+            <a:off x="2834640" y="2962656"/>
+            <a:ext cx="8595360" cy="411480"/>
+          </a:xfrm>
+          <a:prstGeom prst="rect">
+            <a:avLst/>
+          </a:prstGeom>
+          <a:noFill/>
+        </p:spPr>
+        <p:txBody>
+          <a:bodyPr wrap="square" anchor="t">
+            <a:spAutoFit/>
+          </a:bodyPr>
+          <a:lstStyle/>
+          <a:p>
+            <a:pPr algn="l">
+              <a:lnSpc>
+                <a:spcPct val="100000"/>
+              </a:lnSpc>
+              <a:spcAft>
+                <a:spcPts val="600"/>
+              </a:spcAft>
+            </a:pPr>
+            <a:r>
+              <a:rPr sz="1150" b="0" i="0">
+                <a:solidFill>
+                  <a:srgbClr val="1C2430"/>
+                </a:solidFill>
+                <a:latin typeface="Roboto"/>
+              </a:rPr>
+              <a:t>Your security team + ours · define success criteria</a:t>
+            </a:r>
+          </a:p>
+        </p:txBody>
+      </p:sp>
+      <p:sp>
+        <p:nvSpPr>
+          <p:cNvPr id="19" name="Rounded Rectangle 18"/>
+          <p:cNvSpPr/>
+          <p:nvPr/>
+        </p:nvSpPr>
+        <p:spPr>
+          <a:xfrm>
+            <a:off x="502920" y="3529584"/>
+            <a:ext cx="11201400" cy="932688"/>
+          </a:xfrm>
+          <a:prstGeom prst="roundRect">
+            <a:avLst>
+              <a:gd name="adj" fmla="val 10000"/>
+            </a:avLst>
+          </a:prstGeom>
+          <a:solidFill>
+            <a:srgbClr val="F4F6F9"/>
+          </a:solidFill>
+          <a:ln>
+            <a:noFill/>
+          </a:ln>
+          <a:effectLst/>
+        </p:spPr>
+        <p:style>
+          <a:lnRef idx="1">
+            <a:schemeClr val="accent1"/>
+          </a:lnRef>
+          <a:fillRef idx="3">
+            <a:schemeClr val="accent1"/>
+          </a:fillRef>
+          <a:effectRef idx="2">
+            <a:schemeClr val="accent1"/>
+          </a:effectRef>
+          <a:fontRef idx="minor">
+            <a:schemeClr val="lt1"/>
+          </a:fontRef>
+        </p:style>
+        <p:txBody>
+          <a:bodyPr rtlCol="0" anchor="ctr"/>
+          <a:lstStyle/>
+          <a:p>
+            <a:pPr algn="ctr"/>
+          </a:p>
+        </p:txBody>
+      </p:sp>
+      <p:sp>
+        <p:nvSpPr>
+          <p:cNvPr id="20" name="Oval 19"/>
+          <p:cNvSpPr/>
+          <p:nvPr/>
+        </p:nvSpPr>
+        <p:spPr>
+          <a:xfrm>
+            <a:off x="658368" y="3730752"/>
+            <a:ext cx="530352" cy="530352"/>
+          </a:xfrm>
+          <a:prstGeom prst="ellipse">
+            <a:avLst/>
+          </a:prstGeom>
+          <a:solidFill>
+            <a:srgbClr val="E31837"/>
+          </a:solidFill>
+          <a:ln>
+            <a:noFill/>
+          </a:ln>
+          <a:effectLst/>
+        </p:spPr>
+        <p:style>
+          <a:lnRef idx="1">
+            <a:schemeClr val="accent1"/>
+          </a:lnRef>
+          <a:fillRef idx="3">
+            <a:schemeClr val="accent1"/>
+          </a:fillRef>
+          <a:effectRef idx="2">
+            <a:schemeClr val="accent1"/>
+          </a:effectRef>
+          <a:fontRef idx="minor">
+            <a:schemeClr val="lt1"/>
+          </a:fontRef>
+        </p:style>
+        <p:txBody>
+          <a:bodyPr rtlCol="0" anchor="ctr"/>
+          <a:lstStyle/>
+          <a:p>
+            <a:pPr algn="ctr"/>
+          </a:p>
+        </p:txBody>
+      </p:sp>
+      <p:sp>
+        <p:nvSpPr>
+          <p:cNvPr id="21" name="TextBox 20"/>
+          <p:cNvSpPr txBox="1"/>
+          <p:nvPr/>
+        </p:nvSpPr>
+        <p:spPr>
+          <a:xfrm>
+            <a:off x="658368" y="3803904"/>
+            <a:ext cx="530352" cy="402336"/>
+          </a:xfrm>
+          <a:prstGeom prst="rect">
+            <a:avLst/>
+          </a:prstGeom>
+          <a:noFill/>
+        </p:spPr>
+        <p:txBody>
+          <a:bodyPr wrap="square" anchor="t">
+            <a:spAutoFit/>
+          </a:bodyPr>
+          <a:lstStyle/>
+          <a:p>
+            <a:pPr algn="ctr">
+              <a:lnSpc>
+                <a:spcPct val="100000"/>
+              </a:lnSpc>
+              <a:spcAft>
+                <a:spcPts val="600"/>
+              </a:spcAft>
+            </a:pPr>
+            <a:r>
+              <a:rPr sz="1700" b="1" i="0">
+                <a:solidFill>
+                  <a:srgbClr val="FFFFFF"/>
+                </a:solidFill>
+                <a:latin typeface="Roboto"/>
+              </a:rPr>
+              <a:t>3</a:t>
+            </a:r>
+          </a:p>
+        </p:txBody>
+      </p:sp>
+      <p:sp>
+        <p:nvSpPr>
+          <p:cNvPr id="22" name="TextBox 21"/>
+          <p:cNvSpPr txBox="1"/>
+          <p:nvPr/>
+        </p:nvSpPr>
+        <p:spPr>
+          <a:xfrm>
+            <a:off x="1417320" y="3639312"/>
+            <a:ext cx="1417320" cy="685800"/>
+          </a:xfrm>
+          <a:prstGeom prst="rect">
+            <a:avLst/>
+          </a:prstGeom>
+          <a:noFill/>
+        </p:spPr>
+        <p:txBody>
+          <a:bodyPr wrap="square" anchor="t">
+            <a:spAutoFit/>
+          </a:bodyPr>
+          <a:lstStyle/>
+          <a:p>
+            <a:pPr algn="l">
+              <a:lnSpc>
+                <a:spcPct val="100000"/>
+              </a:lnSpc>
+              <a:spcAft>
+                <a:spcPts val="600"/>
+              </a:spcAft>
+            </a:pPr>
+            <a:r>
+              <a:rPr sz="1150" b="1" i="0">
+                <a:solidFill>
+                  <a:srgbClr val="E31837"/>
+                </a:solidFill>
+                <a:latin typeface="Roboto"/>
+              </a:rPr>
+              <a:t>Weeks 2–4</a:t>
+            </a:r>
+          </a:p>
+        </p:txBody>
+      </p:sp>
+      <p:sp>
+        <p:nvSpPr>
+          <p:cNvPr id="23" name="TextBox 22"/>
+          <p:cNvSpPr txBox="1"/>
+          <p:nvPr/>
+        </p:nvSpPr>
+        <p:spPr>
+          <a:xfrm>
+            <a:off x="2834640" y="3639312"/>
+            <a:ext cx="8595360" cy="365760"/>
+          </a:xfrm>
+          <a:prstGeom prst="rect">
+            <a:avLst/>
+          </a:prstGeom>
+          <a:noFill/>
+        </p:spPr>
+        <p:txBody>
+          <a:bodyPr wrap="square" anchor="t">
+            <a:spAutoFit/>
+          </a:bodyPr>
+          <a:lstStyle/>
+          <a:p>
+            <a:pPr algn="l">
+              <a:lnSpc>
+                <a:spcPct val="100000"/>
+              </a:lnSpc>
+              <a:spcAft>
+                <a:spcPts val="600"/>
+              </a:spcAft>
+            </a:pPr>
+            <a:r>
+              <a:rPr sz="1450" b="1" i="0">
+                <a:solidFill>
+                  <a:srgbClr val="012169"/>
+                </a:solidFill>
+                <a:latin typeface="Roboto"/>
+              </a:rPr>
+              <a:t>Run a pilot for you</a:t>
+            </a:r>
+          </a:p>
+        </p:txBody>
+      </p:sp>
+      <p:sp>
+        <p:nvSpPr>
+          <p:cNvPr id="24" name="TextBox 23"/>
+          <p:cNvSpPr txBox="1"/>
+          <p:nvPr/>
+        </p:nvSpPr>
+        <p:spPr>
+          <a:xfrm>
+            <a:off x="2834640" y="3986784"/>
+            <a:ext cx="8595360" cy="411480"/>
+          </a:xfrm>
+          <a:prstGeom prst="rect">
+            <a:avLst/>
+          </a:prstGeom>
+          <a:noFill/>
+        </p:spPr>
+        <p:txBody>
+          <a:bodyPr wrap="square" anchor="t">
+            <a:spAutoFit/>
+          </a:bodyPr>
+          <a:lstStyle/>
+          <a:p>
+            <a:pPr algn="l">
+              <a:lnSpc>
+                <a:spcPct val="100000"/>
+              </a:lnSpc>
+              <a:spcAft>
+                <a:spcPts val="600"/>
+              </a:spcAft>
+            </a:pPr>
+            <a:r>
+              <a:rPr sz="1150" b="0" i="0">
+                <a:solidFill>
+                  <a:srgbClr val="1C2430"/>
+                </a:solidFill>
+                <a:latin typeface="Roboto"/>
+              </a:rPr>
+              <a:t>Devin works one real use case; your engineers review; we measure</a:t>
+            </a:r>
+          </a:p>
+        </p:txBody>
+      </p:sp>
+      <p:sp>
+        <p:nvSpPr>
+          <p:cNvPr id="25" name="Rounded Rectangle 24"/>
+          <p:cNvSpPr/>
+          <p:nvPr/>
+        </p:nvSpPr>
+        <p:spPr>
+          <a:xfrm>
+            <a:off x="502920" y="4553712"/>
+            <a:ext cx="11201400" cy="932688"/>
+          </a:xfrm>
+          <a:prstGeom prst="roundRect">
+            <a:avLst>
+              <a:gd name="adj" fmla="val 10000"/>
+            </a:avLst>
+          </a:prstGeom>
+          <a:solidFill>
+            <a:srgbClr val="F4F6F9"/>
+          </a:solidFill>
+          <a:ln>
+            <a:noFill/>
+          </a:ln>
+          <a:effectLst/>
+        </p:spPr>
+        <p:style>
+          <a:lnRef idx="1">
+            <a:schemeClr val="accent1"/>
+          </a:lnRef>
+          <a:fillRef idx="3">
+            <a:schemeClr val="accent1"/>
+          </a:fillRef>
+          <a:effectRef idx="2">
+            <a:schemeClr val="accent1"/>
+          </a:effectRef>
+          <a:fontRef idx="minor">
+            <a:schemeClr val="lt1"/>
+          </a:fontRef>
+        </p:style>
+        <p:txBody>
+          <a:bodyPr rtlCol="0" anchor="ctr"/>
+          <a:lstStyle/>
+          <a:p>
+            <a:pPr algn="ctr"/>
+          </a:p>
+        </p:txBody>
+      </p:sp>
+      <p:sp>
+        <p:nvSpPr>
+          <p:cNvPr id="26" name="Oval 25"/>
+          <p:cNvSpPr/>
+          <p:nvPr/>
+        </p:nvSpPr>
+        <p:spPr>
+          <a:xfrm>
+            <a:off x="658368" y="4754880"/>
+            <a:ext cx="530352" cy="530352"/>
+          </a:xfrm>
+          <a:prstGeom prst="ellipse">
+            <a:avLst/>
+          </a:prstGeom>
+          <a:solidFill>
+            <a:srgbClr val="E31837"/>
+          </a:solidFill>
+          <a:ln>
+            <a:noFill/>
+          </a:ln>
+          <a:effectLst/>
+        </p:spPr>
+        <p:style>
+          <a:lnRef idx="1">
+            <a:schemeClr val="accent1"/>
+          </a:lnRef>
+          <a:fillRef idx="3">
+            <a:schemeClr val="accent1"/>
+          </a:fillRef>
+          <a:effectRef idx="2">
+            <a:schemeClr val="accent1"/>
+          </a:effectRef>
+          <a:fontRef idx="minor">
+            <a:schemeClr val="lt1"/>
+          </a:fontRef>
+        </p:style>
+        <p:txBody>
+          <a:bodyPr rtlCol="0" anchor="ctr"/>
+          <a:lstStyle/>
+          <a:p>
+            <a:pPr algn="ctr"/>
+          </a:p>
+        </p:txBody>
+      </p:sp>
+      <p:sp>
+        <p:nvSpPr>
+          <p:cNvPr id="27" name="TextBox 26"/>
+          <p:cNvSpPr txBox="1"/>
+          <p:nvPr/>
+        </p:nvSpPr>
+        <p:spPr>
+          <a:xfrm>
+            <a:off x="658368" y="4828032"/>
+            <a:ext cx="530352" cy="402336"/>
+          </a:xfrm>
+          <a:prstGeom prst="rect">
+            <a:avLst/>
+          </a:prstGeom>
+          <a:noFill/>
+        </p:spPr>
+        <p:txBody>
+          <a:bodyPr wrap="square" anchor="t">
+            <a:spAutoFit/>
+          </a:bodyPr>
+          <a:lstStyle/>
+          <a:p>
+            <a:pPr algn="ctr">
+              <a:lnSpc>
+                <a:spcPct val="100000"/>
+              </a:lnSpc>
+              <a:spcAft>
+                <a:spcPts val="600"/>
+              </a:spcAft>
+            </a:pPr>
+            <a:r>
+              <a:rPr sz="1700" b="1" i="0">
+                <a:solidFill>
+                  <a:srgbClr val="FFFFFF"/>
+                </a:solidFill>
+                <a:latin typeface="Roboto"/>
+              </a:rPr>
+              <a:t>4</a:t>
+            </a:r>
+          </a:p>
+        </p:txBody>
+      </p:sp>
+      <p:sp>
+        <p:nvSpPr>
+          <p:cNvPr id="28" name="TextBox 27"/>
+          <p:cNvSpPr txBox="1"/>
+          <p:nvPr/>
+        </p:nvSpPr>
+        <p:spPr>
+          <a:xfrm>
+            <a:off x="1417320" y="4663440"/>
+            <a:ext cx="1417320" cy="685800"/>
+          </a:xfrm>
+          <a:prstGeom prst="rect">
+            <a:avLst/>
+          </a:prstGeom>
+          <a:noFill/>
+        </p:spPr>
+        <p:txBody>
+          <a:bodyPr wrap="square" anchor="t">
+            <a:spAutoFit/>
+          </a:bodyPr>
+          <a:lstStyle/>
+          <a:p>
+            <a:pPr algn="l">
+              <a:lnSpc>
+                <a:spcPct val="100000"/>
+              </a:lnSpc>
+              <a:spcAft>
+                <a:spcPts val="600"/>
+              </a:spcAft>
+            </a:pPr>
+            <a:r>
+              <a:rPr sz="1150" b="1" i="0">
+                <a:solidFill>
+                  <a:srgbClr val="E31837"/>
+                </a:solidFill>
+                <a:latin typeface="Roboto"/>
+              </a:rPr>
+              <a:t>Week 4</a:t>
+            </a:r>
+          </a:p>
+        </p:txBody>
+      </p:sp>
+      <p:sp>
+        <p:nvSpPr>
+          <p:cNvPr id="29" name="TextBox 28"/>
+          <p:cNvSpPr txBox="1"/>
+          <p:nvPr/>
+        </p:nvSpPr>
+        <p:spPr>
+          <a:xfrm>
+            <a:off x="2834640" y="4663440"/>
+            <a:ext cx="8595360" cy="365760"/>
+          </a:xfrm>
+          <a:prstGeom prst="rect">
+            <a:avLst/>
+          </a:prstGeom>
+          <a:noFill/>
+        </p:spPr>
+        <p:txBody>
+          <a:bodyPr wrap="square" anchor="t">
+            <a:spAutoFit/>
+          </a:bodyPr>
+          <a:lstStyle/>
+          <a:p>
+            <a:pPr algn="l">
+              <a:lnSpc>
+                <a:spcPct val="100000"/>
+              </a:lnSpc>
+              <a:spcAft>
+                <a:spcPts val="600"/>
+              </a:spcAft>
+            </a:pPr>
+            <a:r>
+              <a:rPr sz="1450" b="1" i="0">
+                <a:solidFill>
+                  <a:srgbClr val="012169"/>
+                </a:solidFill>
+                <a:latin typeface="Roboto"/>
+              </a:rPr>
+              <a:t>Go / no-go readout</a:t>
+            </a:r>
+          </a:p>
+        </p:txBody>
+      </p:sp>
+      <p:sp>
+        <p:nvSpPr>
+          <p:cNvPr id="30" name="TextBox 29"/>
+          <p:cNvSpPr txBox="1"/>
+          <p:nvPr/>
+        </p:nvSpPr>
+        <p:spPr>
+          <a:xfrm>
+            <a:off x="2834640" y="5010912"/>
+            <a:ext cx="8595360" cy="411480"/>
+          </a:xfrm>
+          <a:prstGeom prst="rect">
+            <a:avLst/>
+          </a:prstGeom>
+          <a:noFill/>
+        </p:spPr>
+        <p:txBody>
+          <a:bodyPr wrap="square" anchor="t">
+            <a:spAutoFit/>
+          </a:bodyPr>
+          <a:lstStyle/>
+          <a:p>
+            <a:pPr algn="l">
+              <a:lnSpc>
+                <a:spcPct val="100000"/>
+              </a:lnSpc>
+              <a:spcAft>
+                <a:spcPts val="600"/>
+              </a:spcAft>
+            </a:pPr>
+            <a:r>
+              <a:rPr sz="1150" b="0" i="0">
+                <a:solidFill>
+                  <a:srgbClr val="1C2430"/>
+                </a:solidFill>
+                <a:latin typeface="Roboto"/>
+              </a:rPr>
+              <a:t>Results in front of this room — then scale to the other two</a:t>
+            </a:r>
+          </a:p>
+        </p:txBody>
+      </p:sp>
+      <p:sp>
+        <p:nvSpPr>
+          <p:cNvPr id="31" name="TextBox 30"/>
+          <p:cNvSpPr txBox="1"/>
+          <p:nvPr/>
+        </p:nvSpPr>
+        <p:spPr>
+          <a:xfrm>
+            <a:off x="502920" y="5715000"/>
+            <a:ext cx="11201400" cy="548640"/>
+          </a:xfrm>
+          <a:prstGeom prst="rect">
+            <a:avLst/>
+          </a:prstGeom>
+          <a:noFill/>
+        </p:spPr>
+        <p:txBody>
+          <a:bodyPr wrap="square" anchor="t">
+            <a:spAutoFit/>
+          </a:bodyPr>
+          <a:lstStyle/>
+          <a:p>
+            <a:pPr algn="l">
+              <a:lnSpc>
+                <a:spcPct val="100000"/>
+              </a:lnSpc>
+              <a:spcAft>
+                <a:spcPts val="600"/>
+              </a:spcAft>
+            </a:pPr>
+            <a:r>
+              <a:rPr sz="1400" b="1" i="0">
+                <a:solidFill>
+                  <a:srgbClr val="E31837"/>
+                </a:solidFill>
+                <a:latin typeface="Roboto"/>
+              </a:rPr>
+              <a:t>The ask:  </a:t>
+            </a:r>
+            <a:r>
+              <a:rPr sz="1400" b="1" i="0">
+                <a:solidFill>
+                  <a:srgbClr val="012169"/>
+                </a:solidFill>
+                <a:latin typeface="Roboto"/>
+              </a:rPr>
+              <a:t>three use cases, one pilot, four weeks, your success criteria.</a:t>
+            </a:r>
+          </a:p>
+        </p:txBody>
+      </p:sp>
+      <p:sp>
+        <p:nvSpPr>
+          <p:cNvPr id="32" name="TextBox 31"/>
+          <p:cNvSpPr txBox="1"/>
+          <p:nvPr/>
+        </p:nvSpPr>
+        <p:spPr>
+          <a:xfrm>
+            <a:off x="502920" y="6473952"/>
+            <a:ext cx="7315200" cy="292608"/>
+          </a:xfrm>
+          <a:prstGeom prst="rect">
+            <a:avLst/>
+          </a:prstGeom>
+          <a:noFill/>
+        </p:spPr>
+        <p:txBody>
+          <a:bodyPr wrap="square" anchor="t">
+            <a:spAutoFit/>
+          </a:bodyPr>
+          <a:lstStyle/>
+          <a:p>
+            <a:pPr algn="l">
+              <a:lnSpc>
+                <a:spcPct val="100000"/>
+              </a:lnSpc>
+              <a:spcAft>
+                <a:spcPts val="600"/>
+              </a:spcAft>
+            </a:pPr>
+            <a:r>
+              <a:rPr sz="900" b="0" i="0">
+                <a:solidFill>
+                  <a:srgbClr val="5A6472"/>
+                </a:solidFill>
+                <a:latin typeface="Roboto"/>
+              </a:rPr>
+              <a:t>Bank of America  ×  Cognition</a:t>
             </a:r>
           </a:p>
         </p:txBody>
@@ -6743,7 +7631,7 @@
         <p:spPr>
           <a:xfrm>
             <a:off x="0" y="0"/>
-            <a:ext cx="12191695" cy="1170432"/>
+            <a:ext cx="12191695" cy="6858000"/>
           </a:xfrm>
           <a:prstGeom prst="rect">
             <a:avLst/>
@@ -6786,8 +7674,8 @@
         </p:nvSpPr>
         <p:spPr>
           <a:xfrm>
-            <a:off x="0" y="1170432"/>
-            <a:ext cx="12191695" cy="50292"/>
+            <a:off x="0" y="3566160"/>
+            <a:ext cx="12191695" cy="54864"/>
           </a:xfrm>
           <a:prstGeom prst="rect">
             <a:avLst/>
@@ -6830,8 +7718,8 @@
         </p:nvSpPr>
         <p:spPr>
           <a:xfrm>
-            <a:off x="502920" y="146304"/>
-            <a:ext cx="9601200" cy="320040"/>
+            <a:off x="822960" y="2651760"/>
+            <a:ext cx="10515600" cy="822960"/>
           </a:xfrm>
           <a:prstGeom prst="rect">
             <a:avLst/>
@@ -6853,13 +7741,13 @@
               </a:spcAft>
             </a:pPr>
             <a:r>
-              <a:rPr sz="1100" b="1" i="0">
-                <a:solidFill>
-                  <a:srgbClr val="9FB4E0"/>
-                </a:solidFill>
-                <a:latin typeface="Roboto"/>
-              </a:rPr>
-              <a:t>APPENDIX A</a:t>
+              <a:rPr sz="3400" b="1" i="0">
+                <a:solidFill>
+                  <a:srgbClr val="FFFFFF"/>
+                </a:solidFill>
+                <a:latin typeface="Roboto"/>
+              </a:rPr>
+              <a:t>Appendix — Prep Material (not presented)</a:t>
             </a:r>
           </a:p>
         </p:txBody>
@@ -6872,50 +7760,8 @@
         </p:nvSpPr>
         <p:spPr>
           <a:xfrm>
-            <a:off x="502920" y="384048"/>
-            <a:ext cx="10424160" cy="731520"/>
-          </a:xfrm>
-          <a:prstGeom prst="rect">
-            <a:avLst/>
-          </a:prstGeom>
-          <a:noFill/>
-        </p:spPr>
-        <p:txBody>
-          <a:bodyPr wrap="square" anchor="ctr">
-            <a:spAutoFit/>
-          </a:bodyPr>
-          <a:lstStyle/>
-          <a:p>
-            <a:pPr algn="l">
-              <a:lnSpc>
-                <a:spcPct val="100000"/>
-              </a:lnSpc>
-              <a:spcAft>
-                <a:spcPts val="600"/>
-              </a:spcAft>
-            </a:pPr>
-            <a:r>
-              <a:rPr sz="2200" b="1" i="0">
-                <a:solidFill>
-                  <a:srgbClr val="FFFFFF"/>
-                </a:solidFill>
-                <a:latin typeface="Roboto"/>
-              </a:rPr>
-              <a:t>If the room pushes back: objections &amp; responses</a:t>
-            </a:r>
-          </a:p>
-        </p:txBody>
-      </p:sp>
-      <p:sp>
-        <p:nvSpPr>
-          <p:cNvPr id="6" name="TextBox 5"/>
-          <p:cNvSpPr txBox="1"/>
-          <p:nvPr/>
-        </p:nvSpPr>
-        <p:spPr>
-          <a:xfrm>
-            <a:off x="11247120" y="384048"/>
-            <a:ext cx="640080" cy="731520"/>
+            <a:off x="822960" y="3794760"/>
+            <a:ext cx="10058400" cy="914400"/>
           </a:xfrm>
           <a:prstGeom prst="rect">
             <a:avLst/>
@@ -6928,7 +7774,7 @@
           </a:bodyPr>
           <a:lstStyle/>
           <a:p>
-            <a:pPr algn="r">
+            <a:pPr algn="l">
               <a:lnSpc>
                 <a:spcPct val="100000"/>
               </a:lnSpc>
@@ -6937,835 +7783,32 @@
               </a:spcAft>
             </a:pPr>
             <a:r>
-              <a:rPr sz="1400" b="0" i="0">
-                <a:solidFill>
-                  <a:srgbClr val="9FB4E0"/>
-                </a:solidFill>
-                <a:latin typeface="Roboto"/>
-              </a:rPr>
-              <a:t>A</a:t>
-            </a:r>
-          </a:p>
-        </p:txBody>
-      </p:sp>
-      <p:sp>
-        <p:nvSpPr>
-          <p:cNvPr id="7" name="Rounded Rectangle 6"/>
-          <p:cNvSpPr/>
-          <p:nvPr/>
-        </p:nvSpPr>
-        <p:spPr>
-          <a:xfrm>
-            <a:off x="502920" y="1417320"/>
-            <a:ext cx="11201400" cy="749808"/>
-          </a:xfrm>
-          <a:prstGeom prst="roundRect">
-            <a:avLst>
-              <a:gd name="adj" fmla="val 10000"/>
-            </a:avLst>
-          </a:prstGeom>
-          <a:solidFill>
-            <a:srgbClr val="F4F6F9"/>
-          </a:solidFill>
-          <a:ln>
-            <a:noFill/>
-          </a:ln>
-          <a:effectLst/>
-        </p:spPr>
-        <p:style>
-          <a:lnRef idx="1">
-            <a:schemeClr val="accent1"/>
-          </a:lnRef>
-          <a:fillRef idx="3">
-            <a:schemeClr val="accent1"/>
-          </a:fillRef>
-          <a:effectRef idx="2">
-            <a:schemeClr val="accent1"/>
-          </a:effectRef>
-          <a:fontRef idx="minor">
-            <a:schemeClr val="lt1"/>
-          </a:fontRef>
-        </p:style>
-        <p:txBody>
-          <a:bodyPr rtlCol="0" anchor="ctr"/>
-          <a:lstStyle/>
-          <a:p>
-            <a:pPr algn="ctr"/>
-          </a:p>
-        </p:txBody>
-      </p:sp>
-      <p:sp>
-        <p:nvSpPr>
-          <p:cNvPr id="8" name="TextBox 7"/>
-          <p:cNvSpPr txBox="1"/>
-          <p:nvPr/>
-        </p:nvSpPr>
-        <p:spPr>
-          <a:xfrm>
-            <a:off x="731520" y="1472184"/>
-            <a:ext cx="4160520" cy="658368"/>
-          </a:xfrm>
-          <a:prstGeom prst="rect">
-            <a:avLst/>
-          </a:prstGeom>
-          <a:noFill/>
-        </p:spPr>
-        <p:txBody>
-          <a:bodyPr wrap="square" anchor="t">
-            <a:spAutoFit/>
-          </a:bodyPr>
-          <a:lstStyle/>
+              <a:rPr sz="1600" b="0" i="0">
+                <a:solidFill>
+                  <a:srgbClr val="C9D4EC"/>
+                </a:solidFill>
+                <a:latin typeface="Roboto"/>
+              </a:rPr>
+              <a:t>A. Objection handling — if the room pushes back</a:t>
+            </a:r>
+          </a:p>
           <a:p>
             <a:pPr algn="l">
               <a:lnSpc>
-                <a:spcPct val="95000"/>
+                <a:spcPct val="100000"/>
               </a:lnSpc>
               <a:spcAft>
                 <a:spcPts val="600"/>
               </a:spcAft>
             </a:pPr>
             <a:r>
-              <a:rPr sz="1050" b="1" i="1">
-                <a:solidFill>
-                  <a:srgbClr val="012169"/>
-                </a:solidFill>
-                <a:latin typeface="Roboto"/>
-              </a:rPr>
-              <a:t>“AI writing code for a bank? Our regulators will never allow it.”</a:t>
-            </a:r>
-          </a:p>
-        </p:txBody>
-      </p:sp>
-      <p:sp>
-        <p:nvSpPr>
-          <p:cNvPr id="9" name="TextBox 8"/>
-          <p:cNvSpPr txBox="1"/>
-          <p:nvPr/>
-        </p:nvSpPr>
-        <p:spPr>
-          <a:xfrm>
-            <a:off x="5029200" y="1472184"/>
-            <a:ext cx="6537960" cy="658368"/>
-          </a:xfrm>
-          <a:prstGeom prst="rect">
-            <a:avLst/>
-          </a:prstGeom>
-          <a:noFill/>
-        </p:spPr>
-        <p:txBody>
-          <a:bodyPr wrap="square" anchor="t">
-            <a:spAutoFit/>
-          </a:bodyPr>
-          <a:lstStyle/>
-          <a:p>
-            <a:pPr algn="l">
-              <a:lnSpc>
-                <a:spcPct val="95000"/>
-              </a:lnSpc>
-              <a:spcAft>
-                <a:spcPts val="600"/>
-              </a:spcAft>
-            </a:pPr>
-            <a:r>
-              <a:rPr sz="1000" b="0" i="0">
-                <a:solidFill>
-                  <a:srgbClr val="1C2430"/>
-                </a:solidFill>
-                <a:latin typeface="Roboto"/>
-              </a:rPr>
-              <a:t>Devin changes who types, not who approves. Every change goes through your existing review, CI, and release gates — the same controls you'd apply to a contractor. And it leaves a better audit trail than a human.</a:t>
-            </a:r>
-          </a:p>
-        </p:txBody>
-      </p:sp>
-      <p:sp>
-        <p:nvSpPr>
-          <p:cNvPr id="10" name="Rounded Rectangle 9"/>
-          <p:cNvSpPr/>
-          <p:nvPr/>
-        </p:nvSpPr>
-        <p:spPr>
-          <a:xfrm>
-            <a:off x="502920" y="2240280"/>
-            <a:ext cx="11201400" cy="749808"/>
-          </a:xfrm>
-          <a:prstGeom prst="roundRect">
-            <a:avLst>
-              <a:gd name="adj" fmla="val 10000"/>
-            </a:avLst>
-          </a:prstGeom>
-          <a:solidFill>
-            <a:srgbClr val="F4F6F9"/>
-          </a:solidFill>
-          <a:ln>
-            <a:noFill/>
-          </a:ln>
-          <a:effectLst/>
-        </p:spPr>
-        <p:style>
-          <a:lnRef idx="1">
-            <a:schemeClr val="accent1"/>
-          </a:lnRef>
-          <a:fillRef idx="3">
-            <a:schemeClr val="accent1"/>
-          </a:fillRef>
-          <a:effectRef idx="2">
-            <a:schemeClr val="accent1"/>
-          </a:effectRef>
-          <a:fontRef idx="minor">
-            <a:schemeClr val="lt1"/>
-          </a:fontRef>
-        </p:style>
-        <p:txBody>
-          <a:bodyPr rtlCol="0" anchor="ctr"/>
-          <a:lstStyle/>
-          <a:p>
-            <a:pPr algn="ctr"/>
-          </a:p>
-        </p:txBody>
-      </p:sp>
-      <p:sp>
-        <p:nvSpPr>
-          <p:cNvPr id="11" name="TextBox 10"/>
-          <p:cNvSpPr txBox="1"/>
-          <p:nvPr/>
-        </p:nvSpPr>
-        <p:spPr>
-          <a:xfrm>
-            <a:off x="731520" y="2295144"/>
-            <a:ext cx="4160520" cy="658368"/>
-          </a:xfrm>
-          <a:prstGeom prst="rect">
-            <a:avLst/>
-          </a:prstGeom>
-          <a:noFill/>
-        </p:spPr>
-        <p:txBody>
-          <a:bodyPr wrap="square" anchor="t">
-            <a:spAutoFit/>
-          </a:bodyPr>
-          <a:lstStyle/>
-          <a:p>
-            <a:pPr algn="l">
-              <a:lnSpc>
-                <a:spcPct val="95000"/>
-              </a:lnSpc>
-              <a:spcAft>
-                <a:spcPts val="600"/>
-              </a:spcAft>
-            </a:pPr>
-            <a:r>
-              <a:rPr sz="1050" b="1" i="1">
-                <a:solidFill>
-                  <a:srgbClr val="012169"/>
-                </a:solidFill>
-                <a:latin typeface="Roboto"/>
-              </a:rPr>
-              <a:t>“We already have Copilot / internal AI tools.”</a:t>
-            </a:r>
-          </a:p>
-        </p:txBody>
-      </p:sp>
-      <p:sp>
-        <p:nvSpPr>
-          <p:cNvPr id="12" name="TextBox 11"/>
-          <p:cNvSpPr txBox="1"/>
-          <p:nvPr/>
-        </p:nvSpPr>
-        <p:spPr>
-          <a:xfrm>
-            <a:off x="5029200" y="2295144"/>
-            <a:ext cx="6537960" cy="658368"/>
-          </a:xfrm>
-          <a:prstGeom prst="rect">
-            <a:avLst/>
-          </a:prstGeom>
-          <a:noFill/>
-        </p:spPr>
-        <p:txBody>
-          <a:bodyPr wrap="square" anchor="t">
-            <a:spAutoFit/>
-          </a:bodyPr>
-          <a:lstStyle/>
-          <a:p>
-            <a:pPr algn="l">
-              <a:lnSpc>
-                <a:spcPct val="95000"/>
-              </a:lnSpc>
-              <a:spcAft>
-                <a:spcPts val="600"/>
-              </a:spcAft>
-            </a:pPr>
-            <a:r>
-              <a:rPr sz="1000" b="0" i="0">
-                <a:solidFill>
-                  <a:srgbClr val="1C2430"/>
-                </a:solidFill>
-                <a:latin typeface="Roboto"/>
-              </a:rPr>
-              <a:t>Complementary, not competing. Copilot accelerates an engineer who's already assigned. Devin absorbs whole task categories nobody wants assigned — migrations, upgrades, test debt.</a:t>
-            </a:r>
-          </a:p>
-        </p:txBody>
-      </p:sp>
-      <p:sp>
-        <p:nvSpPr>
-          <p:cNvPr id="13" name="Rounded Rectangle 12"/>
-          <p:cNvSpPr/>
-          <p:nvPr/>
-        </p:nvSpPr>
-        <p:spPr>
-          <a:xfrm>
-            <a:off x="502920" y="3063240"/>
-            <a:ext cx="11201400" cy="749808"/>
-          </a:xfrm>
-          <a:prstGeom prst="roundRect">
-            <a:avLst>
-              <a:gd name="adj" fmla="val 10000"/>
-            </a:avLst>
-          </a:prstGeom>
-          <a:solidFill>
-            <a:srgbClr val="F4F6F9"/>
-          </a:solidFill>
-          <a:ln>
-            <a:noFill/>
-          </a:ln>
-          <a:effectLst/>
-        </p:spPr>
-        <p:style>
-          <a:lnRef idx="1">
-            <a:schemeClr val="accent1"/>
-          </a:lnRef>
-          <a:fillRef idx="3">
-            <a:schemeClr val="accent1"/>
-          </a:fillRef>
-          <a:effectRef idx="2">
-            <a:schemeClr val="accent1"/>
-          </a:effectRef>
-          <a:fontRef idx="minor">
-            <a:schemeClr val="lt1"/>
-          </a:fontRef>
-        </p:style>
-        <p:txBody>
-          <a:bodyPr rtlCol="0" anchor="ctr"/>
-          <a:lstStyle/>
-          <a:p>
-            <a:pPr algn="ctr"/>
-          </a:p>
-        </p:txBody>
-      </p:sp>
-      <p:sp>
-        <p:nvSpPr>
-          <p:cNvPr id="14" name="TextBox 13"/>
-          <p:cNvSpPr txBox="1"/>
-          <p:nvPr/>
-        </p:nvSpPr>
-        <p:spPr>
-          <a:xfrm>
-            <a:off x="731520" y="3118104"/>
-            <a:ext cx="4160520" cy="658368"/>
-          </a:xfrm>
-          <a:prstGeom prst="rect">
-            <a:avLst/>
-          </a:prstGeom>
-          <a:noFill/>
-        </p:spPr>
-        <p:txBody>
-          <a:bodyPr wrap="square" anchor="t">
-            <a:spAutoFit/>
-          </a:bodyPr>
-          <a:lstStyle/>
-          <a:p>
-            <a:pPr algn="l">
-              <a:lnSpc>
-                <a:spcPct val="95000"/>
-              </a:lnSpc>
-              <a:spcAft>
-                <a:spcPts val="600"/>
-              </a:spcAft>
-            </a:pPr>
-            <a:r>
-              <a:rPr sz="1050" b="1" i="1">
-                <a:solidFill>
-                  <a:srgbClr val="012169"/>
-                </a:solidFill>
-                <a:latin typeface="Roboto"/>
-              </a:rPr>
-              <a:t>“Our codebase is far bigger and messier than any demo.”</a:t>
-            </a:r>
-          </a:p>
-        </p:txBody>
-      </p:sp>
-      <p:sp>
-        <p:nvSpPr>
-          <p:cNvPr id="15" name="TextBox 14"/>
-          <p:cNvSpPr txBox="1"/>
-          <p:nvPr/>
-        </p:nvSpPr>
-        <p:spPr>
-          <a:xfrm>
-            <a:off x="5029200" y="3118104"/>
-            <a:ext cx="6537960" cy="658368"/>
-          </a:xfrm>
-          <a:prstGeom prst="rect">
-            <a:avLst/>
-          </a:prstGeom>
-          <a:noFill/>
-        </p:spPr>
-        <p:txBody>
-          <a:bodyPr wrap="square" anchor="t">
-            <a:spAutoFit/>
-          </a:bodyPr>
-          <a:lstStyle/>
-          <a:p>
-            <a:pPr algn="l">
-              <a:lnSpc>
-                <a:spcPct val="95000"/>
-              </a:lnSpc>
-              <a:spcAft>
-                <a:spcPts val="600"/>
-              </a:spcAft>
-            </a:pPr>
-            <a:r>
-              <a:rPr sz="1000" b="0" i="0">
-                <a:solidFill>
-                  <a:srgbClr val="1C2430"/>
-                </a:solidFill>
-                <a:latin typeface="Roboto"/>
-              </a:rPr>
-              <a:t>Agreed — that's why the pilot is on your code, your criteria, in four weeks. Scale actually favors Devin: it parallelizes across repos; humans don't.</a:t>
-            </a:r>
-          </a:p>
-        </p:txBody>
-      </p:sp>
-      <p:sp>
-        <p:nvSpPr>
-          <p:cNvPr id="16" name="Rounded Rectangle 15"/>
-          <p:cNvSpPr/>
-          <p:nvPr/>
-        </p:nvSpPr>
-        <p:spPr>
-          <a:xfrm>
-            <a:off x="502920" y="3886200"/>
-            <a:ext cx="11201400" cy="749808"/>
-          </a:xfrm>
-          <a:prstGeom prst="roundRect">
-            <a:avLst>
-              <a:gd name="adj" fmla="val 10000"/>
-            </a:avLst>
-          </a:prstGeom>
-          <a:solidFill>
-            <a:srgbClr val="F4F6F9"/>
-          </a:solidFill>
-          <a:ln>
-            <a:noFill/>
-          </a:ln>
-          <a:effectLst/>
-        </p:spPr>
-        <p:style>
-          <a:lnRef idx="1">
-            <a:schemeClr val="accent1"/>
-          </a:lnRef>
-          <a:fillRef idx="3">
-            <a:schemeClr val="accent1"/>
-          </a:fillRef>
-          <a:effectRef idx="2">
-            <a:schemeClr val="accent1"/>
-          </a:effectRef>
-          <a:fontRef idx="minor">
-            <a:schemeClr val="lt1"/>
-          </a:fontRef>
-        </p:style>
-        <p:txBody>
-          <a:bodyPr rtlCol="0" anchor="ctr"/>
-          <a:lstStyle/>
-          <a:p>
-            <a:pPr algn="ctr"/>
-          </a:p>
-        </p:txBody>
-      </p:sp>
-      <p:sp>
-        <p:nvSpPr>
-          <p:cNvPr id="17" name="TextBox 16"/>
-          <p:cNvSpPr txBox="1"/>
-          <p:nvPr/>
-        </p:nvSpPr>
-        <p:spPr>
-          <a:xfrm>
-            <a:off x="731520" y="3941063"/>
-            <a:ext cx="4160520" cy="658368"/>
-          </a:xfrm>
-          <a:prstGeom prst="rect">
-            <a:avLst/>
-          </a:prstGeom>
-          <a:noFill/>
-        </p:spPr>
-        <p:txBody>
-          <a:bodyPr wrap="square" anchor="t">
-            <a:spAutoFit/>
-          </a:bodyPr>
-          <a:lstStyle/>
-          <a:p>
-            <a:pPr algn="l">
-              <a:lnSpc>
-                <a:spcPct val="95000"/>
-              </a:lnSpc>
-              <a:spcAft>
-                <a:spcPts val="600"/>
-              </a:spcAft>
-            </a:pPr>
-            <a:r>
-              <a:rPr sz="1050" b="1" i="1">
-                <a:solidFill>
-                  <a:srgbClr val="012169"/>
-                </a:solidFill>
-                <a:latin typeface="Roboto"/>
-              </a:rPr>
-              <a:t>“What about hallucinations / wrong code?”</a:t>
-            </a:r>
-          </a:p>
-        </p:txBody>
-      </p:sp>
-      <p:sp>
-        <p:nvSpPr>
-          <p:cNvPr id="18" name="TextBox 17"/>
-          <p:cNvSpPr txBox="1"/>
-          <p:nvPr/>
-        </p:nvSpPr>
-        <p:spPr>
-          <a:xfrm>
-            <a:off x="5029200" y="3941063"/>
-            <a:ext cx="6537960" cy="658368"/>
-          </a:xfrm>
-          <a:prstGeom prst="rect">
-            <a:avLst/>
-          </a:prstGeom>
-          <a:noFill/>
-        </p:spPr>
-        <p:txBody>
-          <a:bodyPr wrap="square" anchor="t">
-            <a:spAutoFit/>
-          </a:bodyPr>
-          <a:lstStyle/>
-          <a:p>
-            <a:pPr algn="l">
-              <a:lnSpc>
-                <a:spcPct val="95000"/>
-              </a:lnSpc>
-              <a:spcAft>
-                <a:spcPts val="600"/>
-              </a:spcAft>
-            </a:pPr>
-            <a:r>
-              <a:rPr sz="1000" b="0" i="0">
-                <a:solidFill>
-                  <a:srgbClr val="1C2430"/>
-                </a:solidFill>
-                <a:latin typeface="Roboto"/>
-              </a:rPr>
-              <a:t>Devin executes what it writes — builds, tests, and iterates until green before opening a PR. Wrong code fails your test suite and never reaches a human's desk, let alone production.</a:t>
-            </a:r>
-          </a:p>
-        </p:txBody>
-      </p:sp>
-      <p:sp>
-        <p:nvSpPr>
-          <p:cNvPr id="19" name="Rounded Rectangle 18"/>
-          <p:cNvSpPr/>
-          <p:nvPr/>
-        </p:nvSpPr>
-        <p:spPr>
-          <a:xfrm>
-            <a:off x="502920" y="4709160"/>
-            <a:ext cx="11201400" cy="749808"/>
-          </a:xfrm>
-          <a:prstGeom prst="roundRect">
-            <a:avLst>
-              <a:gd name="adj" fmla="val 10000"/>
-            </a:avLst>
-          </a:prstGeom>
-          <a:solidFill>
-            <a:srgbClr val="F4F6F9"/>
-          </a:solidFill>
-          <a:ln>
-            <a:noFill/>
-          </a:ln>
-          <a:effectLst/>
-        </p:spPr>
-        <p:style>
-          <a:lnRef idx="1">
-            <a:schemeClr val="accent1"/>
-          </a:lnRef>
-          <a:fillRef idx="3">
-            <a:schemeClr val="accent1"/>
-          </a:fillRef>
-          <a:effectRef idx="2">
-            <a:schemeClr val="accent1"/>
-          </a:effectRef>
-          <a:fontRef idx="minor">
-            <a:schemeClr val="lt1"/>
-          </a:fontRef>
-        </p:style>
-        <p:txBody>
-          <a:bodyPr rtlCol="0" anchor="ctr"/>
-          <a:lstStyle/>
-          <a:p>
-            <a:pPr algn="ctr"/>
-          </a:p>
-        </p:txBody>
-      </p:sp>
-      <p:sp>
-        <p:nvSpPr>
-          <p:cNvPr id="20" name="TextBox 19"/>
-          <p:cNvSpPr txBox="1"/>
-          <p:nvPr/>
-        </p:nvSpPr>
-        <p:spPr>
-          <a:xfrm>
-            <a:off x="731520" y="4764024"/>
-            <a:ext cx="4160520" cy="658368"/>
-          </a:xfrm>
-          <a:prstGeom prst="rect">
-            <a:avLst/>
-          </a:prstGeom>
-          <a:noFill/>
-        </p:spPr>
-        <p:txBody>
-          <a:bodyPr wrap="square" anchor="t">
-            <a:spAutoFit/>
-          </a:bodyPr>
-          <a:lstStyle/>
-          <a:p>
-            <a:pPr algn="l">
-              <a:lnSpc>
-                <a:spcPct val="95000"/>
-              </a:lnSpc>
-              <a:spcAft>
-                <a:spcPts val="600"/>
-              </a:spcAft>
-            </a:pPr>
-            <a:r>
-              <a:rPr sz="1050" b="1" i="1">
-                <a:solidFill>
-                  <a:srgbClr val="012169"/>
-                </a:solidFill>
-                <a:latin typeface="Roboto"/>
-              </a:rPr>
-              <a:t>“Is this going to replace my engineers?”</a:t>
-            </a:r>
-          </a:p>
-        </p:txBody>
-      </p:sp>
-      <p:sp>
-        <p:nvSpPr>
-          <p:cNvPr id="21" name="TextBox 20"/>
-          <p:cNvSpPr txBox="1"/>
-          <p:nvPr/>
-        </p:nvSpPr>
-        <p:spPr>
-          <a:xfrm>
-            <a:off x="5029200" y="4764024"/>
-            <a:ext cx="6537960" cy="658368"/>
-          </a:xfrm>
-          <a:prstGeom prst="rect">
-            <a:avLst/>
-          </a:prstGeom>
-          <a:noFill/>
-        </p:spPr>
-        <p:txBody>
-          <a:bodyPr wrap="square" anchor="t">
-            <a:spAutoFit/>
-          </a:bodyPr>
-          <a:lstStyle/>
-          <a:p>
-            <a:pPr algn="l">
-              <a:lnSpc>
-                <a:spcPct val="95000"/>
-              </a:lnSpc>
-              <a:spcAft>
-                <a:spcPts val="600"/>
-              </a:spcAft>
-            </a:pPr>
-            <a:r>
-              <a:rPr sz="1000" b="0" i="0">
-                <a:solidFill>
-                  <a:srgbClr val="1C2430"/>
-                </a:solidFill>
-                <a:latin typeface="Roboto"/>
-              </a:rPr>
-              <a:t>It replaces the work your engineers resent, not the engineers. The pitch to your team: nobody hand-migrates *ngFor loops anymore; everyone reviews, designs, and ships features.</a:t>
-            </a:r>
-          </a:p>
-        </p:txBody>
-      </p:sp>
-      <p:sp>
-        <p:nvSpPr>
-          <p:cNvPr id="22" name="Rounded Rectangle 21"/>
-          <p:cNvSpPr/>
-          <p:nvPr/>
-        </p:nvSpPr>
-        <p:spPr>
-          <a:xfrm>
-            <a:off x="502920" y="5532120"/>
-            <a:ext cx="11201400" cy="749808"/>
-          </a:xfrm>
-          <a:prstGeom prst="roundRect">
-            <a:avLst>
-              <a:gd name="adj" fmla="val 10000"/>
-            </a:avLst>
-          </a:prstGeom>
-          <a:solidFill>
-            <a:srgbClr val="F4F6F9"/>
-          </a:solidFill>
-          <a:ln>
-            <a:noFill/>
-          </a:ln>
-          <a:effectLst/>
-        </p:spPr>
-        <p:style>
-          <a:lnRef idx="1">
-            <a:schemeClr val="accent1"/>
-          </a:lnRef>
-          <a:fillRef idx="3">
-            <a:schemeClr val="accent1"/>
-          </a:fillRef>
-          <a:effectRef idx="2">
-            <a:schemeClr val="accent1"/>
-          </a:effectRef>
-          <a:fontRef idx="minor">
-            <a:schemeClr val="lt1"/>
-          </a:fontRef>
-        </p:style>
-        <p:txBody>
-          <a:bodyPr rtlCol="0" anchor="ctr"/>
-          <a:lstStyle/>
-          <a:p>
-            <a:pPr algn="ctr"/>
-          </a:p>
-        </p:txBody>
-      </p:sp>
-      <p:sp>
-        <p:nvSpPr>
-          <p:cNvPr id="23" name="TextBox 22"/>
-          <p:cNvSpPr txBox="1"/>
-          <p:nvPr/>
-        </p:nvSpPr>
-        <p:spPr>
-          <a:xfrm>
-            <a:off x="731520" y="5586984"/>
-            <a:ext cx="4160520" cy="658368"/>
-          </a:xfrm>
-          <a:prstGeom prst="rect">
-            <a:avLst/>
-          </a:prstGeom>
-          <a:noFill/>
-        </p:spPr>
-        <p:txBody>
-          <a:bodyPr wrap="square" anchor="t">
-            <a:spAutoFit/>
-          </a:bodyPr>
-          <a:lstStyle/>
-          <a:p>
-            <a:pPr algn="l">
-              <a:lnSpc>
-                <a:spcPct val="95000"/>
-              </a:lnSpc>
-              <a:spcAft>
-                <a:spcPts val="600"/>
-              </a:spcAft>
-            </a:pPr>
-            <a:r>
-              <a:rPr sz="1050" b="1" i="1">
-                <a:solidFill>
-                  <a:srgbClr val="012169"/>
-                </a:solidFill>
-                <a:latin typeface="Roboto"/>
-              </a:rPr>
-              <a:t>“Where does our code go? Data security?”</a:t>
-            </a:r>
-          </a:p>
-        </p:txBody>
-      </p:sp>
-      <p:sp>
-        <p:nvSpPr>
-          <p:cNvPr id="24" name="TextBox 23"/>
-          <p:cNvSpPr txBox="1"/>
-          <p:nvPr/>
-        </p:nvSpPr>
-        <p:spPr>
-          <a:xfrm>
-            <a:off x="5029200" y="5586984"/>
-            <a:ext cx="6537960" cy="658368"/>
-          </a:xfrm>
-          <a:prstGeom prst="rect">
-            <a:avLst/>
-          </a:prstGeom>
-          <a:noFill/>
-        </p:spPr>
-        <p:txBody>
-          <a:bodyPr wrap="square" anchor="t">
-            <a:spAutoFit/>
-          </a:bodyPr>
-          <a:lstStyle/>
-          <a:p>
-            <a:pPr algn="l">
-              <a:lnSpc>
-                <a:spcPct val="95000"/>
-              </a:lnSpc>
-              <a:spcAft>
-                <a:spcPts val="600"/>
-              </a:spcAft>
-            </a:pPr>
-            <a:r>
-              <a:rPr sz="1000" b="0" i="0">
-                <a:solidFill>
-                  <a:srgbClr val="1C2430"/>
-                </a:solidFill>
-                <a:latin typeface="Roboto"/>
-              </a:rPr>
-              <a:t>Answered properly in the week-0 security review — enterprise deployment and data-isolation options exist. Don't accept a hand-wave from me; bring your security team.</a:t>
-            </a:r>
-          </a:p>
-        </p:txBody>
-      </p:sp>
-      <p:sp>
-        <p:nvSpPr>
-          <p:cNvPr id="25" name="TextBox 24"/>
-          <p:cNvSpPr txBox="1"/>
-          <p:nvPr/>
-        </p:nvSpPr>
-        <p:spPr>
-          <a:xfrm>
-            <a:off x="502920" y="6473952"/>
-            <a:ext cx="7315200" cy="292608"/>
-          </a:xfrm>
-          <a:prstGeom prst="rect">
-            <a:avLst/>
-          </a:prstGeom>
-          <a:noFill/>
-        </p:spPr>
-        <p:txBody>
-          <a:bodyPr wrap="square" anchor="t">
-            <a:spAutoFit/>
-          </a:bodyPr>
-          <a:lstStyle/>
-          <a:p>
-            <a:pPr algn="l">
-              <a:lnSpc>
-                <a:spcPct val="100000"/>
-              </a:lnSpc>
-              <a:spcAft>
-                <a:spcPts val="600"/>
-              </a:spcAft>
-            </a:pPr>
-            <a:r>
-              <a:rPr sz="900" b="0" i="0">
-                <a:solidFill>
-                  <a:srgbClr val="5A6472"/>
-                </a:solidFill>
-                <a:latin typeface="Roboto"/>
-              </a:rPr>
-              <a:t>Bank of America  ×  Cognition</a:t>
+              <a:rPr sz="1600" b="0" i="0">
+                <a:solidFill>
+                  <a:srgbClr val="C9D4EC"/>
+                </a:solidFill>
+                <a:latin typeface="Roboto"/>
+              </a:rPr>
+              <a:t>B. Pre-meeting research checklist</a:t>
             </a:r>
           </a:p>
         </p:txBody>
@@ -7913,6 +7956,1060 @@
                 </a:solidFill>
                 <a:latin typeface="Roboto"/>
               </a:rPr>
+              <a:t>APPENDIX A</a:t>
+            </a:r>
+          </a:p>
+        </p:txBody>
+      </p:sp>
+      <p:sp>
+        <p:nvSpPr>
+          <p:cNvPr id="5" name="TextBox 4"/>
+          <p:cNvSpPr txBox="1"/>
+          <p:nvPr/>
+        </p:nvSpPr>
+        <p:spPr>
+          <a:xfrm>
+            <a:off x="502920" y="384048"/>
+            <a:ext cx="10424160" cy="731520"/>
+          </a:xfrm>
+          <a:prstGeom prst="rect">
+            <a:avLst/>
+          </a:prstGeom>
+          <a:noFill/>
+        </p:spPr>
+        <p:txBody>
+          <a:bodyPr wrap="square" anchor="ctr">
+            <a:spAutoFit/>
+          </a:bodyPr>
+          <a:lstStyle/>
+          <a:p>
+            <a:pPr algn="l">
+              <a:lnSpc>
+                <a:spcPct val="100000"/>
+              </a:lnSpc>
+              <a:spcAft>
+                <a:spcPts val="600"/>
+              </a:spcAft>
+            </a:pPr>
+            <a:r>
+              <a:rPr sz="2200" b="1" i="0">
+                <a:solidFill>
+                  <a:srgbClr val="FFFFFF"/>
+                </a:solidFill>
+                <a:latin typeface="Roboto"/>
+              </a:rPr>
+              <a:t>If the room pushes back: objections &amp; responses</a:t>
+            </a:r>
+          </a:p>
+        </p:txBody>
+      </p:sp>
+      <p:sp>
+        <p:nvSpPr>
+          <p:cNvPr id="6" name="TextBox 5"/>
+          <p:cNvSpPr txBox="1"/>
+          <p:nvPr/>
+        </p:nvSpPr>
+        <p:spPr>
+          <a:xfrm>
+            <a:off x="11247120" y="384048"/>
+            <a:ext cx="640080" cy="731520"/>
+          </a:xfrm>
+          <a:prstGeom prst="rect">
+            <a:avLst/>
+          </a:prstGeom>
+          <a:noFill/>
+        </p:spPr>
+        <p:txBody>
+          <a:bodyPr wrap="square" anchor="t">
+            <a:spAutoFit/>
+          </a:bodyPr>
+          <a:lstStyle/>
+          <a:p>
+            <a:pPr algn="r">
+              <a:lnSpc>
+                <a:spcPct val="100000"/>
+              </a:lnSpc>
+              <a:spcAft>
+                <a:spcPts val="600"/>
+              </a:spcAft>
+            </a:pPr>
+            <a:r>
+              <a:rPr sz="1400" b="0" i="0">
+                <a:solidFill>
+                  <a:srgbClr val="9FB4E0"/>
+                </a:solidFill>
+                <a:latin typeface="Roboto"/>
+              </a:rPr>
+              <a:t>A</a:t>
+            </a:r>
+          </a:p>
+        </p:txBody>
+      </p:sp>
+      <p:sp>
+        <p:nvSpPr>
+          <p:cNvPr id="7" name="Rounded Rectangle 6"/>
+          <p:cNvSpPr/>
+          <p:nvPr/>
+        </p:nvSpPr>
+        <p:spPr>
+          <a:xfrm>
+            <a:off x="502920" y="1417320"/>
+            <a:ext cx="11201400" cy="749808"/>
+          </a:xfrm>
+          <a:prstGeom prst="roundRect">
+            <a:avLst>
+              <a:gd name="adj" fmla="val 10000"/>
+            </a:avLst>
+          </a:prstGeom>
+          <a:solidFill>
+            <a:srgbClr val="F4F6F9"/>
+          </a:solidFill>
+          <a:ln>
+            <a:noFill/>
+          </a:ln>
+          <a:effectLst/>
+        </p:spPr>
+        <p:style>
+          <a:lnRef idx="1">
+            <a:schemeClr val="accent1"/>
+          </a:lnRef>
+          <a:fillRef idx="3">
+            <a:schemeClr val="accent1"/>
+          </a:fillRef>
+          <a:effectRef idx="2">
+            <a:schemeClr val="accent1"/>
+          </a:effectRef>
+          <a:fontRef idx="minor">
+            <a:schemeClr val="lt1"/>
+          </a:fontRef>
+        </p:style>
+        <p:txBody>
+          <a:bodyPr rtlCol="0" anchor="ctr"/>
+          <a:lstStyle/>
+          <a:p>
+            <a:pPr algn="ctr"/>
+          </a:p>
+        </p:txBody>
+      </p:sp>
+      <p:sp>
+        <p:nvSpPr>
+          <p:cNvPr id="8" name="TextBox 7"/>
+          <p:cNvSpPr txBox="1"/>
+          <p:nvPr/>
+        </p:nvSpPr>
+        <p:spPr>
+          <a:xfrm>
+            <a:off x="731520" y="1472184"/>
+            <a:ext cx="4160520" cy="658368"/>
+          </a:xfrm>
+          <a:prstGeom prst="rect">
+            <a:avLst/>
+          </a:prstGeom>
+          <a:noFill/>
+        </p:spPr>
+        <p:txBody>
+          <a:bodyPr wrap="square" anchor="t">
+            <a:spAutoFit/>
+          </a:bodyPr>
+          <a:lstStyle/>
+          <a:p>
+            <a:pPr algn="l">
+              <a:lnSpc>
+                <a:spcPct val="95000"/>
+              </a:lnSpc>
+              <a:spcAft>
+                <a:spcPts val="600"/>
+              </a:spcAft>
+            </a:pPr>
+            <a:r>
+              <a:rPr sz="1050" b="1" i="1">
+                <a:solidFill>
+                  <a:srgbClr val="012169"/>
+                </a:solidFill>
+                <a:latin typeface="Roboto"/>
+              </a:rPr>
+              <a:t>“AI writing code for a bank? Our regulators will never allow it.”</a:t>
+            </a:r>
+          </a:p>
+        </p:txBody>
+      </p:sp>
+      <p:sp>
+        <p:nvSpPr>
+          <p:cNvPr id="9" name="TextBox 8"/>
+          <p:cNvSpPr txBox="1"/>
+          <p:nvPr/>
+        </p:nvSpPr>
+        <p:spPr>
+          <a:xfrm>
+            <a:off x="5029200" y="1472184"/>
+            <a:ext cx="6537960" cy="658368"/>
+          </a:xfrm>
+          <a:prstGeom prst="rect">
+            <a:avLst/>
+          </a:prstGeom>
+          <a:noFill/>
+        </p:spPr>
+        <p:txBody>
+          <a:bodyPr wrap="square" anchor="t">
+            <a:spAutoFit/>
+          </a:bodyPr>
+          <a:lstStyle/>
+          <a:p>
+            <a:pPr algn="l">
+              <a:lnSpc>
+                <a:spcPct val="95000"/>
+              </a:lnSpc>
+              <a:spcAft>
+                <a:spcPts val="600"/>
+              </a:spcAft>
+            </a:pPr>
+            <a:r>
+              <a:rPr sz="1000" b="0" i="0">
+                <a:solidFill>
+                  <a:srgbClr val="1C2430"/>
+                </a:solidFill>
+                <a:latin typeface="Roboto"/>
+              </a:rPr>
+              <a:t>Devin changes who types, not who approves. Every change goes through your existing review, CI, and release gates — the same controls you'd apply to a contractor. And it leaves a better audit trail than a human.</a:t>
+            </a:r>
+          </a:p>
+        </p:txBody>
+      </p:sp>
+      <p:sp>
+        <p:nvSpPr>
+          <p:cNvPr id="10" name="Rounded Rectangle 9"/>
+          <p:cNvSpPr/>
+          <p:nvPr/>
+        </p:nvSpPr>
+        <p:spPr>
+          <a:xfrm>
+            <a:off x="502920" y="2240280"/>
+            <a:ext cx="11201400" cy="749808"/>
+          </a:xfrm>
+          <a:prstGeom prst="roundRect">
+            <a:avLst>
+              <a:gd name="adj" fmla="val 10000"/>
+            </a:avLst>
+          </a:prstGeom>
+          <a:solidFill>
+            <a:srgbClr val="F4F6F9"/>
+          </a:solidFill>
+          <a:ln>
+            <a:noFill/>
+          </a:ln>
+          <a:effectLst/>
+        </p:spPr>
+        <p:style>
+          <a:lnRef idx="1">
+            <a:schemeClr val="accent1"/>
+          </a:lnRef>
+          <a:fillRef idx="3">
+            <a:schemeClr val="accent1"/>
+          </a:fillRef>
+          <a:effectRef idx="2">
+            <a:schemeClr val="accent1"/>
+          </a:effectRef>
+          <a:fontRef idx="minor">
+            <a:schemeClr val="lt1"/>
+          </a:fontRef>
+        </p:style>
+        <p:txBody>
+          <a:bodyPr rtlCol="0" anchor="ctr"/>
+          <a:lstStyle/>
+          <a:p>
+            <a:pPr algn="ctr"/>
+          </a:p>
+        </p:txBody>
+      </p:sp>
+      <p:sp>
+        <p:nvSpPr>
+          <p:cNvPr id="11" name="TextBox 10"/>
+          <p:cNvSpPr txBox="1"/>
+          <p:nvPr/>
+        </p:nvSpPr>
+        <p:spPr>
+          <a:xfrm>
+            <a:off x="731520" y="2295144"/>
+            <a:ext cx="4160520" cy="658368"/>
+          </a:xfrm>
+          <a:prstGeom prst="rect">
+            <a:avLst/>
+          </a:prstGeom>
+          <a:noFill/>
+        </p:spPr>
+        <p:txBody>
+          <a:bodyPr wrap="square" anchor="t">
+            <a:spAutoFit/>
+          </a:bodyPr>
+          <a:lstStyle/>
+          <a:p>
+            <a:pPr algn="l">
+              <a:lnSpc>
+                <a:spcPct val="95000"/>
+              </a:lnSpc>
+              <a:spcAft>
+                <a:spcPts val="600"/>
+              </a:spcAft>
+            </a:pPr>
+            <a:r>
+              <a:rPr sz="1050" b="1" i="1">
+                <a:solidFill>
+                  <a:srgbClr val="012169"/>
+                </a:solidFill>
+                <a:latin typeface="Roboto"/>
+              </a:rPr>
+              <a:t>“We already have Copilot / internal AI tools.”</a:t>
+            </a:r>
+          </a:p>
+        </p:txBody>
+      </p:sp>
+      <p:sp>
+        <p:nvSpPr>
+          <p:cNvPr id="12" name="TextBox 11"/>
+          <p:cNvSpPr txBox="1"/>
+          <p:nvPr/>
+        </p:nvSpPr>
+        <p:spPr>
+          <a:xfrm>
+            <a:off x="5029200" y="2295144"/>
+            <a:ext cx="6537960" cy="658368"/>
+          </a:xfrm>
+          <a:prstGeom prst="rect">
+            <a:avLst/>
+          </a:prstGeom>
+          <a:noFill/>
+        </p:spPr>
+        <p:txBody>
+          <a:bodyPr wrap="square" anchor="t">
+            <a:spAutoFit/>
+          </a:bodyPr>
+          <a:lstStyle/>
+          <a:p>
+            <a:pPr algn="l">
+              <a:lnSpc>
+                <a:spcPct val="95000"/>
+              </a:lnSpc>
+              <a:spcAft>
+                <a:spcPts val="600"/>
+              </a:spcAft>
+            </a:pPr>
+            <a:r>
+              <a:rPr sz="1000" b="0" i="0">
+                <a:solidFill>
+                  <a:srgbClr val="1C2430"/>
+                </a:solidFill>
+                <a:latin typeface="Roboto"/>
+              </a:rPr>
+              <a:t>Complementary, not competing. Copilot accelerates an engineer who's already assigned. Devin absorbs whole task categories nobody wants assigned — migrations, upgrades, test debt.</a:t>
+            </a:r>
+          </a:p>
+        </p:txBody>
+      </p:sp>
+      <p:sp>
+        <p:nvSpPr>
+          <p:cNvPr id="13" name="Rounded Rectangle 12"/>
+          <p:cNvSpPr/>
+          <p:nvPr/>
+        </p:nvSpPr>
+        <p:spPr>
+          <a:xfrm>
+            <a:off x="502920" y="3063240"/>
+            <a:ext cx="11201400" cy="749808"/>
+          </a:xfrm>
+          <a:prstGeom prst="roundRect">
+            <a:avLst>
+              <a:gd name="adj" fmla="val 10000"/>
+            </a:avLst>
+          </a:prstGeom>
+          <a:solidFill>
+            <a:srgbClr val="F4F6F9"/>
+          </a:solidFill>
+          <a:ln>
+            <a:noFill/>
+          </a:ln>
+          <a:effectLst/>
+        </p:spPr>
+        <p:style>
+          <a:lnRef idx="1">
+            <a:schemeClr val="accent1"/>
+          </a:lnRef>
+          <a:fillRef idx="3">
+            <a:schemeClr val="accent1"/>
+          </a:fillRef>
+          <a:effectRef idx="2">
+            <a:schemeClr val="accent1"/>
+          </a:effectRef>
+          <a:fontRef idx="minor">
+            <a:schemeClr val="lt1"/>
+          </a:fontRef>
+        </p:style>
+        <p:txBody>
+          <a:bodyPr rtlCol="0" anchor="ctr"/>
+          <a:lstStyle/>
+          <a:p>
+            <a:pPr algn="ctr"/>
+          </a:p>
+        </p:txBody>
+      </p:sp>
+      <p:sp>
+        <p:nvSpPr>
+          <p:cNvPr id="14" name="TextBox 13"/>
+          <p:cNvSpPr txBox="1"/>
+          <p:nvPr/>
+        </p:nvSpPr>
+        <p:spPr>
+          <a:xfrm>
+            <a:off x="731520" y="3118104"/>
+            <a:ext cx="4160520" cy="658368"/>
+          </a:xfrm>
+          <a:prstGeom prst="rect">
+            <a:avLst/>
+          </a:prstGeom>
+          <a:noFill/>
+        </p:spPr>
+        <p:txBody>
+          <a:bodyPr wrap="square" anchor="t">
+            <a:spAutoFit/>
+          </a:bodyPr>
+          <a:lstStyle/>
+          <a:p>
+            <a:pPr algn="l">
+              <a:lnSpc>
+                <a:spcPct val="95000"/>
+              </a:lnSpc>
+              <a:spcAft>
+                <a:spcPts val="600"/>
+              </a:spcAft>
+            </a:pPr>
+            <a:r>
+              <a:rPr sz="1050" b="1" i="1">
+                <a:solidFill>
+                  <a:srgbClr val="012169"/>
+                </a:solidFill>
+                <a:latin typeface="Roboto"/>
+              </a:rPr>
+              <a:t>“Our codebase is far bigger and messier than any demo.”</a:t>
+            </a:r>
+          </a:p>
+        </p:txBody>
+      </p:sp>
+      <p:sp>
+        <p:nvSpPr>
+          <p:cNvPr id="15" name="TextBox 14"/>
+          <p:cNvSpPr txBox="1"/>
+          <p:nvPr/>
+        </p:nvSpPr>
+        <p:spPr>
+          <a:xfrm>
+            <a:off x="5029200" y="3118104"/>
+            <a:ext cx="6537960" cy="658368"/>
+          </a:xfrm>
+          <a:prstGeom prst="rect">
+            <a:avLst/>
+          </a:prstGeom>
+          <a:noFill/>
+        </p:spPr>
+        <p:txBody>
+          <a:bodyPr wrap="square" anchor="t">
+            <a:spAutoFit/>
+          </a:bodyPr>
+          <a:lstStyle/>
+          <a:p>
+            <a:pPr algn="l">
+              <a:lnSpc>
+                <a:spcPct val="95000"/>
+              </a:lnSpc>
+              <a:spcAft>
+                <a:spcPts val="600"/>
+              </a:spcAft>
+            </a:pPr>
+            <a:r>
+              <a:rPr sz="1000" b="0" i="0">
+                <a:solidFill>
+                  <a:srgbClr val="1C2430"/>
+                </a:solidFill>
+                <a:latin typeface="Roboto"/>
+              </a:rPr>
+              <a:t>Agreed — that's why the pilot is on your code, your criteria, in four weeks. Scale actually favors Devin: it parallelizes across repos; humans don't.</a:t>
+            </a:r>
+          </a:p>
+        </p:txBody>
+      </p:sp>
+      <p:sp>
+        <p:nvSpPr>
+          <p:cNvPr id="16" name="Rounded Rectangle 15"/>
+          <p:cNvSpPr/>
+          <p:nvPr/>
+        </p:nvSpPr>
+        <p:spPr>
+          <a:xfrm>
+            <a:off x="502920" y="3886200"/>
+            <a:ext cx="11201400" cy="749808"/>
+          </a:xfrm>
+          <a:prstGeom prst="roundRect">
+            <a:avLst>
+              <a:gd name="adj" fmla="val 10000"/>
+            </a:avLst>
+          </a:prstGeom>
+          <a:solidFill>
+            <a:srgbClr val="F4F6F9"/>
+          </a:solidFill>
+          <a:ln>
+            <a:noFill/>
+          </a:ln>
+          <a:effectLst/>
+        </p:spPr>
+        <p:style>
+          <a:lnRef idx="1">
+            <a:schemeClr val="accent1"/>
+          </a:lnRef>
+          <a:fillRef idx="3">
+            <a:schemeClr val="accent1"/>
+          </a:fillRef>
+          <a:effectRef idx="2">
+            <a:schemeClr val="accent1"/>
+          </a:effectRef>
+          <a:fontRef idx="minor">
+            <a:schemeClr val="lt1"/>
+          </a:fontRef>
+        </p:style>
+        <p:txBody>
+          <a:bodyPr rtlCol="0" anchor="ctr"/>
+          <a:lstStyle/>
+          <a:p>
+            <a:pPr algn="ctr"/>
+          </a:p>
+        </p:txBody>
+      </p:sp>
+      <p:sp>
+        <p:nvSpPr>
+          <p:cNvPr id="17" name="TextBox 16"/>
+          <p:cNvSpPr txBox="1"/>
+          <p:nvPr/>
+        </p:nvSpPr>
+        <p:spPr>
+          <a:xfrm>
+            <a:off x="731520" y="3941063"/>
+            <a:ext cx="4160520" cy="658368"/>
+          </a:xfrm>
+          <a:prstGeom prst="rect">
+            <a:avLst/>
+          </a:prstGeom>
+          <a:noFill/>
+        </p:spPr>
+        <p:txBody>
+          <a:bodyPr wrap="square" anchor="t">
+            <a:spAutoFit/>
+          </a:bodyPr>
+          <a:lstStyle/>
+          <a:p>
+            <a:pPr algn="l">
+              <a:lnSpc>
+                <a:spcPct val="95000"/>
+              </a:lnSpc>
+              <a:spcAft>
+                <a:spcPts val="600"/>
+              </a:spcAft>
+            </a:pPr>
+            <a:r>
+              <a:rPr sz="1050" b="1" i="1">
+                <a:solidFill>
+                  <a:srgbClr val="012169"/>
+                </a:solidFill>
+                <a:latin typeface="Roboto"/>
+              </a:rPr>
+              <a:t>“What about hallucinations / wrong code?”</a:t>
+            </a:r>
+          </a:p>
+        </p:txBody>
+      </p:sp>
+      <p:sp>
+        <p:nvSpPr>
+          <p:cNvPr id="18" name="TextBox 17"/>
+          <p:cNvSpPr txBox="1"/>
+          <p:nvPr/>
+        </p:nvSpPr>
+        <p:spPr>
+          <a:xfrm>
+            <a:off x="5029200" y="3941063"/>
+            <a:ext cx="6537960" cy="658368"/>
+          </a:xfrm>
+          <a:prstGeom prst="rect">
+            <a:avLst/>
+          </a:prstGeom>
+          <a:noFill/>
+        </p:spPr>
+        <p:txBody>
+          <a:bodyPr wrap="square" anchor="t">
+            <a:spAutoFit/>
+          </a:bodyPr>
+          <a:lstStyle/>
+          <a:p>
+            <a:pPr algn="l">
+              <a:lnSpc>
+                <a:spcPct val="95000"/>
+              </a:lnSpc>
+              <a:spcAft>
+                <a:spcPts val="600"/>
+              </a:spcAft>
+            </a:pPr>
+            <a:r>
+              <a:rPr sz="1000" b="0" i="0">
+                <a:solidFill>
+                  <a:srgbClr val="1C2430"/>
+                </a:solidFill>
+                <a:latin typeface="Roboto"/>
+              </a:rPr>
+              <a:t>Devin executes what it writes — builds, tests, and iterates until green before opening a PR. Wrong code fails your test suite and never reaches a human's desk, let alone production.</a:t>
+            </a:r>
+          </a:p>
+        </p:txBody>
+      </p:sp>
+      <p:sp>
+        <p:nvSpPr>
+          <p:cNvPr id="19" name="Rounded Rectangle 18"/>
+          <p:cNvSpPr/>
+          <p:nvPr/>
+        </p:nvSpPr>
+        <p:spPr>
+          <a:xfrm>
+            <a:off x="502920" y="4709160"/>
+            <a:ext cx="11201400" cy="749808"/>
+          </a:xfrm>
+          <a:prstGeom prst="roundRect">
+            <a:avLst>
+              <a:gd name="adj" fmla="val 10000"/>
+            </a:avLst>
+          </a:prstGeom>
+          <a:solidFill>
+            <a:srgbClr val="F4F6F9"/>
+          </a:solidFill>
+          <a:ln>
+            <a:noFill/>
+          </a:ln>
+          <a:effectLst/>
+        </p:spPr>
+        <p:style>
+          <a:lnRef idx="1">
+            <a:schemeClr val="accent1"/>
+          </a:lnRef>
+          <a:fillRef idx="3">
+            <a:schemeClr val="accent1"/>
+          </a:fillRef>
+          <a:effectRef idx="2">
+            <a:schemeClr val="accent1"/>
+          </a:effectRef>
+          <a:fontRef idx="minor">
+            <a:schemeClr val="lt1"/>
+          </a:fontRef>
+        </p:style>
+        <p:txBody>
+          <a:bodyPr rtlCol="0" anchor="ctr"/>
+          <a:lstStyle/>
+          <a:p>
+            <a:pPr algn="ctr"/>
+          </a:p>
+        </p:txBody>
+      </p:sp>
+      <p:sp>
+        <p:nvSpPr>
+          <p:cNvPr id="20" name="TextBox 19"/>
+          <p:cNvSpPr txBox="1"/>
+          <p:nvPr/>
+        </p:nvSpPr>
+        <p:spPr>
+          <a:xfrm>
+            <a:off x="731520" y="4764024"/>
+            <a:ext cx="4160520" cy="658368"/>
+          </a:xfrm>
+          <a:prstGeom prst="rect">
+            <a:avLst/>
+          </a:prstGeom>
+          <a:noFill/>
+        </p:spPr>
+        <p:txBody>
+          <a:bodyPr wrap="square" anchor="t">
+            <a:spAutoFit/>
+          </a:bodyPr>
+          <a:lstStyle/>
+          <a:p>
+            <a:pPr algn="l">
+              <a:lnSpc>
+                <a:spcPct val="95000"/>
+              </a:lnSpc>
+              <a:spcAft>
+                <a:spcPts val="600"/>
+              </a:spcAft>
+            </a:pPr>
+            <a:r>
+              <a:rPr sz="1050" b="1" i="1">
+                <a:solidFill>
+                  <a:srgbClr val="012169"/>
+                </a:solidFill>
+                <a:latin typeface="Roboto"/>
+              </a:rPr>
+              <a:t>“Is this going to replace my engineers?”</a:t>
+            </a:r>
+          </a:p>
+        </p:txBody>
+      </p:sp>
+      <p:sp>
+        <p:nvSpPr>
+          <p:cNvPr id="21" name="TextBox 20"/>
+          <p:cNvSpPr txBox="1"/>
+          <p:nvPr/>
+        </p:nvSpPr>
+        <p:spPr>
+          <a:xfrm>
+            <a:off x="5029200" y="4764024"/>
+            <a:ext cx="6537960" cy="658368"/>
+          </a:xfrm>
+          <a:prstGeom prst="rect">
+            <a:avLst/>
+          </a:prstGeom>
+          <a:noFill/>
+        </p:spPr>
+        <p:txBody>
+          <a:bodyPr wrap="square" anchor="t">
+            <a:spAutoFit/>
+          </a:bodyPr>
+          <a:lstStyle/>
+          <a:p>
+            <a:pPr algn="l">
+              <a:lnSpc>
+                <a:spcPct val="95000"/>
+              </a:lnSpc>
+              <a:spcAft>
+                <a:spcPts val="600"/>
+              </a:spcAft>
+            </a:pPr>
+            <a:r>
+              <a:rPr sz="1000" b="0" i="0">
+                <a:solidFill>
+                  <a:srgbClr val="1C2430"/>
+                </a:solidFill>
+                <a:latin typeface="Roboto"/>
+              </a:rPr>
+              <a:t>It replaces the work your engineers resent, not the engineers. The pitch to your team: nobody hand-migrates *ngFor loops anymore; everyone reviews, designs, and ships features.</a:t>
+            </a:r>
+          </a:p>
+        </p:txBody>
+      </p:sp>
+      <p:sp>
+        <p:nvSpPr>
+          <p:cNvPr id="22" name="Rounded Rectangle 21"/>
+          <p:cNvSpPr/>
+          <p:nvPr/>
+        </p:nvSpPr>
+        <p:spPr>
+          <a:xfrm>
+            <a:off x="502920" y="5532120"/>
+            <a:ext cx="11201400" cy="749808"/>
+          </a:xfrm>
+          <a:prstGeom prst="roundRect">
+            <a:avLst>
+              <a:gd name="adj" fmla="val 10000"/>
+            </a:avLst>
+          </a:prstGeom>
+          <a:solidFill>
+            <a:srgbClr val="F4F6F9"/>
+          </a:solidFill>
+          <a:ln>
+            <a:noFill/>
+          </a:ln>
+          <a:effectLst/>
+        </p:spPr>
+        <p:style>
+          <a:lnRef idx="1">
+            <a:schemeClr val="accent1"/>
+          </a:lnRef>
+          <a:fillRef idx="3">
+            <a:schemeClr val="accent1"/>
+          </a:fillRef>
+          <a:effectRef idx="2">
+            <a:schemeClr val="accent1"/>
+          </a:effectRef>
+          <a:fontRef idx="minor">
+            <a:schemeClr val="lt1"/>
+          </a:fontRef>
+        </p:style>
+        <p:txBody>
+          <a:bodyPr rtlCol="0" anchor="ctr"/>
+          <a:lstStyle/>
+          <a:p>
+            <a:pPr algn="ctr"/>
+          </a:p>
+        </p:txBody>
+      </p:sp>
+      <p:sp>
+        <p:nvSpPr>
+          <p:cNvPr id="23" name="TextBox 22"/>
+          <p:cNvSpPr txBox="1"/>
+          <p:nvPr/>
+        </p:nvSpPr>
+        <p:spPr>
+          <a:xfrm>
+            <a:off x="731520" y="5586984"/>
+            <a:ext cx="4160520" cy="658368"/>
+          </a:xfrm>
+          <a:prstGeom prst="rect">
+            <a:avLst/>
+          </a:prstGeom>
+          <a:noFill/>
+        </p:spPr>
+        <p:txBody>
+          <a:bodyPr wrap="square" anchor="t">
+            <a:spAutoFit/>
+          </a:bodyPr>
+          <a:lstStyle/>
+          <a:p>
+            <a:pPr algn="l">
+              <a:lnSpc>
+                <a:spcPct val="95000"/>
+              </a:lnSpc>
+              <a:spcAft>
+                <a:spcPts val="600"/>
+              </a:spcAft>
+            </a:pPr>
+            <a:r>
+              <a:rPr sz="1050" b="1" i="1">
+                <a:solidFill>
+                  <a:srgbClr val="012169"/>
+                </a:solidFill>
+                <a:latin typeface="Roboto"/>
+              </a:rPr>
+              <a:t>“Where does our code go? Data security?”</a:t>
+            </a:r>
+          </a:p>
+        </p:txBody>
+      </p:sp>
+      <p:sp>
+        <p:nvSpPr>
+          <p:cNvPr id="24" name="TextBox 23"/>
+          <p:cNvSpPr txBox="1"/>
+          <p:nvPr/>
+        </p:nvSpPr>
+        <p:spPr>
+          <a:xfrm>
+            <a:off x="5029200" y="5586984"/>
+            <a:ext cx="6537960" cy="658368"/>
+          </a:xfrm>
+          <a:prstGeom prst="rect">
+            <a:avLst/>
+          </a:prstGeom>
+          <a:noFill/>
+        </p:spPr>
+        <p:txBody>
+          <a:bodyPr wrap="square" anchor="t">
+            <a:spAutoFit/>
+          </a:bodyPr>
+          <a:lstStyle/>
+          <a:p>
+            <a:pPr algn="l">
+              <a:lnSpc>
+                <a:spcPct val="95000"/>
+              </a:lnSpc>
+              <a:spcAft>
+                <a:spcPts val="600"/>
+              </a:spcAft>
+            </a:pPr>
+            <a:r>
+              <a:rPr sz="1000" b="0" i="0">
+                <a:solidFill>
+                  <a:srgbClr val="1C2430"/>
+                </a:solidFill>
+                <a:latin typeface="Roboto"/>
+              </a:rPr>
+              <a:t>Answered properly in the week-0 security review — enterprise deployment and data-isolation options exist. Don't accept a hand-wave from me; bring your security team.</a:t>
+            </a:r>
+          </a:p>
+        </p:txBody>
+      </p:sp>
+      <p:sp>
+        <p:nvSpPr>
+          <p:cNvPr id="25" name="TextBox 24"/>
+          <p:cNvSpPr txBox="1"/>
+          <p:nvPr/>
+        </p:nvSpPr>
+        <p:spPr>
+          <a:xfrm>
+            <a:off x="502920" y="6473952"/>
+            <a:ext cx="7315200" cy="292608"/>
+          </a:xfrm>
+          <a:prstGeom prst="rect">
+            <a:avLst/>
+          </a:prstGeom>
+          <a:noFill/>
+        </p:spPr>
+        <p:txBody>
+          <a:bodyPr wrap="square" anchor="t">
+            <a:spAutoFit/>
+          </a:bodyPr>
+          <a:lstStyle/>
+          <a:p>
+            <a:pPr algn="l">
+              <a:lnSpc>
+                <a:spcPct val="100000"/>
+              </a:lnSpc>
+              <a:spcAft>
+                <a:spcPts val="600"/>
+              </a:spcAft>
+            </a:pPr>
+            <a:r>
+              <a:rPr sz="900" b="0" i="0">
+                <a:solidFill>
+                  <a:srgbClr val="5A6472"/>
+                </a:solidFill>
+                <a:latin typeface="Roboto"/>
+              </a:rPr>
+              <a:t>Bank of America  ×  Cognition</a:t>
+            </a:r>
+          </a:p>
+        </p:txBody>
+      </p:sp>
+    </p:spTree>
+  </p:cSld>
+  <p:clrMapOvr>
+    <a:masterClrMapping/>
+  </p:clrMapOvr>
+</p:sld>
+</file>
+
+<file path=ppt/slides/slide14.xml><?xml version="1.0" encoding="utf-8"?>
+<p:sld xmlns:a="http://schemas.openxmlformats.org/drawingml/2006/main" xmlns:p="http://schemas.openxmlformats.org/presentationml/2006/main" xmlns:r="http://schemas.openxmlformats.org/officeDocument/2006/relationships">
+  <p:cSld>
+    <p:spTree>
+      <p:nvGrpSpPr>
+        <p:cNvPr id="1" name=""/>
+        <p:cNvGrpSpPr/>
+        <p:nvPr/>
+      </p:nvGrpSpPr>
+      <p:grpSpPr/>
+      <p:sp>
+        <p:nvSpPr>
+          <p:cNvPr id="2" name="Rectangle 1"/>
+          <p:cNvSpPr/>
+          <p:nvPr/>
+        </p:nvSpPr>
+        <p:spPr>
+          <a:xfrm>
+            <a:off x="0" y="0"/>
+            <a:ext cx="12191695" cy="1170432"/>
+          </a:xfrm>
+          <a:prstGeom prst="rect">
+            <a:avLst/>
+          </a:prstGeom>
+          <a:solidFill>
+            <a:srgbClr val="012169"/>
+          </a:solidFill>
+          <a:ln>
+            <a:noFill/>
+          </a:ln>
+          <a:effectLst/>
+        </p:spPr>
+        <p:style>
+          <a:lnRef idx="1">
+            <a:schemeClr val="accent1"/>
+          </a:lnRef>
+          <a:fillRef idx="3">
+            <a:schemeClr val="accent1"/>
+          </a:fillRef>
+          <a:effectRef idx="2">
+            <a:schemeClr val="accent1"/>
+          </a:effectRef>
+          <a:fontRef idx="minor">
+            <a:schemeClr val="lt1"/>
+          </a:fontRef>
+        </p:style>
+        <p:txBody>
+          <a:bodyPr rtlCol="0" anchor="ctr"/>
+          <a:lstStyle/>
+          <a:p>
+            <a:pPr algn="ctr"/>
+          </a:p>
+        </p:txBody>
+      </p:sp>
+      <p:sp>
+        <p:nvSpPr>
+          <p:cNvPr id="3" name="Rectangle 2"/>
+          <p:cNvSpPr/>
+          <p:nvPr/>
+        </p:nvSpPr>
+        <p:spPr>
+          <a:xfrm>
+            <a:off x="0" y="1170432"/>
+            <a:ext cx="12191695" cy="50292"/>
+          </a:xfrm>
+          <a:prstGeom prst="rect">
+            <a:avLst/>
+          </a:prstGeom>
+          <a:solidFill>
+            <a:srgbClr val="E31837"/>
+          </a:solidFill>
+          <a:ln>
+            <a:noFill/>
+          </a:ln>
+          <a:effectLst/>
+        </p:spPr>
+        <p:style>
+          <a:lnRef idx="1">
+            <a:schemeClr val="accent1"/>
+          </a:lnRef>
+          <a:fillRef idx="3">
+            <a:schemeClr val="accent1"/>
+          </a:fillRef>
+          <a:effectRef idx="2">
+            <a:schemeClr val="accent1"/>
+          </a:effectRef>
+          <a:fontRef idx="minor">
+            <a:schemeClr val="lt1"/>
+          </a:fontRef>
+        </p:style>
+        <p:txBody>
+          <a:bodyPr rtlCol="0" anchor="ctr"/>
+          <a:lstStyle/>
+          <a:p>
+            <a:pPr algn="ctr"/>
+          </a:p>
+        </p:txBody>
+      </p:sp>
+      <p:sp>
+        <p:nvSpPr>
+          <p:cNvPr id="4" name="TextBox 3"/>
+          <p:cNvSpPr txBox="1"/>
+          <p:nvPr/>
+        </p:nvSpPr>
+        <p:spPr>
+          <a:xfrm>
+            <a:off x="502920" y="146304"/>
+            <a:ext cx="9601200" cy="320040"/>
+          </a:xfrm>
+          <a:prstGeom prst="rect">
+            <a:avLst/>
+          </a:prstGeom>
+          <a:noFill/>
+        </p:spPr>
+        <p:txBody>
+          <a:bodyPr wrap="square" anchor="t">
+            <a:spAutoFit/>
+          </a:bodyPr>
+          <a:lstStyle/>
+          <a:p>
+            <a:pPr algn="l">
+              <a:lnSpc>
+                <a:spcPct val="100000"/>
+              </a:lnSpc>
+              <a:spcAft>
+                <a:spcPts val="600"/>
+              </a:spcAft>
+            </a:pPr>
+            <a:r>
+              <a:rPr sz="1100" b="1" i="0">
+                <a:solidFill>
+                  <a:srgbClr val="9FB4E0"/>
+                </a:solidFill>
+                <a:latin typeface="Roboto"/>
+              </a:rPr>
               <a:t>APPENDIX B</a:t>
             </a:r>
           </a:p>
@@ -13546,7 +14643,7 @@
                 </a:solidFill>
                 <a:latin typeface="Roboto"/>
               </a:rPr>
-              <a:t>ADDRESSING THE ELEPHANTS IN THE ROOM</a:t>
+              <a:t>BEFORE YOU ASK</a:t>
             </a:r>
           </a:p>
         </p:txBody>
@@ -13588,7 +14685,7 @@
                 </a:solidFill>
                 <a:latin typeface="Roboto"/>
               </a:rPr>
-              <a:t>What each of you is probably thinking</a:t>
+              <a:t>Devin &amp; security</a:t>
             </a:r>
           </a:p>
         </p:txBody>
@@ -13643,8 +14740,8 @@
         </p:nvSpPr>
         <p:spPr>
           <a:xfrm>
-            <a:off x="502920" y="1481328"/>
-            <a:ext cx="3611880" cy="3291840"/>
+            <a:off x="502920" y="1645920"/>
+            <a:ext cx="3611880" cy="2377440"/>
           </a:xfrm>
           <a:prstGeom prst="roundRect">
             <a:avLst>
@@ -13689,8 +14786,8 @@
         </p:nvSpPr>
         <p:spPr>
           <a:xfrm>
-            <a:off x="502920" y="1591056"/>
-            <a:ext cx="54864" cy="3072384"/>
+            <a:off x="502920" y="1755648"/>
+            <a:ext cx="54864" cy="2157984"/>
           </a:xfrm>
           <a:prstGeom prst="rect">
             <a:avLst/>
@@ -13733,7 +14830,7 @@
         </p:nvSpPr>
         <p:spPr>
           <a:xfrm>
-            <a:off x="704088" y="1591056"/>
+            <a:off x="704088" y="1755648"/>
             <a:ext cx="3246120" cy="365760"/>
           </a:xfrm>
           <a:prstGeom prst="rect">
@@ -13762,7 +14859,7 @@
                 </a:solidFill>
                 <a:latin typeface="Roboto"/>
               </a:rPr>
-              <a:t>VP of Engineering</a:t>
+              <a:t>Isolated by design</a:t>
             </a:r>
           </a:p>
         </p:txBody>
@@ -13775,8 +14872,8 @@
         </p:nvSpPr>
         <p:spPr>
           <a:xfrm>
-            <a:off x="704088" y="1956816"/>
-            <a:ext cx="3246120" cy="2697480"/>
+            <a:off x="704088" y="2121408"/>
+            <a:ext cx="3246120" cy="1783080"/>
           </a:xfrm>
           <a:prstGeom prst="rect">
             <a:avLst/>
@@ -13798,13 +14895,13 @@
               </a:spcAft>
             </a:pPr>
             <a:r>
-              <a:rPr sz="1350" b="0" i="1">
-                <a:solidFill>
-                  <a:srgbClr val="5A6472"/>
-                </a:solidFill>
-                <a:latin typeface="Roboto"/>
-              </a:rPr>
-              <a:t>“Is this a time-saver or a babysitting job?”</a:t>
+              <a:rPr sz="1400" b="0" i="0">
+                <a:solidFill>
+                  <a:srgbClr val="1C2430"/>
+                </a:solidFill>
+                <a:latin typeface="Roboto"/>
+              </a:rPr>
+              <a:t>One isolated machine per session</a:t>
             </a:r>
           </a:p>
           <a:p>
@@ -13817,50 +14914,13 @@
               </a:spcAft>
             </a:pPr>
             <a:r>
-              <a:rPr sz="1350" b="1" i="0">
-                <a:solidFill>
-                  <a:srgbClr val="E31837"/>
-                </a:solidFill>
-                <a:latin typeface="Roboto"/>
-              </a:rPr>
-              <a:t>→ </a:t>
-            </a:r>
-            <a:r>
-              <a:rPr sz="1350" b="0" i="0">
+              <a:rPr sz="1400" b="0" i="0">
                 <a:solidFill>
                   <a:srgbClr val="1C2430"/>
                 </a:solidFill>
                 <a:latin typeface="Roboto"/>
               </a:rPr>
-              <a:t>Reviewing ≪ writing</a:t>
-            </a:r>
-          </a:p>
-          <a:p>
-            <a:pPr algn="l">
-              <a:lnSpc>
-                <a:spcPct val="105000"/>
-              </a:lnSpc>
-              <a:spcAft>
-                <a:spcPts val="500"/>
-              </a:spcAft>
-            </a:pPr>
-            <a:r>
-              <a:rPr sz="1350" b="1" i="0">
-                <a:solidFill>
-                  <a:srgbClr val="E31837"/>
-                </a:solidFill>
-                <a:latin typeface="Roboto"/>
-              </a:rPr>
-              <a:t>→ </a:t>
-            </a:r>
-            <a:r>
-              <a:rPr sz="1350" b="0" i="0">
-                <a:solidFill>
-                  <a:srgbClr val="1C2430"/>
-                </a:solidFill>
-                <a:latin typeface="Roboto"/>
-              </a:rPr>
-              <a:t>Roadmap keeps moving</a:t>
+              <a:t>Encrypted in transit &amp; at rest</a:t>
             </a:r>
           </a:p>
         </p:txBody>
@@ -13873,8 +14933,8 @@
         </p:nvSpPr>
         <p:spPr>
           <a:xfrm>
-            <a:off x="4297680" y="1481328"/>
-            <a:ext cx="3611880" cy="3291840"/>
+            <a:off x="4297680" y="1645920"/>
+            <a:ext cx="3611880" cy="2377440"/>
           </a:xfrm>
           <a:prstGeom prst="roundRect">
             <a:avLst>
@@ -13919,8 +14979,8 @@
         </p:nvSpPr>
         <p:spPr>
           <a:xfrm>
-            <a:off x="4297680" y="1591056"/>
-            <a:ext cx="54864" cy="3072384"/>
+            <a:off x="4297680" y="1755648"/>
+            <a:ext cx="54864" cy="2157984"/>
           </a:xfrm>
           <a:prstGeom prst="rect">
             <a:avLst/>
@@ -13963,7 +15023,7 @@
         </p:nvSpPr>
         <p:spPr>
           <a:xfrm>
-            <a:off x="4498848" y="1591056"/>
+            <a:off x="4498848" y="1755648"/>
             <a:ext cx="3246120" cy="365760"/>
           </a:xfrm>
           <a:prstGeom prst="rect">
@@ -13992,7 +15052,7 @@
                 </a:solidFill>
                 <a:latin typeface="Roboto"/>
               </a:rPr>
-              <a:t>Security Engineer</a:t>
+              <a:t>Deploys your way</a:t>
             </a:r>
           </a:p>
         </p:txBody>
@@ -14005,8 +15065,8 @@
         </p:nvSpPr>
         <p:spPr>
           <a:xfrm>
-            <a:off x="4498848" y="1956816"/>
-            <a:ext cx="3246120" cy="2697480"/>
+            <a:off x="4498848" y="2121408"/>
+            <a:ext cx="3246120" cy="1783080"/>
           </a:xfrm>
           <a:prstGeom prst="rect">
             <a:avLst/>
@@ -14028,13 +15088,13 @@
               </a:spcAft>
             </a:pPr>
             <a:r>
-              <a:rPr sz="1350" b="0" i="1">
-                <a:solidFill>
-                  <a:srgbClr val="5A6472"/>
-                </a:solidFill>
-                <a:latin typeface="Roboto"/>
-              </a:rPr>
-              <a:t>“An autonomous agent in a bank's codebase?”</a:t>
+              <a:rPr sz="1400" b="0" i="0">
+                <a:solidFill>
+                  <a:srgbClr val="1C2430"/>
+                </a:solidFill>
+                <a:latin typeface="Roboto"/>
+              </a:rPr>
+              <a:t>Enterprise Cloud, or</a:t>
             </a:r>
           </a:p>
           <a:p>
@@ -14047,50 +15107,13 @@
               </a:spcAft>
             </a:pPr>
             <a:r>
-              <a:rPr sz="1350" b="1" i="0">
-                <a:solidFill>
-                  <a:srgbClr val="E31837"/>
-                </a:solidFill>
-                <a:latin typeface="Roboto"/>
-              </a:rPr>
-              <a:t>→ </a:t>
-            </a:r>
-            <a:r>
-              <a:rPr sz="1350" b="0" i="0">
+              <a:rPr sz="1400" b="0" i="0">
                 <a:solidFill>
                   <a:srgbClr val="1C2430"/>
                 </a:solidFill>
                 <a:latin typeface="Roboto"/>
               </a:rPr>
-              <a:t>Nothing merges without human approval</a:t>
-            </a:r>
-          </a:p>
-          <a:p>
-            <a:pPr algn="l">
-              <a:lnSpc>
-                <a:spcPct val="105000"/>
-              </a:lnSpc>
-              <a:spcAft>
-                <a:spcPts val="500"/>
-              </a:spcAft>
-            </a:pPr>
-            <a:r>
-              <a:rPr sz="1350" b="1" i="0">
-                <a:solidFill>
-                  <a:srgbClr val="E31837"/>
-                </a:solidFill>
-                <a:latin typeface="Roboto"/>
-              </a:rPr>
-              <a:t>→ </a:t>
-            </a:r>
-            <a:r>
-              <a:rPr sz="1350" b="0" i="0">
-                <a:solidFill>
-                  <a:srgbClr val="1C2430"/>
-                </a:solidFill>
-                <a:latin typeface="Roboto"/>
-              </a:rPr>
-              <a:t>Every action logged &amp; replayable</a:t>
+              <a:t>Single-tenant VPC via AWS PrivateLink</a:t>
             </a:r>
           </a:p>
         </p:txBody>
@@ -14103,8 +15126,8 @@
         </p:nvSpPr>
         <p:spPr>
           <a:xfrm>
-            <a:off x="8092440" y="1481328"/>
-            <a:ext cx="3611880" cy="3291840"/>
+            <a:off x="8092440" y="1645920"/>
+            <a:ext cx="3611880" cy="2377440"/>
           </a:xfrm>
           <a:prstGeom prst="roundRect">
             <a:avLst>
@@ -14149,8 +15172,8 @@
         </p:nvSpPr>
         <p:spPr>
           <a:xfrm>
-            <a:off x="8092440" y="1591056"/>
-            <a:ext cx="54864" cy="3072384"/>
+            <a:off x="8092440" y="1755648"/>
+            <a:ext cx="54864" cy="2157984"/>
           </a:xfrm>
           <a:prstGeom prst="rect">
             <a:avLst/>
@@ -14193,7 +15216,7 @@
         </p:nvSpPr>
         <p:spPr>
           <a:xfrm>
-            <a:off x="8293608" y="1591056"/>
+            <a:off x="8293608" y="1755648"/>
             <a:ext cx="3246120" cy="365760"/>
           </a:xfrm>
           <a:prstGeom prst="rect">
@@ -14222,7 +15245,7 @@
                 </a:solidFill>
                 <a:latin typeface="Roboto"/>
               </a:rPr>
-              <a:t>Chief Architect</a:t>
+              <a:t>Your controls</a:t>
             </a:r>
           </a:p>
         </p:txBody>
@@ -14235,8 +15258,8 @@
         </p:nvSpPr>
         <p:spPr>
           <a:xfrm>
-            <a:off x="8293608" y="1956816"/>
-            <a:ext cx="3246120" cy="2697480"/>
+            <a:off x="8293608" y="2121408"/>
+            <a:ext cx="3246120" cy="1783080"/>
           </a:xfrm>
           <a:prstGeom prst="rect">
             <a:avLst/>
@@ -14258,13 +15281,13 @@
               </a:spcAft>
             </a:pPr>
             <a:r>
-              <a:rPr sz="1350" b="0" i="1">
-                <a:solidFill>
-                  <a:srgbClr val="5A6472"/>
-                </a:solidFill>
-                <a:latin typeface="Roboto"/>
-              </a:rPr>
-              <a:t>“Will it respect our standards?”</a:t>
+              <a:rPr sz="1400" b="0" i="0">
+                <a:solidFill>
+                  <a:srgbClr val="1C2430"/>
+                </a:solidFill>
+                <a:latin typeface="Roboto"/>
+              </a:rPr>
+              <a:t>SSO · Okta / Entra / SAML</a:t>
             </a:r>
           </a:p>
           <a:p>
@@ -14277,57 +15300,108 @@
               </a:spcAft>
             </a:pPr>
             <a:r>
-              <a:rPr sz="1350" b="1" i="0">
-                <a:solidFill>
-                  <a:srgbClr val="E31837"/>
-                </a:solidFill>
-                <a:latin typeface="Roboto"/>
-              </a:rPr>
-              <a:t>→ </a:t>
-            </a:r>
-            <a:r>
-              <a:rPr sz="1350" b="0" i="0">
+              <a:rPr sz="1400" b="0" i="0">
                 <a:solidFill>
                   <a:srgbClr val="1C2430"/>
                 </a:solidFill>
                 <a:latin typeface="Roboto"/>
               </a:rPr>
-              <a:t>Your conventions, applied consistently</a:t>
-            </a:r>
-          </a:p>
+              <a:t>Nothing merges without your review</a:t>
+            </a:r>
+          </a:p>
+        </p:txBody>
+      </p:sp>
+      <p:sp>
+        <p:nvSpPr>
+          <p:cNvPr id="19" name="Rounded Rectangle 18"/>
+          <p:cNvSpPr/>
+          <p:nvPr/>
+        </p:nvSpPr>
+        <p:spPr>
+          <a:xfrm>
+            <a:off x="502920" y="4343400"/>
+            <a:ext cx="11201400" cy="868680"/>
+          </a:xfrm>
+          <a:prstGeom prst="roundRect">
+            <a:avLst>
+              <a:gd name="adj" fmla="val 10000"/>
+            </a:avLst>
+          </a:prstGeom>
+          <a:solidFill>
+            <a:srgbClr val="012169"/>
+          </a:solidFill>
+          <a:ln>
+            <a:noFill/>
+          </a:ln>
+          <a:effectLst/>
+        </p:spPr>
+        <p:style>
+          <a:lnRef idx="1">
+            <a:schemeClr val="accent1"/>
+          </a:lnRef>
+          <a:fillRef idx="3">
+            <a:schemeClr val="accent1"/>
+          </a:fillRef>
+          <a:effectRef idx="2">
+            <a:schemeClr val="accent1"/>
+          </a:effectRef>
+          <a:fontRef idx="minor">
+            <a:schemeClr val="lt1"/>
+          </a:fontRef>
+        </p:style>
+        <p:txBody>
+          <a:bodyPr rtlCol="0" anchor="ctr"/>
+          <a:lstStyle/>
+          <a:p>
+            <a:pPr algn="ctr"/>
+          </a:p>
+        </p:txBody>
+      </p:sp>
+      <p:sp>
+        <p:nvSpPr>
+          <p:cNvPr id="20" name="TextBox 19"/>
+          <p:cNvSpPr txBox="1"/>
+          <p:nvPr/>
+        </p:nvSpPr>
+        <p:spPr>
+          <a:xfrm>
+            <a:off x="777240" y="4553712"/>
+            <a:ext cx="10698480" cy="594360"/>
+          </a:xfrm>
+          <a:prstGeom prst="rect">
+            <a:avLst/>
+          </a:prstGeom>
+          <a:noFill/>
+        </p:spPr>
+        <p:txBody>
+          <a:bodyPr wrap="square" anchor="t">
+            <a:spAutoFit/>
+          </a:bodyPr>
+          <a:lstStyle/>
           <a:p>
             <a:pPr algn="l">
               <a:lnSpc>
-                <a:spcPct val="105000"/>
-              </a:lnSpc>
-              <a:spcAft>
-                <a:spcPts val="500"/>
-              </a:spcAft>
-            </a:pPr>
-            <a:r>
-              <a:rPr sz="1350" b="1" i="0">
-                <a:solidFill>
-                  <a:srgbClr val="E31837"/>
-                </a:solidFill>
-                <a:latin typeface="Roboto"/>
-              </a:rPr>
-              <a:t>→ </a:t>
-            </a:r>
-            <a:r>
-              <a:rPr sz="1350" b="0" i="0">
-                <a:solidFill>
-                  <a:srgbClr val="1C2430"/>
-                </a:solidFill>
-                <a:latin typeface="Roboto"/>
-              </a:rPr>
-              <a:t>Library validated before downstream</a:t>
-            </a:r>
-          </a:p>
-        </p:txBody>
-      </p:sp>
-      <p:sp>
-        <p:nvSpPr>
-          <p:cNvPr id="19" name="TextBox 18"/>
+                <a:spcPct val="100000"/>
+              </a:lnSpc>
+              <a:spcAft>
+                <a:spcPts val="600"/>
+              </a:spcAft>
+            </a:pPr>
+            <a:r>
+              <a:rPr sz="1600" b="1" i="0">
+                <a:solidFill>
+                  <a:srgbClr val="FFFFFF"/>
+                </a:solidFill>
+                <a:latin typeface="Roboto"/>
+              </a:rPr>
+              <a:t>Every command, file change, and test run — logged and replayable.</a:t>
+            </a:r>
+          </a:p>
+        </p:txBody>
+      </p:sp>
+      <p:sp>
+        <p:nvSpPr>
+          <p:cNvPr id="21" name="TextBox 20"/>
           <p:cNvSpPr txBox="1"/>
           <p:nvPr/>
         </p:nvSpPr>
@@ -14510,7 +15584,7 @@
                 </a:solidFill>
                 <a:latin typeface="Roboto"/>
               </a:rPr>
-              <a:t>ENOUGH SLIDES — LET'S WATCH IT WORK</a:t>
+              <a:t>ADDRESSING THE ELEPHANTS IN THE ROOM</a:t>
             </a:r>
           </a:p>
         </p:txBody>
@@ -14546,13 +15620,13 @@
               </a:spcAft>
             </a:pPr>
             <a:r>
-              <a:rPr sz="2200" b="1" i="0">
+              <a:rPr sz="2700" b="1" i="0">
                 <a:solidFill>
                   <a:srgbClr val="FFFFFF"/>
                 </a:solidFill>
                 <a:latin typeface="Roboto"/>
               </a:rPr>
-              <a:t>Live demo: Devin migrates a BofA-shaped banking app, 14 → 18</a:t>
+              <a:t>What each of you is probably thinking</a:t>
             </a:r>
           </a:p>
         </p:txBody>
@@ -14608,7 +15682,7 @@
         <p:spPr>
           <a:xfrm>
             <a:off x="502920" y="1481328"/>
-            <a:ext cx="4846320" cy="3931920"/>
+            <a:ext cx="3611880" cy="3291840"/>
           </a:xfrm>
           <a:prstGeom prst="roundRect">
             <a:avLst>
@@ -14654,7 +15728,7 @@
         <p:spPr>
           <a:xfrm>
             <a:off x="502920" y="1591056"/>
-            <a:ext cx="54864" cy="3712463"/>
+            <a:ext cx="54864" cy="3072384"/>
           </a:xfrm>
           <a:prstGeom prst="rect">
             <a:avLst/>
@@ -14698,7 +15772,7 @@
         <p:spPr>
           <a:xfrm>
             <a:off x="704088" y="1591056"/>
-            <a:ext cx="4480559" cy="365760"/>
+            <a:ext cx="3246120" cy="365760"/>
           </a:xfrm>
           <a:prstGeom prst="rect">
             <a:avLst/>
@@ -14726,7 +15800,7 @@
                 </a:solidFill>
                 <a:latin typeface="Roboto"/>
               </a:rPr>
-              <a:t>A codebase shaped like yours</a:t>
+              <a:t>VP of Engineering</a:t>
             </a:r>
           </a:p>
         </p:txBody>
@@ -14740,7 +15814,7 @@
         <p:spPr>
           <a:xfrm>
             <a:off x="704088" y="1956816"/>
-            <a:ext cx="4480559" cy="3337560"/>
+            <a:ext cx="3246120" cy="2697480"/>
           </a:xfrm>
           <a:prstGeom prst="rect">
             <a:avLst/>
@@ -14762,13 +15836,41 @@
               </a:spcAft>
             </a:pPr>
             <a:r>
-              <a:rPr sz="1400" b="1" i="0">
+              <a:rPr sz="1350" b="0" i="1">
+                <a:solidFill>
+                  <a:srgbClr val="5A6472"/>
+                </a:solidFill>
+                <a:latin typeface="Roboto"/>
+              </a:rPr>
+              <a:t>“Is this a time-saver or a babysitting job?”</a:t>
+            </a:r>
+          </a:p>
+          <a:p>
+            <a:pPr algn="l">
+              <a:lnSpc>
+                <a:spcPct val="105000"/>
+              </a:lnSpc>
+              <a:spcAft>
+                <a:spcPts val="500"/>
+              </a:spcAft>
+            </a:pPr>
+            <a:r>
+              <a:rPr sz="1350" b="1" i="0">
+                <a:solidFill>
+                  <a:srgbClr val="E31837"/>
+                </a:solidFill>
+                <a:latin typeface="Roboto"/>
+              </a:rPr>
+              <a:t>→ </a:t>
+            </a:r>
+            <a:r>
+              <a:rPr sz="1350" b="0" i="0">
                 <a:solidFill>
                   <a:srgbClr val="1C2430"/>
                 </a:solidFill>
                 <a:latin typeface="Roboto"/>
               </a:rPr>
-              <a:t>Shared component library</a:t>
+              <a:t>Reviewing ≪ writing</a:t>
             </a:r>
           </a:p>
           <a:p>
@@ -14781,51 +15883,22 @@
               </a:spcAft>
             </a:pPr>
             <a:r>
-              <a:rPr sz="1400" b="0" i="0">
+              <a:rPr sz="1350" b="1" i="0">
+                <a:solidFill>
+                  <a:srgbClr val="E31837"/>
+                </a:solidFill>
+                <a:latin typeface="Roboto"/>
+              </a:rPr>
+              <a:t>→ </a:t>
+            </a:r>
+            <a:r>
+              <a:rPr sz="1350" b="0" i="0">
                 <a:solidFill>
                   <a:srgbClr val="1C2430"/>
                 </a:solidFill>
                 <a:latin typeface="Roboto"/>
               </a:rPr>
-              <a:t>SSO/MFA · analytics SDK · financial data</a:t>
-            </a:r>
-          </a:p>
-          <a:p>
-            <a:pPr algn="l">
-              <a:lnSpc>
-                <a:spcPct val="105000"/>
-              </a:lnSpc>
-              <a:spcAft>
-                <a:spcPts val="500"/>
-              </a:spcAft>
-            </a:pPr>
-            <a:r>
-              <a:rPr sz="1400" b="0" i="0">
-                <a:solidFill>
-                  <a:srgbClr val="1C2430"/>
-                </a:solidFill>
-                <a:latin typeface="Roboto"/>
-              </a:rPr>
-              <a:t>Custom design system on Angular Material</a:t>
-            </a:r>
-          </a:p>
-          <a:p>
-            <a:pPr algn="l">
-              <a:lnSpc>
-                <a:spcPct val="105000"/>
-              </a:lnSpc>
-              <a:spcAft>
-                <a:spcPts val="500"/>
-              </a:spcAft>
-            </a:pPr>
-            <a:r>
-              <a:rPr sz="1400" b="0" i="1">
-                <a:solidFill>
-                  <a:srgbClr val="5A6472"/>
-                </a:solidFill>
-                <a:latin typeface="Roboto"/>
-              </a:rPr>
-              <a:t>Mock code, real architecture.</a:t>
+              <a:t>Roadmap keeps moving</a:t>
             </a:r>
           </a:p>
         </p:txBody>
@@ -14838,8 +15911,8 @@
         </p:nvSpPr>
         <p:spPr>
           <a:xfrm>
-            <a:off x="5532120" y="1481328"/>
-            <a:ext cx="6172200" cy="3931920"/>
+            <a:off x="4297680" y="1481328"/>
+            <a:ext cx="3611880" cy="3291840"/>
           </a:xfrm>
           <a:prstGeom prst="roundRect">
             <a:avLst>
@@ -14884,8 +15957,8 @@
         </p:nvSpPr>
         <p:spPr>
           <a:xfrm>
-            <a:off x="5532120" y="1591056"/>
-            <a:ext cx="54864" cy="3712463"/>
+            <a:off x="4297680" y="1591056"/>
+            <a:ext cx="54864" cy="3072384"/>
           </a:xfrm>
           <a:prstGeom prst="rect">
             <a:avLst/>
@@ -14928,8 +16001,8 @@
         </p:nvSpPr>
         <p:spPr>
           <a:xfrm>
-            <a:off x="5733288" y="1591056"/>
-            <a:ext cx="5806440" cy="365760"/>
+            <a:off x="4498848" y="1591056"/>
+            <a:ext cx="3246120" cy="365760"/>
           </a:xfrm>
           <a:prstGeom prst="rect">
             <a:avLst/>
@@ -14957,7 +16030,7 @@
                 </a:solidFill>
                 <a:latin typeface="Roboto"/>
               </a:rPr>
-              <a:t>What Devin will do</a:t>
+              <a:t>Security Engineer</a:t>
             </a:r>
           </a:p>
         </p:txBody>
@@ -14970,8 +16043,8 @@
         </p:nvSpPr>
         <p:spPr>
           <a:xfrm>
-            <a:off x="5733288" y="1956816"/>
-            <a:ext cx="5806440" cy="3337560"/>
+            <a:off x="4498848" y="1956816"/>
+            <a:ext cx="3246120" cy="2697480"/>
           </a:xfrm>
           <a:prstGeom prst="rect">
             <a:avLst/>
@@ -14993,22 +16066,271 @@
               </a:spcAft>
             </a:pPr>
             <a:r>
+              <a:rPr sz="1350" b="0" i="1">
+                <a:solidFill>
+                  <a:srgbClr val="5A6472"/>
+                </a:solidFill>
+                <a:latin typeface="Roboto"/>
+              </a:rPr>
+              <a:t>“An autonomous agent in a bank's codebase?”</a:t>
+            </a:r>
+          </a:p>
+          <a:p>
+            <a:pPr algn="l">
+              <a:lnSpc>
+                <a:spcPct val="105000"/>
+              </a:lnSpc>
+              <a:spcAft>
+                <a:spcPts val="500"/>
+              </a:spcAft>
+            </a:pPr>
+            <a:r>
+              <a:rPr sz="1350" b="1" i="0">
+                <a:solidFill>
+                  <a:srgbClr val="E31837"/>
+                </a:solidFill>
+                <a:latin typeface="Roboto"/>
+              </a:rPr>
+              <a:t>→ </a:t>
+            </a:r>
+            <a:r>
+              <a:rPr sz="1350" b="0" i="0">
+                <a:solidFill>
+                  <a:srgbClr val="1C2430"/>
+                </a:solidFill>
+                <a:latin typeface="Roboto"/>
+              </a:rPr>
+              <a:t>Nothing merges without human approval</a:t>
+            </a:r>
+          </a:p>
+          <a:p>
+            <a:pPr algn="l">
+              <a:lnSpc>
+                <a:spcPct val="105000"/>
+              </a:lnSpc>
+              <a:spcAft>
+                <a:spcPts val="500"/>
+              </a:spcAft>
+            </a:pPr>
+            <a:r>
+              <a:rPr sz="1350" b="1" i="0">
+                <a:solidFill>
+                  <a:srgbClr val="E31837"/>
+                </a:solidFill>
+                <a:latin typeface="Roboto"/>
+              </a:rPr>
+              <a:t>→ </a:t>
+            </a:r>
+            <a:r>
+              <a:rPr sz="1350" b="0" i="0">
+                <a:solidFill>
+                  <a:srgbClr val="1C2430"/>
+                </a:solidFill>
+                <a:latin typeface="Roboto"/>
+              </a:rPr>
+              <a:t>Every action logged &amp; replayable</a:t>
+            </a:r>
+          </a:p>
+        </p:txBody>
+      </p:sp>
+      <p:sp>
+        <p:nvSpPr>
+          <p:cNvPr id="15" name="Rounded Rectangle 14"/>
+          <p:cNvSpPr/>
+          <p:nvPr/>
+        </p:nvSpPr>
+        <p:spPr>
+          <a:xfrm>
+            <a:off x="8092440" y="1481328"/>
+            <a:ext cx="3611880" cy="3291840"/>
+          </a:xfrm>
+          <a:prstGeom prst="roundRect">
+            <a:avLst>
+              <a:gd name="adj" fmla="val 6000"/>
+            </a:avLst>
+          </a:prstGeom>
+          <a:solidFill>
+            <a:srgbClr val="F4F6F9"/>
+          </a:solidFill>
+          <a:ln>
+            <a:noFill/>
+          </a:ln>
+          <a:effectLst/>
+        </p:spPr>
+        <p:style>
+          <a:lnRef idx="1">
+            <a:schemeClr val="accent1"/>
+          </a:lnRef>
+          <a:fillRef idx="3">
+            <a:schemeClr val="accent1"/>
+          </a:fillRef>
+          <a:effectRef idx="2">
+            <a:schemeClr val="accent1"/>
+          </a:effectRef>
+          <a:fontRef idx="minor">
+            <a:schemeClr val="lt1"/>
+          </a:fontRef>
+        </p:style>
+        <p:txBody>
+          <a:bodyPr rtlCol="0" anchor="ctr"/>
+          <a:lstStyle/>
+          <a:p>
+            <a:pPr algn="ctr"/>
+          </a:p>
+        </p:txBody>
+      </p:sp>
+      <p:sp>
+        <p:nvSpPr>
+          <p:cNvPr id="16" name="Rectangle 15"/>
+          <p:cNvSpPr/>
+          <p:nvPr/>
+        </p:nvSpPr>
+        <p:spPr>
+          <a:xfrm>
+            <a:off x="8092440" y="1591056"/>
+            <a:ext cx="54864" cy="3072384"/>
+          </a:xfrm>
+          <a:prstGeom prst="rect">
+            <a:avLst/>
+          </a:prstGeom>
+          <a:solidFill>
+            <a:srgbClr val="E31837"/>
+          </a:solidFill>
+          <a:ln>
+            <a:noFill/>
+          </a:ln>
+          <a:effectLst/>
+        </p:spPr>
+        <p:style>
+          <a:lnRef idx="1">
+            <a:schemeClr val="accent1"/>
+          </a:lnRef>
+          <a:fillRef idx="3">
+            <a:schemeClr val="accent1"/>
+          </a:fillRef>
+          <a:effectRef idx="2">
+            <a:schemeClr val="accent1"/>
+          </a:effectRef>
+          <a:fontRef idx="minor">
+            <a:schemeClr val="lt1"/>
+          </a:fontRef>
+        </p:style>
+        <p:txBody>
+          <a:bodyPr rtlCol="0" anchor="ctr"/>
+          <a:lstStyle/>
+          <a:p>
+            <a:pPr algn="ctr"/>
+          </a:p>
+        </p:txBody>
+      </p:sp>
+      <p:sp>
+        <p:nvSpPr>
+          <p:cNvPr id="17" name="TextBox 16"/>
+          <p:cNvSpPr txBox="1"/>
+          <p:nvPr/>
+        </p:nvSpPr>
+        <p:spPr>
+          <a:xfrm>
+            <a:off x="8293608" y="1591056"/>
+            <a:ext cx="3246120" cy="365760"/>
+          </a:xfrm>
+          <a:prstGeom prst="rect">
+            <a:avLst/>
+          </a:prstGeom>
+          <a:noFill/>
+        </p:spPr>
+        <p:txBody>
+          <a:bodyPr wrap="square" anchor="t">
+            <a:spAutoFit/>
+          </a:bodyPr>
+          <a:lstStyle/>
+          <a:p>
+            <a:pPr algn="l">
+              <a:lnSpc>
+                <a:spcPct val="100000"/>
+              </a:lnSpc>
+              <a:spcAft>
+                <a:spcPts val="600"/>
+              </a:spcAft>
+            </a:pPr>
+            <a:r>
               <a:rPr sz="1400" b="1" i="0">
                 <a:solidFill>
+                  <a:srgbClr val="012169"/>
+                </a:solidFill>
+                <a:latin typeface="Roboto"/>
+              </a:rPr>
+              <a:t>Chief Architect</a:t>
+            </a:r>
+          </a:p>
+        </p:txBody>
+      </p:sp>
+      <p:sp>
+        <p:nvSpPr>
+          <p:cNvPr id="18" name="TextBox 17"/>
+          <p:cNvSpPr txBox="1"/>
+          <p:nvPr/>
+        </p:nvSpPr>
+        <p:spPr>
+          <a:xfrm>
+            <a:off x="8293608" y="1956816"/>
+            <a:ext cx="3246120" cy="2697480"/>
+          </a:xfrm>
+          <a:prstGeom prst="rect">
+            <a:avLst/>
+          </a:prstGeom>
+          <a:noFill/>
+        </p:spPr>
+        <p:txBody>
+          <a:bodyPr wrap="square" anchor="t">
+            <a:spAutoFit/>
+          </a:bodyPr>
+          <a:lstStyle/>
+          <a:p>
+            <a:pPr algn="l">
+              <a:lnSpc>
+                <a:spcPct val="105000"/>
+              </a:lnSpc>
+              <a:spcAft>
+                <a:spcPts val="500"/>
+              </a:spcAft>
+            </a:pPr>
+            <a:r>
+              <a:rPr sz="1350" b="0" i="1">
+                <a:solidFill>
+                  <a:srgbClr val="5A6472"/>
+                </a:solidFill>
+                <a:latin typeface="Roboto"/>
+              </a:rPr>
+              <a:t>“Will it respect our standards?”</a:t>
+            </a:r>
+          </a:p>
+          <a:p>
+            <a:pPr algn="l">
+              <a:lnSpc>
+                <a:spcPct val="105000"/>
+              </a:lnSpc>
+              <a:spcAft>
+                <a:spcPts val="500"/>
+              </a:spcAft>
+            </a:pPr>
+            <a:r>
+              <a:rPr sz="1350" b="1" i="0">
+                <a:solidFill>
                   <a:srgbClr val="E31837"/>
                 </a:solidFill>
                 <a:latin typeface="Roboto"/>
               </a:rPr>
-              <a:t>1. </a:t>
-            </a:r>
-            <a:r>
-              <a:rPr sz="1400" b="0" i="0">
+              <a:t>→ </a:t>
+            </a:r>
+            <a:r>
+              <a:rPr sz="1350" b="0" i="0">
                 <a:solidFill>
                   <a:srgbClr val="1C2430"/>
                 </a:solidFill>
                 <a:latin typeface="Roboto"/>
               </a:rPr>
-              <a:t>Baseline — build + tests green</a:t>
+              <a:t>Your conventions, applied consistently</a:t>
             </a:r>
           </a:p>
           <a:p>
@@ -15021,113 +16343,29 @@
               </a:spcAft>
             </a:pPr>
             <a:r>
-              <a:rPr sz="1400" b="1" i="0">
+              <a:rPr sz="1350" b="1" i="0">
                 <a:solidFill>
                   <a:srgbClr val="E31837"/>
                 </a:solidFill>
                 <a:latin typeface="Roboto"/>
               </a:rPr>
-              <a:t>2. </a:t>
-            </a:r>
-            <a:r>
-              <a:rPr sz="1400" b="0" i="0">
+              <a:t>→ </a:t>
+            </a:r>
+            <a:r>
+              <a:rPr sz="1350" b="0" i="0">
                 <a:solidFill>
                   <a:srgbClr val="1C2430"/>
                 </a:solidFill>
                 <a:latin typeface="Roboto"/>
               </a:rPr>
-              <a:t>Stepwise ng update 14→15→16→17→18</a:t>
-            </a:r>
-          </a:p>
-          <a:p>
-            <a:pPr algn="l">
-              <a:lnSpc>
-                <a:spcPct val="105000"/>
-              </a:lnSpc>
-              <a:spcAft>
-                <a:spcPts val="500"/>
-              </a:spcAft>
-            </a:pPr>
-            <a:r>
-              <a:rPr sz="1400" b="1" i="0">
-                <a:solidFill>
-                  <a:srgbClr val="E31837"/>
-                </a:solidFill>
-                <a:latin typeface="Roboto"/>
-              </a:rPr>
-              <a:t>3. </a:t>
-            </a:r>
-            <a:r>
-              <a:rPr sz="1400" b="0" i="0">
-                <a:solidFill>
-                  <a:srgbClr val="1C2430"/>
-                </a:solidFill>
-                <a:latin typeface="Roboto"/>
-              </a:rPr>
-              <a:t>Modernize 5 legacy patterns</a:t>
-            </a:r>
-          </a:p>
-          <a:p>
-            <a:pPr algn="l">
-              <a:lnSpc>
-                <a:spcPct val="105000"/>
-              </a:lnSpc>
-              <a:spcAft>
-                <a:spcPts val="500"/>
-              </a:spcAft>
-            </a:pPr>
-            <a:r>
-              <a:rPr sz="1400" b="1" i="0">
-                <a:solidFill>
-                  <a:srgbClr val="E31837"/>
-                </a:solidFill>
-                <a:latin typeface="Roboto"/>
-              </a:rPr>
-              <a:t>4. </a:t>
-            </a:r>
-            <a:r>
-              <a:rPr sz="1400" b="0" i="0">
-                <a:solidFill>
-                  <a:srgbClr val="1C2430"/>
-                </a:solidFill>
-                <a:latin typeface="Roboto"/>
-              </a:rPr>
-              <a:t>Validate — zero legacy patterns remain</a:t>
-            </a:r>
-          </a:p>
-          <a:p>
-            <a:pPr algn="l">
-              <a:lnSpc>
-                <a:spcPct val="105000"/>
-              </a:lnSpc>
-              <a:spcAft>
-                <a:spcPts val="500"/>
-              </a:spcAft>
-            </a:pPr>
-            <a:r>
-              <a:rPr sz="1400" b="1" i="0">
-                <a:solidFill>
-                  <a:srgbClr val="E31837"/>
-                </a:solidFill>
-                <a:latin typeface="Roboto"/>
-              </a:rPr>
-              <a:t>5. </a:t>
-            </a:r>
-            <a:r>
-              <a:rPr sz="1400" b="0" i="0">
-                <a:solidFill>
-                  <a:srgbClr val="1C2430"/>
-                </a:solidFill>
-                <a:latin typeface="Roboto"/>
-              </a:rPr>
-              <a:t>Deliver — reviewable PRs</a:t>
-            </a:r>
-          </a:p>
-        </p:txBody>
-      </p:sp>
-      <p:sp>
-        <p:nvSpPr>
-          <p:cNvPr id="15" name="TextBox 14"/>
+              <a:t>Library validated before downstream</a:t>
+            </a:r>
+          </a:p>
+        </p:txBody>
+      </p:sp>
+      <p:sp>
+        <p:nvSpPr>
+          <p:cNvPr id="19" name="TextBox 18"/>
           <p:cNvSpPr txBox="1"/>
           <p:nvPr/>
         </p:nvSpPr>
@@ -15310,7 +16548,7 @@
                 </a:solidFill>
                 <a:latin typeface="Roboto"/>
               </a:rPr>
-              <a:t>FROM DEMO TO YOUR REALITY</a:t>
+              <a:t>ENOUGH SLIDES — LET'S WATCH IT WORK</a:t>
             </a:r>
           </a:p>
         </p:txBody>
@@ -15346,13 +16584,13 @@
               </a:spcAft>
             </a:pPr>
             <a:r>
-              <a:rPr sz="2700" b="1" i="0">
+              <a:rPr sz="2200" b="1" i="0">
                 <a:solidFill>
                   <a:srgbClr val="FFFFFF"/>
                 </a:solidFill>
                 <a:latin typeface="Roboto"/>
               </a:rPr>
-              <a:t>How this maps to BofA's actual migration</a:t>
+              <a:t>Live demo: Devin migrates a BofA-shaped banking app, 14 → 18</a:t>
             </a:r>
           </a:p>
         </p:txBody>
@@ -15408,11 +16646,11 @@
         <p:spPr>
           <a:xfrm>
             <a:off x="502920" y="1481328"/>
-            <a:ext cx="11201400" cy="932688"/>
+            <a:ext cx="4846320" cy="3931920"/>
           </a:xfrm>
           <a:prstGeom prst="roundRect">
             <a:avLst>
-              <a:gd name="adj" fmla="val 10000"/>
+              <a:gd name="adj" fmla="val 6000"/>
             </a:avLst>
           </a:prstGeom>
           <a:solidFill>
@@ -15447,22 +16685,20 @@
       </p:sp>
       <p:sp>
         <p:nvSpPr>
-          <p:cNvPr id="8" name="Rounded Rectangle 7"/>
+          <p:cNvPr id="8" name="Rectangle 7"/>
           <p:cNvSpPr/>
           <p:nvPr/>
         </p:nvSpPr>
         <p:spPr>
           <a:xfrm>
-            <a:off x="685800" y="1645920"/>
-            <a:ext cx="1371600" cy="603504"/>
-          </a:xfrm>
-          <a:prstGeom prst="roundRect">
-            <a:avLst>
-              <a:gd name="adj" fmla="val 18000"/>
-            </a:avLst>
+            <a:off x="502920" y="1591056"/>
+            <a:ext cx="54864" cy="3712463"/>
+          </a:xfrm>
+          <a:prstGeom prst="rect">
+            <a:avLst/>
           </a:prstGeom>
           <a:solidFill>
-            <a:srgbClr val="012169"/>
+            <a:srgbClr val="E31837"/>
           </a:solidFill>
           <a:ln>
             <a:noFill/>
@@ -15499,8 +16735,8 @@
         </p:nvSpPr>
         <p:spPr>
           <a:xfrm>
-            <a:off x="685800" y="1783080"/>
-            <a:ext cx="1371600" cy="365760"/>
+            <a:off x="704088" y="1591056"/>
+            <a:ext cx="4480559" cy="365760"/>
           </a:xfrm>
           <a:prstGeom prst="rect">
             <a:avLst/>
@@ -15513,7 +16749,7 @@
           </a:bodyPr>
           <a:lstStyle/>
           <a:p>
-            <a:pPr algn="ctr">
+            <a:pPr algn="l">
               <a:lnSpc>
                 <a:spcPct val="100000"/>
               </a:lnSpc>
@@ -15522,13 +16758,13 @@
               </a:spcAft>
             </a:pPr>
             <a:r>
-              <a:rPr sz="1200" b="1" i="0">
-                <a:solidFill>
-                  <a:srgbClr val="FFFFFF"/>
-                </a:solidFill>
-                <a:latin typeface="Roboto"/>
-              </a:rPr>
-              <a:t>Week 0</a:t>
+              <a:rPr sz="1400" b="1" i="0">
+                <a:solidFill>
+                  <a:srgbClr val="012169"/>
+                </a:solidFill>
+                <a:latin typeface="Roboto"/>
+              </a:rPr>
+              <a:t>A codebase shaped like yours</a:t>
             </a:r>
           </a:p>
         </p:txBody>
@@ -15541,8 +16777,8 @@
         </p:nvSpPr>
         <p:spPr>
           <a:xfrm>
-            <a:off x="2286000" y="1591056"/>
-            <a:ext cx="9144000" cy="365760"/>
+            <a:off x="704088" y="1956816"/>
+            <a:ext cx="4480559" cy="3337560"/>
           </a:xfrm>
           <a:prstGeom prst="rect">
             <a:avLst/>
@@ -15557,298 +16793,95 @@
           <a:p>
             <a:pPr algn="l">
               <a:lnSpc>
-                <a:spcPct val="100000"/>
-              </a:lnSpc>
-              <a:spcAft>
-                <a:spcPts val="600"/>
-              </a:spcAft>
-            </a:pPr>
-            <a:r>
-              <a:rPr sz="1450" b="1" i="0">
-                <a:solidFill>
-                  <a:srgbClr val="012169"/>
-                </a:solidFill>
-                <a:latin typeface="Roboto"/>
-              </a:rPr>
-              <a:t>Scope &amp; safety rails</a:t>
-            </a:r>
-          </a:p>
-        </p:txBody>
-      </p:sp>
-      <p:sp>
-        <p:nvSpPr>
-          <p:cNvPr id="11" name="TextBox 10"/>
-          <p:cNvSpPr txBox="1"/>
-          <p:nvPr/>
-        </p:nvSpPr>
-        <p:spPr>
-          <a:xfrm>
-            <a:off x="2286000" y="1938528"/>
-            <a:ext cx="9144000" cy="411480"/>
-          </a:xfrm>
-          <a:prstGeom prst="rect">
-            <a:avLst/>
-          </a:prstGeom>
-          <a:noFill/>
-        </p:spPr>
-        <p:txBody>
-          <a:bodyPr wrap="square" anchor="t">
-            <a:spAutoFit/>
-          </a:bodyPr>
-          <a:lstStyle/>
+                <a:spcPct val="105000"/>
+              </a:lnSpc>
+              <a:spcAft>
+                <a:spcPts val="500"/>
+              </a:spcAft>
+            </a:pPr>
+            <a:r>
+              <a:rPr sz="1400" b="1" i="0">
+                <a:solidFill>
+                  <a:srgbClr val="1C2430"/>
+                </a:solidFill>
+                <a:latin typeface="Roboto"/>
+              </a:rPr>
+              <a:t>Shared component library</a:t>
+            </a:r>
+          </a:p>
           <a:p>
             <a:pPr algn="l">
               <a:lnSpc>
-                <a:spcPct val="100000"/>
-              </a:lnSpc>
-              <a:spcAft>
-                <a:spcPts val="600"/>
-              </a:spcAft>
-            </a:pPr>
-            <a:r>
-              <a:rPr sz="1200" b="0" i="0">
+                <a:spcPct val="105000"/>
+              </a:lnSpc>
+              <a:spcAft>
+                <a:spcPts val="500"/>
+              </a:spcAft>
+            </a:pPr>
+            <a:r>
+              <a:rPr sz="1400" b="0" i="0">
                 <a:solidFill>
                   <a:srgbClr val="1C2430"/>
                 </a:solidFill>
                 <a:latin typeface="Roboto"/>
               </a:rPr>
-              <a:t>Security review · success criteria</a:t>
-            </a:r>
-          </a:p>
-        </p:txBody>
-      </p:sp>
-      <p:sp>
-        <p:nvSpPr>
-          <p:cNvPr id="12" name="Rounded Rectangle 11"/>
+              <a:t>SSO/MFA · analytics SDK · financial data</a:t>
+            </a:r>
+          </a:p>
+          <a:p>
+            <a:pPr algn="l">
+              <a:lnSpc>
+                <a:spcPct val="105000"/>
+              </a:lnSpc>
+              <a:spcAft>
+                <a:spcPts val="500"/>
+              </a:spcAft>
+            </a:pPr>
+            <a:r>
+              <a:rPr sz="1400" b="0" i="0">
+                <a:solidFill>
+                  <a:srgbClr val="1C2430"/>
+                </a:solidFill>
+                <a:latin typeface="Roboto"/>
+              </a:rPr>
+              <a:t>Custom design system on Angular Material</a:t>
+            </a:r>
+          </a:p>
+          <a:p>
+            <a:pPr algn="l">
+              <a:lnSpc>
+                <a:spcPct val="105000"/>
+              </a:lnSpc>
+              <a:spcAft>
+                <a:spcPts val="500"/>
+              </a:spcAft>
+            </a:pPr>
+            <a:r>
+              <a:rPr sz="1400" b="0" i="1">
+                <a:solidFill>
+                  <a:srgbClr val="5A6472"/>
+                </a:solidFill>
+                <a:latin typeface="Roboto"/>
+              </a:rPr>
+              <a:t>Mock code, real architecture.</a:t>
+            </a:r>
+          </a:p>
+        </p:txBody>
+      </p:sp>
+      <p:sp>
+        <p:nvSpPr>
+          <p:cNvPr id="11" name="Rounded Rectangle 10"/>
           <p:cNvSpPr/>
           <p:nvPr/>
         </p:nvSpPr>
         <p:spPr>
           <a:xfrm>
-            <a:off x="502920" y="2505456"/>
-            <a:ext cx="11201400" cy="932688"/>
+            <a:off x="5532120" y="1481328"/>
+            <a:ext cx="6172200" cy="3931920"/>
           </a:xfrm>
           <a:prstGeom prst="roundRect">
             <a:avLst>
-              <a:gd name="adj" fmla="val 10000"/>
-            </a:avLst>
-          </a:prstGeom>
-          <a:solidFill>
-            <a:srgbClr val="FFFFFF"/>
-          </a:solidFill>
-          <a:ln>
-            <a:noFill/>
-          </a:ln>
-          <a:effectLst/>
-        </p:spPr>
-        <p:style>
-          <a:lnRef idx="1">
-            <a:schemeClr val="accent1"/>
-          </a:lnRef>
-          <a:fillRef idx="3">
-            <a:schemeClr val="accent1"/>
-          </a:fillRef>
-          <a:effectRef idx="2">
-            <a:schemeClr val="accent1"/>
-          </a:effectRef>
-          <a:fontRef idx="minor">
-            <a:schemeClr val="lt1"/>
-          </a:fontRef>
-        </p:style>
-        <p:txBody>
-          <a:bodyPr rtlCol="0" anchor="ctr"/>
-          <a:lstStyle/>
-          <a:p>
-            <a:pPr algn="ctr"/>
-          </a:p>
-        </p:txBody>
-      </p:sp>
-      <p:sp>
-        <p:nvSpPr>
-          <p:cNvPr id="13" name="Rounded Rectangle 12"/>
-          <p:cNvSpPr/>
-          <p:nvPr/>
-        </p:nvSpPr>
-        <p:spPr>
-          <a:xfrm>
-            <a:off x="685800" y="2670048"/>
-            <a:ext cx="1371600" cy="603504"/>
-          </a:xfrm>
-          <a:prstGeom prst="roundRect">
-            <a:avLst>
-              <a:gd name="adj" fmla="val 18000"/>
-            </a:avLst>
-          </a:prstGeom>
-          <a:solidFill>
-            <a:srgbClr val="012169"/>
-          </a:solidFill>
-          <a:ln>
-            <a:noFill/>
-          </a:ln>
-          <a:effectLst/>
-        </p:spPr>
-        <p:style>
-          <a:lnRef idx="1">
-            <a:schemeClr val="accent1"/>
-          </a:lnRef>
-          <a:fillRef idx="3">
-            <a:schemeClr val="accent1"/>
-          </a:fillRef>
-          <a:effectRef idx="2">
-            <a:schemeClr val="accent1"/>
-          </a:effectRef>
-          <a:fontRef idx="minor">
-            <a:schemeClr val="lt1"/>
-          </a:fontRef>
-        </p:style>
-        <p:txBody>
-          <a:bodyPr rtlCol="0" anchor="ctr"/>
-          <a:lstStyle/>
-          <a:p>
-            <a:pPr algn="ctr"/>
-          </a:p>
-        </p:txBody>
-      </p:sp>
-      <p:sp>
-        <p:nvSpPr>
-          <p:cNvPr id="14" name="TextBox 13"/>
-          <p:cNvSpPr txBox="1"/>
-          <p:nvPr/>
-        </p:nvSpPr>
-        <p:spPr>
-          <a:xfrm>
-            <a:off x="685800" y="2807208"/>
-            <a:ext cx="1371600" cy="365760"/>
-          </a:xfrm>
-          <a:prstGeom prst="rect">
-            <a:avLst/>
-          </a:prstGeom>
-          <a:noFill/>
-        </p:spPr>
-        <p:txBody>
-          <a:bodyPr wrap="square" anchor="t">
-            <a:spAutoFit/>
-          </a:bodyPr>
-          <a:lstStyle/>
-          <a:p>
-            <a:pPr algn="ctr">
-              <a:lnSpc>
-                <a:spcPct val="100000"/>
-              </a:lnSpc>
-              <a:spcAft>
-                <a:spcPts val="600"/>
-              </a:spcAft>
-            </a:pPr>
-            <a:r>
-              <a:rPr sz="1200" b="1" i="0">
-                <a:solidFill>
-                  <a:srgbClr val="FFFFFF"/>
-                </a:solidFill>
-                <a:latin typeface="Roboto"/>
-              </a:rPr>
-              <a:t>Weeks 1–2</a:t>
-            </a:r>
-          </a:p>
-        </p:txBody>
-      </p:sp>
-      <p:sp>
-        <p:nvSpPr>
-          <p:cNvPr id="15" name="TextBox 14"/>
-          <p:cNvSpPr txBox="1"/>
-          <p:nvPr/>
-        </p:nvSpPr>
-        <p:spPr>
-          <a:xfrm>
-            <a:off x="2286000" y="2615184"/>
-            <a:ext cx="9144000" cy="365760"/>
-          </a:xfrm>
-          <a:prstGeom prst="rect">
-            <a:avLst/>
-          </a:prstGeom>
-          <a:noFill/>
-        </p:spPr>
-        <p:txBody>
-          <a:bodyPr wrap="square" anchor="t">
-            <a:spAutoFit/>
-          </a:bodyPr>
-          <a:lstStyle/>
-          <a:p>
-            <a:pPr algn="l">
-              <a:lnSpc>
-                <a:spcPct val="100000"/>
-              </a:lnSpc>
-              <a:spcAft>
-                <a:spcPts val="600"/>
-              </a:spcAft>
-            </a:pPr>
-            <a:r>
-              <a:rPr sz="1450" b="1" i="0">
-                <a:solidFill>
-                  <a:srgbClr val="012169"/>
-                </a:solidFill>
-                <a:latin typeface="Roboto"/>
-              </a:rPr>
-              <a:t>Shared library first</a:t>
-            </a:r>
-          </a:p>
-        </p:txBody>
-      </p:sp>
-      <p:sp>
-        <p:nvSpPr>
-          <p:cNvPr id="16" name="TextBox 15"/>
-          <p:cNvSpPr txBox="1"/>
-          <p:nvPr/>
-        </p:nvSpPr>
-        <p:spPr>
-          <a:xfrm>
-            <a:off x="2286000" y="2962656"/>
-            <a:ext cx="9144000" cy="411480"/>
-          </a:xfrm>
-          <a:prstGeom prst="rect">
-            <a:avLst/>
-          </a:prstGeom>
-          <a:noFill/>
-        </p:spPr>
-        <p:txBody>
-          <a:bodyPr wrap="square" anchor="t">
-            <a:spAutoFit/>
-          </a:bodyPr>
-          <a:lstStyle/>
-          <a:p>
-            <a:pPr algn="l">
-              <a:lnSpc>
-                <a:spcPct val="100000"/>
-              </a:lnSpc>
-              <a:spcAft>
-                <a:spcPts val="600"/>
-              </a:spcAft>
-            </a:pPr>
-            <a:r>
-              <a:rPr sz="1200" b="0" i="0">
-                <a:solidFill>
-                  <a:srgbClr val="1C2430"/>
-                </a:solidFill>
-                <a:latin typeface="Roboto"/>
-              </a:rPr>
-              <a:t>Root of the dependency tree — your team reviews every PR</a:t>
-            </a:r>
-          </a:p>
-        </p:txBody>
-      </p:sp>
-      <p:sp>
-        <p:nvSpPr>
-          <p:cNvPr id="17" name="Rounded Rectangle 16"/>
-          <p:cNvSpPr/>
-          <p:nvPr/>
-        </p:nvSpPr>
-        <p:spPr>
-          <a:xfrm>
-            <a:off x="502920" y="3529584"/>
-            <a:ext cx="11201400" cy="932688"/>
-          </a:xfrm>
-          <a:prstGeom prst="roundRect">
-            <a:avLst>
-              <a:gd name="adj" fmla="val 10000"/>
+              <a:gd name="adj" fmla="val 6000"/>
             </a:avLst>
           </a:prstGeom>
           <a:solidFill>
@@ -15883,22 +16916,20 @@
       </p:sp>
       <p:sp>
         <p:nvSpPr>
-          <p:cNvPr id="18" name="Rounded Rectangle 17"/>
+          <p:cNvPr id="12" name="Rectangle 11"/>
           <p:cNvSpPr/>
           <p:nvPr/>
         </p:nvSpPr>
         <p:spPr>
           <a:xfrm>
-            <a:off x="685800" y="3694176"/>
-            <a:ext cx="1371600" cy="603504"/>
-          </a:xfrm>
-          <a:prstGeom prst="roundRect">
-            <a:avLst>
-              <a:gd name="adj" fmla="val 18000"/>
-            </a:avLst>
+            <a:off x="5532120" y="1591056"/>
+            <a:ext cx="54864" cy="3712463"/>
+          </a:xfrm>
+          <a:prstGeom prst="rect">
+            <a:avLst/>
           </a:prstGeom>
           <a:solidFill>
-            <a:srgbClr val="012169"/>
+            <a:srgbClr val="E31837"/>
           </a:solidFill>
           <a:ln>
             <a:noFill/>
@@ -15929,14 +16960,14 @@
       </p:sp>
       <p:sp>
         <p:nvSpPr>
-          <p:cNvPr id="19" name="TextBox 18"/>
+          <p:cNvPr id="13" name="TextBox 12"/>
           <p:cNvSpPr txBox="1"/>
           <p:nvPr/>
         </p:nvSpPr>
         <p:spPr>
           <a:xfrm>
-            <a:off x="685800" y="3831336"/>
-            <a:ext cx="1371600" cy="365760"/>
+            <a:off x="5733288" y="1591056"/>
+            <a:ext cx="5806440" cy="365760"/>
           </a:xfrm>
           <a:prstGeom prst="rect">
             <a:avLst/>
@@ -15949,7 +16980,7 @@
           </a:bodyPr>
           <a:lstStyle/>
           <a:p>
-            <a:pPr algn="ctr">
+            <a:pPr algn="l">
               <a:lnSpc>
                 <a:spcPct val="100000"/>
               </a:lnSpc>
@@ -15958,27 +16989,27 @@
               </a:spcAft>
             </a:pPr>
             <a:r>
-              <a:rPr sz="1200" b="1" i="0">
-                <a:solidFill>
-                  <a:srgbClr val="FFFFFF"/>
-                </a:solidFill>
-                <a:latin typeface="Roboto"/>
-              </a:rPr>
-              <a:t>Weeks 2–3</a:t>
-            </a:r>
-          </a:p>
-        </p:txBody>
-      </p:sp>
-      <p:sp>
-        <p:nvSpPr>
-          <p:cNvPr id="20" name="TextBox 19"/>
+              <a:rPr sz="1400" b="1" i="0">
+                <a:solidFill>
+                  <a:srgbClr val="012169"/>
+                </a:solidFill>
+                <a:latin typeface="Roboto"/>
+              </a:rPr>
+              <a:t>What Devin will do</a:t>
+            </a:r>
+          </a:p>
+        </p:txBody>
+      </p:sp>
+      <p:sp>
+        <p:nvSpPr>
+          <p:cNvPr id="14" name="TextBox 13"/>
           <p:cNvSpPr txBox="1"/>
           <p:nvPr/>
         </p:nvSpPr>
         <p:spPr>
           <a:xfrm>
-            <a:off x="2286000" y="3639312"/>
-            <a:ext cx="9144000" cy="365760"/>
+            <a:off x="5733288" y="1956816"/>
+            <a:ext cx="5806440" cy="3337560"/>
           </a:xfrm>
           <a:prstGeom prst="rect">
             <a:avLst/>
@@ -15993,375 +17024,148 @@
           <a:p>
             <a:pPr algn="l">
               <a:lnSpc>
-                <a:spcPct val="100000"/>
-              </a:lnSpc>
-              <a:spcAft>
-                <a:spcPts val="600"/>
-              </a:spcAft>
-            </a:pPr>
-            <a:r>
-              <a:rPr sz="1450" b="1" i="0">
-                <a:solidFill>
-                  <a:srgbClr val="012169"/>
-                </a:solidFill>
-                <a:latin typeface="Roboto"/>
-              </a:rPr>
-              <a:t>Downstream in parallel</a:t>
-            </a:r>
-          </a:p>
-        </p:txBody>
-      </p:sp>
-      <p:sp>
-        <p:nvSpPr>
-          <p:cNvPr id="21" name="TextBox 20"/>
-          <p:cNvSpPr txBox="1"/>
-          <p:nvPr/>
-        </p:nvSpPr>
-        <p:spPr>
-          <a:xfrm>
-            <a:off x="2286000" y="3986784"/>
-            <a:ext cx="9144000" cy="411480"/>
-          </a:xfrm>
-          <a:prstGeom prst="rect">
-            <a:avLst/>
-          </a:prstGeom>
-          <a:noFill/>
-        </p:spPr>
-        <p:txBody>
-          <a:bodyPr wrap="square" anchor="t">
-            <a:spAutoFit/>
-          </a:bodyPr>
-          <a:lstStyle/>
+                <a:spcPct val="105000"/>
+              </a:lnSpc>
+              <a:spcAft>
+                <a:spcPts val="500"/>
+              </a:spcAft>
+            </a:pPr>
+            <a:r>
+              <a:rPr sz="1400" b="1" i="0">
+                <a:solidFill>
+                  <a:srgbClr val="E31837"/>
+                </a:solidFill>
+                <a:latin typeface="Roboto"/>
+              </a:rPr>
+              <a:t>1. </a:t>
+            </a:r>
+            <a:r>
+              <a:rPr sz="1400" b="0" i="0">
+                <a:solidFill>
+                  <a:srgbClr val="1C2430"/>
+                </a:solidFill>
+                <a:latin typeface="Roboto"/>
+              </a:rPr>
+              <a:t>Baseline — build + tests green</a:t>
+            </a:r>
+          </a:p>
           <a:p>
             <a:pPr algn="l">
               <a:lnSpc>
-                <a:spcPct val="100000"/>
-              </a:lnSpc>
-              <a:spcAft>
-                <a:spcPts val="600"/>
-              </a:spcAft>
-            </a:pPr>
-            <a:r>
-              <a:rPr sz="1200" b="0" i="0">
+                <a:spcPct val="105000"/>
+              </a:lnSpc>
+              <a:spcAft>
+                <a:spcPts val="500"/>
+              </a:spcAft>
+            </a:pPr>
+            <a:r>
+              <a:rPr sz="1400" b="1" i="0">
+                <a:solidFill>
+                  <a:srgbClr val="E31837"/>
+                </a:solidFill>
+                <a:latin typeface="Roboto"/>
+              </a:rPr>
+              <a:t>2. </a:t>
+            </a:r>
+            <a:r>
+              <a:rPr sz="1400" b="0" i="0">
                 <a:solidFill>
                   <a:srgbClr val="1C2430"/>
                 </a:solidFill>
                 <a:latin typeface="Roboto"/>
               </a:rPr>
-              <a:t>One Devin per consuming app — the coordination tax collapses</a:t>
-            </a:r>
-          </a:p>
-        </p:txBody>
-      </p:sp>
-      <p:sp>
-        <p:nvSpPr>
-          <p:cNvPr id="22" name="Rounded Rectangle 21"/>
-          <p:cNvSpPr/>
-          <p:nvPr/>
-        </p:nvSpPr>
-        <p:spPr>
-          <a:xfrm>
-            <a:off x="502920" y="4553712"/>
-            <a:ext cx="11201400" cy="932688"/>
-          </a:xfrm>
-          <a:prstGeom prst="roundRect">
-            <a:avLst>
-              <a:gd name="adj" fmla="val 10000"/>
-            </a:avLst>
-          </a:prstGeom>
-          <a:solidFill>
-            <a:srgbClr val="FFFFFF"/>
-          </a:solidFill>
-          <a:ln>
-            <a:noFill/>
-          </a:ln>
-          <a:effectLst/>
-        </p:spPr>
-        <p:style>
-          <a:lnRef idx="1">
-            <a:schemeClr val="accent1"/>
-          </a:lnRef>
-          <a:fillRef idx="3">
-            <a:schemeClr val="accent1"/>
-          </a:fillRef>
-          <a:effectRef idx="2">
-            <a:schemeClr val="accent1"/>
-          </a:effectRef>
-          <a:fontRef idx="minor">
-            <a:schemeClr val="lt1"/>
-          </a:fontRef>
-        </p:style>
-        <p:txBody>
-          <a:bodyPr rtlCol="0" anchor="ctr"/>
-          <a:lstStyle/>
-          <a:p>
-            <a:pPr algn="ctr"/>
-          </a:p>
-        </p:txBody>
-      </p:sp>
-      <p:sp>
-        <p:nvSpPr>
-          <p:cNvPr id="23" name="Rounded Rectangle 22"/>
-          <p:cNvSpPr/>
-          <p:nvPr/>
-        </p:nvSpPr>
-        <p:spPr>
-          <a:xfrm>
-            <a:off x="685800" y="4718304"/>
-            <a:ext cx="1371600" cy="603504"/>
-          </a:xfrm>
-          <a:prstGeom prst="roundRect">
-            <a:avLst>
-              <a:gd name="adj" fmla="val 18000"/>
-            </a:avLst>
-          </a:prstGeom>
-          <a:solidFill>
-            <a:srgbClr val="012169"/>
-          </a:solidFill>
-          <a:ln>
-            <a:noFill/>
-          </a:ln>
-          <a:effectLst/>
-        </p:spPr>
-        <p:style>
-          <a:lnRef idx="1">
-            <a:schemeClr val="accent1"/>
-          </a:lnRef>
-          <a:fillRef idx="3">
-            <a:schemeClr val="accent1"/>
-          </a:fillRef>
-          <a:effectRef idx="2">
-            <a:schemeClr val="accent1"/>
-          </a:effectRef>
-          <a:fontRef idx="minor">
-            <a:schemeClr val="lt1"/>
-          </a:fontRef>
-        </p:style>
-        <p:txBody>
-          <a:bodyPr rtlCol="0" anchor="ctr"/>
-          <a:lstStyle/>
-          <a:p>
-            <a:pPr algn="ctr"/>
-          </a:p>
-        </p:txBody>
-      </p:sp>
-      <p:sp>
-        <p:nvSpPr>
-          <p:cNvPr id="24" name="TextBox 23"/>
-          <p:cNvSpPr txBox="1"/>
-          <p:nvPr/>
-        </p:nvSpPr>
-        <p:spPr>
-          <a:xfrm>
-            <a:off x="685800" y="4855464"/>
-            <a:ext cx="1371600" cy="365760"/>
-          </a:xfrm>
-          <a:prstGeom prst="rect">
-            <a:avLst/>
-          </a:prstGeom>
-          <a:noFill/>
-        </p:spPr>
-        <p:txBody>
-          <a:bodyPr wrap="square" anchor="t">
-            <a:spAutoFit/>
-          </a:bodyPr>
-          <a:lstStyle/>
-          <a:p>
-            <a:pPr algn="ctr">
-              <a:lnSpc>
-                <a:spcPct val="100000"/>
-              </a:lnSpc>
-              <a:spcAft>
-                <a:spcPts val="600"/>
-              </a:spcAft>
-            </a:pPr>
-            <a:r>
-              <a:rPr sz="1200" b="1" i="0">
-                <a:solidFill>
-                  <a:srgbClr val="FFFFFF"/>
-                </a:solidFill>
-                <a:latin typeface="Roboto"/>
-              </a:rPr>
-              <a:t>Ongoing</a:t>
-            </a:r>
-          </a:p>
-        </p:txBody>
-      </p:sp>
-      <p:sp>
-        <p:nvSpPr>
-          <p:cNvPr id="25" name="TextBox 24"/>
-          <p:cNvSpPr txBox="1"/>
-          <p:nvPr/>
-        </p:nvSpPr>
-        <p:spPr>
-          <a:xfrm>
-            <a:off x="2286000" y="4663440"/>
-            <a:ext cx="9144000" cy="365760"/>
-          </a:xfrm>
-          <a:prstGeom prst="rect">
-            <a:avLst/>
-          </a:prstGeom>
-          <a:noFill/>
-        </p:spPr>
-        <p:txBody>
-          <a:bodyPr wrap="square" anchor="t">
-            <a:spAutoFit/>
-          </a:bodyPr>
-          <a:lstStyle/>
+              <a:t>Stepwise ng update 14→15→16→17→18</a:t>
+            </a:r>
+          </a:p>
           <a:p>
             <a:pPr algn="l">
               <a:lnSpc>
-                <a:spcPct val="100000"/>
-              </a:lnSpc>
-              <a:spcAft>
-                <a:spcPts val="600"/>
-              </a:spcAft>
-            </a:pPr>
-            <a:r>
-              <a:rPr sz="1450" b="1" i="0">
-                <a:solidFill>
-                  <a:srgbClr val="012169"/>
-                </a:solidFill>
-                <a:latin typeface="Roboto"/>
-              </a:rPr>
-              <a:t>Evidence as you go</a:t>
-            </a:r>
-          </a:p>
-        </p:txBody>
-      </p:sp>
-      <p:sp>
-        <p:nvSpPr>
-          <p:cNvPr id="26" name="TextBox 25"/>
-          <p:cNvSpPr txBox="1"/>
-          <p:nvPr/>
-        </p:nvSpPr>
-        <p:spPr>
-          <a:xfrm>
-            <a:off x="2286000" y="5010912"/>
-            <a:ext cx="9144000" cy="411480"/>
-          </a:xfrm>
-          <a:prstGeom prst="rect">
-            <a:avLst/>
-          </a:prstGeom>
-          <a:noFill/>
-        </p:spPr>
-        <p:txBody>
-          <a:bodyPr wrap="square" anchor="t">
-            <a:spAutoFit/>
-          </a:bodyPr>
-          <a:lstStyle/>
+                <a:spcPct val="105000"/>
+              </a:lnSpc>
+              <a:spcAft>
+                <a:spcPts val="500"/>
+              </a:spcAft>
+            </a:pPr>
+            <a:r>
+              <a:rPr sz="1400" b="1" i="0">
+                <a:solidFill>
+                  <a:srgbClr val="E31837"/>
+                </a:solidFill>
+                <a:latin typeface="Roboto"/>
+              </a:rPr>
+              <a:t>3. </a:t>
+            </a:r>
+            <a:r>
+              <a:rPr sz="1400" b="0" i="0">
+                <a:solidFill>
+                  <a:srgbClr val="1C2430"/>
+                </a:solidFill>
+                <a:latin typeface="Roboto"/>
+              </a:rPr>
+              <a:t>Modernize 5 legacy patterns</a:t>
+            </a:r>
+          </a:p>
           <a:p>
             <a:pPr algn="l">
               <a:lnSpc>
-                <a:spcPct val="100000"/>
-              </a:lnSpc>
-              <a:spcAft>
-                <a:spcPts val="600"/>
-              </a:spcAft>
-            </a:pPr>
-            <a:r>
-              <a:rPr sz="1200" b="0" i="0">
+                <a:spcPct val="105000"/>
+              </a:lnSpc>
+              <a:spcAft>
+                <a:spcPts val="500"/>
+              </a:spcAft>
+            </a:pPr>
+            <a:r>
+              <a:rPr sz="1400" b="1" i="0">
+                <a:solidFill>
+                  <a:srgbClr val="E31837"/>
+                </a:solidFill>
+                <a:latin typeface="Roboto"/>
+              </a:rPr>
+              <a:t>4. </a:t>
+            </a:r>
+            <a:r>
+              <a:rPr sz="1400" b="0" i="0">
                 <a:solidFill>
                   <a:srgbClr val="1C2430"/>
                 </a:solidFill>
                 <a:latin typeface="Roboto"/>
               </a:rPr>
-              <a:t>Logs + tests + scans = audit file, automatically</a:t>
-            </a:r>
-          </a:p>
-        </p:txBody>
-      </p:sp>
-      <p:sp>
-        <p:nvSpPr>
-          <p:cNvPr id="27" name="Rounded Rectangle 26"/>
-          <p:cNvSpPr/>
-          <p:nvPr/>
-        </p:nvSpPr>
-        <p:spPr>
-          <a:xfrm>
-            <a:off x="502920" y="5669280"/>
-            <a:ext cx="11201400" cy="658368"/>
-          </a:xfrm>
-          <a:prstGeom prst="roundRect">
-            <a:avLst>
-              <a:gd name="adj" fmla="val 10000"/>
-            </a:avLst>
-          </a:prstGeom>
-          <a:solidFill>
-            <a:srgbClr val="012169"/>
-          </a:solidFill>
-          <a:ln>
-            <a:noFill/>
-          </a:ln>
-          <a:effectLst/>
-        </p:spPr>
-        <p:style>
-          <a:lnRef idx="1">
-            <a:schemeClr val="accent1"/>
-          </a:lnRef>
-          <a:fillRef idx="3">
-            <a:schemeClr val="accent1"/>
-          </a:fillRef>
-          <a:effectRef idx="2">
-            <a:schemeClr val="accent1"/>
-          </a:effectRef>
-          <a:fontRef idx="minor">
-            <a:schemeClr val="lt1"/>
-          </a:fontRef>
-        </p:style>
-        <p:txBody>
-          <a:bodyPr rtlCol="0" anchor="ctr"/>
-          <a:lstStyle/>
-          <a:p>
-            <a:pPr algn="ctr"/>
-          </a:p>
-        </p:txBody>
-      </p:sp>
-      <p:sp>
-        <p:nvSpPr>
-          <p:cNvPr id="28" name="TextBox 27"/>
-          <p:cNvSpPr txBox="1"/>
-          <p:nvPr/>
-        </p:nvSpPr>
-        <p:spPr>
-          <a:xfrm>
-            <a:off x="777240" y="5788152"/>
-            <a:ext cx="10698480" cy="457200"/>
-          </a:xfrm>
-          <a:prstGeom prst="rect">
-            <a:avLst/>
-          </a:prstGeom>
-          <a:noFill/>
-        </p:spPr>
-        <p:txBody>
-          <a:bodyPr wrap="square" anchor="t">
-            <a:spAutoFit/>
-          </a:bodyPr>
-          <a:lstStyle/>
+              <a:t>Validate — zero legacy patterns remain</a:t>
+            </a:r>
+          </a:p>
           <a:p>
             <a:pPr algn="l">
               <a:lnSpc>
-                <a:spcPct val="100000"/>
-              </a:lnSpc>
-              <a:spcAft>
-                <a:spcPts val="600"/>
-              </a:spcAft>
-            </a:pPr>
-            <a:r>
-              <a:rPr sz="1500" b="1" i="0">
-                <a:solidFill>
-                  <a:srgbClr val="FFFFFF"/>
-                </a:solidFill>
-                <a:latin typeface="Roboto"/>
-              </a:rPr>
-              <a:t>Devin changes who does the labor — never who's in control.</a:t>
-            </a:r>
-          </a:p>
-        </p:txBody>
-      </p:sp>
-      <p:sp>
-        <p:nvSpPr>
-          <p:cNvPr id="29" name="TextBox 28"/>
+                <a:spcPct val="105000"/>
+              </a:lnSpc>
+              <a:spcAft>
+                <a:spcPts val="500"/>
+              </a:spcAft>
+            </a:pPr>
+            <a:r>
+              <a:rPr sz="1400" b="1" i="0">
+                <a:solidFill>
+                  <a:srgbClr val="E31837"/>
+                </a:solidFill>
+                <a:latin typeface="Roboto"/>
+              </a:rPr>
+              <a:t>5. </a:t>
+            </a:r>
+            <a:r>
+              <a:rPr sz="1400" b="0" i="0">
+                <a:solidFill>
+                  <a:srgbClr val="1C2430"/>
+                </a:solidFill>
+                <a:latin typeface="Roboto"/>
+              </a:rPr>
+              <a:t>Deliver — reviewable PRs</a:t>
+            </a:r>
+          </a:p>
+        </p:txBody>
+      </p:sp>
+      <p:sp>
+        <p:nvSpPr>
+          <p:cNvPr id="15" name="TextBox 14"/>
           <p:cNvSpPr txBox="1"/>
           <p:nvPr/>
         </p:nvSpPr>
@@ -16544,7 +17348,7 @@
                 </a:solidFill>
                 <a:latin typeface="Roboto"/>
               </a:rPr>
-              <a:t>WHAT GOOD LOOKS LIKE</a:t>
+              <a:t>FROM DEMO TO YOUR REALITY</a:t>
             </a:r>
           </a:p>
         </p:txBody>
@@ -16586,7 +17390,7 @@
                 </a:solidFill>
                 <a:latin typeface="Roboto"/>
               </a:rPr>
-              <a:t>The end state: BofA running on Devin</a:t>
+              <a:t>How this maps to BofA's actual migration</a:t>
             </a:r>
           </a:p>
         </p:txBody>
@@ -16642,11 +17446,11 @@
         <p:spPr>
           <a:xfrm>
             <a:off x="502920" y="1481328"/>
-            <a:ext cx="3611880" cy="2286000"/>
+            <a:ext cx="11201400" cy="932688"/>
           </a:xfrm>
           <a:prstGeom prst="roundRect">
             <a:avLst>
-              <a:gd name="adj" fmla="val 6000"/>
+              <a:gd name="adj" fmla="val 10000"/>
             </a:avLst>
           </a:prstGeom>
           <a:solidFill>
@@ -16681,20 +17485,22 @@
       </p:sp>
       <p:sp>
         <p:nvSpPr>
-          <p:cNvPr id="8" name="Rectangle 7"/>
+          <p:cNvPr id="8" name="Rounded Rectangle 7"/>
           <p:cNvSpPr/>
           <p:nvPr/>
         </p:nvSpPr>
         <p:spPr>
           <a:xfrm>
-            <a:off x="502920" y="1591056"/>
-            <a:ext cx="54864" cy="2066543"/>
-          </a:xfrm>
-          <a:prstGeom prst="rect">
-            <a:avLst/>
+            <a:off x="685800" y="1645920"/>
+            <a:ext cx="1371600" cy="603504"/>
+          </a:xfrm>
+          <a:prstGeom prst="roundRect">
+            <a:avLst>
+              <a:gd name="adj" fmla="val 18000"/>
+            </a:avLst>
           </a:prstGeom>
           <a:solidFill>
-            <a:srgbClr val="E31837"/>
+            <a:srgbClr val="012169"/>
           </a:solidFill>
           <a:ln>
             <a:noFill/>
@@ -16731,8 +17537,8 @@
         </p:nvSpPr>
         <p:spPr>
           <a:xfrm>
-            <a:off x="704088" y="1591056"/>
-            <a:ext cx="3246120" cy="365760"/>
+            <a:off x="685800" y="1783080"/>
+            <a:ext cx="1371600" cy="365760"/>
           </a:xfrm>
           <a:prstGeom prst="rect">
             <a:avLst/>
@@ -16745,7 +17551,7 @@
           </a:bodyPr>
           <a:lstStyle/>
           <a:p>
-            <a:pPr algn="l">
+            <a:pPr algn="ctr">
               <a:lnSpc>
                 <a:spcPct val="100000"/>
               </a:lnSpc>
@@ -16754,13 +17560,13 @@
               </a:spcAft>
             </a:pPr>
             <a:r>
-              <a:rPr sz="1400" b="1" i="0">
-                <a:solidFill>
-                  <a:srgbClr val="012169"/>
-                </a:solidFill>
-                <a:latin typeface="Roboto"/>
-              </a:rPr>
-              <a:t>This migration</a:t>
+              <a:rPr sz="1200" b="1" i="0">
+                <a:solidFill>
+                  <a:srgbClr val="FFFFFF"/>
+                </a:solidFill>
+                <a:latin typeface="Roboto"/>
+              </a:rPr>
+              <a:t>Week 0</a:t>
             </a:r>
           </a:p>
         </p:txBody>
@@ -16773,8 +17579,8 @@
         </p:nvSpPr>
         <p:spPr>
           <a:xfrm>
-            <a:off x="704088" y="1956816"/>
-            <a:ext cx="3246120" cy="1691640"/>
+            <a:off x="2286000" y="1591056"/>
+            <a:ext cx="9144000" cy="365760"/>
           </a:xfrm>
           <a:prstGeom prst="rect">
             <a:avLst/>
@@ -16789,76 +17595,298 @@
           <a:p>
             <a:pPr algn="l">
               <a:lnSpc>
-                <a:spcPct val="105000"/>
-              </a:lnSpc>
-              <a:spcAft>
-                <a:spcPts val="500"/>
-              </a:spcAft>
-            </a:pPr>
-            <a:r>
-              <a:rPr sz="1400" b="0" i="0">
+                <a:spcPct val="100000"/>
+              </a:lnSpc>
+              <a:spcAft>
+                <a:spcPts val="600"/>
+              </a:spcAft>
+            </a:pPr>
+            <a:r>
+              <a:rPr sz="1450" b="1" i="0">
+                <a:solidFill>
+                  <a:srgbClr val="012169"/>
+                </a:solidFill>
+                <a:latin typeface="Roboto"/>
+              </a:rPr>
+              <a:t>Scope &amp; safety rails</a:t>
+            </a:r>
+          </a:p>
+        </p:txBody>
+      </p:sp>
+      <p:sp>
+        <p:nvSpPr>
+          <p:cNvPr id="11" name="TextBox 10"/>
+          <p:cNvSpPr txBox="1"/>
+          <p:nvPr/>
+        </p:nvSpPr>
+        <p:spPr>
+          <a:xfrm>
+            <a:off x="2286000" y="1938528"/>
+            <a:ext cx="9144000" cy="411480"/>
+          </a:xfrm>
+          <a:prstGeom prst="rect">
+            <a:avLst/>
+          </a:prstGeom>
+          <a:noFill/>
+        </p:spPr>
+        <p:txBody>
+          <a:bodyPr wrap="square" anchor="t">
+            <a:spAutoFit/>
+          </a:bodyPr>
+          <a:lstStyle/>
+          <a:p>
+            <a:pPr algn="l">
+              <a:lnSpc>
+                <a:spcPct val="100000"/>
+              </a:lnSpc>
+              <a:spcAft>
+                <a:spcPts val="600"/>
+              </a:spcAft>
+            </a:pPr>
+            <a:r>
+              <a:rPr sz="1200" b="0" i="0">
                 <a:solidFill>
                   <a:srgbClr val="1C2430"/>
                 </a:solidFill>
                 <a:latin typeface="Roboto"/>
               </a:rPr>
-              <a:t>Angular 18 before the deadline</a:t>
-            </a:r>
-          </a:p>
-          <a:p>
-            <a:pPr algn="l">
-              <a:lnSpc>
-                <a:spcPct val="105000"/>
-              </a:lnSpc>
-              <a:spcAft>
-                <a:spcPts val="500"/>
-              </a:spcAft>
-            </a:pPr>
-            <a:r>
-              <a:rPr sz="1400" b="0" i="0">
-                <a:solidFill>
-                  <a:srgbClr val="1C2430"/>
-                </a:solidFill>
-                <a:latin typeface="Roboto"/>
-              </a:rPr>
-              <a:t>12+ teams unbroken</a:t>
-            </a:r>
-          </a:p>
-          <a:p>
-            <a:pPr algn="l">
-              <a:lnSpc>
-                <a:spcPct val="105000"/>
-              </a:lnSpc>
-              <a:spcAft>
-                <a:spcPts val="500"/>
-              </a:spcAft>
-            </a:pPr>
-            <a:r>
-              <a:rPr sz="1400" b="0" i="0">
-                <a:solidFill>
-                  <a:srgbClr val="1C2430"/>
-                </a:solidFill>
-                <a:latin typeface="Roboto"/>
-              </a:rPr>
-              <a:t>Audit trail, automatic</a:t>
-            </a:r>
-          </a:p>
-        </p:txBody>
-      </p:sp>
-      <p:sp>
-        <p:nvSpPr>
-          <p:cNvPr id="11" name="Rounded Rectangle 10"/>
+              <a:t>Security review · success criteria</a:t>
+            </a:r>
+          </a:p>
+        </p:txBody>
+      </p:sp>
+      <p:sp>
+        <p:nvSpPr>
+          <p:cNvPr id="12" name="Rounded Rectangle 11"/>
           <p:cNvSpPr/>
           <p:nvPr/>
         </p:nvSpPr>
         <p:spPr>
           <a:xfrm>
-            <a:off x="4297680" y="1481328"/>
-            <a:ext cx="3611880" cy="2286000"/>
+            <a:off x="502920" y="2505456"/>
+            <a:ext cx="11201400" cy="932688"/>
           </a:xfrm>
           <a:prstGeom prst="roundRect">
             <a:avLst>
-              <a:gd name="adj" fmla="val 6000"/>
+              <a:gd name="adj" fmla="val 10000"/>
+            </a:avLst>
+          </a:prstGeom>
+          <a:solidFill>
+            <a:srgbClr val="FFFFFF"/>
+          </a:solidFill>
+          <a:ln>
+            <a:noFill/>
+          </a:ln>
+          <a:effectLst/>
+        </p:spPr>
+        <p:style>
+          <a:lnRef idx="1">
+            <a:schemeClr val="accent1"/>
+          </a:lnRef>
+          <a:fillRef idx="3">
+            <a:schemeClr val="accent1"/>
+          </a:fillRef>
+          <a:effectRef idx="2">
+            <a:schemeClr val="accent1"/>
+          </a:effectRef>
+          <a:fontRef idx="minor">
+            <a:schemeClr val="lt1"/>
+          </a:fontRef>
+        </p:style>
+        <p:txBody>
+          <a:bodyPr rtlCol="0" anchor="ctr"/>
+          <a:lstStyle/>
+          <a:p>
+            <a:pPr algn="ctr"/>
+          </a:p>
+        </p:txBody>
+      </p:sp>
+      <p:sp>
+        <p:nvSpPr>
+          <p:cNvPr id="13" name="Rounded Rectangle 12"/>
+          <p:cNvSpPr/>
+          <p:nvPr/>
+        </p:nvSpPr>
+        <p:spPr>
+          <a:xfrm>
+            <a:off x="685800" y="2670048"/>
+            <a:ext cx="1371600" cy="603504"/>
+          </a:xfrm>
+          <a:prstGeom prst="roundRect">
+            <a:avLst>
+              <a:gd name="adj" fmla="val 18000"/>
+            </a:avLst>
+          </a:prstGeom>
+          <a:solidFill>
+            <a:srgbClr val="012169"/>
+          </a:solidFill>
+          <a:ln>
+            <a:noFill/>
+          </a:ln>
+          <a:effectLst/>
+        </p:spPr>
+        <p:style>
+          <a:lnRef idx="1">
+            <a:schemeClr val="accent1"/>
+          </a:lnRef>
+          <a:fillRef idx="3">
+            <a:schemeClr val="accent1"/>
+          </a:fillRef>
+          <a:effectRef idx="2">
+            <a:schemeClr val="accent1"/>
+          </a:effectRef>
+          <a:fontRef idx="minor">
+            <a:schemeClr val="lt1"/>
+          </a:fontRef>
+        </p:style>
+        <p:txBody>
+          <a:bodyPr rtlCol="0" anchor="ctr"/>
+          <a:lstStyle/>
+          <a:p>
+            <a:pPr algn="ctr"/>
+          </a:p>
+        </p:txBody>
+      </p:sp>
+      <p:sp>
+        <p:nvSpPr>
+          <p:cNvPr id="14" name="TextBox 13"/>
+          <p:cNvSpPr txBox="1"/>
+          <p:nvPr/>
+        </p:nvSpPr>
+        <p:spPr>
+          <a:xfrm>
+            <a:off x="685800" y="2807208"/>
+            <a:ext cx="1371600" cy="365760"/>
+          </a:xfrm>
+          <a:prstGeom prst="rect">
+            <a:avLst/>
+          </a:prstGeom>
+          <a:noFill/>
+        </p:spPr>
+        <p:txBody>
+          <a:bodyPr wrap="square" anchor="t">
+            <a:spAutoFit/>
+          </a:bodyPr>
+          <a:lstStyle/>
+          <a:p>
+            <a:pPr algn="ctr">
+              <a:lnSpc>
+                <a:spcPct val="100000"/>
+              </a:lnSpc>
+              <a:spcAft>
+                <a:spcPts val="600"/>
+              </a:spcAft>
+            </a:pPr>
+            <a:r>
+              <a:rPr sz="1200" b="1" i="0">
+                <a:solidFill>
+                  <a:srgbClr val="FFFFFF"/>
+                </a:solidFill>
+                <a:latin typeface="Roboto"/>
+              </a:rPr>
+              <a:t>Weeks 1–2</a:t>
+            </a:r>
+          </a:p>
+        </p:txBody>
+      </p:sp>
+      <p:sp>
+        <p:nvSpPr>
+          <p:cNvPr id="15" name="TextBox 14"/>
+          <p:cNvSpPr txBox="1"/>
+          <p:nvPr/>
+        </p:nvSpPr>
+        <p:spPr>
+          <a:xfrm>
+            <a:off x="2286000" y="2615184"/>
+            <a:ext cx="9144000" cy="365760"/>
+          </a:xfrm>
+          <a:prstGeom prst="rect">
+            <a:avLst/>
+          </a:prstGeom>
+          <a:noFill/>
+        </p:spPr>
+        <p:txBody>
+          <a:bodyPr wrap="square" anchor="t">
+            <a:spAutoFit/>
+          </a:bodyPr>
+          <a:lstStyle/>
+          <a:p>
+            <a:pPr algn="l">
+              <a:lnSpc>
+                <a:spcPct val="100000"/>
+              </a:lnSpc>
+              <a:spcAft>
+                <a:spcPts val="600"/>
+              </a:spcAft>
+            </a:pPr>
+            <a:r>
+              <a:rPr sz="1450" b="1" i="0">
+                <a:solidFill>
+                  <a:srgbClr val="012169"/>
+                </a:solidFill>
+                <a:latin typeface="Roboto"/>
+              </a:rPr>
+              <a:t>Shared library first</a:t>
+            </a:r>
+          </a:p>
+        </p:txBody>
+      </p:sp>
+      <p:sp>
+        <p:nvSpPr>
+          <p:cNvPr id="16" name="TextBox 15"/>
+          <p:cNvSpPr txBox="1"/>
+          <p:nvPr/>
+        </p:nvSpPr>
+        <p:spPr>
+          <a:xfrm>
+            <a:off x="2286000" y="2962656"/>
+            <a:ext cx="9144000" cy="411480"/>
+          </a:xfrm>
+          <a:prstGeom prst="rect">
+            <a:avLst/>
+          </a:prstGeom>
+          <a:noFill/>
+        </p:spPr>
+        <p:txBody>
+          <a:bodyPr wrap="square" anchor="t">
+            <a:spAutoFit/>
+          </a:bodyPr>
+          <a:lstStyle/>
+          <a:p>
+            <a:pPr algn="l">
+              <a:lnSpc>
+                <a:spcPct val="100000"/>
+              </a:lnSpc>
+              <a:spcAft>
+                <a:spcPts val="600"/>
+              </a:spcAft>
+            </a:pPr>
+            <a:r>
+              <a:rPr sz="1200" b="0" i="0">
+                <a:solidFill>
+                  <a:srgbClr val="1C2430"/>
+                </a:solidFill>
+                <a:latin typeface="Roboto"/>
+              </a:rPr>
+              <a:t>Root of the dependency tree — your team reviews every PR</a:t>
+            </a:r>
+          </a:p>
+        </p:txBody>
+      </p:sp>
+      <p:sp>
+        <p:nvSpPr>
+          <p:cNvPr id="17" name="Rounded Rectangle 16"/>
+          <p:cNvSpPr/>
+          <p:nvPr/>
+        </p:nvSpPr>
+        <p:spPr>
+          <a:xfrm>
+            <a:off x="502920" y="3529584"/>
+            <a:ext cx="11201400" cy="932688"/>
+          </a:xfrm>
+          <a:prstGeom prst="roundRect">
+            <a:avLst>
+              <a:gd name="adj" fmla="val 10000"/>
             </a:avLst>
           </a:prstGeom>
           <a:solidFill>
@@ -16893,20 +17921,22 @@
       </p:sp>
       <p:sp>
         <p:nvSpPr>
-          <p:cNvPr id="12" name="Rectangle 11"/>
+          <p:cNvPr id="18" name="Rounded Rectangle 17"/>
           <p:cNvSpPr/>
           <p:nvPr/>
         </p:nvSpPr>
         <p:spPr>
           <a:xfrm>
-            <a:off x="4297680" y="1591056"/>
-            <a:ext cx="54864" cy="2066543"/>
-          </a:xfrm>
-          <a:prstGeom prst="rect">
-            <a:avLst/>
+            <a:off x="685800" y="3694176"/>
+            <a:ext cx="1371600" cy="603504"/>
+          </a:xfrm>
+          <a:prstGeom prst="roundRect">
+            <a:avLst>
+              <a:gd name="adj" fmla="val 18000"/>
+            </a:avLst>
           </a:prstGeom>
           <a:solidFill>
-            <a:srgbClr val="E31837"/>
+            <a:srgbClr val="012169"/>
           </a:solidFill>
           <a:ln>
             <a:noFill/>
@@ -16937,14 +17967,14 @@
       </p:sp>
       <p:sp>
         <p:nvSpPr>
-          <p:cNvPr id="13" name="TextBox 12"/>
+          <p:cNvPr id="19" name="TextBox 18"/>
           <p:cNvSpPr txBox="1"/>
           <p:nvPr/>
         </p:nvSpPr>
         <p:spPr>
           <a:xfrm>
-            <a:off x="4498848" y="1591056"/>
-            <a:ext cx="3246120" cy="365760"/>
+            <a:off x="685800" y="3831336"/>
+            <a:ext cx="1371600" cy="365760"/>
           </a:xfrm>
           <a:prstGeom prst="rect">
             <a:avLst/>
@@ -16957,7 +17987,7 @@
           </a:bodyPr>
           <a:lstStyle/>
           <a:p>
-            <a:pPr algn="l">
+            <a:pPr algn="ctr">
               <a:lnSpc>
                 <a:spcPct val="100000"/>
               </a:lnSpc>
@@ -16966,27 +17996,27 @@
               </a:spcAft>
             </a:pPr>
             <a:r>
-              <a:rPr sz="1400" b="1" i="0">
-                <a:solidFill>
-                  <a:srgbClr val="012169"/>
-                </a:solidFill>
-                <a:latin typeface="Roboto"/>
-              </a:rPr>
-              <a:t>Your engineers</a:t>
-            </a:r>
-          </a:p>
-        </p:txBody>
-      </p:sp>
-      <p:sp>
-        <p:nvSpPr>
-          <p:cNvPr id="14" name="TextBox 13"/>
+              <a:rPr sz="1200" b="1" i="0">
+                <a:solidFill>
+                  <a:srgbClr val="FFFFFF"/>
+                </a:solidFill>
+                <a:latin typeface="Roboto"/>
+              </a:rPr>
+              <a:t>Weeks 2–3</a:t>
+            </a:r>
+          </a:p>
+        </p:txBody>
+      </p:sp>
+      <p:sp>
+        <p:nvSpPr>
+          <p:cNvPr id="20" name="TextBox 19"/>
           <p:cNvSpPr txBox="1"/>
           <p:nvPr/>
         </p:nvSpPr>
         <p:spPr>
           <a:xfrm>
-            <a:off x="4498848" y="1956816"/>
-            <a:ext cx="3246120" cy="1691640"/>
+            <a:off x="2286000" y="3639312"/>
+            <a:ext cx="9144000" cy="365760"/>
           </a:xfrm>
           <a:prstGeom prst="rect">
             <a:avLst/>
@@ -17001,61 +18031,84 @@
           <a:p>
             <a:pPr algn="l">
               <a:lnSpc>
-                <a:spcPct val="105000"/>
-              </a:lnSpc>
-              <a:spcAft>
-                <a:spcPts val="500"/>
-              </a:spcAft>
-            </a:pPr>
-            <a:r>
-              <a:rPr sz="1400" b="0" i="0">
+                <a:spcPct val="100000"/>
+              </a:lnSpc>
+              <a:spcAft>
+                <a:spcPts val="600"/>
+              </a:spcAft>
+            </a:pPr>
+            <a:r>
+              <a:rPr sz="1450" b="1" i="0">
+                <a:solidFill>
+                  <a:srgbClr val="012169"/>
+                </a:solidFill>
+                <a:latin typeface="Roboto"/>
+              </a:rPr>
+              <a:t>Downstream in parallel</a:t>
+            </a:r>
+          </a:p>
+        </p:txBody>
+      </p:sp>
+      <p:sp>
+        <p:nvSpPr>
+          <p:cNvPr id="21" name="TextBox 20"/>
+          <p:cNvSpPr txBox="1"/>
+          <p:nvPr/>
+        </p:nvSpPr>
+        <p:spPr>
+          <a:xfrm>
+            <a:off x="2286000" y="3986784"/>
+            <a:ext cx="9144000" cy="411480"/>
+          </a:xfrm>
+          <a:prstGeom prst="rect">
+            <a:avLst/>
+          </a:prstGeom>
+          <a:noFill/>
+        </p:spPr>
+        <p:txBody>
+          <a:bodyPr wrap="square" anchor="t">
+            <a:spAutoFit/>
+          </a:bodyPr>
+          <a:lstStyle/>
+          <a:p>
+            <a:pPr algn="l">
+              <a:lnSpc>
+                <a:spcPct val="100000"/>
+              </a:lnSpc>
+              <a:spcAft>
+                <a:spcPts val="600"/>
+              </a:spcAft>
+            </a:pPr>
+            <a:r>
+              <a:rPr sz="1200" b="0" i="0">
                 <a:solidFill>
                   <a:srgbClr val="1C2430"/>
                 </a:solidFill>
                 <a:latin typeface="Roboto"/>
               </a:rPr>
-              <a:t>Back on revenue features</a:t>
-            </a:r>
-          </a:p>
-          <a:p>
-            <a:pPr algn="l">
-              <a:lnSpc>
-                <a:spcPct val="105000"/>
-              </a:lnSpc>
-              <a:spcAft>
-                <a:spcPts val="500"/>
-              </a:spcAft>
-            </a:pPr>
-            <a:r>
-              <a:rPr sz="1400" b="0" i="0">
-                <a:solidFill>
-                  <a:srgbClr val="1C2430"/>
-                </a:solidFill>
-                <a:latin typeface="Roboto"/>
-              </a:rPr>
-              <a:t>Reviewing, not hand-migrating</a:t>
-            </a:r>
-          </a:p>
-        </p:txBody>
-      </p:sp>
-      <p:sp>
-        <p:nvSpPr>
-          <p:cNvPr id="15" name="Rounded Rectangle 14"/>
+              <a:t>One Devin per consuming app — the coordination tax collapses</a:t>
+            </a:r>
+          </a:p>
+        </p:txBody>
+      </p:sp>
+      <p:sp>
+        <p:nvSpPr>
+          <p:cNvPr id="22" name="Rounded Rectangle 21"/>
           <p:cNvSpPr/>
           <p:nvPr/>
         </p:nvSpPr>
         <p:spPr>
           <a:xfrm>
-            <a:off x="8092440" y="1481328"/>
-            <a:ext cx="3611880" cy="2286000"/>
+            <a:off x="502920" y="4553712"/>
+            <a:ext cx="11201400" cy="932688"/>
           </a:xfrm>
           <a:prstGeom prst="roundRect">
             <a:avLst>
-              <a:gd name="adj" fmla="val 6000"/>
+              <a:gd name="adj" fmla="val 10000"/>
             </a:avLst>
           </a:prstGeom>
           <a:solidFill>
-            <a:srgbClr val="F4F6F9"/>
+            <a:srgbClr val="FFFFFF"/>
           </a:solidFill>
           <a:ln>
             <a:noFill/>
@@ -17086,20 +18139,22 @@
       </p:sp>
       <p:sp>
         <p:nvSpPr>
-          <p:cNvPr id="16" name="Rectangle 15"/>
+          <p:cNvPr id="23" name="Rounded Rectangle 22"/>
           <p:cNvSpPr/>
           <p:nvPr/>
         </p:nvSpPr>
         <p:spPr>
           <a:xfrm>
-            <a:off x="8092440" y="1591056"/>
-            <a:ext cx="54864" cy="2066543"/>
-          </a:xfrm>
-          <a:prstGeom prst="rect">
-            <a:avLst/>
+            <a:off x="685800" y="4718304"/>
+            <a:ext cx="1371600" cy="603504"/>
+          </a:xfrm>
+          <a:prstGeom prst="roundRect">
+            <a:avLst>
+              <a:gd name="adj" fmla="val 18000"/>
+            </a:avLst>
           </a:prstGeom>
           <a:solidFill>
-            <a:srgbClr val="E31837"/>
+            <a:srgbClr val="012169"/>
           </a:solidFill>
           <a:ln>
             <a:noFill/>
@@ -17130,14 +18185,14 @@
       </p:sp>
       <p:sp>
         <p:nvSpPr>
-          <p:cNvPr id="17" name="TextBox 16"/>
+          <p:cNvPr id="24" name="TextBox 23"/>
           <p:cNvSpPr txBox="1"/>
           <p:nvPr/>
         </p:nvSpPr>
         <p:spPr>
           <a:xfrm>
-            <a:off x="8293608" y="1591056"/>
-            <a:ext cx="3246120" cy="365760"/>
+            <a:off x="685800" y="4855464"/>
+            <a:ext cx="1371600" cy="365760"/>
           </a:xfrm>
           <a:prstGeom prst="rect">
             <a:avLst/>
@@ -17150,7 +18205,7 @@
           </a:bodyPr>
           <a:lstStyle/>
           <a:p>
-            <a:pPr algn="l">
+            <a:pPr algn="ctr">
               <a:lnSpc>
                 <a:spcPct val="100000"/>
               </a:lnSpc>
@@ -17159,27 +18214,27 @@
               </a:spcAft>
             </a:pPr>
             <a:r>
-              <a:rPr sz="1400" b="1" i="0">
-                <a:solidFill>
-                  <a:srgbClr val="012169"/>
-                </a:solidFill>
-                <a:latin typeface="Roboto"/>
-              </a:rPr>
-              <a:t>The bigger unlock</a:t>
-            </a:r>
-          </a:p>
-        </p:txBody>
-      </p:sp>
-      <p:sp>
-        <p:nvSpPr>
-          <p:cNvPr id="18" name="TextBox 17"/>
+              <a:rPr sz="1200" b="1" i="0">
+                <a:solidFill>
+                  <a:srgbClr val="FFFFFF"/>
+                </a:solidFill>
+                <a:latin typeface="Roboto"/>
+              </a:rPr>
+              <a:t>Ongoing</a:t>
+            </a:r>
+          </a:p>
+        </p:txBody>
+      </p:sp>
+      <p:sp>
+        <p:nvSpPr>
+          <p:cNvPr id="25" name="TextBox 24"/>
           <p:cNvSpPr txBox="1"/>
           <p:nvPr/>
         </p:nvSpPr>
         <p:spPr>
           <a:xfrm>
-            <a:off x="8293608" y="1956816"/>
-            <a:ext cx="3246120" cy="1691640"/>
+            <a:off x="2286000" y="4663440"/>
+            <a:ext cx="9144000" cy="365760"/>
           </a:xfrm>
           <a:prstGeom prst="rect">
             <a:avLst/>
@@ -17194,53 +18249,76 @@
           <a:p>
             <a:pPr algn="l">
               <a:lnSpc>
-                <a:spcPct val="105000"/>
-              </a:lnSpc>
-              <a:spcAft>
-                <a:spcPts val="500"/>
-              </a:spcAft>
-            </a:pPr>
-            <a:r>
-              <a:rPr sz="1400" b="0" i="0">
+                <a:spcPct val="100000"/>
+              </a:lnSpc>
+              <a:spcAft>
+                <a:spcPts val="600"/>
+              </a:spcAft>
+            </a:pPr>
+            <a:r>
+              <a:rPr sz="1450" b="1" i="0">
+                <a:solidFill>
+                  <a:srgbClr val="012169"/>
+                </a:solidFill>
+                <a:latin typeface="Roboto"/>
+              </a:rPr>
+              <a:t>Evidence as you go</a:t>
+            </a:r>
+          </a:p>
+        </p:txBody>
+      </p:sp>
+      <p:sp>
+        <p:nvSpPr>
+          <p:cNvPr id="26" name="TextBox 25"/>
+          <p:cNvSpPr txBox="1"/>
+          <p:nvPr/>
+        </p:nvSpPr>
+        <p:spPr>
+          <a:xfrm>
+            <a:off x="2286000" y="5010912"/>
+            <a:ext cx="9144000" cy="411480"/>
+          </a:xfrm>
+          <a:prstGeom prst="rect">
+            <a:avLst/>
+          </a:prstGeom>
+          <a:noFill/>
+        </p:spPr>
+        <p:txBody>
+          <a:bodyPr wrap="square" anchor="t">
+            <a:spAutoFit/>
+          </a:bodyPr>
+          <a:lstStyle/>
+          <a:p>
+            <a:pPr algn="l">
+              <a:lnSpc>
+                <a:spcPct val="100000"/>
+              </a:lnSpc>
+              <a:spcAft>
+                <a:spcPts val="600"/>
+              </a:spcAft>
+            </a:pPr>
+            <a:r>
+              <a:rPr sz="1200" b="0" i="0">
                 <a:solidFill>
                   <a:srgbClr val="1C2430"/>
                 </a:solidFill>
                 <a:latin typeface="Roboto"/>
               </a:rPr>
-              <a:t>Angular 19, 20… become routine</a:t>
-            </a:r>
-          </a:p>
-          <a:p>
-            <a:pPr algn="l">
-              <a:lnSpc>
-                <a:spcPct val="105000"/>
-              </a:lnSpc>
-              <a:spcAft>
-                <a:spcPts val="500"/>
-              </a:spcAft>
-            </a:pPr>
-            <a:r>
-              <a:rPr sz="1400" b="0" i="0">
-                <a:solidFill>
-                  <a:srgbClr val="1C2430"/>
-                </a:solidFill>
-                <a:latin typeface="Roboto"/>
-              </a:rPr>
-              <a:t>Same machinery: cloud migration, test coverage</a:t>
-            </a:r>
-          </a:p>
-        </p:txBody>
-      </p:sp>
-      <p:sp>
-        <p:nvSpPr>
-          <p:cNvPr id="19" name="Rounded Rectangle 18"/>
+              <a:t>Logs + tests + scans = audit file, automatically</a:t>
+            </a:r>
+          </a:p>
+        </p:txBody>
+      </p:sp>
+      <p:sp>
+        <p:nvSpPr>
+          <p:cNvPr id="27" name="Rounded Rectangle 26"/>
           <p:cNvSpPr/>
           <p:nvPr/>
         </p:nvSpPr>
         <p:spPr>
           <a:xfrm>
-            <a:off x="502920" y="4023360"/>
-            <a:ext cx="11201400" cy="1051560"/>
+            <a:off x="502920" y="5669280"/>
+            <a:ext cx="11201400" cy="658368"/>
           </a:xfrm>
           <a:prstGeom prst="roundRect">
             <a:avLst>
@@ -17248,7 +18326,7 @@
             </a:avLst>
           </a:prstGeom>
           <a:solidFill>
-            <a:srgbClr val="F4F6F9"/>
+            <a:srgbClr val="012169"/>
           </a:solidFill>
           <a:ln>
             <a:noFill/>
@@ -17279,14 +18357,14 @@
       </p:sp>
       <p:sp>
         <p:nvSpPr>
-          <p:cNvPr id="20" name="TextBox 19"/>
+          <p:cNvPr id="28" name="TextBox 27"/>
           <p:cNvSpPr txBox="1"/>
           <p:nvPr/>
         </p:nvSpPr>
         <p:spPr>
           <a:xfrm>
-            <a:off x="777240" y="4224528"/>
-            <a:ext cx="10698480" cy="777240"/>
+            <a:off x="777240" y="5788152"/>
+            <a:ext cx="10698480" cy="457200"/>
           </a:xfrm>
           <a:prstGeom prst="rect">
             <a:avLst/>
@@ -17308,20 +18386,20 @@
               </a:spcAft>
             </a:pPr>
             <a:r>
-              <a:rPr sz="1700" b="1" i="1">
-                <a:solidFill>
-                  <a:srgbClr val="012169"/>
-                </a:solidFill>
-                <a:latin typeface="Roboto"/>
-              </a:rPr>
-              <a:t>“We met a hard compliance deadline without pausing the roadmap.”</a:t>
-            </a:r>
-          </a:p>
-        </p:txBody>
-      </p:sp>
-      <p:sp>
-        <p:nvSpPr>
-          <p:cNvPr id="21" name="TextBox 20"/>
+              <a:rPr sz="1500" b="1" i="0">
+                <a:solidFill>
+                  <a:srgbClr val="FFFFFF"/>
+                </a:solidFill>
+                <a:latin typeface="Roboto"/>
+              </a:rPr>
+              <a:t>Devin changes who does the labor — never who's in control.</a:t>
+            </a:r>
+          </a:p>
+        </p:txBody>
+      </p:sp>
+      <p:sp>
+        <p:nvSpPr>
+          <p:cNvPr id="29" name="TextBox 28"/>
           <p:cNvSpPr txBox="1"/>
           <p:nvPr/>
         </p:nvSpPr>

--- a/presentation/BofA_x_Cognition_Devin_Demo.pptx
+++ b/presentation/BofA_x_Cognition_Devin_Demo.pptx
@@ -14734,60 +14734,14 @@
       </p:sp>
       <p:sp>
         <p:nvSpPr>
-          <p:cNvPr id="7" name="Rounded Rectangle 6"/>
+          <p:cNvPr id="7" name="Rectangle 6"/>
           <p:cNvSpPr/>
           <p:nvPr/>
         </p:nvSpPr>
         <p:spPr>
           <a:xfrm>
-            <a:off x="502920" y="1645920"/>
-            <a:ext cx="3611880" cy="2377440"/>
-          </a:xfrm>
-          <a:prstGeom prst="roundRect">
-            <a:avLst>
-              <a:gd name="adj" fmla="val 6000"/>
-            </a:avLst>
-          </a:prstGeom>
-          <a:solidFill>
-            <a:srgbClr val="F4F6F9"/>
-          </a:solidFill>
-          <a:ln>
-            <a:noFill/>
-          </a:ln>
-          <a:effectLst/>
-        </p:spPr>
-        <p:style>
-          <a:lnRef idx="1">
-            <a:schemeClr val="accent1"/>
-          </a:lnRef>
-          <a:fillRef idx="3">
-            <a:schemeClr val="accent1"/>
-          </a:fillRef>
-          <a:effectRef idx="2">
-            <a:schemeClr val="accent1"/>
-          </a:effectRef>
-          <a:fontRef idx="minor">
-            <a:schemeClr val="lt1"/>
-          </a:fontRef>
-        </p:style>
-        <p:txBody>
-          <a:bodyPr rtlCol="0" anchor="ctr"/>
-          <a:lstStyle/>
-          <a:p>
-            <a:pPr algn="ctr"/>
-          </a:p>
-        </p:txBody>
-      </p:sp>
-      <p:sp>
-        <p:nvSpPr>
-          <p:cNvPr id="8" name="Rectangle 7"/>
-          <p:cNvSpPr/>
-          <p:nvPr/>
-        </p:nvSpPr>
-        <p:spPr>
-          <a:xfrm>
-            <a:off x="502920" y="1755648"/>
-            <a:ext cx="54864" cy="2157984"/>
+            <a:off x="502920" y="1801368"/>
+            <a:ext cx="128016" cy="658368"/>
           </a:xfrm>
           <a:prstGeom prst="rect">
             <a:avLst/>
@@ -14824,14 +14778,56 @@
       </p:sp>
       <p:sp>
         <p:nvSpPr>
+          <p:cNvPr id="8" name="TextBox 7"/>
+          <p:cNvSpPr txBox="1"/>
+          <p:nvPr/>
+        </p:nvSpPr>
+        <p:spPr>
+          <a:xfrm>
+            <a:off x="868680" y="1691640"/>
+            <a:ext cx="3017520" cy="868680"/>
+          </a:xfrm>
+          <a:prstGeom prst="rect">
+            <a:avLst/>
+          </a:prstGeom>
+          <a:noFill/>
+        </p:spPr>
+        <p:txBody>
+          <a:bodyPr wrap="square" anchor="ctr">
+            <a:spAutoFit/>
+          </a:bodyPr>
+          <a:lstStyle/>
+          <a:p>
+            <a:pPr algn="l">
+              <a:lnSpc>
+                <a:spcPct val="100000"/>
+              </a:lnSpc>
+              <a:spcAft>
+                <a:spcPts val="600"/>
+              </a:spcAft>
+            </a:pPr>
+            <a:r>
+              <a:rPr sz="2600" b="1" i="0">
+                <a:solidFill>
+                  <a:srgbClr val="012169"/>
+                </a:solidFill>
+                <a:latin typeface="Roboto"/>
+              </a:rPr>
+              <a:t>Isolated</a:t>
+            </a:r>
+          </a:p>
+        </p:txBody>
+      </p:sp>
+      <p:sp>
+        <p:nvSpPr>
           <p:cNvPr id="9" name="TextBox 8"/>
           <p:cNvSpPr txBox="1"/>
           <p:nvPr/>
         </p:nvSpPr>
         <p:spPr>
           <a:xfrm>
-            <a:off x="704088" y="1755648"/>
-            <a:ext cx="3246120" cy="365760"/>
+            <a:off x="4069080" y="1691640"/>
+            <a:ext cx="7635240" cy="868680"/>
           </a:xfrm>
           <a:prstGeom prst="rect">
             <a:avLst/>
@@ -14839,7 +14835,7 @@
           <a:noFill/>
         </p:spPr>
         <p:txBody>
-          <a:bodyPr wrap="square" anchor="t">
+          <a:bodyPr wrap="square" anchor="ctr">
             <a:spAutoFit/>
           </a:bodyPr>
           <a:lstStyle/>
@@ -14853,96 +14849,33 @@
               </a:spcAft>
             </a:pPr>
             <a:r>
-              <a:rPr sz="1400" b="1" i="0">
-                <a:solidFill>
-                  <a:srgbClr val="012169"/>
-                </a:solidFill>
-                <a:latin typeface="Roboto"/>
-              </a:rPr>
-              <a:t>Isolated by design</a:t>
-            </a:r>
-          </a:p>
-        </p:txBody>
-      </p:sp>
-      <p:sp>
-        <p:nvSpPr>
-          <p:cNvPr id="10" name="TextBox 9"/>
-          <p:cNvSpPr txBox="1"/>
-          <p:nvPr/>
-        </p:nvSpPr>
-        <p:spPr>
-          <a:xfrm>
-            <a:off x="704088" y="2121408"/>
-            <a:ext cx="3246120" cy="1783080"/>
-          </a:xfrm>
-          <a:prstGeom prst="rect">
-            <a:avLst/>
-          </a:prstGeom>
-          <a:noFill/>
-        </p:spPr>
-        <p:txBody>
-          <a:bodyPr wrap="square" anchor="t">
-            <a:spAutoFit/>
-          </a:bodyPr>
-          <a:lstStyle/>
-          <a:p>
-            <a:pPr algn="l">
-              <a:lnSpc>
-                <a:spcPct val="105000"/>
-              </a:lnSpc>
-              <a:spcAft>
-                <a:spcPts val="500"/>
-              </a:spcAft>
-            </a:pPr>
-            <a:r>
-              <a:rPr sz="1400" b="0" i="0">
+              <a:rPr sz="1500" b="0" i="0">
                 <a:solidFill>
                   <a:srgbClr val="1C2430"/>
                 </a:solidFill>
                 <a:latin typeface="Roboto"/>
               </a:rPr>
-              <a:t>One isolated machine per session</a:t>
-            </a:r>
-          </a:p>
-          <a:p>
-            <a:pPr algn="l">
-              <a:lnSpc>
-                <a:spcPct val="105000"/>
-              </a:lnSpc>
-              <a:spcAft>
-                <a:spcPts val="500"/>
-              </a:spcAft>
-            </a:pPr>
-            <a:r>
-              <a:rPr sz="1400" b="0" i="0">
-                <a:solidFill>
-                  <a:srgbClr val="1C2430"/>
-                </a:solidFill>
-                <a:latin typeface="Roboto"/>
-              </a:rPr>
-              <a:t>Encrypted in transit &amp; at rest</a:t>
-            </a:r>
-          </a:p>
-        </p:txBody>
-      </p:sp>
-      <p:sp>
-        <p:nvSpPr>
-          <p:cNvPr id="11" name="Rounded Rectangle 10"/>
+              <a:t>One isolated machine per session — encrypted in transit &amp; at rest.</a:t>
+            </a:r>
+          </a:p>
+        </p:txBody>
+      </p:sp>
+      <p:sp>
+        <p:nvSpPr>
+          <p:cNvPr id="10" name="Rectangle 9"/>
           <p:cNvSpPr/>
           <p:nvPr/>
         </p:nvSpPr>
         <p:spPr>
           <a:xfrm>
-            <a:off x="4297680" y="1645920"/>
-            <a:ext cx="3611880" cy="2377440"/>
-          </a:xfrm>
-          <a:prstGeom prst="roundRect">
-            <a:avLst>
-              <a:gd name="adj" fmla="val 6000"/>
-            </a:avLst>
+            <a:off x="502920" y="2569464"/>
+            <a:ext cx="11201400" cy="14630"/>
+          </a:xfrm>
+          <a:prstGeom prst="rect">
+            <a:avLst/>
           </a:prstGeom>
           <a:solidFill>
-            <a:srgbClr val="F4F6F9"/>
+            <a:srgbClr val="D5DCE8"/>
           </a:solidFill>
           <a:ln>
             <a:noFill/>
@@ -14973,14 +14906,14 @@
       </p:sp>
       <p:sp>
         <p:nvSpPr>
-          <p:cNvPr id="12" name="Rectangle 11"/>
+          <p:cNvPr id="11" name="Rectangle 10"/>
           <p:cNvSpPr/>
           <p:nvPr/>
         </p:nvSpPr>
         <p:spPr>
           <a:xfrm>
-            <a:off x="4297680" y="1755648"/>
-            <a:ext cx="54864" cy="2157984"/>
+            <a:off x="502920" y="2953512"/>
+            <a:ext cx="128016" cy="658368"/>
           </a:xfrm>
           <a:prstGeom prst="rect">
             <a:avLst/>
@@ -15017,14 +14950,56 @@
       </p:sp>
       <p:sp>
         <p:nvSpPr>
+          <p:cNvPr id="12" name="TextBox 11"/>
+          <p:cNvSpPr txBox="1"/>
+          <p:nvPr/>
+        </p:nvSpPr>
+        <p:spPr>
+          <a:xfrm>
+            <a:off x="868680" y="2843784"/>
+            <a:ext cx="3017520" cy="868680"/>
+          </a:xfrm>
+          <a:prstGeom prst="rect">
+            <a:avLst/>
+          </a:prstGeom>
+          <a:noFill/>
+        </p:spPr>
+        <p:txBody>
+          <a:bodyPr wrap="square" anchor="ctr">
+            <a:spAutoFit/>
+          </a:bodyPr>
+          <a:lstStyle/>
+          <a:p>
+            <a:pPr algn="l">
+              <a:lnSpc>
+                <a:spcPct val="100000"/>
+              </a:lnSpc>
+              <a:spcAft>
+                <a:spcPts val="600"/>
+              </a:spcAft>
+            </a:pPr>
+            <a:r>
+              <a:rPr sz="2600" b="1" i="0">
+                <a:solidFill>
+                  <a:srgbClr val="012169"/>
+                </a:solidFill>
+                <a:latin typeface="Roboto"/>
+              </a:rPr>
+              <a:t>Private</a:t>
+            </a:r>
+          </a:p>
+        </p:txBody>
+      </p:sp>
+      <p:sp>
+        <p:nvSpPr>
           <p:cNvPr id="13" name="TextBox 12"/>
           <p:cNvSpPr txBox="1"/>
           <p:nvPr/>
         </p:nvSpPr>
         <p:spPr>
           <a:xfrm>
-            <a:off x="4498848" y="1755648"/>
-            <a:ext cx="3246120" cy="365760"/>
+            <a:off x="4069080" y="2843784"/>
+            <a:ext cx="7635240" cy="868680"/>
           </a:xfrm>
           <a:prstGeom prst="rect">
             <a:avLst/>
@@ -15032,7 +15007,7 @@
           <a:noFill/>
         </p:spPr>
         <p:txBody>
-          <a:bodyPr wrap="square" anchor="t">
+          <a:bodyPr wrap="square" anchor="ctr">
             <a:spAutoFit/>
           </a:bodyPr>
           <a:lstStyle/>
@@ -15046,96 +15021,33 @@
               </a:spcAft>
             </a:pPr>
             <a:r>
-              <a:rPr sz="1400" b="1" i="0">
-                <a:solidFill>
-                  <a:srgbClr val="012169"/>
-                </a:solidFill>
-                <a:latin typeface="Roboto"/>
-              </a:rPr>
-              <a:t>Deploys your way</a:t>
-            </a:r>
-          </a:p>
-        </p:txBody>
-      </p:sp>
-      <p:sp>
-        <p:nvSpPr>
-          <p:cNvPr id="14" name="TextBox 13"/>
-          <p:cNvSpPr txBox="1"/>
-          <p:nvPr/>
-        </p:nvSpPr>
-        <p:spPr>
-          <a:xfrm>
-            <a:off x="4498848" y="2121408"/>
-            <a:ext cx="3246120" cy="1783080"/>
-          </a:xfrm>
-          <a:prstGeom prst="rect">
-            <a:avLst/>
-          </a:prstGeom>
-          <a:noFill/>
-        </p:spPr>
-        <p:txBody>
-          <a:bodyPr wrap="square" anchor="t">
-            <a:spAutoFit/>
-          </a:bodyPr>
-          <a:lstStyle/>
-          <a:p>
-            <a:pPr algn="l">
-              <a:lnSpc>
-                <a:spcPct val="105000"/>
-              </a:lnSpc>
-              <a:spcAft>
-                <a:spcPts val="500"/>
-              </a:spcAft>
-            </a:pPr>
-            <a:r>
-              <a:rPr sz="1400" b="0" i="0">
+              <a:rPr sz="1500" b="0" i="0">
                 <a:solidFill>
                   <a:srgbClr val="1C2430"/>
                 </a:solidFill>
                 <a:latin typeface="Roboto"/>
               </a:rPr>
-              <a:t>Enterprise Cloud, or</a:t>
-            </a:r>
-          </a:p>
-          <a:p>
-            <a:pPr algn="l">
-              <a:lnSpc>
-                <a:spcPct val="105000"/>
-              </a:lnSpc>
-              <a:spcAft>
-                <a:spcPts val="500"/>
-              </a:spcAft>
-            </a:pPr>
-            <a:r>
-              <a:rPr sz="1400" b="0" i="0">
-                <a:solidFill>
-                  <a:srgbClr val="1C2430"/>
-                </a:solidFill>
-                <a:latin typeface="Roboto"/>
-              </a:rPr>
-              <a:t>Single-tenant VPC via AWS PrivateLink</a:t>
-            </a:r>
-          </a:p>
-        </p:txBody>
-      </p:sp>
-      <p:sp>
-        <p:nvSpPr>
-          <p:cNvPr id="15" name="Rounded Rectangle 14"/>
+              <a:t>Enterprise Cloud, or a single-tenant VPC connected via AWS PrivateLink.</a:t>
+            </a:r>
+          </a:p>
+        </p:txBody>
+      </p:sp>
+      <p:sp>
+        <p:nvSpPr>
+          <p:cNvPr id="14" name="Rectangle 13"/>
           <p:cNvSpPr/>
           <p:nvPr/>
         </p:nvSpPr>
         <p:spPr>
           <a:xfrm>
-            <a:off x="8092440" y="1645920"/>
-            <a:ext cx="3611880" cy="2377440"/>
-          </a:xfrm>
-          <a:prstGeom prst="roundRect">
-            <a:avLst>
-              <a:gd name="adj" fmla="val 6000"/>
-            </a:avLst>
+            <a:off x="502920" y="3721608"/>
+            <a:ext cx="11201400" cy="14630"/>
+          </a:xfrm>
+          <a:prstGeom prst="rect">
+            <a:avLst/>
           </a:prstGeom>
           <a:solidFill>
-            <a:srgbClr val="F4F6F9"/>
+            <a:srgbClr val="D5DCE8"/>
           </a:solidFill>
           <a:ln>
             <a:noFill/>
@@ -15166,14 +15078,14 @@
       </p:sp>
       <p:sp>
         <p:nvSpPr>
-          <p:cNvPr id="16" name="Rectangle 15"/>
+          <p:cNvPr id="15" name="Rectangle 14"/>
           <p:cNvSpPr/>
           <p:nvPr/>
         </p:nvSpPr>
         <p:spPr>
           <a:xfrm>
-            <a:off x="8092440" y="1755648"/>
-            <a:ext cx="54864" cy="2157984"/>
+            <a:off x="502920" y="4105656"/>
+            <a:ext cx="128016" cy="658368"/>
           </a:xfrm>
           <a:prstGeom prst="rect">
             <a:avLst/>
@@ -15210,14 +15122,56 @@
       </p:sp>
       <p:sp>
         <p:nvSpPr>
+          <p:cNvPr id="16" name="TextBox 15"/>
+          <p:cNvSpPr txBox="1"/>
+          <p:nvPr/>
+        </p:nvSpPr>
+        <p:spPr>
+          <a:xfrm>
+            <a:off x="868680" y="3995928"/>
+            <a:ext cx="3017520" cy="868680"/>
+          </a:xfrm>
+          <a:prstGeom prst="rect">
+            <a:avLst/>
+          </a:prstGeom>
+          <a:noFill/>
+        </p:spPr>
+        <p:txBody>
+          <a:bodyPr wrap="square" anchor="ctr">
+            <a:spAutoFit/>
+          </a:bodyPr>
+          <a:lstStyle/>
+          <a:p>
+            <a:pPr algn="l">
+              <a:lnSpc>
+                <a:spcPct val="100000"/>
+              </a:lnSpc>
+              <a:spcAft>
+                <a:spcPts val="600"/>
+              </a:spcAft>
+            </a:pPr>
+            <a:r>
+              <a:rPr sz="2600" b="1" i="0">
+                <a:solidFill>
+                  <a:srgbClr val="012169"/>
+                </a:solidFill>
+                <a:latin typeface="Roboto"/>
+              </a:rPr>
+              <a:t>Controlled</a:t>
+            </a:r>
+          </a:p>
+        </p:txBody>
+      </p:sp>
+      <p:sp>
+        <p:nvSpPr>
           <p:cNvPr id="17" name="TextBox 16"/>
           <p:cNvSpPr txBox="1"/>
           <p:nvPr/>
         </p:nvSpPr>
         <p:spPr>
           <a:xfrm>
-            <a:off x="8293608" y="1755648"/>
-            <a:ext cx="3246120" cy="365760"/>
+            <a:off x="4069080" y="3995928"/>
+            <a:ext cx="7635240" cy="868680"/>
           </a:xfrm>
           <a:prstGeom prst="rect">
             <a:avLst/>
@@ -15225,7 +15179,7 @@
           <a:noFill/>
         </p:spPr>
         <p:txBody>
-          <a:bodyPr wrap="square" anchor="t">
+          <a:bodyPr wrap="square" anchor="ctr">
             <a:spAutoFit/>
           </a:bodyPr>
           <a:lstStyle/>
@@ -15239,93 +15193,30 @@
               </a:spcAft>
             </a:pPr>
             <a:r>
-              <a:rPr sz="1400" b="1" i="0">
-                <a:solidFill>
-                  <a:srgbClr val="012169"/>
-                </a:solidFill>
-                <a:latin typeface="Roboto"/>
-              </a:rPr>
-              <a:t>Your controls</a:t>
-            </a:r>
-          </a:p>
-        </p:txBody>
-      </p:sp>
-      <p:sp>
-        <p:nvSpPr>
-          <p:cNvPr id="18" name="TextBox 17"/>
-          <p:cNvSpPr txBox="1"/>
-          <p:nvPr/>
-        </p:nvSpPr>
-        <p:spPr>
-          <a:xfrm>
-            <a:off x="8293608" y="2121408"/>
-            <a:ext cx="3246120" cy="1783080"/>
-          </a:xfrm>
-          <a:prstGeom prst="rect">
-            <a:avLst/>
-          </a:prstGeom>
-          <a:noFill/>
-        </p:spPr>
-        <p:txBody>
-          <a:bodyPr wrap="square" anchor="t">
-            <a:spAutoFit/>
-          </a:bodyPr>
-          <a:lstStyle/>
-          <a:p>
-            <a:pPr algn="l">
-              <a:lnSpc>
-                <a:spcPct val="105000"/>
-              </a:lnSpc>
-              <a:spcAft>
-                <a:spcPts val="500"/>
-              </a:spcAft>
-            </a:pPr>
-            <a:r>
-              <a:rPr sz="1400" b="0" i="0">
+              <a:rPr sz="1500" b="0" i="0">
                 <a:solidFill>
                   <a:srgbClr val="1C2430"/>
                 </a:solidFill>
                 <a:latin typeface="Roboto"/>
               </a:rPr>
-              <a:t>SSO · Okta / Entra / SAML</a:t>
-            </a:r>
-          </a:p>
-          <a:p>
-            <a:pPr algn="l">
-              <a:lnSpc>
-                <a:spcPct val="105000"/>
-              </a:lnSpc>
-              <a:spcAft>
-                <a:spcPts val="500"/>
-              </a:spcAft>
-            </a:pPr>
-            <a:r>
-              <a:rPr sz="1400" b="0" i="0">
-                <a:solidFill>
-                  <a:srgbClr val="1C2430"/>
-                </a:solidFill>
-                <a:latin typeface="Roboto"/>
-              </a:rPr>
-              <a:t>Nothing merges without your review</a:t>
-            </a:r>
-          </a:p>
-        </p:txBody>
-      </p:sp>
-      <p:sp>
-        <p:nvSpPr>
-          <p:cNvPr id="19" name="Rounded Rectangle 18"/>
+              <a:t>SSO (Okta / Entra / SAML) — and nothing merges without your review.</a:t>
+            </a:r>
+          </a:p>
+        </p:txBody>
+      </p:sp>
+      <p:sp>
+        <p:nvSpPr>
+          <p:cNvPr id="18" name="Rectangle 17"/>
           <p:cNvSpPr/>
           <p:nvPr/>
         </p:nvSpPr>
         <p:spPr>
           <a:xfrm>
-            <a:off x="502920" y="4343400"/>
-            <a:ext cx="11201400" cy="868680"/>
-          </a:xfrm>
-          <a:prstGeom prst="roundRect">
-            <a:avLst>
-              <a:gd name="adj" fmla="val 10000"/>
-            </a:avLst>
+            <a:off x="0" y="5349240"/>
+            <a:ext cx="12191695" cy="914400"/>
+          </a:xfrm>
+          <a:prstGeom prst="rect">
+            <a:avLst/>
           </a:prstGeom>
           <a:solidFill>
             <a:srgbClr val="012169"/>
@@ -15359,13 +15250,13 @@
       </p:sp>
       <p:sp>
         <p:nvSpPr>
-          <p:cNvPr id="20" name="TextBox 19"/>
+          <p:cNvPr id="19" name="TextBox 18"/>
           <p:cNvSpPr txBox="1"/>
           <p:nvPr/>
         </p:nvSpPr>
         <p:spPr>
           <a:xfrm>
-            <a:off x="777240" y="4553712"/>
+            <a:off x="868680" y="5513832"/>
             <a:ext cx="10698480" cy="594360"/>
           </a:xfrm>
           <a:prstGeom prst="rect">
@@ -15374,7 +15265,7 @@
           <a:noFill/>
         </p:spPr>
         <p:txBody>
-          <a:bodyPr wrap="square" anchor="t">
+          <a:bodyPr wrap="square" anchor="ctr">
             <a:spAutoFit/>
           </a:bodyPr>
           <a:lstStyle/>
@@ -15395,48 +15286,6 @@
                 <a:latin typeface="Roboto"/>
               </a:rPr>
               <a:t>Every command, file change, and test run — logged and replayable.</a:t>
-            </a:r>
-          </a:p>
-        </p:txBody>
-      </p:sp>
-      <p:sp>
-        <p:nvSpPr>
-          <p:cNvPr id="21" name="TextBox 20"/>
-          <p:cNvSpPr txBox="1"/>
-          <p:nvPr/>
-        </p:nvSpPr>
-        <p:spPr>
-          <a:xfrm>
-            <a:off x="502920" y="6473952"/>
-            <a:ext cx="7315200" cy="292608"/>
-          </a:xfrm>
-          <a:prstGeom prst="rect">
-            <a:avLst/>
-          </a:prstGeom>
-          <a:noFill/>
-        </p:spPr>
-        <p:txBody>
-          <a:bodyPr wrap="square" anchor="t">
-            <a:spAutoFit/>
-          </a:bodyPr>
-          <a:lstStyle/>
-          <a:p>
-            <a:pPr algn="l">
-              <a:lnSpc>
-                <a:spcPct val="100000"/>
-              </a:lnSpc>
-              <a:spcAft>
-                <a:spcPts val="600"/>
-              </a:spcAft>
-            </a:pPr>
-            <a:r>
-              <a:rPr sz="900" b="0" i="0">
-                <a:solidFill>
-                  <a:srgbClr val="5A6472"/>
-                </a:solidFill>
-                <a:latin typeface="Roboto"/>
-              </a:rPr>
-              <a:t>Bank of America  ×  Cognition</a:t>
             </a:r>
           </a:p>
         </p:txBody>

--- a/presentation/BofA_x_Cognition_Devin_Demo.pptx
+++ b/presentation/BofA_x_Cognition_Devin_Demo.pptx
@@ -722,19 +722,19 @@
           <a:p/>
           <a:p>
             <a:r>
-              <a:t>Talk track: "Here's what I'd propose. First, we sit down together and pick three use cases — the natural starting points are work like what you just watched: framework upgrades, migrations, test-coverage debt — but you know your backlog; whatever you'd never staff greenfield engineers on is a candidate. Then a security and data review so your team is comfortable. Then we run a pilot on ONE of the three — a real repo, four weeks, measured against criteria you define. If it earns its keep, we scale to the other two. If it doesn't, you've spent almost nothing finding out."</a:t>
+              <a:t>Talk track: "You just watched the proof of concept — now let's do it for real. Step one, we scope your actual Angular estate together: which repos are on 14, where the shared library sits, who consumes it downstream. Step two, a security and data review so your team is comfortable, and we agree the success criteria up front. Then weeks two to four: Devin migrates your real shared library, 14 to 18, and your engineers review every PR — same thing you saw today, on your code. Week four, we're back in this room with results, and if it earned its keep, we point Devin at the downstream apps in parallel. If it didn't, you've spent four weeks finding out."</a:t>
             </a:r>
           </a:p>
           <a:p/>
           <a:p>
             <a:r>
-              <a:t>Why 3 use cases but 1 pilot: picking three gets them mentally invested in a roadmap (not a one-off experiment), while piloting one keeps the ask small enough to say yes to today.</a:t>
+              <a:t>Why the shared library as the pilot slice: it's the root of the dependency tree — proving it there de-risks everything downstream, and it's the exact shape of what they saw in the demo. If they'd rather start on a lower-stakes repo, flex immediately; the structure holds.</a:t>
             </a:r>
           </a:p>
           <a:p/>
           <a:p>
             <a:r>
-              <a:t>Assign ownership live: use-case shortlist → VP Eng (it's their backlog); security review → Security Engineer; pilot repo + success criteria → Chief Architect. People who own a step show up to the next meeting.</a:t>
+              <a:t>Assign ownership live: estate scoping → Chief Architect (they know the dependency tree); security review → Security Engineer; sponsorship + success criteria → VP Eng. People who own a step show up to the next meeting.</a:t>
             </a:r>
           </a:p>
           <a:p/>
@@ -6487,8 +6487,8 @@
         </p:nvSpPr>
         <p:spPr>
           <a:xfrm>
-            <a:off x="502920" y="1481328"/>
-            <a:ext cx="11201400" cy="932688"/>
+            <a:off x="502920" y="1444752"/>
+            <a:ext cx="11201400" cy="1115568"/>
           </a:xfrm>
           <a:prstGeom prst="roundRect">
             <a:avLst>
@@ -6533,8 +6533,8 @@
         </p:nvSpPr>
         <p:spPr>
           <a:xfrm>
-            <a:off x="658368" y="1682496"/>
-            <a:ext cx="530352" cy="530352"/>
+            <a:off x="713232" y="1719072"/>
+            <a:ext cx="566928" cy="566928"/>
           </a:xfrm>
           <a:prstGeom prst="ellipse">
             <a:avLst/>
@@ -6577,8 +6577,8 @@
         </p:nvSpPr>
         <p:spPr>
           <a:xfrm>
-            <a:off x="658368" y="1755648"/>
-            <a:ext cx="530352" cy="402336"/>
+            <a:off x="713232" y="1783080"/>
+            <a:ext cx="566928" cy="438912"/>
           </a:xfrm>
           <a:prstGeom prst="rect">
             <a:avLst/>
@@ -6600,7 +6600,7 @@
               </a:spcAft>
             </a:pPr>
             <a:r>
-              <a:rPr sz="1700" b="1" i="0">
+              <a:rPr sz="1800" b="1" i="0">
                 <a:solidFill>
                   <a:srgbClr val="FFFFFF"/>
                 </a:solidFill>
@@ -6619,8 +6619,8 @@
         </p:nvSpPr>
         <p:spPr>
           <a:xfrm>
-            <a:off x="1417320" y="1591056"/>
-            <a:ext cx="1417320" cy="685800"/>
+            <a:off x="1508760" y="1444752"/>
+            <a:ext cx="1417320" cy="1115568"/>
           </a:xfrm>
           <a:prstGeom prst="rect">
             <a:avLst/>
@@ -6628,7 +6628,7 @@
           <a:noFill/>
         </p:spPr>
         <p:txBody>
-          <a:bodyPr wrap="square" anchor="t">
+          <a:bodyPr wrap="square" anchor="ctr">
             <a:spAutoFit/>
           </a:bodyPr>
           <a:lstStyle/>
@@ -6642,7 +6642,7 @@
               </a:spcAft>
             </a:pPr>
             <a:r>
-              <a:rPr sz="1150" b="1" i="0">
+              <a:rPr sz="1200" b="1" i="0">
                 <a:solidFill>
                   <a:srgbClr val="E31837"/>
                 </a:solidFill>
@@ -6661,8 +6661,8 @@
         </p:nvSpPr>
         <p:spPr>
           <a:xfrm>
-            <a:off x="2834640" y="1591056"/>
-            <a:ext cx="8595360" cy="365760"/>
+            <a:off x="3017520" y="1444752"/>
+            <a:ext cx="8503920" cy="1115568"/>
           </a:xfrm>
           <a:prstGeom prst="rect">
             <a:avLst/>
@@ -6670,7 +6670,7 @@
           <a:noFill/>
         </p:spPr>
         <p:txBody>
-          <a:bodyPr wrap="square" anchor="t">
+          <a:bodyPr wrap="square" anchor="ctr">
             <a:spAutoFit/>
           </a:bodyPr>
           <a:lstStyle/>
@@ -6684,38 +6684,15 @@
               </a:spcAft>
             </a:pPr>
             <a:r>
-              <a:rPr sz="1450" b="1" i="0">
+              <a:rPr sz="1600" b="1" i="0">
                 <a:solidFill>
                   <a:srgbClr val="012169"/>
                 </a:solidFill>
                 <a:latin typeface="Roboto"/>
               </a:rPr>
-              <a:t>Pick 3 use cases together</a:t>
-            </a:r>
-          </a:p>
-        </p:txBody>
-      </p:sp>
-      <p:sp>
-        <p:nvSpPr>
-          <p:cNvPr id="12" name="TextBox 11"/>
-          <p:cNvSpPr txBox="1"/>
-          <p:nvPr/>
-        </p:nvSpPr>
-        <p:spPr>
-          <a:xfrm>
-            <a:off x="2834640" y="1938528"/>
-            <a:ext cx="8595360" cy="411480"/>
-          </a:xfrm>
-          <a:prstGeom prst="rect">
-            <a:avLst/>
-          </a:prstGeom>
-          <a:noFill/>
-        </p:spPr>
-        <p:txBody>
-          <a:bodyPr wrap="square" anchor="t">
-            <a:spAutoFit/>
-          </a:bodyPr>
-          <a:lstStyle/>
+              <a:t>Scope your Angular estate</a:t>
+            </a:r>
+          </a:p>
           <a:p>
             <a:pPr algn="l">
               <a:lnSpc>
@@ -6726,27 +6703,27 @@
               </a:spcAft>
             </a:pPr>
             <a:r>
-              <a:rPr sz="1150" b="0" i="0">
+              <a:rPr sz="1200" b="0" i="0">
                 <a:solidFill>
                   <a:srgbClr val="1C2430"/>
                 </a:solidFill>
                 <a:latin typeface="Roboto"/>
               </a:rPr>
-              <a:t>Start with work like today's demo — upgrades, migrations, test debt</a:t>
-            </a:r>
-          </a:p>
-        </p:txBody>
-      </p:sp>
-      <p:sp>
-        <p:nvSpPr>
-          <p:cNvPr id="13" name="Rounded Rectangle 12"/>
+              <a:t>Inventory the 14.x repos — shared library, downstream consumers, test coverage</a:t>
+            </a:r>
+          </a:p>
+        </p:txBody>
+      </p:sp>
+      <p:sp>
+        <p:nvSpPr>
+          <p:cNvPr id="12" name="Rounded Rectangle 11"/>
           <p:cNvSpPr/>
           <p:nvPr/>
         </p:nvSpPr>
         <p:spPr>
           <a:xfrm>
-            <a:off x="502920" y="2505456"/>
-            <a:ext cx="11201400" cy="932688"/>
+            <a:off x="502920" y="2688336"/>
+            <a:ext cx="11201400" cy="1115568"/>
           </a:xfrm>
           <a:prstGeom prst="roundRect">
             <a:avLst>
@@ -6785,14 +6762,14 @@
       </p:sp>
       <p:sp>
         <p:nvSpPr>
-          <p:cNvPr id="14" name="Oval 13"/>
+          <p:cNvPr id="13" name="Oval 12"/>
           <p:cNvSpPr/>
           <p:nvPr/>
         </p:nvSpPr>
         <p:spPr>
           <a:xfrm>
-            <a:off x="658368" y="2706624"/>
-            <a:ext cx="530352" cy="530352"/>
+            <a:off x="713232" y="2962656"/>
+            <a:ext cx="566928" cy="566928"/>
           </a:xfrm>
           <a:prstGeom prst="ellipse">
             <a:avLst/>
@@ -6829,14 +6806,14 @@
       </p:sp>
       <p:sp>
         <p:nvSpPr>
-          <p:cNvPr id="15" name="TextBox 14"/>
+          <p:cNvPr id="14" name="TextBox 13"/>
           <p:cNvSpPr txBox="1"/>
           <p:nvPr/>
         </p:nvSpPr>
         <p:spPr>
           <a:xfrm>
-            <a:off x="658368" y="2779776"/>
-            <a:ext cx="530352" cy="402336"/>
+            <a:off x="713232" y="3026663"/>
+            <a:ext cx="566928" cy="438912"/>
           </a:xfrm>
           <a:prstGeom prst="rect">
             <a:avLst/>
@@ -6858,13 +6835,55 @@
               </a:spcAft>
             </a:pPr>
             <a:r>
-              <a:rPr sz="1700" b="1" i="0">
+              <a:rPr sz="1800" b="1" i="0">
                 <a:solidFill>
                   <a:srgbClr val="FFFFFF"/>
                 </a:solidFill>
                 <a:latin typeface="Roboto"/>
               </a:rPr>
               <a:t>2</a:t>
+            </a:r>
+          </a:p>
+        </p:txBody>
+      </p:sp>
+      <p:sp>
+        <p:nvSpPr>
+          <p:cNvPr id="15" name="TextBox 14"/>
+          <p:cNvSpPr txBox="1"/>
+          <p:nvPr/>
+        </p:nvSpPr>
+        <p:spPr>
+          <a:xfrm>
+            <a:off x="1508760" y="2688336"/>
+            <a:ext cx="1417320" cy="1115568"/>
+          </a:xfrm>
+          <a:prstGeom prst="rect">
+            <a:avLst/>
+          </a:prstGeom>
+          <a:noFill/>
+        </p:spPr>
+        <p:txBody>
+          <a:bodyPr wrap="square" anchor="ctr">
+            <a:spAutoFit/>
+          </a:bodyPr>
+          <a:lstStyle/>
+          <a:p>
+            <a:pPr algn="l">
+              <a:lnSpc>
+                <a:spcPct val="100000"/>
+              </a:lnSpc>
+              <a:spcAft>
+                <a:spcPts val="600"/>
+              </a:spcAft>
+            </a:pPr>
+            <a:r>
+              <a:rPr sz="1200" b="1" i="0">
+                <a:solidFill>
+                  <a:srgbClr val="E31837"/>
+                </a:solidFill>
+                <a:latin typeface="Roboto"/>
+              </a:rPr>
+              <a:t>Next week</a:t>
             </a:r>
           </a:p>
         </p:txBody>
@@ -6877,8 +6896,8 @@
         </p:nvSpPr>
         <p:spPr>
           <a:xfrm>
-            <a:off x="1417320" y="2615184"/>
-            <a:ext cx="1417320" cy="685800"/>
+            <a:off x="3017520" y="2688336"/>
+            <a:ext cx="8503920" cy="1115568"/>
           </a:xfrm>
           <a:prstGeom prst="rect">
             <a:avLst/>
@@ -6886,7 +6905,7 @@
           <a:noFill/>
         </p:spPr>
         <p:txBody>
-          <a:bodyPr wrap="square" anchor="t">
+          <a:bodyPr wrap="square" anchor="ctr">
             <a:spAutoFit/>
           </a:bodyPr>
           <a:lstStyle/>
@@ -6900,38 +6919,15 @@
               </a:spcAft>
             </a:pPr>
             <a:r>
-              <a:rPr sz="1150" b="1" i="0">
-                <a:solidFill>
-                  <a:srgbClr val="E31837"/>
-                </a:solidFill>
-                <a:latin typeface="Roboto"/>
-              </a:rPr>
-              <a:t>Next week</a:t>
-            </a:r>
-          </a:p>
-        </p:txBody>
-      </p:sp>
-      <p:sp>
-        <p:nvSpPr>
-          <p:cNvPr id="17" name="TextBox 16"/>
-          <p:cNvSpPr txBox="1"/>
-          <p:nvPr/>
-        </p:nvSpPr>
-        <p:spPr>
-          <a:xfrm>
-            <a:off x="2834640" y="2615184"/>
-            <a:ext cx="8595360" cy="365760"/>
-          </a:xfrm>
-          <a:prstGeom prst="rect">
-            <a:avLst/>
-          </a:prstGeom>
-          <a:noFill/>
-        </p:spPr>
-        <p:txBody>
-          <a:bodyPr wrap="square" anchor="t">
-            <a:spAutoFit/>
-          </a:bodyPr>
-          <a:lstStyle/>
+              <a:rPr sz="1600" b="1" i="0">
+                <a:solidFill>
+                  <a:srgbClr val="012169"/>
+                </a:solidFill>
+                <a:latin typeface="Roboto"/>
+              </a:rPr>
+              <a:t>Security &amp; data review</a:t>
+            </a:r>
+          </a:p>
           <a:p>
             <a:pPr algn="l">
               <a:lnSpc>
@@ -6942,69 +6938,27 @@
               </a:spcAft>
             </a:pPr>
             <a:r>
-              <a:rPr sz="1450" b="1" i="0">
-                <a:solidFill>
-                  <a:srgbClr val="012169"/>
-                </a:solidFill>
-                <a:latin typeface="Roboto"/>
-              </a:rPr>
-              <a:t>Security &amp; data review</a:t>
-            </a:r>
-          </a:p>
-        </p:txBody>
-      </p:sp>
-      <p:sp>
-        <p:nvSpPr>
-          <p:cNvPr id="18" name="TextBox 17"/>
-          <p:cNvSpPr txBox="1"/>
-          <p:nvPr/>
-        </p:nvSpPr>
-        <p:spPr>
-          <a:xfrm>
-            <a:off x="2834640" y="2962656"/>
-            <a:ext cx="8595360" cy="411480"/>
-          </a:xfrm>
-          <a:prstGeom prst="rect">
-            <a:avLst/>
-          </a:prstGeom>
-          <a:noFill/>
-        </p:spPr>
-        <p:txBody>
-          <a:bodyPr wrap="square" anchor="t">
-            <a:spAutoFit/>
-          </a:bodyPr>
-          <a:lstStyle/>
-          <a:p>
-            <a:pPr algn="l">
-              <a:lnSpc>
-                <a:spcPct val="100000"/>
-              </a:lnSpc>
-              <a:spcAft>
-                <a:spcPts val="600"/>
-              </a:spcAft>
-            </a:pPr>
-            <a:r>
-              <a:rPr sz="1150" b="0" i="0">
+              <a:rPr sz="1200" b="0" i="0">
                 <a:solidFill>
                   <a:srgbClr val="1C2430"/>
                 </a:solidFill>
                 <a:latin typeface="Roboto"/>
               </a:rPr>
-              <a:t>Your security team + ours · define success criteria</a:t>
-            </a:r>
-          </a:p>
-        </p:txBody>
-      </p:sp>
-      <p:sp>
-        <p:nvSpPr>
-          <p:cNvPr id="19" name="Rounded Rectangle 18"/>
+              <a:t>Your security team + ours · access to one real repo · success criteria you define</a:t>
+            </a:r>
+          </a:p>
+        </p:txBody>
+      </p:sp>
+      <p:sp>
+        <p:nvSpPr>
+          <p:cNvPr id="17" name="Rounded Rectangle 16"/>
           <p:cNvSpPr/>
           <p:nvPr/>
         </p:nvSpPr>
         <p:spPr>
           <a:xfrm>
-            <a:off x="502920" y="3529584"/>
-            <a:ext cx="11201400" cy="932688"/>
+            <a:off x="502920" y="3931920"/>
+            <a:ext cx="11201400" cy="1115568"/>
           </a:xfrm>
           <a:prstGeom prst="roundRect">
             <a:avLst>
@@ -7043,14 +6997,14 @@
       </p:sp>
       <p:sp>
         <p:nvSpPr>
-          <p:cNvPr id="20" name="Oval 19"/>
+          <p:cNvPr id="18" name="Oval 17"/>
           <p:cNvSpPr/>
           <p:nvPr/>
         </p:nvSpPr>
         <p:spPr>
           <a:xfrm>
-            <a:off x="658368" y="3730752"/>
-            <a:ext cx="530352" cy="530352"/>
+            <a:off x="713232" y="4206240"/>
+            <a:ext cx="566928" cy="566928"/>
           </a:xfrm>
           <a:prstGeom prst="ellipse">
             <a:avLst/>
@@ -7087,14 +7041,14 @@
       </p:sp>
       <p:sp>
         <p:nvSpPr>
-          <p:cNvPr id="21" name="TextBox 20"/>
+          <p:cNvPr id="19" name="TextBox 18"/>
           <p:cNvSpPr txBox="1"/>
           <p:nvPr/>
         </p:nvSpPr>
         <p:spPr>
           <a:xfrm>
-            <a:off x="658368" y="3803904"/>
-            <a:ext cx="530352" cy="402336"/>
+            <a:off x="713232" y="4270248"/>
+            <a:ext cx="566928" cy="438912"/>
           </a:xfrm>
           <a:prstGeom prst="rect">
             <a:avLst/>
@@ -7116,7 +7070,7 @@
               </a:spcAft>
             </a:pPr>
             <a:r>
-              <a:rPr sz="1700" b="1" i="0">
+              <a:rPr sz="1800" b="1" i="0">
                 <a:solidFill>
                   <a:srgbClr val="FFFFFF"/>
                 </a:solidFill>
@@ -7129,14 +7083,14 @@
       </p:sp>
       <p:sp>
         <p:nvSpPr>
-          <p:cNvPr id="22" name="TextBox 21"/>
+          <p:cNvPr id="20" name="TextBox 19"/>
           <p:cNvSpPr txBox="1"/>
           <p:nvPr/>
         </p:nvSpPr>
         <p:spPr>
           <a:xfrm>
-            <a:off x="1417320" y="3639312"/>
-            <a:ext cx="1417320" cy="685800"/>
+            <a:off x="1508760" y="3931920"/>
+            <a:ext cx="1417320" cy="1115568"/>
           </a:xfrm>
           <a:prstGeom prst="rect">
             <a:avLst/>
@@ -7144,7 +7098,7 @@
           <a:noFill/>
         </p:spPr>
         <p:txBody>
-          <a:bodyPr wrap="square" anchor="t">
+          <a:bodyPr wrap="square" anchor="ctr">
             <a:spAutoFit/>
           </a:bodyPr>
           <a:lstStyle/>
@@ -7158,7 +7112,7 @@
               </a:spcAft>
             </a:pPr>
             <a:r>
-              <a:rPr sz="1150" b="1" i="0">
+              <a:rPr sz="1200" b="1" i="0">
                 <a:solidFill>
                   <a:srgbClr val="E31837"/>
                 </a:solidFill>
@@ -7171,14 +7125,14 @@
       </p:sp>
       <p:sp>
         <p:nvSpPr>
-          <p:cNvPr id="23" name="TextBox 22"/>
+          <p:cNvPr id="21" name="TextBox 20"/>
           <p:cNvSpPr txBox="1"/>
           <p:nvPr/>
         </p:nvSpPr>
         <p:spPr>
           <a:xfrm>
-            <a:off x="2834640" y="3639312"/>
-            <a:ext cx="8595360" cy="365760"/>
+            <a:off x="3017520" y="3931920"/>
+            <a:ext cx="8503920" cy="1115568"/>
           </a:xfrm>
           <a:prstGeom prst="rect">
             <a:avLst/>
@@ -7186,7 +7140,7 @@
           <a:noFill/>
         </p:spPr>
         <p:txBody>
-          <a:bodyPr wrap="square" anchor="t">
+          <a:bodyPr wrap="square" anchor="ctr">
             <a:spAutoFit/>
           </a:bodyPr>
           <a:lstStyle/>
@@ -7200,38 +7154,15 @@
               </a:spcAft>
             </a:pPr>
             <a:r>
-              <a:rPr sz="1450" b="1" i="0">
+              <a:rPr sz="1600" b="1" i="0">
                 <a:solidFill>
                   <a:srgbClr val="012169"/>
                 </a:solidFill>
                 <a:latin typeface="Roboto"/>
               </a:rPr>
-              <a:t>Run a pilot for you</a:t>
-            </a:r>
-          </a:p>
-        </p:txBody>
-      </p:sp>
-      <p:sp>
-        <p:nvSpPr>
-          <p:cNvPr id="24" name="TextBox 23"/>
-          <p:cNvSpPr txBox="1"/>
-          <p:nvPr/>
-        </p:nvSpPr>
-        <p:spPr>
-          <a:xfrm>
-            <a:off x="2834640" y="3986784"/>
-            <a:ext cx="8595360" cy="411480"/>
-          </a:xfrm>
-          <a:prstGeom prst="rect">
-            <a:avLst/>
-          </a:prstGeom>
-          <a:noFill/>
-        </p:spPr>
-        <p:txBody>
-          <a:bodyPr wrap="square" anchor="t">
-            <a:spAutoFit/>
-          </a:bodyPr>
-          <a:lstStyle/>
+              <a:t>Devin migrates your shared library</a:t>
+            </a:r>
+          </a:p>
           <a:p>
             <a:pPr algn="l">
               <a:lnSpc>
@@ -7242,27 +7173,27 @@
               </a:spcAft>
             </a:pPr>
             <a:r>
-              <a:rPr sz="1150" b="0" i="0">
+              <a:rPr sz="1200" b="0" i="0">
                 <a:solidFill>
                   <a:srgbClr val="1C2430"/>
                 </a:solidFill>
                 <a:latin typeface="Roboto"/>
               </a:rPr>
-              <a:t>Devin works one real use case; your engineers review; we measure</a:t>
-            </a:r>
-          </a:p>
-        </p:txBody>
-      </p:sp>
-      <p:sp>
-        <p:nvSpPr>
-          <p:cNvPr id="25" name="Rounded Rectangle 24"/>
+              <a:t>Real code, 14 → 18 — your engineers review every PR</a:t>
+            </a:r>
+          </a:p>
+        </p:txBody>
+      </p:sp>
+      <p:sp>
+        <p:nvSpPr>
+          <p:cNvPr id="22" name="Rounded Rectangle 21"/>
           <p:cNvSpPr/>
           <p:nvPr/>
         </p:nvSpPr>
         <p:spPr>
           <a:xfrm>
-            <a:off x="502920" y="4553712"/>
-            <a:ext cx="11201400" cy="932688"/>
+            <a:off x="502920" y="5175504"/>
+            <a:ext cx="11201400" cy="1115568"/>
           </a:xfrm>
           <a:prstGeom prst="roundRect">
             <a:avLst>
@@ -7301,14 +7232,14 @@
       </p:sp>
       <p:sp>
         <p:nvSpPr>
-          <p:cNvPr id="26" name="Oval 25"/>
+          <p:cNvPr id="23" name="Oval 22"/>
           <p:cNvSpPr/>
           <p:nvPr/>
         </p:nvSpPr>
         <p:spPr>
           <a:xfrm>
-            <a:off x="658368" y="4754880"/>
-            <a:ext cx="530352" cy="530352"/>
+            <a:off x="713232" y="5449824"/>
+            <a:ext cx="566928" cy="566928"/>
           </a:xfrm>
           <a:prstGeom prst="ellipse">
             <a:avLst/>
@@ -7345,14 +7276,14 @@
       </p:sp>
       <p:sp>
         <p:nvSpPr>
-          <p:cNvPr id="27" name="TextBox 26"/>
+          <p:cNvPr id="24" name="TextBox 23"/>
           <p:cNvSpPr txBox="1"/>
           <p:nvPr/>
         </p:nvSpPr>
         <p:spPr>
           <a:xfrm>
-            <a:off x="658368" y="4828032"/>
-            <a:ext cx="530352" cy="402336"/>
+            <a:off x="713232" y="5513832"/>
+            <a:ext cx="566928" cy="438912"/>
           </a:xfrm>
           <a:prstGeom prst="rect">
             <a:avLst/>
@@ -7374,7 +7305,7 @@
               </a:spcAft>
             </a:pPr>
             <a:r>
-              <a:rPr sz="1700" b="1" i="0">
+              <a:rPr sz="1800" b="1" i="0">
                 <a:solidFill>
                   <a:srgbClr val="FFFFFF"/>
                 </a:solidFill>
@@ -7387,14 +7318,14 @@
       </p:sp>
       <p:sp>
         <p:nvSpPr>
-          <p:cNvPr id="28" name="TextBox 27"/>
+          <p:cNvPr id="25" name="TextBox 24"/>
           <p:cNvSpPr txBox="1"/>
           <p:nvPr/>
         </p:nvSpPr>
         <p:spPr>
           <a:xfrm>
-            <a:off x="1417320" y="4663440"/>
-            <a:ext cx="1417320" cy="685800"/>
+            <a:off x="1508760" y="5175504"/>
+            <a:ext cx="1417320" cy="1115568"/>
           </a:xfrm>
           <a:prstGeom prst="rect">
             <a:avLst/>
@@ -7402,7 +7333,7 @@
           <a:noFill/>
         </p:spPr>
         <p:txBody>
-          <a:bodyPr wrap="square" anchor="t">
+          <a:bodyPr wrap="square" anchor="ctr">
             <a:spAutoFit/>
           </a:bodyPr>
           <a:lstStyle/>
@@ -7416,7 +7347,7 @@
               </a:spcAft>
             </a:pPr>
             <a:r>
-              <a:rPr sz="1150" b="1" i="0">
+              <a:rPr sz="1200" b="1" i="0">
                 <a:solidFill>
                   <a:srgbClr val="E31837"/>
                 </a:solidFill>
@@ -7429,14 +7360,14 @@
       </p:sp>
       <p:sp>
         <p:nvSpPr>
-          <p:cNvPr id="29" name="TextBox 28"/>
+          <p:cNvPr id="26" name="TextBox 25"/>
           <p:cNvSpPr txBox="1"/>
           <p:nvPr/>
         </p:nvSpPr>
         <p:spPr>
           <a:xfrm>
-            <a:off x="2834640" y="4663440"/>
-            <a:ext cx="8595360" cy="365760"/>
+            <a:off x="3017520" y="5175504"/>
+            <a:ext cx="8503920" cy="1115568"/>
           </a:xfrm>
           <a:prstGeom prst="rect">
             <a:avLst/>
@@ -7444,7 +7375,7 @@
           <a:noFill/>
         </p:spPr>
         <p:txBody>
-          <a:bodyPr wrap="square" anchor="t">
+          <a:bodyPr wrap="square" anchor="ctr">
             <a:spAutoFit/>
           </a:bodyPr>
           <a:lstStyle/>
@@ -7458,7 +7389,7 @@
               </a:spcAft>
             </a:pPr>
             <a:r>
-              <a:rPr sz="1450" b="1" i="0">
+              <a:rPr sz="1600" b="1" i="0">
                 <a:solidFill>
                   <a:srgbClr val="012169"/>
                 </a:solidFill>
@@ -7467,29 +7398,6 @@
               <a:t>Go / no-go readout</a:t>
             </a:r>
           </a:p>
-        </p:txBody>
-      </p:sp>
-      <p:sp>
-        <p:nvSpPr>
-          <p:cNvPr id="30" name="TextBox 29"/>
-          <p:cNvSpPr txBox="1"/>
-          <p:nvPr/>
-        </p:nvSpPr>
-        <p:spPr>
-          <a:xfrm>
-            <a:off x="2834640" y="5010912"/>
-            <a:ext cx="8595360" cy="411480"/>
-          </a:xfrm>
-          <a:prstGeom prst="rect">
-            <a:avLst/>
-          </a:prstGeom>
-          <a:noFill/>
-        </p:spPr>
-        <p:txBody>
-          <a:bodyPr wrap="square" anchor="t">
-            <a:spAutoFit/>
-          </a:bodyPr>
-          <a:lstStyle/>
           <a:p>
             <a:pPr algn="l">
               <a:lnSpc>
@@ -7500,71 +7408,20 @@
               </a:spcAft>
             </a:pPr>
             <a:r>
-              <a:rPr sz="1150" b="0" i="0">
+              <a:rPr sz="1200" b="0" i="0">
                 <a:solidFill>
                   <a:srgbClr val="1C2430"/>
                 </a:solidFill>
                 <a:latin typeface="Roboto"/>
               </a:rPr>
-              <a:t>Results in front of this room — then scale to the other two</a:t>
-            </a:r>
-          </a:p>
-        </p:txBody>
-      </p:sp>
-      <p:sp>
-        <p:nvSpPr>
-          <p:cNvPr id="31" name="TextBox 30"/>
-          <p:cNvSpPr txBox="1"/>
-          <p:nvPr/>
-        </p:nvSpPr>
-        <p:spPr>
-          <a:xfrm>
-            <a:off x="502920" y="5715000"/>
-            <a:ext cx="11201400" cy="548640"/>
-          </a:xfrm>
-          <a:prstGeom prst="rect">
-            <a:avLst/>
-          </a:prstGeom>
-          <a:noFill/>
-        </p:spPr>
-        <p:txBody>
-          <a:bodyPr wrap="square" anchor="t">
-            <a:spAutoFit/>
-          </a:bodyPr>
-          <a:lstStyle/>
-          <a:p>
-            <a:pPr algn="l">
-              <a:lnSpc>
-                <a:spcPct val="100000"/>
-              </a:lnSpc>
-              <a:spcAft>
-                <a:spcPts val="600"/>
-              </a:spcAft>
-            </a:pPr>
-            <a:r>
-              <a:rPr sz="1400" b="1" i="0">
-                <a:solidFill>
-                  <a:srgbClr val="E31837"/>
-                </a:solidFill>
-                <a:latin typeface="Roboto"/>
-              </a:rPr>
-              <a:t>The ask:  </a:t>
-            </a:r>
-            <a:r>
-              <a:rPr sz="1400" b="1" i="0">
-                <a:solidFill>
-                  <a:srgbClr val="012169"/>
-                </a:solidFill>
-                <a:latin typeface="Roboto"/>
-              </a:rPr>
-              <a:t>three use cases, one pilot, four weeks, your success criteria.</a:t>
-            </a:r>
-          </a:p>
-        </p:txBody>
-      </p:sp>
-      <p:sp>
-        <p:nvSpPr>
-          <p:cNvPr id="32" name="TextBox 31"/>
+              <a:t>Results in front of this room — then downstream apps in parallel</a:t>
+            </a:r>
+          </a:p>
+        </p:txBody>
+      </p:sp>
+      <p:sp>
+        <p:nvSpPr>
+          <p:cNvPr id="27" name="TextBox 26"/>
           <p:cNvSpPr txBox="1"/>
           <p:nvPr/>
         </p:nvSpPr>

--- a/presentation/BofA_x_Cognition_Devin_Demo.pptx
+++ b/presentation/BofA_x_Cognition_Devin_Demo.pptx
@@ -722,7 +722,7 @@
           <a:p/>
           <a:p>
             <a:r>
-              <a:t>Talk track: "You just watched the proof of concept — now let's do it for real. Step one, we scope your actual Angular estate together: which repos are on 14, where the shared library sits, who consumes it downstream. Step two, a security and data review so your team is comfortable, and we agree the success criteria up front. Then weeks two to four: Devin migrates your real shared library, 14 to 18, and your engineers review every PR — same thing you saw today, on your code. Week four, we're back in this room with results, and if it earned its keep, we point Devin at the downstream apps in parallel. If it didn't, you've spent four weeks finding out."</a:t>
+              <a:t>Talk track: "You just watched the proof of concept — now let's do it for real, in four simple beats. One: we pick what to test — which slice of your Angular 14 estate Devin starts on; the shared library is the natural first pick, but it's your call. Two: the pilot phase — a quick security and data review, then Devin migrates real code, 14 to 18, with your engineers reviewing every PR, same as you saw today. Three: we see how it did — back in this room at week four, measured against success criteria you defined up front. Four: if it earned its keep, we deploy Devin fully — downstream apps in parallel, then the rest of the maintenance backlog. If it didn't, you've spent four weeks finding out."</a:t>
             </a:r>
           </a:p>
           <a:p/>
@@ -6690,7 +6690,7 @@
                 </a:solidFill>
                 <a:latin typeface="Roboto"/>
               </a:rPr>
-              <a:t>Scope your Angular estate</a:t>
+              <a:t>Pick what to test</a:t>
             </a:r>
           </a:p>
           <a:p>
@@ -6709,7 +6709,7 @@
                 </a:solidFill>
                 <a:latin typeface="Roboto"/>
               </a:rPr>
-              <a:t>Inventory the 14.x repos — shared library, downstream consumers, test coverage</a:t>
+              <a:t>Choose the Angular 14.x slice Devin starts on — the shared library is the natural first pick</a:t>
             </a:r>
           </a:p>
         </p:txBody>
@@ -6883,7 +6883,7 @@
                 </a:solidFill>
                 <a:latin typeface="Roboto"/>
               </a:rPr>
-              <a:t>Next week</a:t>
+              <a:t>Weeks 1–4</a:t>
             </a:r>
           </a:p>
         </p:txBody>
@@ -6925,7 +6925,7 @@
                 </a:solidFill>
                 <a:latin typeface="Roboto"/>
               </a:rPr>
-              <a:t>Security &amp; data review</a:t>
+              <a:t>Pilot phase</a:t>
             </a:r>
           </a:p>
           <a:p>
@@ -6944,7 +6944,7 @@
                 </a:solidFill>
                 <a:latin typeface="Roboto"/>
               </a:rPr>
-              <a:t>Your security team + ours · access to one real repo · success criteria you define</a:t>
+              <a:t>Security review, then Devin migrates real code 14 → 18 — your engineers review every PR</a:t>
             </a:r>
           </a:p>
         </p:txBody>
@@ -7118,7 +7118,7 @@
                 </a:solidFill>
                 <a:latin typeface="Roboto"/>
               </a:rPr>
-              <a:t>Weeks 2–4</a:t>
+              <a:t>Week 4</a:t>
             </a:r>
           </a:p>
         </p:txBody>
@@ -7160,7 +7160,7 @@
                 </a:solidFill>
                 <a:latin typeface="Roboto"/>
               </a:rPr>
-              <a:t>Devin migrates your shared library</a:t>
+              <a:t>See how it does</a:t>
             </a:r>
           </a:p>
           <a:p>
@@ -7179,7 +7179,7 @@
                 </a:solidFill>
                 <a:latin typeface="Roboto"/>
               </a:rPr>
-              <a:t>Real code, 14 → 18 — your engineers review every PR</a:t>
+              <a:t>Readout against your success criteria, in front of this room</a:t>
             </a:r>
           </a:p>
         </p:txBody>
@@ -7353,7 +7353,7 @@
                 </a:solidFill>
                 <a:latin typeface="Roboto"/>
               </a:rPr>
-              <a:t>Week 4</a:t>
+              <a:t>After</a:t>
             </a:r>
           </a:p>
         </p:txBody>
@@ -7395,7 +7395,7 @@
                 </a:solidFill>
                 <a:latin typeface="Roboto"/>
               </a:rPr>
-              <a:t>Go / no-go readout</a:t>
+              <a:t>Deploy Devin fully</a:t>
             </a:r>
           </a:p>
           <a:p>
@@ -7414,7 +7414,7 @@
                 </a:solidFill>
                 <a:latin typeface="Roboto"/>
               </a:rPr>
-              <a:t>Results in front of this room — then downstream apps in parallel</a:t>
+              <a:t>Downstream apps in parallel — then the rest of the maintenance backlog</a:t>
             </a:r>
           </a:p>
         </p:txBody>

--- a/presentation/BofA_x_Cognition_Devin_Demo.pptx
+++ b/presentation/BofA_x_Cognition_Devin_Demo.pptx
@@ -722,19 +722,19 @@
           <a:p/>
           <a:p>
             <a:r>
-              <a:t>Talk track: "You just watched the proof of concept — now let's do it for real, in four simple beats. One: we pick what to test — which slice of your Angular 14 estate Devin starts on; the shared library is the natural first pick, but it's your call. Two: the pilot phase — a quick security and data review, then Devin migrates real code, 14 to 18, with your engineers reviewing every PR, same as you saw today. Three: we see how it did — back in this room at week four, measured against success criteria you defined up front. Four: if it earned its keep, we deploy Devin fully — downstream apps in parallel, then the rest of the maintenance backlog. If it didn't, you've spent four weeks finding out."</a:t>
+              <a:t>Talk track: "You just watched the proof of concept — now let's do it for real, in four simple beats. One: we sit down with your team and pick three Angular 14 apps for Devin to fix — you know which ones hurt the most; a mix of a lower-stakes app and something meaty like the shared library works well. Two: the pilot phase — a quick security and data review, then Devin migrates that real code, 14 to 18, with your engineers reviewing every PR, same as you saw today. Three: we see how it did — back in this room at week four, measured against success criteria you defined up front. Four: if it earned its keep, we deploy Devin fully — the rest of the Angular estate in parallel, then the broader maintenance backlog. If it didn't, you've spent four weeks finding out."</a:t>
             </a:r>
           </a:p>
           <a:p/>
           <a:p>
             <a:r>
-              <a:t>Why the shared library as the pilot slice: it's the root of the dependency tree — proving it there de-risks everything downstream, and it's the exact shape of what they saw in the demo. If they'd rather start on a lower-stakes repo, flex immediately; the structure holds.</a:t>
+              <a:t>Why three apps: one app feels like a science experiment; three makes it a representative sample — and gets them invested in a roadmap. Steer the mix: one low-stakes, one typical, one hard (e.g. the shared library). If they push to start with just one, flex immediately; the structure holds.</a:t>
             </a:r>
           </a:p>
           <a:p/>
           <a:p>
             <a:r>
-              <a:t>Assign ownership live: estate scoping → Chief Architect (they know the dependency tree); security review → Security Engineer; sponsorship + success criteria → VP Eng. People who own a step show up to the next meeting.</a:t>
+              <a:t>Assign ownership live: the three-app shortlist → Chief Architect (they know the dependency tree); security review → Security Engineer; sponsorship + success criteria → VP Eng. People who own a step show up to the next meeting.</a:t>
             </a:r>
           </a:p>
           <a:p/>
@@ -6690,7 +6690,7 @@
                 </a:solidFill>
                 <a:latin typeface="Roboto"/>
               </a:rPr>
-              <a:t>Pick what to test</a:t>
+              <a:t>Pick 3 Angular apps together</a:t>
             </a:r>
           </a:p>
           <a:p>
@@ -6709,7 +6709,7 @@
                 </a:solidFill>
                 <a:latin typeface="Roboto"/>
               </a:rPr>
-              <a:t>Choose the Angular 14.x slice Devin starts on — the shared library is the natural first pick</a:t>
+              <a:t>We sit down with your team and choose three 14.x apps for Devin to fix</a:t>
             </a:r>
           </a:p>
         </p:txBody>
@@ -7414,7 +7414,7 @@
                 </a:solidFill>
                 <a:latin typeface="Roboto"/>
               </a:rPr>
-              <a:t>Downstream apps in parallel — then the rest of the maintenance backlog</a:t>
+              <a:t>Rest of the Angular estate in parallel — then the broader maintenance backlog</a:t>
             </a:r>
           </a:p>
         </p:txBody>

--- a/presentation/BofA_x_Cognition_Devin_Demo.pptx
+++ b/presentation/BofA_x_Cognition_Devin_Demo.pptx
@@ -5472,7 +5472,7 @@
                 </a:solidFill>
                 <a:latin typeface="Roboto"/>
               </a:rPr>
-              <a:t>The end state: BofA running on Devin</a:t>
+              <a:t>The future of Bank of America engineering</a:t>
             </a:r>
           </a:p>
         </p:txBody>
@@ -5528,7 +5528,7 @@
         <p:spPr>
           <a:xfrm>
             <a:off x="502920" y="1481328"/>
-            <a:ext cx="3611880" cy="2286000"/>
+            <a:ext cx="5257800" cy="4572000"/>
           </a:xfrm>
           <a:prstGeom prst="roundRect">
             <a:avLst>
@@ -5567,16 +5567,214 @@
       </p:sp>
       <p:sp>
         <p:nvSpPr>
-          <p:cNvPr id="8" name="Rectangle 7"/>
+          <p:cNvPr id="8" name="TextBox 7"/>
+          <p:cNvSpPr txBox="1"/>
+          <p:nvPr/>
+        </p:nvSpPr>
+        <p:spPr>
+          <a:xfrm>
+            <a:off x="868680" y="1755648"/>
+            <a:ext cx="4572000" cy="457200"/>
+          </a:xfrm>
+          <a:prstGeom prst="rect">
+            <a:avLst/>
+          </a:prstGeom>
+          <a:noFill/>
+        </p:spPr>
+        <p:txBody>
+          <a:bodyPr wrap="square" anchor="t">
+            <a:spAutoFit/>
+          </a:bodyPr>
+          <a:lstStyle/>
+          <a:p>
+            <a:pPr algn="l">
+              <a:lnSpc>
+                <a:spcPct val="100000"/>
+              </a:lnSpc>
+              <a:spcAft>
+                <a:spcPts val="600"/>
+              </a:spcAft>
+            </a:pPr>
+            <a:r>
+              <a:rPr sz="1300" b="1" i="0">
+                <a:solidFill>
+                  <a:srgbClr val="5A6472"/>
+                </a:solidFill>
+                <a:latin typeface="Roboto"/>
+              </a:rPr>
+              <a:t>TODAY</a:t>
+            </a:r>
+          </a:p>
+        </p:txBody>
+      </p:sp>
+      <p:sp>
+        <p:nvSpPr>
+          <p:cNvPr id="9" name="TextBox 8"/>
+          <p:cNvSpPr txBox="1"/>
+          <p:nvPr/>
+        </p:nvSpPr>
+        <p:spPr>
+          <a:xfrm>
+            <a:off x="868680" y="2514600"/>
+            <a:ext cx="4572000" cy="3291840"/>
+          </a:xfrm>
+          <a:prstGeom prst="rect">
+            <a:avLst/>
+          </a:prstGeom>
+          <a:noFill/>
+        </p:spPr>
+        <p:txBody>
+          <a:bodyPr wrap="square" anchor="t">
+            <a:spAutoFit/>
+          </a:bodyPr>
+          <a:lstStyle/>
+          <a:p>
+            <a:pPr algn="l">
+              <a:lnSpc>
+                <a:spcPct val="100000"/>
+              </a:lnSpc>
+              <a:spcAft>
+                <a:spcPts val="600"/>
+              </a:spcAft>
+            </a:pPr>
+            <a:r>
+              <a:rPr sz="1500" b="0" i="0">
+                <a:solidFill>
+                  <a:srgbClr val="1C2430"/>
+                </a:solidFill>
+                <a:latin typeface="Roboto"/>
+              </a:rPr>
+              <a:t>~70% of tech budget on maintenance</a:t>
+            </a:r>
+          </a:p>
+          <a:p>
+            <a:pPr algn="l">
+              <a:lnSpc>
+                <a:spcPct val="100000"/>
+              </a:lnSpc>
+              <a:spcAft>
+                <a:spcPts val="600"/>
+              </a:spcAft>
+            </a:pPr>
+            <a:r>
+              <a:rPr sz="3000" b="0" i="0">
+                <a:solidFill>
+                  <a:srgbClr val="1C2430"/>
+                </a:solidFill>
+                <a:latin typeface="Roboto"/>
+              </a:rPr>
+              <a:t/>
+            </a:r>
+          </a:p>
+          <a:p>
+            <a:pPr algn="l">
+              <a:lnSpc>
+                <a:spcPct val="100000"/>
+              </a:lnSpc>
+              <a:spcAft>
+                <a:spcPts val="600"/>
+              </a:spcAft>
+            </a:pPr>
+            <a:r>
+              <a:rPr sz="1500" b="0" i="0">
+                <a:solidFill>
+                  <a:srgbClr val="1C2430"/>
+                </a:solidFill>
+                <a:latin typeface="Roboto"/>
+              </a:rPr>
+              <a:t>Compliance deadlines displace the roadmap</a:t>
+            </a:r>
+          </a:p>
+          <a:p>
+            <a:pPr algn="l">
+              <a:lnSpc>
+                <a:spcPct val="100000"/>
+              </a:lnSpc>
+              <a:spcAft>
+                <a:spcPts val="600"/>
+              </a:spcAft>
+            </a:pPr>
+            <a:r>
+              <a:rPr sz="3000" b="0" i="0">
+                <a:solidFill>
+                  <a:srgbClr val="1C2430"/>
+                </a:solidFill>
+                <a:latin typeface="Roboto"/>
+              </a:rPr>
+              <a:t/>
+            </a:r>
+          </a:p>
+          <a:p>
+            <a:pPr algn="l">
+              <a:lnSpc>
+                <a:spcPct val="100000"/>
+              </a:lnSpc>
+              <a:spcAft>
+                <a:spcPts val="600"/>
+              </a:spcAft>
+            </a:pPr>
+            <a:r>
+              <a:rPr sz="1500" b="0" i="0">
+                <a:solidFill>
+                  <a:srgbClr val="1C2430"/>
+                </a:solidFill>
+                <a:latin typeface="Roboto"/>
+              </a:rPr>
+              <a:t>Best engineers stuck on migrations &amp; upkeep</a:t>
+            </a:r>
+          </a:p>
+          <a:p>
+            <a:pPr algn="l">
+              <a:lnSpc>
+                <a:spcPct val="100000"/>
+              </a:lnSpc>
+              <a:spcAft>
+                <a:spcPts val="600"/>
+              </a:spcAft>
+            </a:pPr>
+            <a:r>
+              <a:rPr sz="3000" b="0" i="0">
+                <a:solidFill>
+                  <a:srgbClr val="1C2430"/>
+                </a:solidFill>
+                <a:latin typeface="Roboto"/>
+              </a:rPr>
+              <a:t/>
+            </a:r>
+          </a:p>
+          <a:p>
+            <a:pPr algn="l">
+              <a:lnSpc>
+                <a:spcPct val="100000"/>
+              </a:lnSpc>
+              <a:spcAft>
+                <a:spcPts val="600"/>
+              </a:spcAft>
+            </a:pPr>
+            <a:r>
+              <a:rPr sz="1500" b="0" i="0">
+                <a:solidFill>
+                  <a:srgbClr val="1C2430"/>
+                </a:solidFill>
+                <a:latin typeface="Roboto"/>
+              </a:rPr>
+              <a:t>Legacy debt compounds, quarter after quarter</a:t>
+            </a:r>
+          </a:p>
+        </p:txBody>
+      </p:sp>
+      <p:sp>
+        <p:nvSpPr>
+          <p:cNvPr id="10" name="Chevron 9"/>
           <p:cNvSpPr/>
           <p:nvPr/>
         </p:nvSpPr>
         <p:spPr>
           <a:xfrm>
-            <a:off x="502920" y="1591056"/>
-            <a:ext cx="54864" cy="2066543"/>
-          </a:xfrm>
-          <a:prstGeom prst="rect">
+            <a:off x="5870448" y="3401568"/>
+            <a:ext cx="457200" cy="731520"/>
+          </a:xfrm>
+          <a:prstGeom prst="chevron">
             <a:avLst/>
           </a:prstGeom>
           <a:solidFill>
@@ -5611,136 +5809,14 @@
       </p:sp>
       <p:sp>
         <p:nvSpPr>
-          <p:cNvPr id="9" name="TextBox 8"/>
-          <p:cNvSpPr txBox="1"/>
-          <p:nvPr/>
-        </p:nvSpPr>
-        <p:spPr>
-          <a:xfrm>
-            <a:off x="704088" y="1591056"/>
-            <a:ext cx="3246120" cy="365760"/>
-          </a:xfrm>
-          <a:prstGeom prst="rect">
-            <a:avLst/>
-          </a:prstGeom>
-          <a:noFill/>
-        </p:spPr>
-        <p:txBody>
-          <a:bodyPr wrap="square" anchor="t">
-            <a:spAutoFit/>
-          </a:bodyPr>
-          <a:lstStyle/>
-          <a:p>
-            <a:pPr algn="l">
-              <a:lnSpc>
-                <a:spcPct val="100000"/>
-              </a:lnSpc>
-              <a:spcAft>
-                <a:spcPts val="600"/>
-              </a:spcAft>
-            </a:pPr>
-            <a:r>
-              <a:rPr sz="1400" b="1" i="0">
-                <a:solidFill>
-                  <a:srgbClr val="012169"/>
-                </a:solidFill>
-                <a:latin typeface="Roboto"/>
-              </a:rPr>
-              <a:t>This migration</a:t>
-            </a:r>
-          </a:p>
-        </p:txBody>
-      </p:sp>
-      <p:sp>
-        <p:nvSpPr>
-          <p:cNvPr id="10" name="TextBox 9"/>
-          <p:cNvSpPr txBox="1"/>
-          <p:nvPr/>
-        </p:nvSpPr>
-        <p:spPr>
-          <a:xfrm>
-            <a:off x="704088" y="1956816"/>
-            <a:ext cx="3246120" cy="1691640"/>
-          </a:xfrm>
-          <a:prstGeom prst="rect">
-            <a:avLst/>
-          </a:prstGeom>
-          <a:noFill/>
-        </p:spPr>
-        <p:txBody>
-          <a:bodyPr wrap="square" anchor="t">
-            <a:spAutoFit/>
-          </a:bodyPr>
-          <a:lstStyle/>
-          <a:p>
-            <a:pPr algn="l">
-              <a:lnSpc>
-                <a:spcPct val="105000"/>
-              </a:lnSpc>
-              <a:spcAft>
-                <a:spcPts val="500"/>
-              </a:spcAft>
-            </a:pPr>
-            <a:r>
-              <a:rPr sz="1400" b="0" i="0">
-                <a:solidFill>
-                  <a:srgbClr val="1C2430"/>
-                </a:solidFill>
-                <a:latin typeface="Roboto"/>
-              </a:rPr>
-              <a:t>Angular 18 before the deadline</a:t>
-            </a:r>
-          </a:p>
-          <a:p>
-            <a:pPr algn="l">
-              <a:lnSpc>
-                <a:spcPct val="105000"/>
-              </a:lnSpc>
-              <a:spcAft>
-                <a:spcPts val="500"/>
-              </a:spcAft>
-            </a:pPr>
-            <a:r>
-              <a:rPr sz="1400" b="0" i="0">
-                <a:solidFill>
-                  <a:srgbClr val="1C2430"/>
-                </a:solidFill>
-                <a:latin typeface="Roboto"/>
-              </a:rPr>
-              <a:t>12+ teams unbroken</a:t>
-            </a:r>
-          </a:p>
-          <a:p>
-            <a:pPr algn="l">
-              <a:lnSpc>
-                <a:spcPct val="105000"/>
-              </a:lnSpc>
-              <a:spcAft>
-                <a:spcPts val="500"/>
-              </a:spcAft>
-            </a:pPr>
-            <a:r>
-              <a:rPr sz="1400" b="0" i="0">
-                <a:solidFill>
-                  <a:srgbClr val="1C2430"/>
-                </a:solidFill>
-                <a:latin typeface="Roboto"/>
-              </a:rPr>
-              <a:t>Audit trail, automatic</a:t>
-            </a:r>
-          </a:p>
-        </p:txBody>
-      </p:sp>
-      <p:sp>
-        <p:nvSpPr>
           <p:cNvPr id="11" name="Rounded Rectangle 10"/>
           <p:cNvSpPr/>
           <p:nvPr/>
         </p:nvSpPr>
         <p:spPr>
           <a:xfrm>
-            <a:off x="4297680" y="1481328"/>
-            <a:ext cx="3611880" cy="2286000"/>
+            <a:off x="6446520" y="1481328"/>
+            <a:ext cx="5257800" cy="4572000"/>
           </a:xfrm>
           <a:prstGeom prst="roundRect">
             <a:avLst>
@@ -5748,7 +5824,7 @@
             </a:avLst>
           </a:prstGeom>
           <a:solidFill>
-            <a:srgbClr val="F4F6F9"/>
+            <a:srgbClr val="012169"/>
           </a:solidFill>
           <a:ln>
             <a:noFill/>
@@ -5779,58 +5855,14 @@
       </p:sp>
       <p:sp>
         <p:nvSpPr>
-          <p:cNvPr id="12" name="Rectangle 11"/>
-          <p:cNvSpPr/>
-          <p:nvPr/>
-        </p:nvSpPr>
-        <p:spPr>
-          <a:xfrm>
-            <a:off x="4297680" y="1591056"/>
-            <a:ext cx="54864" cy="2066543"/>
-          </a:xfrm>
-          <a:prstGeom prst="rect">
-            <a:avLst/>
-          </a:prstGeom>
-          <a:solidFill>
-            <a:srgbClr val="E31837"/>
-          </a:solidFill>
-          <a:ln>
-            <a:noFill/>
-          </a:ln>
-          <a:effectLst/>
-        </p:spPr>
-        <p:style>
-          <a:lnRef idx="1">
-            <a:schemeClr val="accent1"/>
-          </a:lnRef>
-          <a:fillRef idx="3">
-            <a:schemeClr val="accent1"/>
-          </a:fillRef>
-          <a:effectRef idx="2">
-            <a:schemeClr val="accent1"/>
-          </a:effectRef>
-          <a:fontRef idx="minor">
-            <a:schemeClr val="lt1"/>
-          </a:fontRef>
-        </p:style>
-        <p:txBody>
-          <a:bodyPr rtlCol="0" anchor="ctr"/>
-          <a:lstStyle/>
-          <a:p>
-            <a:pPr algn="ctr"/>
-          </a:p>
-        </p:txBody>
-      </p:sp>
-      <p:sp>
-        <p:nvSpPr>
-          <p:cNvPr id="13" name="TextBox 12"/>
+          <p:cNvPr id="12" name="TextBox 11"/>
           <p:cNvSpPr txBox="1"/>
           <p:nvPr/>
         </p:nvSpPr>
         <p:spPr>
           <a:xfrm>
-            <a:off x="4498848" y="1591056"/>
-            <a:ext cx="3246120" cy="365760"/>
+            <a:off x="6812280" y="1755648"/>
+            <a:ext cx="4572000" cy="457200"/>
           </a:xfrm>
           <a:prstGeom prst="rect">
             <a:avLst/>
@@ -5852,27 +5884,27 @@
               </a:spcAft>
             </a:pPr>
             <a:r>
-              <a:rPr sz="1400" b="1" i="0">
-                <a:solidFill>
-                  <a:srgbClr val="012169"/>
-                </a:solidFill>
-                <a:latin typeface="Roboto"/>
-              </a:rPr>
-              <a:t>Your engineers</a:t>
-            </a:r>
-          </a:p>
-        </p:txBody>
-      </p:sp>
-      <p:sp>
-        <p:nvSpPr>
-          <p:cNvPr id="14" name="TextBox 13"/>
+              <a:rPr sz="1300" b="1" i="0">
+                <a:solidFill>
+                  <a:srgbClr val="E31837"/>
+                </a:solidFill>
+                <a:latin typeface="Roboto"/>
+              </a:rPr>
+              <a:t>WITH DEVIN</a:t>
+            </a:r>
+          </a:p>
+        </p:txBody>
+      </p:sp>
+      <p:sp>
+        <p:nvSpPr>
+          <p:cNvPr id="13" name="TextBox 12"/>
           <p:cNvSpPr txBox="1"/>
           <p:nvPr/>
         </p:nvSpPr>
         <p:spPr>
           <a:xfrm>
-            <a:off x="4498848" y="1956816"/>
-            <a:ext cx="3246120" cy="1691640"/>
+            <a:off x="6812280" y="2514600"/>
+            <a:ext cx="4572000" cy="3291840"/>
           </a:xfrm>
           <a:prstGeom prst="rect">
             <a:avLst/>
@@ -5887,154 +5919,79 @@
           <a:p>
             <a:pPr algn="l">
               <a:lnSpc>
-                <a:spcPct val="105000"/>
-              </a:lnSpc>
-              <a:spcAft>
-                <a:spcPts val="500"/>
-              </a:spcAft>
-            </a:pPr>
-            <a:r>
-              <a:rPr sz="1400" b="0" i="0">
+                <a:spcPct val="100000"/>
+              </a:lnSpc>
+              <a:spcAft>
+                <a:spcPts val="600"/>
+              </a:spcAft>
+            </a:pPr>
+            <a:r>
+              <a:rPr sz="1500" b="0" i="0">
+                <a:solidFill>
+                  <a:srgbClr val="FFFFFF"/>
+                </a:solidFill>
+                <a:latin typeface="Roboto"/>
+              </a:rPr>
+              <a:t>Maintenance runs in the background, PR by PR</a:t>
+            </a:r>
+          </a:p>
+          <a:p>
+            <a:pPr algn="l">
+              <a:lnSpc>
+                <a:spcPct val="100000"/>
+              </a:lnSpc>
+              <a:spcAft>
+                <a:spcPts val="600"/>
+              </a:spcAft>
+            </a:pPr>
+            <a:r>
+              <a:rPr sz="3000" b="0" i="0">
                 <a:solidFill>
                   <a:srgbClr val="1C2430"/>
                 </a:solidFill>
                 <a:latin typeface="Roboto"/>
               </a:rPr>
-              <a:t>Back on revenue features</a:t>
+              <a:t/>
             </a:r>
           </a:p>
           <a:p>
             <a:pPr algn="l">
               <a:lnSpc>
-                <a:spcPct val="105000"/>
-              </a:lnSpc>
-              <a:spcAft>
-                <a:spcPts val="500"/>
-              </a:spcAft>
-            </a:pPr>
-            <a:r>
-              <a:rPr sz="1400" b="0" i="0">
+                <a:spcPct val="100000"/>
+              </a:lnSpc>
+              <a:spcAft>
+                <a:spcPts val="600"/>
+              </a:spcAft>
+            </a:pPr>
+            <a:r>
+              <a:rPr sz="1500" b="0" i="0">
+                <a:solidFill>
+                  <a:srgbClr val="FFFFFF"/>
+                </a:solidFill>
+                <a:latin typeface="Roboto"/>
+              </a:rPr>
+              <a:t>Deadlines met without pausing the roadmap</a:t>
+            </a:r>
+          </a:p>
+          <a:p>
+            <a:pPr algn="l">
+              <a:lnSpc>
+                <a:spcPct val="100000"/>
+              </a:lnSpc>
+              <a:spcAft>
+                <a:spcPts val="600"/>
+              </a:spcAft>
+            </a:pPr>
+            <a:r>
+              <a:rPr sz="3000" b="0" i="0">
                 <a:solidFill>
                   <a:srgbClr val="1C2430"/>
                 </a:solidFill>
                 <a:latin typeface="Roboto"/>
               </a:rPr>
-              <a:t>Reviewing, not hand-migrating</a:t>
-            </a:r>
-          </a:p>
-        </p:txBody>
-      </p:sp>
-      <p:sp>
-        <p:nvSpPr>
-          <p:cNvPr id="15" name="Rounded Rectangle 14"/>
-          <p:cNvSpPr/>
-          <p:nvPr/>
-        </p:nvSpPr>
-        <p:spPr>
-          <a:xfrm>
-            <a:off x="8092440" y="1481328"/>
-            <a:ext cx="3611880" cy="2286000"/>
-          </a:xfrm>
-          <a:prstGeom prst="roundRect">
-            <a:avLst>
-              <a:gd name="adj" fmla="val 6000"/>
-            </a:avLst>
-          </a:prstGeom>
-          <a:solidFill>
-            <a:srgbClr val="F4F6F9"/>
-          </a:solidFill>
-          <a:ln>
-            <a:noFill/>
-          </a:ln>
-          <a:effectLst/>
-        </p:spPr>
-        <p:style>
-          <a:lnRef idx="1">
-            <a:schemeClr val="accent1"/>
-          </a:lnRef>
-          <a:fillRef idx="3">
-            <a:schemeClr val="accent1"/>
-          </a:fillRef>
-          <a:effectRef idx="2">
-            <a:schemeClr val="accent1"/>
-          </a:effectRef>
-          <a:fontRef idx="minor">
-            <a:schemeClr val="lt1"/>
-          </a:fontRef>
-        </p:style>
-        <p:txBody>
-          <a:bodyPr rtlCol="0" anchor="ctr"/>
-          <a:lstStyle/>
-          <a:p>
-            <a:pPr algn="ctr"/>
-          </a:p>
-        </p:txBody>
-      </p:sp>
-      <p:sp>
-        <p:nvSpPr>
-          <p:cNvPr id="16" name="Rectangle 15"/>
-          <p:cNvSpPr/>
-          <p:nvPr/>
-        </p:nvSpPr>
-        <p:spPr>
-          <a:xfrm>
-            <a:off x="8092440" y="1591056"/>
-            <a:ext cx="54864" cy="2066543"/>
-          </a:xfrm>
-          <a:prstGeom prst="rect">
-            <a:avLst/>
-          </a:prstGeom>
-          <a:solidFill>
-            <a:srgbClr val="E31837"/>
-          </a:solidFill>
-          <a:ln>
-            <a:noFill/>
-          </a:ln>
-          <a:effectLst/>
-        </p:spPr>
-        <p:style>
-          <a:lnRef idx="1">
-            <a:schemeClr val="accent1"/>
-          </a:lnRef>
-          <a:fillRef idx="3">
-            <a:schemeClr val="accent1"/>
-          </a:fillRef>
-          <a:effectRef idx="2">
-            <a:schemeClr val="accent1"/>
-          </a:effectRef>
-          <a:fontRef idx="minor">
-            <a:schemeClr val="lt1"/>
-          </a:fontRef>
-        </p:style>
-        <p:txBody>
-          <a:bodyPr rtlCol="0" anchor="ctr"/>
-          <a:lstStyle/>
-          <a:p>
-            <a:pPr algn="ctr"/>
-          </a:p>
-        </p:txBody>
-      </p:sp>
-      <p:sp>
-        <p:nvSpPr>
-          <p:cNvPr id="17" name="TextBox 16"/>
-          <p:cNvSpPr txBox="1"/>
-          <p:nvPr/>
-        </p:nvSpPr>
-        <p:spPr>
-          <a:xfrm>
-            <a:off x="8293608" y="1591056"/>
-            <a:ext cx="3246120" cy="365760"/>
-          </a:xfrm>
-          <a:prstGeom prst="rect">
-            <a:avLst/>
-          </a:prstGeom>
-          <a:noFill/>
-        </p:spPr>
-        <p:txBody>
-          <a:bodyPr wrap="square" anchor="t">
-            <a:spAutoFit/>
-          </a:bodyPr>
-          <a:lstStyle/>
+              <a:t/>
+            </a:r>
+          </a:p>
           <a:p>
             <a:pPr algn="l">
               <a:lnSpc>
@@ -6045,148 +6002,37 @@
               </a:spcAft>
             </a:pPr>
             <a:r>
-              <a:rPr sz="1400" b="1" i="0">
-                <a:solidFill>
-                  <a:srgbClr val="012169"/>
-                </a:solidFill>
-                <a:latin typeface="Roboto"/>
-              </a:rPr>
-              <a:t>The bigger unlock</a:t>
-            </a:r>
-          </a:p>
-        </p:txBody>
-      </p:sp>
-      <p:sp>
-        <p:nvSpPr>
-          <p:cNvPr id="18" name="TextBox 17"/>
-          <p:cNvSpPr txBox="1"/>
-          <p:nvPr/>
-        </p:nvSpPr>
-        <p:spPr>
-          <a:xfrm>
-            <a:off x="8293608" y="1956816"/>
-            <a:ext cx="3246120" cy="1691640"/>
-          </a:xfrm>
-          <a:prstGeom prst="rect">
-            <a:avLst/>
-          </a:prstGeom>
-          <a:noFill/>
-        </p:spPr>
-        <p:txBody>
-          <a:bodyPr wrap="square" anchor="t">
-            <a:spAutoFit/>
-          </a:bodyPr>
-          <a:lstStyle/>
+              <a:rPr sz="1500" b="0" i="0">
+                <a:solidFill>
+                  <a:srgbClr val="FFFFFF"/>
+                </a:solidFill>
+                <a:latin typeface="Roboto"/>
+              </a:rPr>
+              <a:t>Engineers on greenfield and revenue work</a:t>
+            </a:r>
+          </a:p>
           <a:p>
             <a:pPr algn="l">
               <a:lnSpc>
-                <a:spcPct val="105000"/>
-              </a:lnSpc>
-              <a:spcAft>
-                <a:spcPts val="500"/>
-              </a:spcAft>
-            </a:pPr>
-            <a:r>
-              <a:rPr sz="1400" b="0" i="0">
+                <a:spcPct val="100000"/>
+              </a:lnSpc>
+              <a:spcAft>
+                <a:spcPts val="600"/>
+              </a:spcAft>
+            </a:pPr>
+            <a:r>
+              <a:rPr sz="3000" b="0" i="0">
                 <a:solidFill>
                   <a:srgbClr val="1C2430"/>
                 </a:solidFill>
                 <a:latin typeface="Roboto"/>
               </a:rPr>
-              <a:t>Angular 19, 20… become routine</a:t>
+              <a:t/>
             </a:r>
           </a:p>
           <a:p>
             <a:pPr algn="l">
               <a:lnSpc>
-                <a:spcPct val="105000"/>
-              </a:lnSpc>
-              <a:spcAft>
-                <a:spcPts val="500"/>
-              </a:spcAft>
-            </a:pPr>
-            <a:r>
-              <a:rPr sz="1400" b="0" i="0">
-                <a:solidFill>
-                  <a:srgbClr val="1C2430"/>
-                </a:solidFill>
-                <a:latin typeface="Roboto"/>
-              </a:rPr>
-              <a:t>Same machinery: cloud migration, test coverage</a:t>
-            </a:r>
-          </a:p>
-        </p:txBody>
-      </p:sp>
-      <p:sp>
-        <p:nvSpPr>
-          <p:cNvPr id="19" name="Rounded Rectangle 18"/>
-          <p:cNvSpPr/>
-          <p:nvPr/>
-        </p:nvSpPr>
-        <p:spPr>
-          <a:xfrm>
-            <a:off x="502920" y="4023360"/>
-            <a:ext cx="11201400" cy="1051560"/>
-          </a:xfrm>
-          <a:prstGeom prst="roundRect">
-            <a:avLst>
-              <a:gd name="adj" fmla="val 10000"/>
-            </a:avLst>
-          </a:prstGeom>
-          <a:solidFill>
-            <a:srgbClr val="F4F6F9"/>
-          </a:solidFill>
-          <a:ln>
-            <a:noFill/>
-          </a:ln>
-          <a:effectLst/>
-        </p:spPr>
-        <p:style>
-          <a:lnRef idx="1">
-            <a:schemeClr val="accent1"/>
-          </a:lnRef>
-          <a:fillRef idx="3">
-            <a:schemeClr val="accent1"/>
-          </a:fillRef>
-          <a:effectRef idx="2">
-            <a:schemeClr val="accent1"/>
-          </a:effectRef>
-          <a:fontRef idx="minor">
-            <a:schemeClr val="lt1"/>
-          </a:fontRef>
-        </p:style>
-        <p:txBody>
-          <a:bodyPr rtlCol="0" anchor="ctr"/>
-          <a:lstStyle/>
-          <a:p>
-            <a:pPr algn="ctr"/>
-          </a:p>
-        </p:txBody>
-      </p:sp>
-      <p:sp>
-        <p:nvSpPr>
-          <p:cNvPr id="20" name="TextBox 19"/>
-          <p:cNvSpPr txBox="1"/>
-          <p:nvPr/>
-        </p:nvSpPr>
-        <p:spPr>
-          <a:xfrm>
-            <a:off x="777240" y="4224528"/>
-            <a:ext cx="10698480" cy="777240"/>
-          </a:xfrm>
-          <a:prstGeom prst="rect">
-            <a:avLst/>
-          </a:prstGeom>
-          <a:noFill/>
-        </p:spPr>
-        <p:txBody>
-          <a:bodyPr wrap="square" anchor="t">
-            <a:spAutoFit/>
-          </a:bodyPr>
-          <a:lstStyle/>
-          <a:p>
-            <a:pPr algn="l">
-              <a:lnSpc>
                 <a:spcPct val="100000"/>
               </a:lnSpc>
               <a:spcAft>
@@ -6194,20 +6040,20 @@
               </a:spcAft>
             </a:pPr>
             <a:r>
-              <a:rPr sz="1700" b="1" i="1">
-                <a:solidFill>
-                  <a:srgbClr val="012169"/>
-                </a:solidFill>
-                <a:latin typeface="Roboto"/>
-              </a:rPr>
-              <a:t>“We met a hard compliance deadline without pausing the roadmap.”</a:t>
-            </a:r>
-          </a:p>
-        </p:txBody>
-      </p:sp>
-      <p:sp>
-        <p:nvSpPr>
-          <p:cNvPr id="21" name="TextBox 20"/>
+              <a:rPr sz="1500" b="0" i="0">
+                <a:solidFill>
+                  <a:srgbClr val="FFFFFF"/>
+                </a:solidFill>
+                <a:latin typeface="Roboto"/>
+              </a:rPr>
+              <a:t>Every change reviewed, logged, and auditable</a:t>
+            </a:r>
+          </a:p>
+        </p:txBody>
+      </p:sp>
+      <p:sp>
+        <p:nvSpPr>
+          <p:cNvPr id="14" name="TextBox 13"/>
           <p:cNvSpPr txBox="1"/>
           <p:nvPr/>
         </p:nvSpPr>
@@ -7160,7 +7006,7 @@
                 </a:solidFill>
                 <a:latin typeface="Roboto"/>
               </a:rPr>
-              <a:t>See how it does</a:t>
+              <a:t>Assess pilot performance</a:t>
             </a:r>
           </a:p>
           <a:p>
@@ -7179,7 +7025,7 @@
                 </a:solidFill>
                 <a:latin typeface="Roboto"/>
               </a:rPr>
-              <a:t>Readout against your success criteria, in front of this room</a:t>
+              <a:t>Speed · engineer time saved · quality — against your targets</a:t>
             </a:r>
           </a:p>
         </p:txBody>
@@ -7414,7 +7260,7 @@
                 </a:solidFill>
                 <a:latin typeface="Roboto"/>
               </a:rPr>
-              <a:t>Rest of the Angular estate in parallel — then the broader maintenance backlog</a:t>
+              <a:t>If the pilot succeeds, we modernize the rest of your Angular estate in parallel</a:t>
             </a:r>
           </a:p>
         </p:txBody>
